--- a/docs/presentation/Unsupervised Statistical Learning for Kinematic Anomaly Detection in Autonomous Driving Scenarios.pptx
+++ b/docs/presentation/Unsupervised Statistical Learning for Kinematic Anomaly Detection in Autonomous Driving Scenarios.pptx
@@ -5,7 +5,7 @@
     <p:sldMasterId id="2147483648" r:id="rId1"/>
   </p:sldMasterIdLst>
   <p:notesMasterIdLst>
-    <p:notesMasterId r:id="rId16"/>
+    <p:notesMasterId r:id="rId17"/>
   </p:notesMasterIdLst>
   <p:sldIdLst>
     <p:sldId id="256" r:id="rId2"/>
@@ -15,13 +15,14 @@
     <p:sldId id="262" r:id="rId6"/>
     <p:sldId id="263" r:id="rId7"/>
     <p:sldId id="264" r:id="rId8"/>
-    <p:sldId id="265" r:id="rId9"/>
-    <p:sldId id="266" r:id="rId10"/>
-    <p:sldId id="267" r:id="rId11"/>
-    <p:sldId id="268" r:id="rId12"/>
-    <p:sldId id="269" r:id="rId13"/>
-    <p:sldId id="270" r:id="rId14"/>
-    <p:sldId id="271" r:id="rId15"/>
+    <p:sldId id="272" r:id="rId9"/>
+    <p:sldId id="265" r:id="rId10"/>
+    <p:sldId id="266" r:id="rId11"/>
+    <p:sldId id="267" r:id="rId12"/>
+    <p:sldId id="268" r:id="rId13"/>
+    <p:sldId id="269" r:id="rId14"/>
+    <p:sldId id="270" r:id="rId15"/>
+    <p:sldId id="271" r:id="rId16"/>
   </p:sldIdLst>
   <p:sldSz cx="12192000" cy="6858000"/>
   <p:notesSz cx="6858000" cy="9144000"/>
@@ -131,7 +132,7 @@
 <file path=ppt/revisionInfo.xml><?xml version="1.0" encoding="utf-8"?>
 <p1510:revInfo xmlns:a="http://schemas.openxmlformats.org/drawingml/2006/main" xmlns:r="http://schemas.openxmlformats.org/officeDocument/2006/relationships" xmlns:p1510="http://schemas.microsoft.com/office/powerpoint/2015/10/main">
   <p1510:revLst>
-    <p1510:client id="{E91D200D-BFFE-DF45-BD3E-DC36CCF88744}" v="11" dt="2026-04-12T02:06:53.030"/>
+    <p1510:client id="{E91D200D-BFFE-DF45-BD3E-DC36CCF88744}" v="37" dt="2026-04-12T02:44:56.824"/>
   </p1510:revLst>
 </p1510:revInfo>
 </file>
@@ -140,31 +141,55 @@
 <pc:chgInfo xmlns:a="http://schemas.openxmlformats.org/drawingml/2006/main" xmlns:r="http://schemas.openxmlformats.org/officeDocument/2006/relationships" xmlns:ac="http://schemas.microsoft.com/office/drawing/2013/main/command" xmlns:pc="http://schemas.microsoft.com/office/powerpoint/2013/main/command">
   <pc:docChgLst>
     <pc:chgData name="Stepanov, Pavel Aleksandrovich" userId="b85f6bca-230c-483e-a25b-e13e873626fd" providerId="ADAL" clId="{AB235781-41D1-50B9-86EA-51A98A5F500A}"/>
-    <pc:docChg chg="undo custSel modSld">
-      <pc:chgData name="Stepanov, Pavel Aleksandrovich" userId="b85f6bca-230c-483e-a25b-e13e873626fd" providerId="ADAL" clId="{AB235781-41D1-50B9-86EA-51A98A5F500A}" dt="2026-04-12T02:08:41.912" v="84" actId="1076"/>
+    <pc:docChg chg="undo custSel addSld modSld">
+      <pc:chgData name="Stepanov, Pavel Aleksandrovich" userId="b85f6bca-230c-483e-a25b-e13e873626fd" providerId="ADAL" clId="{AB235781-41D1-50B9-86EA-51A98A5F500A}" dt="2026-04-12T02:45:35.358" v="214" actId="20577"/>
       <pc:docMkLst>
         <pc:docMk/>
       </pc:docMkLst>
       <pc:sldChg chg="modNotesTx">
-        <pc:chgData name="Stepanov, Pavel Aleksandrovich" userId="b85f6bca-230c-483e-a25b-e13e873626fd" providerId="ADAL" clId="{AB235781-41D1-50B9-86EA-51A98A5F500A}" dt="2026-04-12T01:59:05.502" v="20" actId="113"/>
+        <pc:chgData name="Stepanov, Pavel Aleksandrovich" userId="b85f6bca-230c-483e-a25b-e13e873626fd" providerId="ADAL" clId="{AB235781-41D1-50B9-86EA-51A98A5F500A}" dt="2026-04-12T02:27:22.605" v="91" actId="20577"/>
         <pc:sldMkLst>
           <pc:docMk/>
           <pc:sldMk cId="3542837740" sldId="256"/>
         </pc:sldMkLst>
       </pc:sldChg>
-      <pc:sldChg chg="modNotesTx">
-        <pc:chgData name="Stepanov, Pavel Aleksandrovich" userId="b85f6bca-230c-483e-a25b-e13e873626fd" providerId="ADAL" clId="{AB235781-41D1-50B9-86EA-51A98A5F500A}" dt="2026-04-12T02:03:13.322" v="59" actId="20577"/>
+      <pc:sldChg chg="modSp mod modNotesTx">
+        <pc:chgData name="Stepanov, Pavel Aleksandrovich" userId="b85f6bca-230c-483e-a25b-e13e873626fd" providerId="ADAL" clId="{AB235781-41D1-50B9-86EA-51A98A5F500A}" dt="2026-04-12T02:28:02.687" v="92" actId="20577"/>
         <pc:sldMkLst>
           <pc:docMk/>
           <pc:sldMk cId="2587833539" sldId="258"/>
         </pc:sldMkLst>
+        <pc:spChg chg="mod">
+          <ac:chgData name="Stepanov, Pavel Aleksandrovich" userId="b85f6bca-230c-483e-a25b-e13e873626fd" providerId="ADAL" clId="{AB235781-41D1-50B9-86EA-51A98A5F500A}" dt="2026-04-12T02:09:14.642" v="88" actId="1076"/>
+          <ac:spMkLst>
+            <pc:docMk/>
+            <pc:sldMk cId="2587833539" sldId="258"/>
+            <ac:spMk id="3" creationId="{FFF5F632-AB2B-5851-4C9F-220142F83551}"/>
+          </ac:spMkLst>
+        </pc:spChg>
       </pc:sldChg>
-      <pc:sldChg chg="delSp modSp modNotesTx">
-        <pc:chgData name="Stepanov, Pavel Aleksandrovich" userId="b85f6bca-230c-483e-a25b-e13e873626fd" providerId="ADAL" clId="{AB235781-41D1-50B9-86EA-51A98A5F500A}" dt="2026-04-12T02:01:11.925" v="36" actId="478"/>
+      <pc:sldChg chg="addSp delSp modSp mod modNotesTx">
+        <pc:chgData name="Stepanov, Pavel Aleksandrovich" userId="b85f6bca-230c-483e-a25b-e13e873626fd" providerId="ADAL" clId="{AB235781-41D1-50B9-86EA-51A98A5F500A}" dt="2026-04-12T02:09:15.352" v="89" actId="478"/>
         <pc:sldMkLst>
           <pc:docMk/>
           <pc:sldMk cId="37105992" sldId="259"/>
         </pc:sldMkLst>
+        <pc:spChg chg="add del">
+          <ac:chgData name="Stepanov, Pavel Aleksandrovich" userId="b85f6bca-230c-483e-a25b-e13e873626fd" providerId="ADAL" clId="{AB235781-41D1-50B9-86EA-51A98A5F500A}" dt="2026-04-12T02:09:15.352" v="89" actId="478"/>
+          <ac:spMkLst>
+            <pc:docMk/>
+            <pc:sldMk cId="37105992" sldId="259"/>
+            <ac:spMk id="2" creationId="{2D7D061C-6FCC-F08D-4061-3B26691D1FFF}"/>
+          </ac:spMkLst>
+        </pc:spChg>
+        <pc:spChg chg="add mod">
+          <ac:chgData name="Stepanov, Pavel Aleksandrovich" userId="b85f6bca-230c-483e-a25b-e13e873626fd" providerId="ADAL" clId="{AB235781-41D1-50B9-86EA-51A98A5F500A}" dt="2026-04-12T02:09:09.619" v="86"/>
+          <ac:spMkLst>
+            <pc:docMk/>
+            <pc:sldMk cId="37105992" sldId="259"/>
+            <ac:spMk id="3" creationId="{9F57C200-CD06-01DF-2146-66A24FFC4655}"/>
+          </ac:spMkLst>
+        </pc:spChg>
         <pc:picChg chg="del mod">
           <ac:chgData name="Stepanov, Pavel Aleksandrovich" userId="b85f6bca-230c-483e-a25b-e13e873626fd" providerId="ADAL" clId="{AB235781-41D1-50B9-86EA-51A98A5F500A}" dt="2026-04-12T02:01:11.925" v="36" actId="478"/>
           <ac:picMkLst>
@@ -211,8 +236,95 @@
           <pc:sldMk cId="2414567693" sldId="263"/>
         </pc:sldMkLst>
       </pc:sldChg>
+      <pc:sldChg chg="addSp delSp modSp modNotesTx">
+        <pc:chgData name="Stepanov, Pavel Aleksandrovich" userId="b85f6bca-230c-483e-a25b-e13e873626fd" providerId="ADAL" clId="{AB235781-41D1-50B9-86EA-51A98A5F500A}" dt="2026-04-12T02:44:44.652" v="212" actId="20577"/>
+        <pc:sldMkLst>
+          <pc:docMk/>
+          <pc:sldMk cId="2606525707" sldId="264"/>
+        </pc:sldMkLst>
+        <pc:spChg chg="del">
+          <ac:chgData name="Stepanov, Pavel Aleksandrovich" userId="b85f6bca-230c-483e-a25b-e13e873626fd" providerId="ADAL" clId="{AB235781-41D1-50B9-86EA-51A98A5F500A}" dt="2026-04-12T02:44:33.442" v="210" actId="478"/>
+          <ac:spMkLst>
+            <pc:docMk/>
+            <pc:sldMk cId="2606525707" sldId="264"/>
+            <ac:spMk id="2" creationId="{7A68A61C-4608-E59F-E53A-ACC82BDE3BFB}"/>
+          </ac:spMkLst>
+        </pc:spChg>
+        <pc:spChg chg="add mod">
+          <ac:chgData name="Stepanov, Pavel Aleksandrovich" userId="b85f6bca-230c-483e-a25b-e13e873626fd" providerId="ADAL" clId="{AB235781-41D1-50B9-86EA-51A98A5F500A}" dt="2026-04-12T02:44:33.442" v="210" actId="478"/>
+          <ac:spMkLst>
+            <pc:docMk/>
+            <pc:sldMk cId="2606525707" sldId="264"/>
+            <ac:spMk id="3" creationId="{CE7B1E02-7E04-CB0C-3314-A673C2BD6DEC}"/>
+          </ac:spMkLst>
+        </pc:spChg>
+        <pc:spChg chg="del">
+          <ac:chgData name="Stepanov, Pavel Aleksandrovich" userId="b85f6bca-230c-483e-a25b-e13e873626fd" providerId="ADAL" clId="{AB235781-41D1-50B9-86EA-51A98A5F500A}" dt="2026-04-12T02:44:33.442" v="210" actId="478"/>
+          <ac:spMkLst>
+            <pc:docMk/>
+            <pc:sldMk cId="2606525707" sldId="264"/>
+            <ac:spMk id="4" creationId="{7C72B4AF-3303-D5F9-B0F5-2775BA6C11A3}"/>
+          </ac:spMkLst>
+        </pc:spChg>
+        <pc:spChg chg="del">
+          <ac:chgData name="Stepanov, Pavel Aleksandrovich" userId="b85f6bca-230c-483e-a25b-e13e873626fd" providerId="ADAL" clId="{AB235781-41D1-50B9-86EA-51A98A5F500A}" dt="2026-04-12T02:44:33.442" v="210" actId="478"/>
+          <ac:spMkLst>
+            <pc:docMk/>
+            <pc:sldMk cId="2606525707" sldId="264"/>
+            <ac:spMk id="5" creationId="{D7373F07-4ACA-1B01-241E-AF7E7DC70674}"/>
+          </ac:spMkLst>
+        </pc:spChg>
+        <pc:spChg chg="del">
+          <ac:chgData name="Stepanov, Pavel Aleksandrovich" userId="b85f6bca-230c-483e-a25b-e13e873626fd" providerId="ADAL" clId="{AB235781-41D1-50B9-86EA-51A98A5F500A}" dt="2026-04-12T02:44:33.442" v="210" actId="478"/>
+          <ac:spMkLst>
+            <pc:docMk/>
+            <pc:sldMk cId="2606525707" sldId="264"/>
+            <ac:spMk id="7" creationId="{9C0FDC66-D3E4-E203-0DF1-C8F46FC5F057}"/>
+          </ac:spMkLst>
+        </pc:spChg>
+        <pc:spChg chg="del">
+          <ac:chgData name="Stepanov, Pavel Aleksandrovich" userId="b85f6bca-230c-483e-a25b-e13e873626fd" providerId="ADAL" clId="{AB235781-41D1-50B9-86EA-51A98A5F500A}" dt="2026-04-12T02:44:33.442" v="210" actId="478"/>
+          <ac:spMkLst>
+            <pc:docMk/>
+            <pc:sldMk cId="2606525707" sldId="264"/>
+            <ac:spMk id="8" creationId="{3B39957A-7A79-0237-F7BA-3507FB224EBF}"/>
+          </ac:spMkLst>
+        </pc:spChg>
+        <pc:spChg chg="del">
+          <ac:chgData name="Stepanov, Pavel Aleksandrovich" userId="b85f6bca-230c-483e-a25b-e13e873626fd" providerId="ADAL" clId="{AB235781-41D1-50B9-86EA-51A98A5F500A}" dt="2026-04-12T02:44:33.442" v="210" actId="478"/>
+          <ac:spMkLst>
+            <pc:docMk/>
+            <pc:sldMk cId="2606525707" sldId="264"/>
+            <ac:spMk id="10" creationId="{88F07873-F556-363B-D82F-5070AC0E40F8}"/>
+          </ac:spMkLst>
+        </pc:spChg>
+        <pc:spChg chg="del">
+          <ac:chgData name="Stepanov, Pavel Aleksandrovich" userId="b85f6bca-230c-483e-a25b-e13e873626fd" providerId="ADAL" clId="{AB235781-41D1-50B9-86EA-51A98A5F500A}" dt="2026-04-12T02:44:33.442" v="210" actId="478"/>
+          <ac:spMkLst>
+            <pc:docMk/>
+            <pc:sldMk cId="2606525707" sldId="264"/>
+            <ac:spMk id="15" creationId="{93ED1794-7A9B-1693-FDA5-2205F28AED0A}"/>
+          </ac:spMkLst>
+        </pc:spChg>
+        <pc:spChg chg="del">
+          <ac:chgData name="Stepanov, Pavel Aleksandrovich" userId="b85f6bca-230c-483e-a25b-e13e873626fd" providerId="ADAL" clId="{AB235781-41D1-50B9-86EA-51A98A5F500A}" dt="2026-04-12T02:44:33.442" v="210" actId="478"/>
+          <ac:spMkLst>
+            <pc:docMk/>
+            <pc:sldMk cId="2606525707" sldId="264"/>
+            <ac:spMk id="16" creationId="{A9B3A18B-1E6C-CA70-05A1-CB6DEEF0205D}"/>
+          </ac:spMkLst>
+        </pc:spChg>
+        <pc:spChg chg="del">
+          <ac:chgData name="Stepanov, Pavel Aleksandrovich" userId="b85f6bca-230c-483e-a25b-e13e873626fd" providerId="ADAL" clId="{AB235781-41D1-50B9-86EA-51A98A5F500A}" dt="2026-04-12T02:44:33.442" v="210" actId="478"/>
+          <ac:spMkLst>
+            <pc:docMk/>
+            <pc:sldMk cId="2606525707" sldId="264"/>
+            <ac:spMk id="17" creationId="{ADE500D8-7D23-EFBE-E974-8C8A094C2972}"/>
+          </ac:spMkLst>
+        </pc:spChg>
+      </pc:sldChg>
       <pc:sldChg chg="addSp delSp mod modNotesTx">
-        <pc:chgData name="Stepanov, Pavel Aleksandrovich" userId="b85f6bca-230c-483e-a25b-e13e873626fd" providerId="ADAL" clId="{AB235781-41D1-50B9-86EA-51A98A5F500A}" dt="2026-04-12T02:06:19.498" v="78" actId="478"/>
+        <pc:chgData name="Stepanov, Pavel Aleksandrovich" userId="b85f6bca-230c-483e-a25b-e13e873626fd" providerId="ADAL" clId="{AB235781-41D1-50B9-86EA-51A98A5F500A}" dt="2026-04-12T02:44:57.589" v="213" actId="113"/>
         <pc:sldMkLst>
           <pc:docMk/>
           <pc:sldMk cId="1500307707" sldId="265"/>
@@ -251,28 +363,28 @@
         </pc:spChg>
       </pc:sldChg>
       <pc:sldChg chg="modNotesTx">
-        <pc:chgData name="Stepanov, Pavel Aleksandrovich" userId="b85f6bca-230c-483e-a25b-e13e873626fd" providerId="ADAL" clId="{AB235781-41D1-50B9-86EA-51A98A5F500A}" dt="2026-04-12T02:04:56.889" v="67" actId="20577"/>
+        <pc:chgData name="Stepanov, Pavel Aleksandrovich" userId="b85f6bca-230c-483e-a25b-e13e873626fd" providerId="ADAL" clId="{AB235781-41D1-50B9-86EA-51A98A5F500A}" dt="2026-04-12T02:42:56.728" v="181" actId="20577"/>
         <pc:sldMkLst>
           <pc:docMk/>
           <pc:sldMk cId="3511431320" sldId="266"/>
         </pc:sldMkLst>
       </pc:sldChg>
-      <pc:sldChg chg="modNotesTx">
-        <pc:chgData name="Stepanov, Pavel Aleksandrovich" userId="b85f6bca-230c-483e-a25b-e13e873626fd" providerId="ADAL" clId="{AB235781-41D1-50B9-86EA-51A98A5F500A}" dt="2026-04-12T02:04:59.076" v="68" actId="20577"/>
+      <pc:sldChg chg="mod modShow modNotesTx">
+        <pc:chgData name="Stepanov, Pavel Aleksandrovich" userId="b85f6bca-230c-483e-a25b-e13e873626fd" providerId="ADAL" clId="{AB235781-41D1-50B9-86EA-51A98A5F500A}" dt="2026-04-12T02:42:42.920" v="179" actId="729"/>
         <pc:sldMkLst>
           <pc:docMk/>
           <pc:sldMk cId="3688322972" sldId="267"/>
         </pc:sldMkLst>
       </pc:sldChg>
       <pc:sldChg chg="modNotesTx">
-        <pc:chgData name="Stepanov, Pavel Aleksandrovich" userId="b85f6bca-230c-483e-a25b-e13e873626fd" providerId="ADAL" clId="{AB235781-41D1-50B9-86EA-51A98A5F500A}" dt="2026-04-12T02:05:01.581" v="69" actId="20577"/>
+        <pc:chgData name="Stepanov, Pavel Aleksandrovich" userId="b85f6bca-230c-483e-a25b-e13e873626fd" providerId="ADAL" clId="{AB235781-41D1-50B9-86EA-51A98A5F500A}" dt="2026-04-12T02:42:00.570" v="178" actId="20577"/>
         <pc:sldMkLst>
           <pc:docMk/>
           <pc:sldMk cId="3183023199" sldId="268"/>
         </pc:sldMkLst>
       </pc:sldChg>
       <pc:sldChg chg="delSp modSp mod modNotesTx">
-        <pc:chgData name="Stepanov, Pavel Aleksandrovich" userId="b85f6bca-230c-483e-a25b-e13e873626fd" providerId="ADAL" clId="{AB235781-41D1-50B9-86EA-51A98A5F500A}" dt="2026-04-12T02:06:55.624" v="81" actId="478"/>
+        <pc:chgData name="Stepanov, Pavel Aleksandrovich" userId="b85f6bca-230c-483e-a25b-e13e873626fd" providerId="ADAL" clId="{AB235781-41D1-50B9-86EA-51A98A5F500A}" dt="2026-04-12T02:36:33.349" v="132" actId="20577"/>
         <pc:sldMkLst>
           <pc:docMk/>
           <pc:sldMk cId="1235929803" sldId="269"/>
@@ -295,7 +407,7 @@
         </pc:picChg>
       </pc:sldChg>
       <pc:sldChg chg="modNotesTx">
-        <pc:chgData name="Stepanov, Pavel Aleksandrovich" userId="b85f6bca-230c-483e-a25b-e13e873626fd" providerId="ADAL" clId="{AB235781-41D1-50B9-86EA-51A98A5F500A}" dt="2026-04-12T02:05:06.584" v="71" actId="20577"/>
+        <pc:chgData name="Stepanov, Pavel Aleksandrovich" userId="b85f6bca-230c-483e-a25b-e13e873626fd" providerId="ADAL" clId="{AB235781-41D1-50B9-86EA-51A98A5F500A}" dt="2026-04-12T02:45:35.358" v="214" actId="20577"/>
         <pc:sldMkLst>
           <pc:docMk/>
           <pc:sldMk cId="133968869" sldId="270"/>
@@ -307,6 +419,93 @@
           <pc:docMk/>
           <pc:sldMk cId="480666757" sldId="271"/>
         </pc:sldMkLst>
+      </pc:sldChg>
+      <pc:sldChg chg="addSp delSp modSp add modNotesTx">
+        <pc:chgData name="Stepanov, Pavel Aleksandrovich" userId="b85f6bca-230c-483e-a25b-e13e873626fd" providerId="ADAL" clId="{AB235781-41D1-50B9-86EA-51A98A5F500A}" dt="2026-04-12T02:44:36.704" v="211" actId="478"/>
+        <pc:sldMkLst>
+          <pc:docMk/>
+          <pc:sldMk cId="1015887060" sldId="272"/>
+        </pc:sldMkLst>
+        <pc:spChg chg="del">
+          <ac:chgData name="Stepanov, Pavel Aleksandrovich" userId="b85f6bca-230c-483e-a25b-e13e873626fd" providerId="ADAL" clId="{AB235781-41D1-50B9-86EA-51A98A5F500A}" dt="2026-04-12T02:44:36.704" v="211" actId="478"/>
+          <ac:spMkLst>
+            <pc:docMk/>
+            <pc:sldMk cId="1015887060" sldId="272"/>
+            <ac:spMk id="2" creationId="{3C85ED86-3106-1AE7-29BD-E84CE5C78B99}"/>
+          </ac:spMkLst>
+        </pc:spChg>
+        <pc:spChg chg="add mod">
+          <ac:chgData name="Stepanov, Pavel Aleksandrovich" userId="b85f6bca-230c-483e-a25b-e13e873626fd" providerId="ADAL" clId="{AB235781-41D1-50B9-86EA-51A98A5F500A}" dt="2026-04-12T02:44:36.704" v="211" actId="478"/>
+          <ac:spMkLst>
+            <pc:docMk/>
+            <pc:sldMk cId="1015887060" sldId="272"/>
+            <ac:spMk id="3" creationId="{FCAB2BF5-F20F-C31F-3CA6-179525C2DB7D}"/>
+          </ac:spMkLst>
+        </pc:spChg>
+        <pc:spChg chg="del">
+          <ac:chgData name="Stepanov, Pavel Aleksandrovich" userId="b85f6bca-230c-483e-a25b-e13e873626fd" providerId="ADAL" clId="{AB235781-41D1-50B9-86EA-51A98A5F500A}" dt="2026-04-12T02:44:36.704" v="211" actId="478"/>
+          <ac:spMkLst>
+            <pc:docMk/>
+            <pc:sldMk cId="1015887060" sldId="272"/>
+            <ac:spMk id="4" creationId="{58C06A6B-2D01-9593-CC6E-E229F902E49C}"/>
+          </ac:spMkLst>
+        </pc:spChg>
+        <pc:spChg chg="del">
+          <ac:chgData name="Stepanov, Pavel Aleksandrovich" userId="b85f6bca-230c-483e-a25b-e13e873626fd" providerId="ADAL" clId="{AB235781-41D1-50B9-86EA-51A98A5F500A}" dt="2026-04-12T02:44:36.704" v="211" actId="478"/>
+          <ac:spMkLst>
+            <pc:docMk/>
+            <pc:sldMk cId="1015887060" sldId="272"/>
+            <ac:spMk id="5" creationId="{DEFD2CC0-FC69-45D9-3DC9-EA386316F03B}"/>
+          </ac:spMkLst>
+        </pc:spChg>
+        <pc:spChg chg="del">
+          <ac:chgData name="Stepanov, Pavel Aleksandrovich" userId="b85f6bca-230c-483e-a25b-e13e873626fd" providerId="ADAL" clId="{AB235781-41D1-50B9-86EA-51A98A5F500A}" dt="2026-04-12T02:44:36.704" v="211" actId="478"/>
+          <ac:spMkLst>
+            <pc:docMk/>
+            <pc:sldMk cId="1015887060" sldId="272"/>
+            <ac:spMk id="7" creationId="{57595808-DFB0-7DC5-6366-D8A1D9399F4A}"/>
+          </ac:spMkLst>
+        </pc:spChg>
+        <pc:spChg chg="del">
+          <ac:chgData name="Stepanov, Pavel Aleksandrovich" userId="b85f6bca-230c-483e-a25b-e13e873626fd" providerId="ADAL" clId="{AB235781-41D1-50B9-86EA-51A98A5F500A}" dt="2026-04-12T02:44:36.704" v="211" actId="478"/>
+          <ac:spMkLst>
+            <pc:docMk/>
+            <pc:sldMk cId="1015887060" sldId="272"/>
+            <ac:spMk id="10" creationId="{413A6E5C-51C2-E759-AD91-BC6A7AFA5C8E}"/>
+          </ac:spMkLst>
+        </pc:spChg>
+        <pc:spChg chg="del">
+          <ac:chgData name="Stepanov, Pavel Aleksandrovich" userId="b85f6bca-230c-483e-a25b-e13e873626fd" providerId="ADAL" clId="{AB235781-41D1-50B9-86EA-51A98A5F500A}" dt="2026-04-12T02:44:36.704" v="211" actId="478"/>
+          <ac:spMkLst>
+            <pc:docMk/>
+            <pc:sldMk cId="1015887060" sldId="272"/>
+            <ac:spMk id="15" creationId="{0B1DA6E0-4602-769D-C1BC-7A4F6D9B1F28}"/>
+          </ac:spMkLst>
+        </pc:spChg>
+        <pc:spChg chg="del">
+          <ac:chgData name="Stepanov, Pavel Aleksandrovich" userId="b85f6bca-230c-483e-a25b-e13e873626fd" providerId="ADAL" clId="{AB235781-41D1-50B9-86EA-51A98A5F500A}" dt="2026-04-12T02:44:36.704" v="211" actId="478"/>
+          <ac:spMkLst>
+            <pc:docMk/>
+            <pc:sldMk cId="1015887060" sldId="272"/>
+            <ac:spMk id="16" creationId="{0CAEF6D4-A34B-4F2B-AEBE-544BB27AFC60}"/>
+          </ac:spMkLst>
+        </pc:spChg>
+        <pc:spChg chg="del">
+          <ac:chgData name="Stepanov, Pavel Aleksandrovich" userId="b85f6bca-230c-483e-a25b-e13e873626fd" providerId="ADAL" clId="{AB235781-41D1-50B9-86EA-51A98A5F500A}" dt="2026-04-12T02:44:36.704" v="211" actId="478"/>
+          <ac:spMkLst>
+            <pc:docMk/>
+            <pc:sldMk cId="1015887060" sldId="272"/>
+            <ac:spMk id="17" creationId="{01D601D3-AC74-8DAD-AD4F-4E4C81AC81AD}"/>
+          </ac:spMkLst>
+        </pc:spChg>
+        <pc:spChg chg="del">
+          <ac:chgData name="Stepanov, Pavel Aleksandrovich" userId="b85f6bca-230c-483e-a25b-e13e873626fd" providerId="ADAL" clId="{AB235781-41D1-50B9-86EA-51A98A5F500A}" dt="2026-04-12T02:44:36.704" v="211" actId="478"/>
+          <ac:spMkLst>
+            <pc:docMk/>
+            <pc:sldMk cId="1015887060" sldId="272"/>
+            <ac:spMk id="18" creationId="{708A88AF-DE9D-38F6-42C4-213598D854A4}"/>
+          </ac:spMkLst>
+        </pc:spChg>
       </pc:sldChg>
     </pc:docChg>
   </pc:docChgLst>
@@ -753,6 +952,17 @@
             </a:r>
           </a:p>
           <a:p>
+            <a:endParaRPr lang="en-US" sz="1200" b="0" i="0" kern="1200" dirty="0">
+              <a:solidFill>
+                <a:schemeClr val="tx1"/>
+              </a:solidFill>
+              <a:effectLst/>
+              <a:latin typeface="+mn-lt"/>
+              <a:ea typeface="+mn-ea"/>
+              <a:cs typeface="+mn-cs"/>
+            </a:endParaRPr>
+          </a:p>
+          <a:p>
             <a:r>
               <a:rPr lang="en-US" sz="1200" b="0" i="0" kern="1200" dirty="0">
                 <a:solidFill>
@@ -777,6 +987,8 @@
               </a:rPr>
               <a:t>How does an autonomous vehicle recognize that something unusual is happening on the road — without anyone ever labeling what "unusual" looks like?</a:t>
             </a:r>
+          </a:p>
+          <a:p>
             <a:endParaRPr lang="en-US" sz="1200" b="0" i="0" kern="1200" dirty="0">
               <a:solidFill>
                 <a:schemeClr val="tx1"/>
@@ -843,6 +1055,363 @@
 </file>
 
 <file path=ppt/notesSlides/notesSlide10.xml><?xml version="1.0" encoding="utf-8"?>
+<p:notes xmlns:a="http://schemas.openxmlformats.org/drawingml/2006/main" xmlns:r="http://schemas.openxmlformats.org/officeDocument/2006/relationships" xmlns:p="http://schemas.openxmlformats.org/presentationml/2006/main">
+  <p:cSld>
+    <p:spTree>
+      <p:nvGrpSpPr>
+        <p:cNvPr id="1" name="">
+          <a:extLst>
+            <a:ext uri="{FF2B5EF4-FFF2-40B4-BE49-F238E27FC236}">
+              <a16:creationId xmlns:a16="http://schemas.microsoft.com/office/drawing/2014/main" id="{28B6F447-6712-10CC-B836-ECC08ADB1A30}"/>
+            </a:ext>
+          </a:extLst>
+        </p:cNvPr>
+        <p:cNvGrpSpPr/>
+        <p:nvPr/>
+      </p:nvGrpSpPr>
+      <p:grpSpPr>
+        <a:xfrm>
+          <a:off x="0" y="0"/>
+          <a:ext cx="0" cy="0"/>
+          <a:chOff x="0" y="0"/>
+          <a:chExt cx="0" cy="0"/>
+        </a:xfrm>
+      </p:grpSpPr>
+      <p:sp>
+        <p:nvSpPr>
+          <p:cNvPr id="2" name="Slide Image Placeholder 1">
+            <a:extLst>
+              <a:ext uri="{FF2B5EF4-FFF2-40B4-BE49-F238E27FC236}">
+                <a16:creationId xmlns:a16="http://schemas.microsoft.com/office/drawing/2014/main" id="{FAB7EA59-FF18-6101-C3B9-A9E808FEE456}"/>
+              </a:ext>
+            </a:extLst>
+          </p:cNvPr>
+          <p:cNvSpPr>
+            <a:spLocks noGrp="1" noRot="1" noChangeAspect="1"/>
+          </p:cNvSpPr>
+          <p:nvPr>
+            <p:ph type="sldImg"/>
+          </p:nvPr>
+        </p:nvSpPr>
+        <p:spPr/>
+      </p:sp>
+      <p:sp>
+        <p:nvSpPr>
+          <p:cNvPr id="3" name="Notes Placeholder 2">
+            <a:extLst>
+              <a:ext uri="{FF2B5EF4-FFF2-40B4-BE49-F238E27FC236}">
+                <a16:creationId xmlns:a16="http://schemas.microsoft.com/office/drawing/2014/main" id="{F62F3CF9-8F06-1FBD-581A-29A668F3B3D2}"/>
+              </a:ext>
+            </a:extLst>
+          </p:cNvPr>
+          <p:cNvSpPr>
+            <a:spLocks noGrp="1"/>
+          </p:cNvSpPr>
+          <p:nvPr>
+            <p:ph type="body" idx="1"/>
+          </p:nvPr>
+        </p:nvSpPr>
+        <p:spPr/>
+        <p:txBody>
+          <a:bodyPr/>
+          <a:lstStyle/>
+          <a:p>
+            <a:r>
+              <a:rPr lang="en-US" b="1" dirty="0"/>
+              <a:t>JUSTIN:</a:t>
+            </a:r>
+            <a:br>
+              <a:rPr lang="en-US" b="1" dirty="0"/>
+            </a:br>
+            <a:br>
+              <a:rPr lang="en-US" b="1" dirty="0"/>
+            </a:br>
+            <a:r>
+              <a:rPr lang="en-US" sz="1200" b="0" i="0" kern="1200" dirty="0">
+                <a:solidFill>
+                  <a:schemeClr val="tx1"/>
+                </a:solidFill>
+                <a:effectLst/>
+                <a:latin typeface="+mn-lt"/>
+                <a:ea typeface="+mn-ea"/>
+                <a:cs typeface="+mn-cs"/>
+              </a:rPr>
+              <a:t>Let's talk about what we found — and I want to start with the anomalies themselves, because the videos tell the story better than any table.</a:t>
+            </a:r>
+          </a:p>
+          <a:p>
+            <a:endParaRPr lang="en-US" sz="1200" b="0" i="0" kern="1200" dirty="0">
+              <a:solidFill>
+                <a:schemeClr val="tx1"/>
+              </a:solidFill>
+              <a:effectLst/>
+              <a:latin typeface="+mn-lt"/>
+              <a:ea typeface="+mn-ea"/>
+              <a:cs typeface="+mn-cs"/>
+            </a:endParaRPr>
+          </a:p>
+          <a:p>
+            <a:r>
+              <a:rPr lang="en-US" sz="1200" b="0" i="0" kern="1200" dirty="0">
+                <a:solidFill>
+                  <a:schemeClr val="tx1"/>
+                </a:solidFill>
+                <a:effectLst/>
+                <a:latin typeface="+mn-lt"/>
+                <a:ea typeface="+mn-ea"/>
+                <a:cs typeface="+mn-cs"/>
+              </a:rPr>
+              <a:t>These are actual scenario clips from the Waymo dataset, centered on the agents our Isolation Forest flagged as most anomalous.</a:t>
+            </a:r>
+          </a:p>
+          <a:p>
+            <a:r>
+              <a:rPr lang="en-US" sz="1200" b="0" i="0" kern="1200" dirty="0">
+                <a:solidFill>
+                  <a:schemeClr val="tx1"/>
+                </a:solidFill>
+                <a:effectLst/>
+                <a:latin typeface="+mn-lt"/>
+                <a:ea typeface="+mn-ea"/>
+                <a:cs typeface="+mn-cs"/>
+              </a:rPr>
+              <a:t>The flagged agents fall into two distinct categories — and the split is instructive.</a:t>
+            </a:r>
+          </a:p>
+          <a:p>
+            <a:r>
+              <a:rPr lang="en-US" sz="1200" b="0" i="0" kern="1200" dirty="0">
+                <a:solidFill>
+                  <a:schemeClr val="tx1"/>
+                </a:solidFill>
+                <a:effectLst/>
+                <a:latin typeface="+mn-lt"/>
+                <a:ea typeface="+mn-ea"/>
+                <a:cs typeface="+mn-cs"/>
+              </a:rPr>
+              <a:t>The first is </a:t>
+            </a:r>
+            <a:r>
+              <a:rPr lang="en-US" sz="1200" b="1" i="0" kern="1200" dirty="0">
+                <a:solidFill>
+                  <a:schemeClr val="tx1"/>
+                </a:solidFill>
+                <a:effectLst/>
+                <a:latin typeface="+mn-lt"/>
+                <a:ea typeface="+mn-ea"/>
+                <a:cs typeface="+mn-cs"/>
+              </a:rPr>
+              <a:t>genuine kinematic extremes</a:t>
+            </a:r>
+            <a:r>
+              <a:rPr lang="en-US" sz="1200" b="0" i="0" kern="1200" dirty="0">
+                <a:solidFill>
+                  <a:schemeClr val="tx1"/>
+                </a:solidFill>
+                <a:effectLst/>
+                <a:latin typeface="+mn-lt"/>
+                <a:ea typeface="+mn-ea"/>
+                <a:cs typeface="+mn-cs"/>
+              </a:rPr>
+              <a:t>. Three agents were flagged for truly unusual speed and acceleration: one vehicle reaching </a:t>
+            </a:r>
+            <a:r>
+              <a:rPr lang="en-US" sz="1200" b="1" i="0" kern="1200" dirty="0">
+                <a:solidFill>
+                  <a:schemeClr val="tx1"/>
+                </a:solidFill>
+                <a:effectLst/>
+                <a:latin typeface="+mn-lt"/>
+                <a:ea typeface="+mn-ea"/>
+                <a:cs typeface="+mn-cs"/>
+              </a:rPr>
+              <a:t>49.75 m/s — roughly 180 km/h</a:t>
+            </a:r>
+            <a:r>
+              <a:rPr lang="en-US" sz="1200" b="0" i="0" kern="1200" dirty="0">
+                <a:solidFill>
+                  <a:schemeClr val="tx1"/>
+                </a:solidFill>
+                <a:effectLst/>
+                <a:latin typeface="+mn-lt"/>
+                <a:ea typeface="+mn-ea"/>
+                <a:cs typeface="+mn-cs"/>
+              </a:rPr>
+              <a:t> — with an acceleration reading of 355 m/s². Another at 32 m/s, another at 25 m/s. In urban scenario context, these are real outliers.</a:t>
+            </a:r>
+          </a:p>
+          <a:p>
+            <a:r>
+              <a:rPr lang="en-US" sz="1200" b="0" i="0" kern="1200" dirty="0">
+                <a:solidFill>
+                  <a:schemeClr val="tx1"/>
+                </a:solidFill>
+                <a:effectLst/>
+                <a:latin typeface="+mn-lt"/>
+                <a:ea typeface="+mn-ea"/>
+                <a:cs typeface="+mn-cs"/>
+              </a:rPr>
+              <a:t>The second category — and this accounts for seventeen of the top twenty — is a </a:t>
+            </a:r>
+            <a:r>
+              <a:rPr lang="en-US" sz="1200" b="1" i="0" kern="1200" dirty="0">
+                <a:solidFill>
+                  <a:schemeClr val="tx1"/>
+                </a:solidFill>
+                <a:effectLst/>
+                <a:latin typeface="+mn-lt"/>
+                <a:ea typeface="+mn-ea"/>
+                <a:cs typeface="+mn-cs"/>
+              </a:rPr>
+              <a:t>sensor artifact</a:t>
+            </a:r>
+            <a:r>
+              <a:rPr lang="en-US" sz="1200" b="0" i="0" kern="1200" dirty="0">
+                <a:solidFill>
+                  <a:schemeClr val="tx1"/>
+                </a:solidFill>
+                <a:effectLst/>
+                <a:latin typeface="+mn-lt"/>
+                <a:ea typeface="+mn-ea"/>
+                <a:cs typeface="+mn-cs"/>
+              </a:rPr>
+              <a:t>. Near-stationary agents, across all three agent types, with yaw rate fixed at exactly ±31 rad/s. A rotation rate of 31 radians per second is not physically possible for any ground vehicle. The pattern is unmistakable: near-zero speed, always the same magnitude, appearing in vehicles, pedestrians, and cyclists alike. This is numerical instability in the heading derivative computation when speed approaches zero. The model flagged real structure in the data — it's just that the structure reflects a measurement issue, not a driving incident.</a:t>
+            </a:r>
+          </a:p>
+          <a:p>
+            <a:r>
+              <a:rPr lang="en-US" sz="1200" b="0" i="0" kern="1200" dirty="0">
+                <a:solidFill>
+                  <a:schemeClr val="tx1"/>
+                </a:solidFill>
+                <a:effectLst/>
+                <a:latin typeface="+mn-lt"/>
+                <a:ea typeface="+mn-ea"/>
+                <a:cs typeface="+mn-cs"/>
+              </a:rPr>
+              <a:t>There's one more detail worth highlighting: </a:t>
+            </a:r>
+            <a:r>
+              <a:rPr lang="en-US" sz="1200" b="1" i="0" kern="1200" dirty="0">
+                <a:solidFill>
+                  <a:schemeClr val="tx1"/>
+                </a:solidFill>
+                <a:effectLst/>
+                <a:latin typeface="+mn-lt"/>
+                <a:ea typeface="+mn-ea"/>
+                <a:cs typeface="+mn-cs"/>
+              </a:rPr>
+              <a:t>none of the top 20 anomalies carry an </a:t>
+            </a:r>
+            <a:r>
+              <a:rPr lang="en-US" sz="1200" b="1" i="0" kern="1200" dirty="0" err="1">
+                <a:solidFill>
+                  <a:schemeClr val="tx1"/>
+                </a:solidFill>
+                <a:effectLst/>
+                <a:latin typeface="+mn-lt"/>
+                <a:ea typeface="+mn-ea"/>
+                <a:cs typeface="+mn-cs"/>
+              </a:rPr>
+              <a:t>IsInteractive</a:t>
+            </a:r>
+            <a:r>
+              <a:rPr lang="en-US" sz="1200" b="1" i="0" kern="1200" dirty="0">
+                <a:solidFill>
+                  <a:schemeClr val="tx1"/>
+                </a:solidFill>
+                <a:effectLst/>
+                <a:latin typeface="+mn-lt"/>
+                <a:ea typeface="+mn-ea"/>
+                <a:cs typeface="+mn-cs"/>
+              </a:rPr>
+              <a:t> flag from Waymo</a:t>
+            </a:r>
+            <a:r>
+              <a:rPr lang="en-US" sz="1200" b="0" i="0" kern="1200" dirty="0">
+                <a:solidFill>
+                  <a:schemeClr val="tx1"/>
+                </a:solidFill>
+                <a:effectLst/>
+                <a:latin typeface="+mn-lt"/>
+                <a:ea typeface="+mn-ea"/>
+                <a:cs typeface="+mn-cs"/>
+              </a:rPr>
+              <a:t>. </a:t>
+            </a:r>
+            <a:r>
+              <a:rPr lang="en-US" sz="1200" b="0" i="0" kern="1200" dirty="0" err="1">
+                <a:solidFill>
+                  <a:schemeClr val="tx1"/>
+                </a:solidFill>
+                <a:effectLst/>
+                <a:latin typeface="+mn-lt"/>
+                <a:ea typeface="+mn-ea"/>
+                <a:cs typeface="+mn-cs"/>
+              </a:rPr>
+              <a:t>IsInteractive</a:t>
+            </a:r>
+            <a:r>
+              <a:rPr lang="en-US" sz="1200" b="0" i="0" kern="1200" dirty="0">
+                <a:solidFill>
+                  <a:schemeClr val="tx1"/>
+                </a:solidFill>
+                <a:effectLst/>
+                <a:latin typeface="+mn-lt"/>
+                <a:ea typeface="+mn-ea"/>
+                <a:cs typeface="+mn-cs"/>
+              </a:rPr>
+              <a:t> marks agents that are safety-relevant to the AV's immediate planning. Our most extreme kinematic outliers — the 180 km/h vehicle, the ±31 rad/s artifacts — were not flagged by Waymo as planning-relevant. We'll come back to what that means in discussion, but it's an important caveat to carry into the results.</a:t>
+            </a:r>
+          </a:p>
+          <a:p>
+            <a:endParaRPr lang="en-US" b="1" dirty="0"/>
+          </a:p>
+        </p:txBody>
+      </p:sp>
+      <p:sp>
+        <p:nvSpPr>
+          <p:cNvPr id="4" name="Slide Number Placeholder 3">
+            <a:extLst>
+              <a:ext uri="{FF2B5EF4-FFF2-40B4-BE49-F238E27FC236}">
+                <a16:creationId xmlns:a16="http://schemas.microsoft.com/office/drawing/2014/main" id="{83AF3720-730E-9476-95AA-C800296916AA}"/>
+              </a:ext>
+            </a:extLst>
+          </p:cNvPr>
+          <p:cNvSpPr>
+            <a:spLocks noGrp="1"/>
+          </p:cNvSpPr>
+          <p:nvPr>
+            <p:ph type="sldNum" sz="quarter" idx="5"/>
+          </p:nvPr>
+        </p:nvSpPr>
+        <p:spPr/>
+        <p:txBody>
+          <a:bodyPr/>
+          <a:lstStyle/>
+          <a:p>
+            <a:fld id="{B3F43537-14D9-9349-AA70-B1088F1298F1}" type="slidenum">
+              <a:rPr lang="en-US" smtClean="0"/>
+              <a:t>10</a:t>
+            </a:fld>
+            <a:endParaRPr lang="en-US"/>
+          </a:p>
+        </p:txBody>
+      </p:sp>
+    </p:spTree>
+    <p:extLst>
+      <p:ext uri="{BB962C8B-B14F-4D97-AF65-F5344CB8AC3E}">
+        <p14:creationId xmlns:p14="http://schemas.microsoft.com/office/powerpoint/2010/main" val="1370636603"/>
+      </p:ext>
+    </p:extLst>
+  </p:cSld>
+  <p:clrMapOvr>
+    <a:masterClrMapping/>
+  </p:clrMapOvr>
+</p:notes>
+</file>
+
+<file path=ppt/notesSlides/notesSlide11.xml><?xml version="1.0" encoding="utf-8"?>
 <p:notes xmlns:a="http://schemas.openxmlformats.org/drawingml/2006/main" xmlns:r="http://schemas.openxmlformats.org/officeDocument/2006/relationships" xmlns:p="http://schemas.openxmlformats.org/presentationml/2006/main">
   <p:cSld>
     <p:spTree>
@@ -904,6 +1473,188 @@
           <a:bodyPr/>
           <a:lstStyle/>
           <a:p>
+            <a:r>
+              <a:rPr lang="en-US" dirty="0"/>
+              <a:t>JUSTIN:</a:t>
+            </a:r>
+            <a:br>
+              <a:rPr lang="en-US" dirty="0"/>
+            </a:br>
+            <a:br>
+              <a:rPr lang="en-US" dirty="0"/>
+            </a:br>
+            <a:r>
+              <a:rPr lang="en-US" sz="1200" b="0" i="0" kern="1200" dirty="0">
+                <a:solidFill>
+                  <a:schemeClr val="tx1"/>
+                </a:solidFill>
+                <a:effectLst/>
+                <a:latin typeface="+mn-lt"/>
+                <a:ea typeface="+mn-ea"/>
+                <a:cs typeface="+mn-cs"/>
+              </a:rPr>
+              <a:t>The Random Forest classifier trained on those pseudo-labels achieved:</a:t>
+            </a:r>
+          </a:p>
+          <a:p>
+            <a:r>
+              <a:rPr lang="en-US" sz="1200" b="0" i="0" kern="1200" dirty="0">
+                <a:solidFill>
+                  <a:schemeClr val="tx1"/>
+                </a:solidFill>
+                <a:effectLst/>
+                <a:latin typeface="+mn-lt"/>
+                <a:ea typeface="+mn-ea"/>
+                <a:cs typeface="+mn-cs"/>
+              </a:rPr>
+              <a:t>Cross-validated AUC-ROC of </a:t>
+            </a:r>
+            <a:r>
+              <a:rPr lang="en-US" sz="1200" b="1" i="0" kern="1200" dirty="0">
+                <a:solidFill>
+                  <a:schemeClr val="tx1"/>
+                </a:solidFill>
+                <a:effectLst/>
+                <a:latin typeface="+mn-lt"/>
+                <a:ea typeface="+mn-ea"/>
+                <a:cs typeface="+mn-cs"/>
+              </a:rPr>
+              <a:t>0.887</a:t>
+            </a:r>
+            <a:endParaRPr lang="en-US" sz="1200" b="0" i="0" kern="1200" dirty="0">
+              <a:solidFill>
+                <a:schemeClr val="tx1"/>
+              </a:solidFill>
+              <a:effectLst/>
+              <a:latin typeface="+mn-lt"/>
+              <a:ea typeface="+mn-ea"/>
+              <a:cs typeface="+mn-cs"/>
+            </a:endParaRPr>
+          </a:p>
+          <a:p>
+            <a:r>
+              <a:rPr lang="en-US" sz="1200" b="0" i="0" kern="1200" dirty="0">
+                <a:solidFill>
+                  <a:schemeClr val="tx1"/>
+                </a:solidFill>
+                <a:effectLst/>
+                <a:latin typeface="+mn-lt"/>
+                <a:ea typeface="+mn-ea"/>
+                <a:cs typeface="+mn-cs"/>
+              </a:rPr>
+              <a:t>Sensitivity 0.836, Specificity 0.839 on training data</a:t>
+            </a:r>
+          </a:p>
+          <a:p>
+            <a:r>
+              <a:rPr lang="en-US" sz="1200" b="0" i="0" kern="1200" dirty="0">
+                <a:solidFill>
+                  <a:schemeClr val="tx1"/>
+                </a:solidFill>
+                <a:effectLst/>
+                <a:latin typeface="+mn-lt"/>
+                <a:ea typeface="+mn-ea"/>
+                <a:cs typeface="+mn-cs"/>
+              </a:rPr>
+              <a:t>On the held-out test set: accuracy </a:t>
+            </a:r>
+            <a:r>
+              <a:rPr lang="en-US" sz="1200" b="1" i="0" kern="1200" dirty="0">
+                <a:solidFill>
+                  <a:schemeClr val="tx1"/>
+                </a:solidFill>
+                <a:effectLst/>
+                <a:latin typeface="+mn-lt"/>
+                <a:ea typeface="+mn-ea"/>
+                <a:cs typeface="+mn-cs"/>
+              </a:rPr>
+              <a:t>79.5%</a:t>
+            </a:r>
+            <a:r>
+              <a:rPr lang="en-US" sz="1200" b="0" i="0" kern="1200" dirty="0">
+                <a:solidFill>
+                  <a:schemeClr val="tx1"/>
+                </a:solidFill>
+                <a:effectLst/>
+                <a:latin typeface="+mn-lt"/>
+                <a:ea typeface="+mn-ea"/>
+                <a:cs typeface="+mn-cs"/>
+              </a:rPr>
+              <a:t>, balanced accuracy </a:t>
+            </a:r>
+            <a:r>
+              <a:rPr lang="en-US" sz="1200" b="1" i="0" kern="1200" dirty="0">
+                <a:solidFill>
+                  <a:schemeClr val="tx1"/>
+                </a:solidFill>
+                <a:effectLst/>
+                <a:latin typeface="+mn-lt"/>
+                <a:ea typeface="+mn-ea"/>
+                <a:cs typeface="+mn-cs"/>
+              </a:rPr>
+              <a:t>73.1%</a:t>
+            </a:r>
+            <a:endParaRPr lang="en-US" sz="1200" b="0" i="0" kern="1200" dirty="0">
+              <a:solidFill>
+                <a:schemeClr val="tx1"/>
+              </a:solidFill>
+              <a:effectLst/>
+              <a:latin typeface="+mn-lt"/>
+              <a:ea typeface="+mn-ea"/>
+              <a:cs typeface="+mn-cs"/>
+            </a:endParaRPr>
+          </a:p>
+          <a:p>
+            <a:r>
+              <a:rPr lang="en-US" sz="1200" b="0" i="0" kern="1200" dirty="0">
+                <a:solidFill>
+                  <a:schemeClr val="tx1"/>
+                </a:solidFill>
+                <a:effectLst/>
+                <a:latin typeface="+mn-lt"/>
+                <a:ea typeface="+mn-ea"/>
+                <a:cs typeface="+mn-cs"/>
+              </a:rPr>
+              <a:t>Strong performance — especially given we're training on unsupervised pseudo-labels rather than verified ground truth. And it's worth noting what the classifier was actually learning from: its three features are </a:t>
+            </a:r>
+            <a:r>
+              <a:rPr lang="en-US" sz="1200" b="1" i="0" kern="1200" dirty="0">
+                <a:solidFill>
+                  <a:schemeClr val="tx1"/>
+                </a:solidFill>
+                <a:effectLst/>
+                <a:latin typeface="+mn-lt"/>
+                <a:ea typeface="+mn-ea"/>
+                <a:cs typeface="+mn-cs"/>
+              </a:rPr>
+              <a:t>Length, Width, and </a:t>
+            </a:r>
+            <a:r>
+              <a:rPr lang="en-US" sz="1200" b="1" i="0" kern="1200" dirty="0" err="1">
+                <a:solidFill>
+                  <a:schemeClr val="tx1"/>
+                </a:solidFill>
+                <a:effectLst/>
+                <a:latin typeface="+mn-lt"/>
+                <a:ea typeface="+mn-ea"/>
+                <a:cs typeface="+mn-cs"/>
+              </a:rPr>
+              <a:t>YawRate</a:t>
+            </a:r>
+            <a:r>
+              <a:rPr lang="en-US" sz="1200" b="0" i="0" kern="1200" dirty="0">
+                <a:solidFill>
+                  <a:schemeClr val="tx1"/>
+                </a:solidFill>
+                <a:effectLst/>
+                <a:latin typeface="+mn-lt"/>
+                <a:ea typeface="+mn-ea"/>
+                <a:cs typeface="+mn-cs"/>
+              </a:rPr>
+              <a:t> — agent geometry and turning behavior. Not speed. The anomaly characterization signal lives in how an agent is shaped and how it rotates, not how fast it moves.</a:t>
+            </a:r>
+          </a:p>
+          <a:p>
             <a:endParaRPr lang="en-US" dirty="0"/>
           </a:p>
         </p:txBody>
@@ -931,7 +1682,7 @@
           <a:p>
             <a:fld id="{B3F43537-14D9-9349-AA70-B1088F1298F1}" type="slidenum">
               <a:rPr lang="en-US" smtClean="0"/>
-              <a:t>10</a:t>
+              <a:t>11</a:t>
             </a:fld>
             <a:endParaRPr lang="en-US"/>
           </a:p>
@@ -950,7 +1701,7 @@
 </p:notes>
 </file>
 
-<file path=ppt/notesSlides/notesSlide11.xml><?xml version="1.0" encoding="utf-8"?>
+<file path=ppt/notesSlides/notesSlide12.xml><?xml version="1.0" encoding="utf-8"?>
 <p:notes xmlns:a="http://schemas.openxmlformats.org/drawingml/2006/main" xmlns:r="http://schemas.openxmlformats.org/officeDocument/2006/relationships" xmlns:p="http://schemas.openxmlformats.org/presentationml/2006/main">
   <p:cSld>
     <p:spTree>
@@ -1012,6 +1763,285 @@
           <a:bodyPr/>
           <a:lstStyle/>
           <a:p>
+            <a:r>
+              <a:rPr lang="en-US" dirty="0"/>
+              <a:t>JUSTIN:</a:t>
+            </a:r>
+          </a:p>
+          <a:p>
+            <a:endParaRPr lang="en-US" dirty="0"/>
+          </a:p>
+          <a:p>
+            <a:r>
+              <a:rPr lang="en-US" sz="1200" b="0" i="0" kern="1200" dirty="0">
+                <a:solidFill>
+                  <a:schemeClr val="tx1"/>
+                </a:solidFill>
+                <a:effectLst/>
+                <a:latin typeface="+mn-lt"/>
+                <a:ea typeface="+mn-ea"/>
+                <a:cs typeface="+mn-cs"/>
+              </a:rPr>
+              <a:t>For motion prediction: with stationary agents included, test RMSE </a:t>
+            </a:r>
+            <a:r>
+              <a:rPr lang="en-US" sz="1200" b="1" i="0" kern="1200" dirty="0">
+                <a:solidFill>
+                  <a:schemeClr val="tx1"/>
+                </a:solidFill>
+                <a:effectLst/>
+                <a:latin typeface="+mn-lt"/>
+                <a:ea typeface="+mn-ea"/>
+                <a:cs typeface="+mn-cs"/>
+              </a:rPr>
+              <a:t>7.44 meters</a:t>
+            </a:r>
+            <a:r>
+              <a:rPr lang="en-US" sz="1200" b="0" i="0" kern="1200" dirty="0">
+                <a:solidFill>
+                  <a:schemeClr val="tx1"/>
+                </a:solidFill>
+                <a:effectLst/>
+                <a:latin typeface="+mn-lt"/>
+                <a:ea typeface="+mn-ea"/>
+                <a:cs typeface="+mn-cs"/>
+              </a:rPr>
+              <a:t>, R-squared </a:t>
+            </a:r>
+            <a:r>
+              <a:rPr lang="en-US" sz="1200" b="1" i="0" kern="1200" dirty="0">
+                <a:solidFill>
+                  <a:schemeClr val="tx1"/>
+                </a:solidFill>
+                <a:effectLst/>
+                <a:latin typeface="+mn-lt"/>
+                <a:ea typeface="+mn-ea"/>
+                <a:cs typeface="+mn-cs"/>
+              </a:rPr>
+              <a:t>0.880</a:t>
+            </a:r>
+            <a:r>
+              <a:rPr lang="en-US" sz="1200" b="0" i="0" kern="1200" dirty="0">
+                <a:solidFill>
+                  <a:schemeClr val="tx1"/>
+                </a:solidFill>
+                <a:effectLst/>
+                <a:latin typeface="+mn-lt"/>
+                <a:ea typeface="+mn-ea"/>
+                <a:cs typeface="+mn-cs"/>
+              </a:rPr>
+              <a:t>. Remove stationary agents and RMSE jumps to </a:t>
+            </a:r>
+            <a:r>
+              <a:rPr lang="en-US" sz="1200" b="1" i="0" kern="1200" dirty="0">
+                <a:solidFill>
+                  <a:schemeClr val="tx1"/>
+                </a:solidFill>
+                <a:effectLst/>
+                <a:latin typeface="+mn-lt"/>
+                <a:ea typeface="+mn-ea"/>
+                <a:cs typeface="+mn-cs"/>
+              </a:rPr>
+              <a:t>13.15 meters</a:t>
+            </a:r>
+            <a:r>
+              <a:rPr lang="en-US" sz="1200" b="0" i="0" kern="1200" dirty="0">
+                <a:solidFill>
+                  <a:schemeClr val="tx1"/>
+                </a:solidFill>
+                <a:effectLst/>
+                <a:latin typeface="+mn-lt"/>
+                <a:ea typeface="+mn-ea"/>
+                <a:cs typeface="+mn-cs"/>
+              </a:rPr>
+              <a:t>, R-squared drops to </a:t>
+            </a:r>
+            <a:r>
+              <a:rPr lang="en-US" sz="1200" b="1" i="0" kern="1200" dirty="0">
+                <a:solidFill>
+                  <a:schemeClr val="tx1"/>
+                </a:solidFill>
+                <a:effectLst/>
+                <a:latin typeface="+mn-lt"/>
+                <a:ea typeface="+mn-ea"/>
+                <a:cs typeface="+mn-cs"/>
+              </a:rPr>
+              <a:t>0.728</a:t>
+            </a:r>
+            <a:r>
+              <a:rPr lang="en-US" sz="1200" b="0" i="0" kern="1200" dirty="0">
+                <a:solidFill>
+                  <a:schemeClr val="tx1"/>
+                </a:solidFill>
+                <a:effectLst/>
+                <a:latin typeface="+mn-lt"/>
+                <a:ea typeface="+mn-ea"/>
+                <a:cs typeface="+mn-cs"/>
+              </a:rPr>
+              <a:t>.</a:t>
+            </a:r>
+          </a:p>
+          <a:p>
+            <a:r>
+              <a:rPr lang="en-US" sz="1200" b="0" i="0" kern="1200" dirty="0">
+                <a:solidFill>
+                  <a:schemeClr val="tx1"/>
+                </a:solidFill>
+                <a:effectLst/>
+                <a:latin typeface="+mn-lt"/>
+                <a:ea typeface="+mn-ea"/>
+                <a:cs typeface="+mn-cs"/>
+              </a:rPr>
+              <a:t>The standardized beta coefficients give us the feature importance for the regression — and the picture could not be clearer. </a:t>
+            </a:r>
+            <a:r>
+              <a:rPr lang="en-US" sz="1200" b="1" i="0" kern="1200" dirty="0">
+                <a:solidFill>
+                  <a:schemeClr val="tx1"/>
+                </a:solidFill>
+                <a:effectLst/>
+                <a:latin typeface="+mn-lt"/>
+                <a:ea typeface="+mn-ea"/>
+                <a:cs typeface="+mn-cs"/>
+              </a:rPr>
+              <a:t>Speed dominates with </a:t>
+            </a:r>
+            <a:r>
+              <a:rPr lang="el-GR" sz="1200" b="1" i="0" kern="1200" dirty="0">
+                <a:solidFill>
+                  <a:schemeClr val="tx1"/>
+                </a:solidFill>
+                <a:effectLst/>
+                <a:latin typeface="+mn-lt"/>
+                <a:ea typeface="+mn-ea"/>
+                <a:cs typeface="+mn-cs"/>
+              </a:rPr>
+              <a:t>β ≈ 0.95</a:t>
+            </a:r>
+            <a:r>
+              <a:rPr lang="el-GR" sz="1200" b="0" i="0" kern="1200" dirty="0">
+                <a:solidFill>
+                  <a:schemeClr val="tx1"/>
+                </a:solidFill>
+                <a:effectLst/>
+                <a:latin typeface="+mn-lt"/>
+                <a:ea typeface="+mn-ea"/>
+                <a:cs typeface="+mn-cs"/>
+              </a:rPr>
+              <a:t>, </a:t>
+            </a:r>
+            <a:r>
+              <a:rPr lang="en-US" sz="1200" b="0" i="0" kern="1200" dirty="0">
+                <a:solidFill>
+                  <a:schemeClr val="tx1"/>
+                </a:solidFill>
+                <a:effectLst/>
+                <a:latin typeface="+mn-lt"/>
+                <a:ea typeface="+mn-ea"/>
+                <a:cs typeface="+mn-cs"/>
+              </a:rPr>
+              <a:t>essentially the entire predictive signal. Acceleration and the velocity components contribute marginally. </a:t>
+            </a:r>
+            <a:r>
+              <a:rPr lang="en-US" sz="1200" b="0" i="0" kern="1200" dirty="0" err="1">
+                <a:solidFill>
+                  <a:schemeClr val="tx1"/>
+                </a:solidFill>
+                <a:effectLst/>
+                <a:latin typeface="+mn-lt"/>
+                <a:ea typeface="+mn-ea"/>
+                <a:cs typeface="+mn-cs"/>
+              </a:rPr>
+              <a:t>YawRate</a:t>
+            </a:r>
+            <a:r>
+              <a:rPr lang="en-US" sz="1200" b="0" i="0" kern="1200" dirty="0">
+                <a:solidFill>
+                  <a:schemeClr val="tx1"/>
+                </a:solidFill>
+                <a:effectLst/>
+                <a:latin typeface="+mn-lt"/>
+                <a:ea typeface="+mn-ea"/>
+                <a:cs typeface="+mn-cs"/>
+              </a:rPr>
+              <a:t> is nearly zero at </a:t>
+            </a:r>
+            <a:r>
+              <a:rPr lang="el-GR" sz="1200" b="0" i="0" kern="1200" dirty="0">
+                <a:solidFill>
+                  <a:schemeClr val="tx1"/>
+                </a:solidFill>
+                <a:effectLst/>
+                <a:latin typeface="+mn-lt"/>
+                <a:ea typeface="+mn-ea"/>
+                <a:cs typeface="+mn-cs"/>
+              </a:rPr>
+              <a:t>β ≈ -0.007 — </a:t>
+            </a:r>
+            <a:r>
+              <a:rPr lang="en-US" sz="1200" b="0" i="0" kern="1200" dirty="0">
+                <a:solidFill>
+                  <a:schemeClr val="tx1"/>
+                </a:solidFill>
+                <a:effectLst/>
+                <a:latin typeface="+mn-lt"/>
+                <a:ea typeface="+mn-ea"/>
+                <a:cs typeface="+mn-cs"/>
+              </a:rPr>
+              <a:t>it adds almost nothing to displacement prediction.</a:t>
+            </a:r>
+          </a:p>
+          <a:p>
+            <a:r>
+              <a:rPr lang="en-US" sz="1200" b="0" i="0" kern="1200" dirty="0">
+                <a:solidFill>
+                  <a:schemeClr val="tx1"/>
+                </a:solidFill>
+                <a:effectLst/>
+                <a:latin typeface="+mn-lt"/>
+                <a:ea typeface="+mn-ea"/>
+                <a:cs typeface="+mn-cs"/>
+              </a:rPr>
+              <a:t>That contrast is the key finding across both models: </a:t>
+            </a:r>
+            <a:r>
+              <a:rPr lang="en-US" sz="1200" b="1" i="0" kern="1200" dirty="0" err="1">
+                <a:solidFill>
+                  <a:schemeClr val="tx1"/>
+                </a:solidFill>
+                <a:effectLst/>
+                <a:latin typeface="+mn-lt"/>
+                <a:ea typeface="+mn-ea"/>
+                <a:cs typeface="+mn-cs"/>
+              </a:rPr>
+              <a:t>YawRate</a:t>
+            </a:r>
+            <a:r>
+              <a:rPr lang="en-US" sz="1200" b="1" i="0" kern="1200" dirty="0">
+                <a:solidFill>
+                  <a:schemeClr val="tx1"/>
+                </a:solidFill>
+                <a:effectLst/>
+                <a:latin typeface="+mn-lt"/>
+                <a:ea typeface="+mn-ea"/>
+                <a:cs typeface="+mn-cs"/>
+              </a:rPr>
+              <a:t> is the anomaly signal, Speed is the displacement signal.</a:t>
+            </a:r>
+            <a:r>
+              <a:rPr lang="en-US" sz="1200" b="0" i="0" kern="1200" dirty="0">
+                <a:solidFill>
+                  <a:schemeClr val="tx1"/>
+                </a:solidFill>
+                <a:effectLst/>
+                <a:latin typeface="+mn-lt"/>
+                <a:ea typeface="+mn-ea"/>
+                <a:cs typeface="+mn-cs"/>
+              </a:rPr>
+              <a:t> They're measuring completely different aspects of agent behavior, and the feature importance of each model confirms exactly that. Neither result is surprising given the physics — but having the data validate the physics is precisely the sanity check you want before trusting a pipeline on real-world safety data.</a:t>
+            </a:r>
+          </a:p>
+          <a:p>
             <a:endParaRPr lang="en-US" dirty="0"/>
           </a:p>
         </p:txBody>
@@ -1039,7 +2069,7 @@
           <a:p>
             <a:fld id="{B3F43537-14D9-9349-AA70-B1088F1298F1}" type="slidenum">
               <a:rPr lang="en-US" smtClean="0"/>
-              <a:t>11</a:t>
+              <a:t>12</a:t>
             </a:fld>
             <a:endParaRPr lang="en-US"/>
           </a:p>
@@ -1058,7 +2088,7 @@
 </p:notes>
 </file>
 
-<file path=ppt/notesSlides/notesSlide12.xml><?xml version="1.0" encoding="utf-8"?>
+<file path=ppt/notesSlides/notesSlide13.xml><?xml version="1.0" encoding="utf-8"?>
 <p:notes xmlns:a="http://schemas.openxmlformats.org/drawingml/2006/main" xmlns:r="http://schemas.openxmlformats.org/officeDocument/2006/relationships" xmlns:p="http://schemas.openxmlformats.org/presentationml/2006/main">
   <p:cSld>
     <p:spTree>
@@ -1120,7 +2150,270 @@
           <a:bodyPr/>
           <a:lstStyle/>
           <a:p>
-            <a:endParaRPr lang="en-US" dirty="0"/>
+            <a:r>
+              <a:rPr lang="en-US" b="1" dirty="0"/>
+              <a:t>RAMSES:</a:t>
+            </a:r>
+          </a:p>
+          <a:p>
+            <a:endParaRPr lang="en-US" b="1" dirty="0"/>
+          </a:p>
+          <a:p>
+            <a:r>
+              <a:rPr lang="en-US" sz="1200" b="0" i="0" kern="1200" dirty="0">
+                <a:solidFill>
+                  <a:schemeClr val="tx1"/>
+                </a:solidFill>
+                <a:effectLst/>
+                <a:latin typeface="+mn-lt"/>
+                <a:ea typeface="+mn-ea"/>
+                <a:cs typeface="+mn-cs"/>
+              </a:rPr>
+              <a:t>Before we get to the takeaways, I want to address what Justin flagged at the end of the results section — because it's the most important nuance in this project.</a:t>
+            </a:r>
+          </a:p>
+          <a:p>
+            <a:r>
+              <a:rPr lang="en-US" sz="1200" b="0" i="0" kern="1200" dirty="0">
+                <a:solidFill>
+                  <a:schemeClr val="tx1"/>
+                </a:solidFill>
+                <a:effectLst/>
+                <a:latin typeface="+mn-lt"/>
+                <a:ea typeface="+mn-ea"/>
+                <a:cs typeface="+mn-cs"/>
+              </a:rPr>
+              <a:t>The pipeline produced statistically validated results: Fisher's p = 0.0005, AUC of 0.887. The numbers look good. But when we actually inspect what was flagged, none of the top 20 anomalies were marked as safety-relevant by Waymo's own </a:t>
+            </a:r>
+            <a:r>
+              <a:rPr lang="en-US" sz="1200" b="0" i="0" kern="1200" dirty="0" err="1">
+                <a:solidFill>
+                  <a:schemeClr val="tx1"/>
+                </a:solidFill>
+                <a:effectLst/>
+                <a:latin typeface="+mn-lt"/>
+                <a:ea typeface="+mn-ea"/>
+                <a:cs typeface="+mn-cs"/>
+              </a:rPr>
+              <a:t>IsInteractive</a:t>
+            </a:r>
+            <a:r>
+              <a:rPr lang="en-US" sz="1200" b="0" i="0" kern="1200" dirty="0">
+                <a:solidFill>
+                  <a:schemeClr val="tx1"/>
+                </a:solidFill>
+                <a:effectLst/>
+                <a:latin typeface="+mn-lt"/>
+                <a:ea typeface="+mn-ea"/>
+                <a:cs typeface="+mn-cs"/>
+              </a:rPr>
+              <a:t> flag. That's not a failure of the model — it's a clarification of what the model is actually measuring. </a:t>
+            </a:r>
+            <a:r>
+              <a:rPr lang="en-US" sz="1200" b="1" i="0" kern="1200" dirty="0">
+                <a:solidFill>
+                  <a:schemeClr val="tx1"/>
+                </a:solidFill>
+                <a:effectLst/>
+                <a:latin typeface="+mn-lt"/>
+                <a:ea typeface="+mn-ea"/>
+                <a:cs typeface="+mn-cs"/>
+              </a:rPr>
+              <a:t>A kinematic outlier is not the same thing as a safety incident.</a:t>
+            </a:r>
+            <a:r>
+              <a:rPr lang="en-US" sz="1200" b="0" i="0" kern="1200" dirty="0">
+                <a:solidFill>
+                  <a:schemeClr val="tx1"/>
+                </a:solidFill>
+                <a:effectLst/>
+                <a:latin typeface="+mn-lt"/>
+                <a:ea typeface="+mn-ea"/>
+                <a:cs typeface="+mn-cs"/>
+              </a:rPr>
+              <a:t> </a:t>
+            </a:r>
+            <a:r>
+              <a:rPr lang="en-US" sz="1200" b="0" i="0" kern="1200" dirty="0" err="1">
+                <a:solidFill>
+                  <a:schemeClr val="tx1"/>
+                </a:solidFill>
+                <a:effectLst/>
+                <a:latin typeface="+mn-lt"/>
+                <a:ea typeface="+mn-ea"/>
+                <a:cs typeface="+mn-cs"/>
+              </a:rPr>
+              <a:t>IsInteractive</a:t>
+            </a:r>
+            <a:r>
+              <a:rPr lang="en-US" sz="1200" b="0" i="0" kern="1200" dirty="0">
+                <a:solidFill>
+                  <a:schemeClr val="tx1"/>
+                </a:solidFill>
+                <a:effectLst/>
+                <a:latin typeface="+mn-lt"/>
+                <a:ea typeface="+mn-ea"/>
+                <a:cs typeface="+mn-cs"/>
+              </a:rPr>
+              <a:t> reflects which agents are in close proximity to the AV during routine planning — adjacent lane vehicles, approaching intersections. Our flagged events — extreme speeds and sensor artifacts — exist outside that frame entirely.</a:t>
+            </a:r>
+          </a:p>
+          <a:p>
+            <a:r>
+              <a:rPr lang="en-US" sz="1200" b="0" i="0" kern="1200" dirty="0">
+                <a:solidFill>
+                  <a:schemeClr val="tx1"/>
+                </a:solidFill>
+                <a:effectLst/>
+                <a:latin typeface="+mn-lt"/>
+                <a:ea typeface="+mn-ea"/>
+                <a:cs typeface="+mn-cs"/>
+              </a:rPr>
+              <a:t>What this means in practice: the pipeline is more accurately described as a </a:t>
+            </a:r>
+            <a:r>
+              <a:rPr lang="en-US" sz="1200" b="1" i="0" kern="1200" dirty="0">
+                <a:solidFill>
+                  <a:schemeClr val="tx1"/>
+                </a:solidFill>
+                <a:effectLst/>
+                <a:latin typeface="+mn-lt"/>
+                <a:ea typeface="+mn-ea"/>
+                <a:cs typeface="+mn-cs"/>
+              </a:rPr>
+              <a:t>data quality and behavioral characterization tool</a:t>
+            </a:r>
+            <a:r>
+              <a:rPr lang="en-US" sz="1200" b="0" i="0" kern="1200" dirty="0">
+                <a:solidFill>
+                  <a:schemeClr val="tx1"/>
+                </a:solidFill>
+                <a:effectLst/>
+                <a:latin typeface="+mn-lt"/>
+                <a:ea typeface="+mn-ea"/>
+                <a:cs typeface="+mn-cs"/>
+              </a:rPr>
+              <a:t> than a safety-incident detector. It found genuine extremes in the data, and it surfaced a systematic measurement problem that would have gone unnoticed without it. Both are useful contributions — but they require domain knowledge to interpret correctly. The danger is treating model outputs as ground truth without that context.</a:t>
+            </a:r>
+          </a:p>
+          <a:p>
+            <a:r>
+              <a:rPr lang="en-US" sz="1200" b="0" i="0" kern="1200" dirty="0">
+                <a:solidFill>
+                  <a:schemeClr val="tx1"/>
+                </a:solidFill>
+                <a:effectLst/>
+                <a:latin typeface="+mn-lt"/>
+                <a:ea typeface="+mn-ea"/>
+                <a:cs typeface="+mn-cs"/>
+              </a:rPr>
+              <a:t>With that framing, two broader takeaways.</a:t>
+            </a:r>
+          </a:p>
+          <a:p>
+            <a:r>
+              <a:rPr lang="en-US" sz="1200" b="0" i="0" kern="1200" dirty="0">
+                <a:solidFill>
+                  <a:schemeClr val="tx1"/>
+                </a:solidFill>
+                <a:effectLst/>
+                <a:latin typeface="+mn-lt"/>
+                <a:ea typeface="+mn-ea"/>
+                <a:cs typeface="+mn-cs"/>
+              </a:rPr>
+              <a:t>First, </a:t>
+            </a:r>
+            <a:r>
+              <a:rPr lang="en-US" sz="1200" b="1" i="0" kern="1200" dirty="0">
+                <a:solidFill>
+                  <a:schemeClr val="tx1"/>
+                </a:solidFill>
+                <a:effectLst/>
+                <a:latin typeface="+mn-lt"/>
+                <a:ea typeface="+mn-ea"/>
+                <a:cs typeface="+mn-cs"/>
+              </a:rPr>
+              <a:t>unsupervised detection works and is statistically </a:t>
+            </a:r>
+            <a:r>
+              <a:rPr lang="en-US" sz="1200" b="1" i="0" kern="1200" dirty="0" err="1">
+                <a:solidFill>
+                  <a:schemeClr val="tx1"/>
+                </a:solidFill>
+                <a:effectLst/>
+                <a:latin typeface="+mn-lt"/>
+                <a:ea typeface="+mn-ea"/>
+                <a:cs typeface="+mn-cs"/>
+              </a:rPr>
+              <a:t>validatable</a:t>
+            </a:r>
+            <a:r>
+              <a:rPr lang="en-US" sz="1200" b="0" i="0" kern="1200" dirty="0">
+                <a:solidFill>
+                  <a:schemeClr val="tx1"/>
+                </a:solidFill>
+                <a:effectLst/>
+                <a:latin typeface="+mn-lt"/>
+                <a:ea typeface="+mn-ea"/>
+                <a:cs typeface="+mn-cs"/>
+              </a:rPr>
+              <a:t>. The Fisher test confirms structure in who gets flagged. Anomalies concentrate in pedestrians and cyclists — consistent with their more irregular urban kinematics. The Random Forest can characterize what anomalous agents look like at 0.887 AUC, even starting from noisy pseudo-labels.</a:t>
+            </a:r>
+          </a:p>
+          <a:p>
+            <a:r>
+              <a:rPr lang="en-US" sz="1200" b="0" i="0" kern="1200" dirty="0">
+                <a:solidFill>
+                  <a:schemeClr val="tx1"/>
+                </a:solidFill>
+                <a:effectLst/>
+                <a:latin typeface="+mn-lt"/>
+                <a:ea typeface="+mn-ea"/>
+                <a:cs typeface="+mn-cs"/>
+              </a:rPr>
+              <a:t>Second, </a:t>
+            </a:r>
+            <a:r>
+              <a:rPr lang="en-US" sz="1200" b="1" i="0" kern="1200" dirty="0">
+                <a:solidFill>
+                  <a:schemeClr val="tx1"/>
+                </a:solidFill>
+                <a:effectLst/>
+                <a:latin typeface="+mn-lt"/>
+                <a:ea typeface="+mn-ea"/>
+                <a:cs typeface="+mn-cs"/>
+              </a:rPr>
+              <a:t>dataset composition dominates metrics</a:t>
+            </a:r>
+            <a:r>
+              <a:rPr lang="en-US" sz="1200" b="0" i="0" kern="1200" dirty="0">
+                <a:solidFill>
+                  <a:schemeClr val="tx1"/>
+                </a:solidFill>
+                <a:effectLst/>
+                <a:latin typeface="+mn-lt"/>
+                <a:ea typeface="+mn-ea"/>
+                <a:cs typeface="+mn-cs"/>
+              </a:rPr>
+              <a:t>. The 15-point R-squared drop when removing stationary agents is not a model failure — it's a dataset artifact. Any evaluation reported on a mixed moving-and-stationary population is inflated. The 0.728 on moving agents is the honest number for dynamic AV deployment.</a:t>
+            </a:r>
+          </a:p>
+          <a:p>
+            <a:r>
+              <a:rPr lang="en-US" sz="1200" b="0" i="0" kern="1200" dirty="0">
+                <a:solidFill>
+                  <a:schemeClr val="tx1"/>
+                </a:solidFill>
+                <a:effectLst/>
+                <a:latin typeface="+mn-lt"/>
+                <a:ea typeface="+mn-ea"/>
+                <a:cs typeface="+mn-cs"/>
+              </a:rPr>
+              <a:t>On limitations: pseudo-labels from the Isolation Forest are not verified ground truth — the test specificity of 0.667 reflects that noise. We work from a single snapshot frame per agent, ignoring the full 20-second trajectory. Our regression is linear; pedestrian and cyclist motion may be nonlinear. And we only analyzed 300 scenarios — the genuine high-speed anomaly tail would be richer with the full dataset.</a:t>
+            </a:r>
+          </a:p>
+          <a:p>
+            <a:endParaRPr lang="en-US" b="1" dirty="0"/>
           </a:p>
         </p:txBody>
       </p:sp>
@@ -1147,7 +2440,7 @@
           <a:p>
             <a:fld id="{B3F43537-14D9-9349-AA70-B1088F1298F1}" type="slidenum">
               <a:rPr lang="en-US" smtClean="0"/>
-              <a:t>12</a:t>
+              <a:t>13</a:t>
             </a:fld>
             <a:endParaRPr lang="en-US"/>
           </a:p>
@@ -1166,7 +2459,7 @@
 </p:notes>
 </file>
 
-<file path=ppt/notesSlides/notesSlide13.xml><?xml version="1.0" encoding="utf-8"?>
+<file path=ppt/notesSlides/notesSlide14.xml><?xml version="1.0" encoding="utf-8"?>
 <p:notes xmlns:a="http://schemas.openxmlformats.org/drawingml/2006/main" xmlns:r="http://schemas.openxmlformats.org/officeDocument/2006/relationships" xmlns:p="http://schemas.openxmlformats.org/presentationml/2006/main">
   <p:cSld>
     <p:spTree>
@@ -1228,7 +2521,227 @@
           <a:bodyPr/>
           <a:lstStyle/>
           <a:p>
-            <a:endParaRPr lang="en-US" dirty="0"/>
+            <a:r>
+              <a:rPr lang="en-US" b="1" dirty="0"/>
+              <a:t>PAVEL:</a:t>
+            </a:r>
+            <a:br>
+              <a:rPr lang="en-US" b="1"/>
+            </a:br>
+            <a:endParaRPr lang="en-US" b="1" dirty="0"/>
+          </a:p>
+          <a:p>
+            <a:r>
+              <a:rPr lang="en-US" sz="1200" b="0" i="0" kern="1200" dirty="0">
+                <a:solidFill>
+                  <a:schemeClr val="tx1"/>
+                </a:solidFill>
+                <a:effectLst/>
+                <a:latin typeface="+mn-lt"/>
+                <a:ea typeface="+mn-ea"/>
+                <a:cs typeface="+mn-cs"/>
+              </a:rPr>
+              <a:t>To summarize: we built a two-stage statistical pipeline for autonomous driving data.</a:t>
+            </a:r>
+          </a:p>
+          <a:p>
+            <a:r>
+              <a:rPr lang="en-US" sz="1200" b="0" i="0" kern="1200" dirty="0">
+                <a:solidFill>
+                  <a:schemeClr val="tx1"/>
+                </a:solidFill>
+                <a:effectLst/>
+                <a:latin typeface="+mn-lt"/>
+                <a:ea typeface="+mn-ea"/>
+                <a:cs typeface="+mn-cs"/>
+              </a:rPr>
+              <a:t>Stage one: Isolation Forest detects kinematic anomalies unsupervised. Fisher's Exact Test validates them at p &lt; 0.001. A Random Forest characterizes them at 0.887 AUC. And manual inspection reveals both genuine extreme events and a systematic sensor artifact that only became visible through the anomaly detection step.</a:t>
+            </a:r>
+          </a:p>
+          <a:p>
+            <a:endParaRPr lang="en-US" sz="1200" b="0" i="0" kern="1200" dirty="0">
+              <a:solidFill>
+                <a:schemeClr val="tx1"/>
+              </a:solidFill>
+              <a:effectLst/>
+              <a:latin typeface="+mn-lt"/>
+              <a:ea typeface="+mn-ea"/>
+              <a:cs typeface="+mn-cs"/>
+            </a:endParaRPr>
+          </a:p>
+          <a:p>
+            <a:r>
+              <a:rPr lang="en-US" sz="1200" b="0" i="0" kern="1200" dirty="0">
+                <a:solidFill>
+                  <a:schemeClr val="tx1"/>
+                </a:solidFill>
+                <a:effectLst/>
+                <a:latin typeface="+mn-lt"/>
+                <a:ea typeface="+mn-ea"/>
+                <a:cs typeface="+mn-cs"/>
+              </a:rPr>
+              <a:t>Stage two: Linear regression predicts 5-second displacement with R-squared of 0.88 — a strong classical baseline.</a:t>
+            </a:r>
+          </a:p>
+          <a:p>
+            <a:r>
+              <a:rPr lang="en-US" sz="1200" b="0" i="0" kern="1200" dirty="0">
+                <a:solidFill>
+                  <a:schemeClr val="tx1"/>
+                </a:solidFill>
+                <a:effectLst/>
+                <a:latin typeface="+mn-lt"/>
+                <a:ea typeface="+mn-ea"/>
+                <a:cs typeface="+mn-cs"/>
+              </a:rPr>
+              <a:t>The result: </a:t>
+            </a:r>
+            <a:r>
+              <a:rPr lang="en-US" sz="1200" b="1" i="0" kern="1200" dirty="0">
+                <a:solidFill>
+                  <a:schemeClr val="tx1"/>
+                </a:solidFill>
+                <a:effectLst/>
+                <a:latin typeface="+mn-lt"/>
+                <a:ea typeface="+mn-ea"/>
+                <a:cs typeface="+mn-cs"/>
+              </a:rPr>
+              <a:t>interpretable, reproducible statistical methods can deliver meaningful safety-relevant insights from large-scale real-world AV data</a:t>
+            </a:r>
+            <a:r>
+              <a:rPr lang="en-US" sz="1200" b="0" i="0" kern="1200" dirty="0">
+                <a:solidFill>
+                  <a:schemeClr val="tx1"/>
+                </a:solidFill>
+                <a:effectLst/>
+                <a:latin typeface="+mn-lt"/>
+                <a:ea typeface="+mn-ea"/>
+                <a:cs typeface="+mn-cs"/>
+              </a:rPr>
+              <a:t>, without any deep learning — and with the important caveat that interpreting those insights requires understanding what each model is and isn't measuring.</a:t>
+            </a:r>
+          </a:p>
+          <a:p>
+            <a:endParaRPr lang="en-US" sz="1200" b="0" i="0" kern="1200" dirty="0">
+              <a:solidFill>
+                <a:schemeClr val="tx1"/>
+              </a:solidFill>
+              <a:effectLst/>
+              <a:latin typeface="+mn-lt"/>
+              <a:ea typeface="+mn-ea"/>
+              <a:cs typeface="+mn-cs"/>
+            </a:endParaRPr>
+          </a:p>
+          <a:p>
+            <a:r>
+              <a:rPr lang="en-US" sz="1200" b="0" i="0" kern="1200" dirty="0">
+                <a:solidFill>
+                  <a:schemeClr val="tx1"/>
+                </a:solidFill>
+                <a:effectLst/>
+                <a:latin typeface="+mn-lt"/>
+                <a:ea typeface="+mn-ea"/>
+                <a:cs typeface="+mn-cs"/>
+              </a:rPr>
+              <a:t>For future work, three extensions:</a:t>
+            </a:r>
+          </a:p>
+          <a:p>
+            <a:r>
+              <a:rPr lang="en-US" sz="1200" b="0" i="0" kern="1200" dirty="0">
+                <a:solidFill>
+                  <a:schemeClr val="tx1"/>
+                </a:solidFill>
+                <a:effectLst/>
+                <a:latin typeface="+mn-lt"/>
+                <a:ea typeface="+mn-ea"/>
+                <a:cs typeface="+mn-cs"/>
+              </a:rPr>
+              <a:t>Filter yaw rate at |yaw| &lt; 10 rad/s before anomaly detection, to remove the sensor artifact and surface more meaningful behavioral anomalies.</a:t>
+            </a:r>
+          </a:p>
+          <a:p>
+            <a:r>
+              <a:rPr lang="en-US" sz="1200" b="0" i="0" kern="1200" dirty="0">
+                <a:solidFill>
+                  <a:schemeClr val="tx1"/>
+                </a:solidFill>
+                <a:effectLst/>
+                <a:latin typeface="+mn-lt"/>
+                <a:ea typeface="+mn-ea"/>
+                <a:cs typeface="+mn-cs"/>
+              </a:rPr>
+              <a:t>Validate flagged agents against Waymo's </a:t>
+            </a:r>
+            <a:r>
+              <a:rPr lang="en-US" sz="1200" b="0" i="0" kern="1200" dirty="0" err="1">
+                <a:solidFill>
+                  <a:schemeClr val="tx1"/>
+                </a:solidFill>
+                <a:effectLst/>
+                <a:latin typeface="+mn-lt"/>
+                <a:ea typeface="+mn-ea"/>
+                <a:cs typeface="+mn-cs"/>
+              </a:rPr>
+              <a:t>IsInteractive</a:t>
+            </a:r>
+            <a:r>
+              <a:rPr lang="en-US" sz="1200" b="0" i="0" kern="1200" dirty="0">
+                <a:solidFill>
+                  <a:schemeClr val="tx1"/>
+                </a:solidFill>
+                <a:effectLst/>
+                <a:latin typeface="+mn-lt"/>
+                <a:ea typeface="+mn-ea"/>
+                <a:cs typeface="+mn-cs"/>
+              </a:rPr>
+              <a:t> flag as a soft reference label, with appropriate caveats about what that flag actually represents.</a:t>
+            </a:r>
+          </a:p>
+          <a:p>
+            <a:r>
+              <a:rPr lang="en-US" sz="1200" b="0" i="0" kern="1200" dirty="0">
+                <a:solidFill>
+                  <a:schemeClr val="tx1"/>
+                </a:solidFill>
+                <a:effectLst/>
+                <a:latin typeface="+mn-lt"/>
+                <a:ea typeface="+mn-ea"/>
+                <a:cs typeface="+mn-cs"/>
+              </a:rPr>
+              <a:t>Apply the pipeline to the full dataset — not just 300 scenarios — to get a richer tail of genuine high-speed events.</a:t>
+            </a:r>
+          </a:p>
+          <a:p>
+            <a:r>
+              <a:rPr lang="en-US" sz="1200" b="0" i="0" kern="1200" dirty="0">
+                <a:solidFill>
+                  <a:schemeClr val="tx1"/>
+                </a:solidFill>
+                <a:effectLst/>
+                <a:latin typeface="+mn-lt"/>
+                <a:ea typeface="+mn-ea"/>
+                <a:cs typeface="+mn-cs"/>
+              </a:rPr>
+              <a:t>Our full code is open-source on GitHub.</a:t>
+            </a:r>
+          </a:p>
+          <a:p>
+            <a:r>
+              <a:rPr lang="en-US" sz="1200" b="0" i="0" kern="1200" dirty="0">
+                <a:solidFill>
+                  <a:schemeClr val="tx1"/>
+                </a:solidFill>
+                <a:effectLst/>
+                <a:latin typeface="+mn-lt"/>
+                <a:ea typeface="+mn-ea"/>
+                <a:cs typeface="+mn-cs"/>
+              </a:rPr>
+              <a:t>Thank you — we're happy to take questions.</a:t>
+            </a:r>
+          </a:p>
+          <a:p>
+            <a:endParaRPr lang="en-US" b="1" dirty="0"/>
           </a:p>
         </p:txBody>
       </p:sp>
@@ -1255,7 +2768,7 @@
           <a:p>
             <a:fld id="{B3F43537-14D9-9349-AA70-B1088F1298F1}" type="slidenum">
               <a:rPr lang="en-US" smtClean="0"/>
-              <a:t>13</a:t>
+              <a:t>14</a:t>
             </a:fld>
             <a:endParaRPr lang="en-US"/>
           </a:p>
@@ -1274,7 +2787,7 @@
 </p:notes>
 </file>
 
-<file path=ppt/notesSlides/notesSlide14.xml><?xml version="1.0" encoding="utf-8"?>
+<file path=ppt/notesSlides/notesSlide15.xml><?xml version="1.0" encoding="utf-8"?>
 <p:notes xmlns:a="http://schemas.openxmlformats.org/drawingml/2006/main" xmlns:r="http://schemas.openxmlformats.org/officeDocument/2006/relationships" xmlns:p="http://schemas.openxmlformats.org/presentationml/2006/main">
   <p:cSld>
     <p:spTree>
@@ -1336,6 +2849,263 @@
           <a:bodyPr/>
           <a:lstStyle/>
           <a:p>
+            <a:r>
+              <a:rPr lang="en-US" sz="1200" b="1" i="0" kern="1200" dirty="0">
+                <a:solidFill>
+                  <a:schemeClr val="tx1"/>
+                </a:solidFill>
+                <a:effectLst/>
+                <a:latin typeface="+mn-lt"/>
+                <a:ea typeface="+mn-ea"/>
+                <a:cs typeface="+mn-cs"/>
+              </a:rPr>
+              <a:t>Q: Why Isolation Forest and not One-Class SVM?</a:t>
+            </a:r>
+            <a:endParaRPr lang="en-US" sz="1200" b="0" i="0" kern="1200" dirty="0">
+              <a:solidFill>
+                <a:schemeClr val="tx1"/>
+              </a:solidFill>
+              <a:effectLst/>
+              <a:latin typeface="+mn-lt"/>
+              <a:ea typeface="+mn-ea"/>
+              <a:cs typeface="+mn-cs"/>
+            </a:endParaRPr>
+          </a:p>
+          <a:p>
+            <a:r>
+              <a:rPr lang="en-US" sz="1200" b="0" i="0" kern="1200" dirty="0">
+                <a:solidFill>
+                  <a:schemeClr val="tx1"/>
+                </a:solidFill>
+                <a:effectLst/>
+                <a:latin typeface="+mn-lt"/>
+                <a:ea typeface="+mn-ea"/>
+                <a:cs typeface="+mn-cs"/>
+              </a:rPr>
+              <a:t>Isolation Forest scales better to our dataset size (~4,500 agents) and requires no kernel tuning. One-Class SVM is sensitive to the nu hyperparameter and the kernel choice; IF is more robust out of the box and interpretable via feature importance.</a:t>
+            </a:r>
+          </a:p>
+          <a:p>
+            <a:r>
+              <a:rPr lang="en-US" sz="1200" b="1" i="0" kern="1200" dirty="0">
+                <a:solidFill>
+                  <a:schemeClr val="tx1"/>
+                </a:solidFill>
+                <a:effectLst/>
+                <a:latin typeface="+mn-lt"/>
+                <a:ea typeface="+mn-ea"/>
+                <a:cs typeface="+mn-cs"/>
+              </a:rPr>
+              <a:t>Q: The 99th percentile threshold — isn't that arbitrary?</a:t>
+            </a:r>
+            <a:endParaRPr lang="en-US" sz="1200" b="0" i="0" kern="1200" dirty="0">
+              <a:solidFill>
+                <a:schemeClr val="tx1"/>
+              </a:solidFill>
+              <a:effectLst/>
+              <a:latin typeface="+mn-lt"/>
+              <a:ea typeface="+mn-ea"/>
+              <a:cs typeface="+mn-cs"/>
+            </a:endParaRPr>
+          </a:p>
+          <a:p>
+            <a:r>
+              <a:rPr lang="en-US" sz="1200" b="0" i="0" kern="1200" dirty="0">
+                <a:solidFill>
+                  <a:schemeClr val="tx1"/>
+                </a:solidFill>
+                <a:effectLst/>
+                <a:latin typeface="+mn-lt"/>
+                <a:ea typeface="+mn-ea"/>
+                <a:cs typeface="+mn-cs"/>
+              </a:rPr>
+              <a:t>It's a design choice, yes. We chose 1% to ensure only the most extreme kinematic outliers are flagged. The Fisher test validates that this threshold produces statistically meaningful, non-random groups. A lower threshold would give more recall at the cost of precision.</a:t>
+            </a:r>
+          </a:p>
+          <a:p>
+            <a:r>
+              <a:rPr lang="en-US" sz="1200" b="1" i="0" kern="1200" dirty="0">
+                <a:solidFill>
+                  <a:schemeClr val="tx1"/>
+                </a:solidFill>
+                <a:effectLst/>
+                <a:latin typeface="+mn-lt"/>
+                <a:ea typeface="+mn-ea"/>
+                <a:cs typeface="+mn-cs"/>
+              </a:rPr>
+              <a:t>Q: None of the top 20 were </a:t>
+            </a:r>
+            <a:r>
+              <a:rPr lang="en-US" sz="1200" b="1" i="0" kern="1200" dirty="0" err="1">
+                <a:solidFill>
+                  <a:schemeClr val="tx1"/>
+                </a:solidFill>
+                <a:effectLst/>
+                <a:latin typeface="+mn-lt"/>
+                <a:ea typeface="+mn-ea"/>
+                <a:cs typeface="+mn-cs"/>
+              </a:rPr>
+              <a:t>IsInteractive</a:t>
+            </a:r>
+            <a:r>
+              <a:rPr lang="en-US" sz="1200" b="1" i="0" kern="1200" dirty="0">
+                <a:solidFill>
+                  <a:schemeClr val="tx1"/>
+                </a:solidFill>
+                <a:effectLst/>
+                <a:latin typeface="+mn-lt"/>
+                <a:ea typeface="+mn-ea"/>
+                <a:cs typeface="+mn-cs"/>
+              </a:rPr>
+              <a:t> — does that mean the results are useless?</a:t>
+            </a:r>
+            <a:endParaRPr lang="en-US" sz="1200" b="0" i="0" kern="1200" dirty="0">
+              <a:solidFill>
+                <a:schemeClr val="tx1"/>
+              </a:solidFill>
+              <a:effectLst/>
+              <a:latin typeface="+mn-lt"/>
+              <a:ea typeface="+mn-ea"/>
+              <a:cs typeface="+mn-cs"/>
+            </a:endParaRPr>
+          </a:p>
+          <a:p>
+            <a:r>
+              <a:rPr lang="en-US" sz="1200" b="0" i="0" kern="1200" dirty="0">
+                <a:solidFill>
+                  <a:schemeClr val="tx1"/>
+                </a:solidFill>
+                <a:effectLst/>
+                <a:latin typeface="+mn-lt"/>
+                <a:ea typeface="+mn-ea"/>
+                <a:cs typeface="+mn-cs"/>
+              </a:rPr>
+              <a:t>No — it means we're measuring something different from what </a:t>
+            </a:r>
+            <a:r>
+              <a:rPr lang="en-US" sz="1200" b="0" i="0" kern="1200" dirty="0" err="1">
+                <a:solidFill>
+                  <a:schemeClr val="tx1"/>
+                </a:solidFill>
+                <a:effectLst/>
+                <a:latin typeface="+mn-lt"/>
+                <a:ea typeface="+mn-ea"/>
+                <a:cs typeface="+mn-cs"/>
+              </a:rPr>
+              <a:t>IsInteractive</a:t>
+            </a:r>
+            <a:r>
+              <a:rPr lang="en-US" sz="1200" b="0" i="0" kern="1200" dirty="0">
+                <a:solidFill>
+                  <a:schemeClr val="tx1"/>
+                </a:solidFill>
+                <a:effectLst/>
+                <a:latin typeface="+mn-lt"/>
+                <a:ea typeface="+mn-ea"/>
+                <a:cs typeface="+mn-cs"/>
+              </a:rPr>
+              <a:t> tracks. </a:t>
+            </a:r>
+            <a:r>
+              <a:rPr lang="en-US" sz="1200" b="0" i="0" kern="1200" dirty="0" err="1">
+                <a:solidFill>
+                  <a:schemeClr val="tx1"/>
+                </a:solidFill>
+                <a:effectLst/>
+                <a:latin typeface="+mn-lt"/>
+                <a:ea typeface="+mn-ea"/>
+                <a:cs typeface="+mn-cs"/>
+              </a:rPr>
+              <a:t>IsInteractive</a:t>
+            </a:r>
+            <a:r>
+              <a:rPr lang="en-US" sz="1200" b="0" i="0" kern="1200" dirty="0">
+                <a:solidFill>
+                  <a:schemeClr val="tx1"/>
+                </a:solidFill>
+                <a:effectLst/>
+                <a:latin typeface="+mn-lt"/>
+                <a:ea typeface="+mn-ea"/>
+                <a:cs typeface="+mn-cs"/>
+              </a:rPr>
+              <a:t> is a proximity-based planning flag for routine AV decisions. Our pipeline finds kinematic extremes that fall outside normal operating ranges and surfaces data quality issues. Those are complementary, not competing, signals.</a:t>
+            </a:r>
+          </a:p>
+          <a:p>
+            <a:r>
+              <a:rPr lang="en-US" sz="1200" b="1" i="0" kern="1200" dirty="0">
+                <a:solidFill>
+                  <a:schemeClr val="tx1"/>
+                </a:solidFill>
+                <a:effectLst/>
+                <a:latin typeface="+mn-lt"/>
+                <a:ea typeface="+mn-ea"/>
+                <a:cs typeface="+mn-cs"/>
+              </a:rPr>
+              <a:t>Q: Why linear regression and not something more powerful for prediction?</a:t>
+            </a:r>
+            <a:endParaRPr lang="en-US" sz="1200" b="0" i="0" kern="1200" dirty="0">
+              <a:solidFill>
+                <a:schemeClr val="tx1"/>
+              </a:solidFill>
+              <a:effectLst/>
+              <a:latin typeface="+mn-lt"/>
+              <a:ea typeface="+mn-ea"/>
+              <a:cs typeface="+mn-cs"/>
+            </a:endParaRPr>
+          </a:p>
+          <a:p>
+            <a:r>
+              <a:rPr lang="en-US" sz="1200" b="0" i="0" kern="1200" dirty="0">
+                <a:solidFill>
+                  <a:schemeClr val="tx1"/>
+                </a:solidFill>
+                <a:effectLst/>
+                <a:latin typeface="+mn-lt"/>
+                <a:ea typeface="+mn-ea"/>
+                <a:cs typeface="+mn-cs"/>
+              </a:rPr>
+              <a:t>Intentionally. We wanted to establish a classical baseline first. An R-squared of 0.88 from a linear model means there's strong linear signal in the kinematic features. Neural approaches should be benchmarked against this, not introduced without first knowing what simpler methods can already achieve.</a:t>
+            </a:r>
+          </a:p>
+          <a:p>
+            <a:r>
+              <a:rPr lang="en-US" sz="1200" b="1" i="0" kern="1200" dirty="0">
+                <a:solidFill>
+                  <a:schemeClr val="tx1"/>
+                </a:solidFill>
+                <a:effectLst/>
+                <a:latin typeface="+mn-lt"/>
+                <a:ea typeface="+mn-ea"/>
+                <a:cs typeface="+mn-cs"/>
+              </a:rPr>
+              <a:t>Q: How generalizable are these results beyond Waymo?</a:t>
+            </a:r>
+            <a:endParaRPr lang="en-US" sz="1200" b="0" i="0" kern="1200" dirty="0">
+              <a:solidFill>
+                <a:schemeClr val="tx1"/>
+              </a:solidFill>
+              <a:effectLst/>
+              <a:latin typeface="+mn-lt"/>
+              <a:ea typeface="+mn-ea"/>
+              <a:cs typeface="+mn-cs"/>
+            </a:endParaRPr>
+          </a:p>
+          <a:p>
+            <a:r>
+              <a:rPr lang="en-US" sz="1200" b="0" i="0" kern="1200" dirty="0">
+                <a:solidFill>
+                  <a:schemeClr val="tx1"/>
+                </a:solidFill>
+                <a:effectLst/>
+                <a:latin typeface="+mn-lt"/>
+                <a:ea typeface="+mn-ea"/>
+                <a:cs typeface="+mn-cs"/>
+              </a:rPr>
+              <a:t>The kinematic features we use — speed, acceleration, yaw rate — are universal to any tracked agent. The pipeline is dataset-agnostic. The specific thresholds and model weights would need retraining, but the methodology transfers directly. The sensor artifact finding (±31 rad/s at near-zero speed) may also appear in other datasets using the same heading derivative computation.</a:t>
+            </a:r>
+          </a:p>
+          <a:p>
             <a:endParaRPr lang="en-US" dirty="0"/>
           </a:p>
         </p:txBody>
@@ -1363,7 +3133,7 @@
           <a:p>
             <a:fld id="{B3F43537-14D9-9349-AA70-B1088F1298F1}" type="slidenum">
               <a:rPr lang="en-US" smtClean="0"/>
-              <a:t>14</a:t>
+              <a:t>15</a:t>
             </a:fld>
             <a:endParaRPr lang="en-US"/>
           </a:p>
@@ -1545,6 +3315,17 @@
             </a:r>
           </a:p>
           <a:p>
+            <a:endParaRPr lang="en-US" sz="1200" b="0" i="0" kern="1200" dirty="0">
+              <a:solidFill>
+                <a:schemeClr val="tx1"/>
+              </a:solidFill>
+              <a:effectLst/>
+              <a:latin typeface="+mn-lt"/>
+              <a:ea typeface="+mn-ea"/>
+              <a:cs typeface="+mn-cs"/>
+            </a:endParaRPr>
+          </a:p>
+          <a:p>
             <a:r>
               <a:rPr lang="en-US" sz="1200" b="0" i="0" kern="1200" dirty="0">
                 <a:solidFill>
@@ -2733,77 +4514,199 @@
           <a:lstStyle/>
           <a:p>
             <a:r>
-              <a:rPr lang="en-US" sz="1200" dirty="0">
+              <a:rPr lang="en-US" sz="1200" b="1" dirty="0">
                 <a:latin typeface="GT Walsheim Trial Th" pitchFamily="2" charset="77"/>
               </a:rPr>
-              <a:t>Most driving is routine: lane-following, steady speeds, predictable stops</a:t>
-            </a:r>
-          </a:p>
-          <a:p>
-            <a:endParaRPr lang="en-US" sz="1200" dirty="0">
-              <a:latin typeface="GT Walsheim Trial Th" pitchFamily="2" charset="77"/>
+              <a:t>JUSTIN:</a:t>
+            </a:r>
+            <a:br>
+              <a:rPr lang="en-US" sz="1200" b="1" dirty="0">
+                <a:latin typeface="GT Walsheim Trial Th" pitchFamily="2" charset="77"/>
+              </a:rPr>
+            </a:br>
+            <a:br>
+              <a:rPr lang="en-US" sz="1200" b="1" dirty="0">
+                <a:latin typeface="GT Walsheim Trial Th" pitchFamily="2" charset="77"/>
+              </a:rPr>
+            </a:br>
+            <a:r>
+              <a:rPr lang="en-US" sz="1200" b="0" i="0" kern="1200" dirty="0">
+                <a:solidFill>
+                  <a:schemeClr val="tx1"/>
+                </a:solidFill>
+                <a:effectLst/>
+                <a:latin typeface="+mn-lt"/>
+                <a:ea typeface="+mn-ea"/>
+                <a:cs typeface="+mn-cs"/>
+              </a:rPr>
+              <a:t>Before diving into the models, let me give you a sense of what this data actually looks like.</a:t>
+            </a:r>
+          </a:p>
+          <a:p>
+            <a:r>
+              <a:rPr lang="en-US" sz="1200" b="0" i="0" kern="1200" dirty="0">
+                <a:solidFill>
+                  <a:schemeClr val="tx1"/>
+                </a:solidFill>
+                <a:effectLst/>
+                <a:latin typeface="+mn-lt"/>
+                <a:ea typeface="+mn-ea"/>
+                <a:cs typeface="+mn-cs"/>
+              </a:rPr>
+              <a:t>We extracted from </a:t>
+            </a:r>
+            <a:r>
+              <a:rPr lang="en-US" sz="1200" b="1" i="0" kern="1200" dirty="0">
+                <a:solidFill>
+                  <a:schemeClr val="tx1"/>
+                </a:solidFill>
+                <a:effectLst/>
+                <a:latin typeface="+mn-lt"/>
+                <a:ea typeface="+mn-ea"/>
+                <a:cs typeface="+mn-cs"/>
+              </a:rPr>
+              <a:t>300 scenarios</a:t>
+            </a:r>
+            <a:r>
+              <a:rPr lang="en-US" sz="1200" b="0" i="0" kern="1200" dirty="0">
+                <a:solidFill>
+                  <a:schemeClr val="tx1"/>
+                </a:solidFill>
+                <a:effectLst/>
+                <a:latin typeface="+mn-lt"/>
+                <a:ea typeface="+mn-ea"/>
+                <a:cs typeface="+mn-cs"/>
+              </a:rPr>
+              <a:t> from the validation split of the Waymo Open Motion Dataset — specifically shard 00000-of-00150. That gives us </a:t>
+            </a:r>
+            <a:r>
+              <a:rPr lang="en-US" sz="1200" b="1" i="0" kern="1200" dirty="0">
+                <a:solidFill>
+                  <a:schemeClr val="tx1"/>
+                </a:solidFill>
+                <a:effectLst/>
+                <a:latin typeface="+mn-lt"/>
+                <a:ea typeface="+mn-ea"/>
+                <a:cs typeface="+mn-cs"/>
+              </a:rPr>
+              <a:t>18,311 raw agent observations</a:t>
+            </a:r>
+            <a:r>
+              <a:rPr lang="en-US" sz="1200" b="0" i="0" kern="1200" dirty="0">
+                <a:solidFill>
+                  <a:schemeClr val="tx1"/>
+                </a:solidFill>
+                <a:effectLst/>
+                <a:latin typeface="+mn-lt"/>
+                <a:ea typeface="+mn-ea"/>
+                <a:cs typeface="+mn-cs"/>
+              </a:rPr>
+              <a:t> across vehicles, pedestrians, cyclists, and the Waymo self-driving car itself, which we exclude from all analysis.</a:t>
+            </a:r>
+          </a:p>
+          <a:p>
+            <a:r>
+              <a:rPr lang="en-US" sz="1200" b="0" i="0" kern="1200" dirty="0">
+                <a:solidFill>
+                  <a:schemeClr val="tx1"/>
+                </a:solidFill>
+                <a:effectLst/>
+                <a:latin typeface="+mn-lt"/>
+                <a:ea typeface="+mn-ea"/>
+                <a:cs typeface="+mn-cs"/>
+              </a:rPr>
+              <a:t>In terms of composition: vehicles make up the clear majority of the dataset, pedestrians account for roughly 25%, and cyclists around 5%. This imbalance matters because it affects both the anomaly detection and how we interpret per-class statistics.</a:t>
+            </a:r>
+          </a:p>
+          <a:p>
+            <a:endParaRPr lang="en-US" sz="1200" b="0" i="0" kern="1200" dirty="0">
+              <a:solidFill>
+                <a:schemeClr val="tx1"/>
+              </a:solidFill>
+              <a:effectLst/>
+              <a:latin typeface="+mn-lt"/>
+              <a:ea typeface="+mn-ea"/>
+              <a:cs typeface="+mn-cs"/>
             </a:endParaRPr>
           </a:p>
           <a:p>
             <a:r>
-              <a:rPr lang="en-US" sz="1200" dirty="0">
-                <a:latin typeface="GT Walsheim Trial Th" pitchFamily="2" charset="77"/>
-              </a:rPr>
-              <a:t>Safety-critical events live in the long tail — rare but dangerous:</a:t>
-            </a:r>
-          </a:p>
-          <a:p>
-            <a:endParaRPr lang="en-US" sz="1200" dirty="0">
-              <a:latin typeface="GT Walsheim Trial Th" pitchFamily="2" charset="77"/>
-            </a:endParaRPr>
-          </a:p>
-          <a:p>
-            <a:r>
-              <a:rPr lang="en-US" sz="1200" dirty="0">
-                <a:latin typeface="GT Walsheim Trial Th" pitchFamily="2" charset="77"/>
-              </a:rPr>
-              <a:t>	Sudden braking / aggressive acceleration</a:t>
-            </a:r>
-          </a:p>
-          <a:p>
-            <a:r>
-              <a:rPr lang="en-US" sz="1200" dirty="0">
-                <a:latin typeface="GT Walsheim Trial Th" pitchFamily="2" charset="77"/>
-              </a:rPr>
-              <a:t>	Pedestrians jaywalking</a:t>
-            </a:r>
-          </a:p>
-          <a:p>
-            <a:r>
-              <a:rPr lang="en-US" sz="1200" dirty="0">
-                <a:latin typeface="GT Walsheim Trial Th" pitchFamily="2" charset="77"/>
-              </a:rPr>
-              <a:t>	Near-miss interactions</a:t>
-            </a:r>
-          </a:p>
-          <a:p>
-            <a:endParaRPr lang="en-US" sz="1200" dirty="0">
-              <a:latin typeface="GT Walsheim Trial Th" pitchFamily="2" charset="77"/>
-            </a:endParaRPr>
-          </a:p>
-          <a:p>
-            <a:r>
-              <a:rPr lang="en-US" sz="1200" dirty="0">
-                <a:latin typeface="GT Walsheim Trial Th" pitchFamily="2" charset="77"/>
-              </a:rPr>
-              <a:t>Labeled anomaly data is scarce by definition</a:t>
-            </a:r>
-          </a:p>
-          <a:p>
-            <a:r>
-              <a:rPr lang="en-US" sz="1200" dirty="0">
-                <a:latin typeface="GT Walsheim Trial Th" pitchFamily="2" charset="77"/>
-              </a:rPr>
-              <a:t>"Dangerous" is context-dependent — no universal ground truth</a:t>
-            </a:r>
-          </a:p>
-          <a:p>
-            <a:endParaRPr lang="en-US" dirty="0"/>
+              <a:rPr lang="en-US" sz="1200" b="0" i="0" kern="1200" dirty="0">
+                <a:solidFill>
+                  <a:schemeClr val="tx1"/>
+                </a:solidFill>
+                <a:effectLst/>
+                <a:latin typeface="+mn-lt"/>
+                <a:ea typeface="+mn-ea"/>
+                <a:cs typeface="+mn-cs"/>
+              </a:rPr>
+              <a:t>A few things worth noting about the raw data before any filtering. When you look at mean speeds including stationary agents, vehicles actually appear slower than cyclists — counterintuitive, and it's entirely because a large fraction of vehicles are stopped at intersections. The moment you filter to moving agents only, the expected ordering returns: vehicles fastest, then cyclists, then pedestrians.</a:t>
+            </a:r>
+          </a:p>
+          <a:p>
+            <a:r>
+              <a:rPr lang="en-US" sz="1200" b="0" i="0" kern="1200" dirty="0">
+                <a:solidFill>
+                  <a:schemeClr val="tx1"/>
+                </a:solidFill>
+                <a:effectLst/>
+                <a:latin typeface="+mn-lt"/>
+                <a:ea typeface="+mn-ea"/>
+                <a:cs typeface="+mn-cs"/>
+              </a:rPr>
+              <a:t>Waymo also provides behavioral flags: </a:t>
+            </a:r>
+            <a:r>
+              <a:rPr lang="en-US" sz="1200" b="0" i="0" kern="1200" dirty="0" err="1">
+                <a:solidFill>
+                  <a:schemeClr val="tx1"/>
+                </a:solidFill>
+                <a:effectLst/>
+                <a:latin typeface="+mn-lt"/>
+                <a:ea typeface="+mn-ea"/>
+                <a:cs typeface="+mn-cs"/>
+              </a:rPr>
+              <a:t>IsInteractive</a:t>
+            </a:r>
+            <a:r>
+              <a:rPr lang="en-US" sz="1200" b="0" i="0" kern="1200" dirty="0">
+                <a:solidFill>
+                  <a:schemeClr val="tx1"/>
+                </a:solidFill>
+                <a:effectLst/>
+                <a:latin typeface="+mn-lt"/>
+                <a:ea typeface="+mn-ea"/>
+                <a:cs typeface="+mn-cs"/>
+              </a:rPr>
+              <a:t> marks agents relevant to the AV's immediate planning — typically nearby vehicles in adjacent lanes or at intersections. </a:t>
+            </a:r>
+            <a:r>
+              <a:rPr lang="en-US" sz="1200" b="0" i="0" kern="1200" dirty="0" err="1">
+                <a:solidFill>
+                  <a:schemeClr val="tx1"/>
+                </a:solidFill>
+                <a:effectLst/>
+                <a:latin typeface="+mn-lt"/>
+                <a:ea typeface="+mn-ea"/>
+                <a:cs typeface="+mn-cs"/>
+              </a:rPr>
+              <a:t>IsSDC</a:t>
+            </a:r>
+            <a:r>
+              <a:rPr lang="en-US" sz="1200" b="0" i="0" kern="1200" dirty="0">
+                <a:solidFill>
+                  <a:schemeClr val="tx1"/>
+                </a:solidFill>
+                <a:effectLst/>
+                <a:latin typeface="+mn-lt"/>
+                <a:ea typeface="+mn-ea"/>
+                <a:cs typeface="+mn-cs"/>
+              </a:rPr>
+              <a:t> identifies the self-driving car itself. These flags are not safety-incident labels — they're proximity-based planning annotations — and that distinction will matter when we interpret the anomaly results.</a:t>
+            </a:r>
+          </a:p>
+          <a:p>
+            <a:endParaRPr lang="en-US" b="1" dirty="0"/>
           </a:p>
         </p:txBody>
       </p:sp>
@@ -2850,6 +4753,380 @@
 </file>
 
 <file path=ppt/notesSlides/notesSlide8.xml><?xml version="1.0" encoding="utf-8"?>
+<p:notes xmlns:a="http://schemas.openxmlformats.org/drawingml/2006/main" xmlns:r="http://schemas.openxmlformats.org/officeDocument/2006/relationships" xmlns:p="http://schemas.openxmlformats.org/presentationml/2006/main">
+  <p:cSld>
+    <p:spTree>
+      <p:nvGrpSpPr>
+        <p:cNvPr id="1" name="">
+          <a:extLst>
+            <a:ext uri="{FF2B5EF4-FFF2-40B4-BE49-F238E27FC236}">
+              <a16:creationId xmlns:a16="http://schemas.microsoft.com/office/drawing/2014/main" id="{48F2E5FB-F86F-92BB-7197-19F9D1B83B5E}"/>
+            </a:ext>
+          </a:extLst>
+        </p:cNvPr>
+        <p:cNvGrpSpPr/>
+        <p:nvPr/>
+      </p:nvGrpSpPr>
+      <p:grpSpPr>
+        <a:xfrm>
+          <a:off x="0" y="0"/>
+          <a:ext cx="0" cy="0"/>
+          <a:chOff x="0" y="0"/>
+          <a:chExt cx="0" cy="0"/>
+        </a:xfrm>
+      </p:grpSpPr>
+      <p:sp>
+        <p:nvSpPr>
+          <p:cNvPr id="2" name="Slide Image Placeholder 1">
+            <a:extLst>
+              <a:ext uri="{FF2B5EF4-FFF2-40B4-BE49-F238E27FC236}">
+                <a16:creationId xmlns:a16="http://schemas.microsoft.com/office/drawing/2014/main" id="{71D3747C-ED42-C0F7-C90C-5EF9DDE2ACEE}"/>
+              </a:ext>
+            </a:extLst>
+          </p:cNvPr>
+          <p:cNvSpPr>
+            <a:spLocks noGrp="1" noRot="1" noChangeAspect="1"/>
+          </p:cNvSpPr>
+          <p:nvPr>
+            <p:ph type="sldImg"/>
+          </p:nvPr>
+        </p:nvSpPr>
+        <p:spPr/>
+      </p:sp>
+      <p:sp>
+        <p:nvSpPr>
+          <p:cNvPr id="3" name="Notes Placeholder 2">
+            <a:extLst>
+              <a:ext uri="{FF2B5EF4-FFF2-40B4-BE49-F238E27FC236}">
+                <a16:creationId xmlns:a16="http://schemas.microsoft.com/office/drawing/2014/main" id="{4CEA28B6-D5BC-6ACB-74A7-4FC545E777D0}"/>
+              </a:ext>
+            </a:extLst>
+          </p:cNvPr>
+          <p:cNvSpPr>
+            <a:spLocks noGrp="1"/>
+          </p:cNvSpPr>
+          <p:nvPr>
+            <p:ph type="body" idx="1"/>
+          </p:nvPr>
+        </p:nvSpPr>
+        <p:spPr/>
+        <p:txBody>
+          <a:bodyPr/>
+          <a:lstStyle/>
+          <a:p>
+            <a:r>
+              <a:rPr lang="en-US" sz="1200" b="1" dirty="0">
+                <a:latin typeface="GT Walsheim Trial Th" pitchFamily="2" charset="77"/>
+              </a:rPr>
+              <a:t>RAMSES:</a:t>
+            </a:r>
+          </a:p>
+          <a:p>
+            <a:endParaRPr lang="en-US" sz="1200" b="1" dirty="0">
+              <a:latin typeface="GT Walsheim Trial Th" pitchFamily="2" charset="77"/>
+            </a:endParaRPr>
+          </a:p>
+          <a:p>
+            <a:r>
+              <a:rPr lang="en-US" sz="1200" b="0" i="0" kern="1200" dirty="0">
+                <a:solidFill>
+                  <a:schemeClr val="tx1"/>
+                </a:solidFill>
+                <a:effectLst/>
+                <a:latin typeface="+mn-lt"/>
+                <a:ea typeface="+mn-ea"/>
+                <a:cs typeface="+mn-cs"/>
+              </a:rPr>
+              <a:t>Our anomaly detection pipeline has three layers.</a:t>
+            </a:r>
+          </a:p>
+          <a:p>
+            <a:r>
+              <a:rPr lang="en-US" sz="1200" b="0" i="0" kern="1200" dirty="0">
+                <a:solidFill>
+                  <a:schemeClr val="tx1"/>
+                </a:solidFill>
+                <a:effectLst/>
+                <a:latin typeface="+mn-lt"/>
+                <a:ea typeface="+mn-ea"/>
+                <a:cs typeface="+mn-cs"/>
+              </a:rPr>
+              <a:t>A word first on feature selection, motivated by the correlation analysis. Yaw rate is uncorrelated with every other kinematic feature — |r| ≤ 0.09 across the board. That independence is exactly what makes it a strong discriminating signal: it carries information the other features don't.</a:t>
+            </a:r>
+          </a:p>
+          <a:p>
+            <a:r>
+              <a:rPr lang="en-US" sz="1200" b="1" i="0" kern="1200" dirty="0">
+                <a:solidFill>
+                  <a:schemeClr val="tx1"/>
+                </a:solidFill>
+                <a:effectLst/>
+                <a:latin typeface="+mn-lt"/>
+                <a:ea typeface="+mn-ea"/>
+                <a:cs typeface="+mn-cs"/>
+              </a:rPr>
+              <a:t>Layer 1: Isolation Forest.</a:t>
+            </a:r>
+            <a:r>
+              <a:rPr lang="en-US" sz="1200" b="0" i="0" kern="1200" dirty="0">
+                <a:solidFill>
+                  <a:schemeClr val="tx1"/>
+                </a:solidFill>
+                <a:effectLst/>
+                <a:latin typeface="+mn-lt"/>
+                <a:ea typeface="+mn-ea"/>
+                <a:cs typeface="+mn-cs"/>
+              </a:rPr>
+              <a:t> We fit 100 trees on Speed, Acceleration, and </a:t>
+            </a:r>
+            <a:r>
+              <a:rPr lang="en-US" sz="1200" b="0" i="0" kern="1200" dirty="0" err="1">
+                <a:solidFill>
+                  <a:schemeClr val="tx1"/>
+                </a:solidFill>
+                <a:effectLst/>
+                <a:latin typeface="+mn-lt"/>
+                <a:ea typeface="+mn-ea"/>
+                <a:cs typeface="+mn-cs"/>
+              </a:rPr>
+              <a:t>YawRate</a:t>
+            </a:r>
+            <a:r>
+              <a:rPr lang="en-US" sz="1200" b="0" i="0" kern="1200" dirty="0">
+                <a:solidFill>
+                  <a:schemeClr val="tx1"/>
+                </a:solidFill>
+                <a:effectLst/>
+                <a:latin typeface="+mn-lt"/>
+                <a:ea typeface="+mn-ea"/>
+                <a:cs typeface="+mn-cs"/>
+              </a:rPr>
+              <a:t>. Each agent receives an anomaly score between 0 and 1. We threshold at the 99th percentile — flagging </a:t>
+            </a:r>
+            <a:r>
+              <a:rPr lang="en-US" sz="1200" b="1" i="0" kern="1200" dirty="0">
+                <a:solidFill>
+                  <a:schemeClr val="tx1"/>
+                </a:solidFill>
+                <a:effectLst/>
+                <a:latin typeface="+mn-lt"/>
+                <a:ea typeface="+mn-ea"/>
+                <a:cs typeface="+mn-cs"/>
+              </a:rPr>
+              <a:t>46 agents</a:t>
+            </a:r>
+            <a:r>
+              <a:rPr lang="en-US" sz="1200" b="0" i="0" kern="1200" dirty="0">
+                <a:solidFill>
+                  <a:schemeClr val="tx1"/>
+                </a:solidFill>
+                <a:effectLst/>
+                <a:latin typeface="+mn-lt"/>
+                <a:ea typeface="+mn-ea"/>
+                <a:cs typeface="+mn-cs"/>
+              </a:rPr>
+              <a:t> out of 4,538 as anomalous.</a:t>
+            </a:r>
+          </a:p>
+          <a:p>
+            <a:r>
+              <a:rPr lang="en-US" sz="1200" b="1" i="0" kern="1200" dirty="0">
+                <a:solidFill>
+                  <a:schemeClr val="tx1"/>
+                </a:solidFill>
+                <a:effectLst/>
+                <a:latin typeface="+mn-lt"/>
+                <a:ea typeface="+mn-ea"/>
+                <a:cs typeface="+mn-cs"/>
+              </a:rPr>
+              <a:t>Layer 2: Statistical Validation.</a:t>
+            </a:r>
+            <a:r>
+              <a:rPr lang="en-US" sz="1200" b="0" i="0" kern="1200" dirty="0">
+                <a:solidFill>
+                  <a:schemeClr val="tx1"/>
+                </a:solidFill>
+                <a:effectLst/>
+                <a:latin typeface="+mn-lt"/>
+                <a:ea typeface="+mn-ea"/>
+                <a:cs typeface="+mn-cs"/>
+              </a:rPr>
+              <a:t> We build a contingency table of agent type versus anomaly status and run </a:t>
+            </a:r>
+            <a:r>
+              <a:rPr lang="en-US" sz="1200" b="1" i="0" kern="1200" dirty="0">
+                <a:solidFill>
+                  <a:schemeClr val="tx1"/>
+                </a:solidFill>
+                <a:effectLst/>
+                <a:latin typeface="+mn-lt"/>
+                <a:ea typeface="+mn-ea"/>
+                <a:cs typeface="+mn-cs"/>
+              </a:rPr>
+              <a:t>Fisher's Exact Test</a:t>
+            </a:r>
+            <a:r>
+              <a:rPr lang="en-US" sz="1200" b="0" i="0" kern="1200" dirty="0">
+                <a:solidFill>
+                  <a:schemeClr val="tx1"/>
+                </a:solidFill>
+                <a:effectLst/>
+                <a:latin typeface="+mn-lt"/>
+                <a:ea typeface="+mn-ea"/>
+                <a:cs typeface="+mn-cs"/>
+              </a:rPr>
+              <a:t> with Monte Carlo simulation. Result: </a:t>
+            </a:r>
+            <a:r>
+              <a:rPr lang="en-US" sz="1200" b="1" i="0" kern="1200" dirty="0">
+                <a:solidFill>
+                  <a:schemeClr val="tx1"/>
+                </a:solidFill>
+                <a:effectLst/>
+                <a:latin typeface="+mn-lt"/>
+                <a:ea typeface="+mn-ea"/>
+                <a:cs typeface="+mn-cs"/>
+              </a:rPr>
+              <a:t>p = 0.0005</a:t>
+            </a:r>
+            <a:r>
+              <a:rPr lang="en-US" sz="1200" b="0" i="0" kern="1200" dirty="0">
+                <a:solidFill>
+                  <a:schemeClr val="tx1"/>
+                </a:solidFill>
+                <a:effectLst/>
+                <a:latin typeface="+mn-lt"/>
+                <a:ea typeface="+mn-ea"/>
+                <a:cs typeface="+mn-cs"/>
+              </a:rPr>
+              <a:t>. The anomalies are not uniformly distributed — certain agent types are disproportionately flagged. That's signal, not noise.</a:t>
+            </a:r>
+          </a:p>
+          <a:p>
+            <a:r>
+              <a:rPr lang="en-US" sz="1200" b="1" i="0" kern="1200" dirty="0">
+                <a:solidFill>
+                  <a:schemeClr val="tx1"/>
+                </a:solidFill>
+                <a:effectLst/>
+                <a:latin typeface="+mn-lt"/>
+                <a:ea typeface="+mn-ea"/>
+                <a:cs typeface="+mn-cs"/>
+              </a:rPr>
+              <a:t>Layer 3: Supervised Characterization.</a:t>
+            </a:r>
+            <a:r>
+              <a:rPr lang="en-US" sz="1200" b="0" i="0" kern="1200" dirty="0">
+                <a:solidFill>
+                  <a:schemeClr val="tx1"/>
+                </a:solidFill>
+                <a:effectLst/>
+                <a:latin typeface="+mn-lt"/>
+                <a:ea typeface="+mn-ea"/>
+                <a:cs typeface="+mn-cs"/>
+              </a:rPr>
+              <a:t> We use those Isolation Forest flags as pseudo-labels to train a </a:t>
+            </a:r>
+            <a:r>
+              <a:rPr lang="en-US" sz="1200" b="1" i="0" kern="1200" dirty="0">
+                <a:solidFill>
+                  <a:schemeClr val="tx1"/>
+                </a:solidFill>
+                <a:effectLst/>
+                <a:latin typeface="+mn-lt"/>
+                <a:ea typeface="+mn-ea"/>
+                <a:cs typeface="+mn-cs"/>
+              </a:rPr>
+              <a:t>Random Forest classifier</a:t>
+            </a:r>
+            <a:r>
+              <a:rPr lang="en-US" sz="1200" b="0" i="0" kern="1200" dirty="0">
+                <a:solidFill>
+                  <a:schemeClr val="tx1"/>
+                </a:solidFill>
+                <a:effectLst/>
+                <a:latin typeface="+mn-lt"/>
+                <a:ea typeface="+mn-ea"/>
+                <a:cs typeface="+mn-cs"/>
+              </a:rPr>
+              <a:t>. Features: bounding box dimensions and yaw rate. Because the class ratio is 99:1, we apply </a:t>
+            </a:r>
+            <a:r>
+              <a:rPr lang="en-US" sz="1200" b="0" i="0" kern="1200" dirty="0" err="1">
+                <a:solidFill>
+                  <a:schemeClr val="tx1"/>
+                </a:solidFill>
+                <a:effectLst/>
+                <a:latin typeface="+mn-lt"/>
+                <a:ea typeface="+mn-ea"/>
+                <a:cs typeface="+mn-cs"/>
+              </a:rPr>
+              <a:t>downsampling</a:t>
+            </a:r>
+            <a:r>
+              <a:rPr lang="en-US" sz="1200" b="0" i="0" kern="1200" dirty="0">
+                <a:solidFill>
+                  <a:schemeClr val="tx1"/>
+                </a:solidFill>
+                <a:effectLst/>
+                <a:latin typeface="+mn-lt"/>
+                <a:ea typeface="+mn-ea"/>
+                <a:cs typeface="+mn-cs"/>
+              </a:rPr>
+              <a:t> and evaluate by AUC-ROC under 5-fold cross-validation.</a:t>
+            </a:r>
+          </a:p>
+          <a:p>
+            <a:br>
+              <a:rPr lang="en-US" dirty="0"/>
+            </a:br>
+            <a:endParaRPr lang="en-US" b="1" dirty="0"/>
+          </a:p>
+        </p:txBody>
+      </p:sp>
+      <p:sp>
+        <p:nvSpPr>
+          <p:cNvPr id="4" name="Slide Number Placeholder 3">
+            <a:extLst>
+              <a:ext uri="{FF2B5EF4-FFF2-40B4-BE49-F238E27FC236}">
+                <a16:creationId xmlns:a16="http://schemas.microsoft.com/office/drawing/2014/main" id="{089D28EE-E95F-7F62-B8CA-D7F9118AFDDD}"/>
+              </a:ext>
+            </a:extLst>
+          </p:cNvPr>
+          <p:cNvSpPr>
+            <a:spLocks noGrp="1"/>
+          </p:cNvSpPr>
+          <p:nvPr>
+            <p:ph type="sldNum" sz="quarter" idx="5"/>
+          </p:nvPr>
+        </p:nvSpPr>
+        <p:spPr/>
+        <p:txBody>
+          <a:bodyPr/>
+          <a:lstStyle/>
+          <a:p>
+            <a:fld id="{B3F43537-14D9-9349-AA70-B1088F1298F1}" type="slidenum">
+              <a:rPr lang="en-US" smtClean="0"/>
+              <a:t>8</a:t>
+            </a:fld>
+            <a:endParaRPr lang="en-US"/>
+          </a:p>
+        </p:txBody>
+      </p:sp>
+    </p:spTree>
+    <p:extLst>
+      <p:ext uri="{BB962C8B-B14F-4D97-AF65-F5344CB8AC3E}">
+        <p14:creationId xmlns:p14="http://schemas.microsoft.com/office/powerpoint/2010/main" val="3701943569"/>
+      </p:ext>
+    </p:extLst>
+  </p:cSld>
+  <p:clrMapOvr>
+    <a:masterClrMapping/>
+  </p:clrMapOvr>
+</p:notes>
+</file>
+
+<file path=ppt/notesSlides/notesSlide9.xml><?xml version="1.0" encoding="utf-8"?>
 <p:notes xmlns:a="http://schemas.openxmlformats.org/drawingml/2006/main" xmlns:r="http://schemas.openxmlformats.org/officeDocument/2006/relationships" xmlns:p="http://schemas.openxmlformats.org/presentationml/2006/main">
   <p:cSld>
     <p:spTree>
@@ -2911,6 +5188,170 @@
           <a:bodyPr/>
           <a:lstStyle/>
           <a:p>
+            <a:r>
+              <a:rPr lang="en-US" b="1" dirty="0"/>
+              <a:t>JUSTIN:</a:t>
+            </a:r>
+            <a:br>
+              <a:rPr lang="en-US" dirty="0"/>
+            </a:br>
+            <a:br>
+              <a:rPr lang="en-US" dirty="0"/>
+            </a:br>
+            <a:r>
+              <a:rPr lang="en-US" sz="1200" b="0" i="0" kern="1200" dirty="0">
+                <a:solidFill>
+                  <a:schemeClr val="tx1"/>
+                </a:solidFill>
+                <a:effectLst/>
+                <a:latin typeface="+mn-lt"/>
+                <a:ea typeface="+mn-ea"/>
+                <a:cs typeface="+mn-cs"/>
+              </a:rPr>
+              <a:t>For motion forecasting we use a linear regression model predicting </a:t>
+            </a:r>
+            <a:r>
+              <a:rPr lang="en-US" sz="1200" b="1" i="0" kern="1200" dirty="0">
+                <a:solidFill>
+                  <a:schemeClr val="tx1"/>
+                </a:solidFill>
+                <a:effectLst/>
+                <a:latin typeface="+mn-lt"/>
+                <a:ea typeface="+mn-ea"/>
+                <a:cs typeface="+mn-cs"/>
+              </a:rPr>
+              <a:t>5-second future displacement</a:t>
+            </a:r>
+            <a:r>
+              <a:rPr lang="en-US" sz="1200" b="0" i="0" kern="1200" dirty="0">
+                <a:solidFill>
+                  <a:schemeClr val="tx1"/>
+                </a:solidFill>
+                <a:effectLst/>
+                <a:latin typeface="+mn-lt"/>
+                <a:ea typeface="+mn-ea"/>
+                <a:cs typeface="+mn-cs"/>
+              </a:rPr>
+              <a:t> from the full kinematic state: speed, acceleration, yaw rate, and the signed velocity components Vx and Vy.</a:t>
+            </a:r>
+          </a:p>
+          <a:p>
+            <a:r>
+              <a:rPr lang="en-US" sz="1200" b="0" i="0" kern="1200" dirty="0">
+                <a:solidFill>
+                  <a:schemeClr val="tx1"/>
+                </a:solidFill>
+                <a:effectLst/>
+                <a:latin typeface="+mn-lt"/>
+                <a:ea typeface="+mn-ea"/>
+                <a:cs typeface="+mn-cs"/>
+              </a:rPr>
+              <a:t>We evaluate under </a:t>
+            </a:r>
+            <a:r>
+              <a:rPr lang="en-US" sz="1200" b="1" i="0" kern="1200" dirty="0">
+                <a:solidFill>
+                  <a:schemeClr val="tx1"/>
+                </a:solidFill>
+                <a:effectLst/>
+                <a:latin typeface="+mn-lt"/>
+                <a:ea typeface="+mn-ea"/>
+                <a:cs typeface="+mn-cs"/>
+              </a:rPr>
+              <a:t>two conditions</a:t>
+            </a:r>
+            <a:r>
+              <a:rPr lang="en-US" sz="1200" b="0" i="0" kern="1200" dirty="0">
+                <a:solidFill>
+                  <a:schemeClr val="tx1"/>
+                </a:solidFill>
+                <a:effectLst/>
+                <a:latin typeface="+mn-lt"/>
+                <a:ea typeface="+mn-ea"/>
+                <a:cs typeface="+mn-cs"/>
+              </a:rPr>
+              <a:t> — intentionally. </a:t>
+            </a:r>
+          </a:p>
+          <a:p>
+            <a:endParaRPr lang="en-US" sz="1200" b="0" i="0" kern="1200" dirty="0">
+              <a:solidFill>
+                <a:schemeClr val="tx1"/>
+              </a:solidFill>
+              <a:effectLst/>
+              <a:latin typeface="+mn-lt"/>
+              <a:ea typeface="+mn-ea"/>
+              <a:cs typeface="+mn-cs"/>
+            </a:endParaRPr>
+          </a:p>
+          <a:p>
+            <a:r>
+              <a:rPr lang="en-US" sz="1200" b="1" i="0" kern="1200" dirty="0">
+                <a:solidFill>
+                  <a:schemeClr val="tx1"/>
+                </a:solidFill>
+                <a:effectLst/>
+                <a:latin typeface="+mn-lt"/>
+                <a:ea typeface="+mn-ea"/>
+                <a:cs typeface="+mn-cs"/>
+              </a:rPr>
+              <a:t>Condition A includes all agents: moving and stationary.</a:t>
+            </a:r>
+          </a:p>
+          <a:p>
+            <a:r>
+              <a:rPr lang="en-US" sz="1200" b="1" i="0" kern="1200" dirty="0">
+                <a:solidFill>
+                  <a:schemeClr val="tx1"/>
+                </a:solidFill>
+                <a:effectLst/>
+                <a:latin typeface="+mn-lt"/>
+                <a:ea typeface="+mn-ea"/>
+                <a:cs typeface="+mn-cs"/>
+              </a:rPr>
+              <a:t>Condition B restricts to moving agents only, giving us 3,196 observations.</a:t>
+            </a:r>
+          </a:p>
+          <a:p>
+            <a:endParaRPr lang="en-US" sz="1200" b="0" i="0" kern="1200" dirty="0">
+              <a:solidFill>
+                <a:schemeClr val="tx1"/>
+              </a:solidFill>
+              <a:effectLst/>
+              <a:latin typeface="+mn-lt"/>
+              <a:ea typeface="+mn-ea"/>
+              <a:cs typeface="+mn-cs"/>
+            </a:endParaRPr>
+          </a:p>
+          <a:p>
+            <a:r>
+              <a:rPr lang="en-US" sz="1200" b="0" i="0" kern="1200" dirty="0">
+                <a:solidFill>
+                  <a:schemeClr val="tx1"/>
+                </a:solidFill>
+                <a:effectLst/>
+                <a:latin typeface="+mn-lt"/>
+                <a:ea typeface="+mn-ea"/>
+                <a:cs typeface="+mn-cs"/>
+              </a:rPr>
+              <a:t>Stationary agents have near-zero displacement — trivially easy to predict and likely to inflate R-squared. The two-condition design lets us directly measure that inflation.</a:t>
+            </a:r>
+          </a:p>
+          <a:p>
+            <a:r>
+              <a:rPr lang="en-US" sz="1200" b="0" i="0" kern="1200" dirty="0">
+                <a:solidFill>
+                  <a:schemeClr val="tx1"/>
+                </a:solidFill>
+                <a:effectLst/>
+                <a:latin typeface="+mn-lt"/>
+                <a:ea typeface="+mn-ea"/>
+                <a:cs typeface="+mn-cs"/>
+              </a:rPr>
+              <a:t>Both models were trained with 5-fold cross-validation and evaluated on a held-out 20% test set.</a:t>
+            </a:r>
+          </a:p>
+          <a:p>
             <a:endParaRPr lang="en-US" dirty="0"/>
           </a:p>
         </p:txBody>
@@ -2938,7 +5379,7 @@
           <a:p>
             <a:fld id="{B3F43537-14D9-9349-AA70-B1088F1298F1}" type="slidenum">
               <a:rPr lang="en-US" smtClean="0"/>
-              <a:t>8</a:t>
+              <a:t>9</a:t>
             </a:fld>
             <a:endParaRPr lang="en-US"/>
           </a:p>
@@ -2948,114 +5389,6 @@
     <p:extLst>
       <p:ext uri="{BB962C8B-B14F-4D97-AF65-F5344CB8AC3E}">
         <p14:creationId xmlns:p14="http://schemas.microsoft.com/office/powerpoint/2010/main" val="2427523799"/>
-      </p:ext>
-    </p:extLst>
-  </p:cSld>
-  <p:clrMapOvr>
-    <a:masterClrMapping/>
-  </p:clrMapOvr>
-</p:notes>
-</file>
-
-<file path=ppt/notesSlides/notesSlide9.xml><?xml version="1.0" encoding="utf-8"?>
-<p:notes xmlns:a="http://schemas.openxmlformats.org/drawingml/2006/main" xmlns:r="http://schemas.openxmlformats.org/officeDocument/2006/relationships" xmlns:p="http://schemas.openxmlformats.org/presentationml/2006/main">
-  <p:cSld>
-    <p:spTree>
-      <p:nvGrpSpPr>
-        <p:cNvPr id="1" name="">
-          <a:extLst>
-            <a:ext uri="{FF2B5EF4-FFF2-40B4-BE49-F238E27FC236}">
-              <a16:creationId xmlns:a16="http://schemas.microsoft.com/office/drawing/2014/main" id="{28B6F447-6712-10CC-B836-ECC08ADB1A30}"/>
-            </a:ext>
-          </a:extLst>
-        </p:cNvPr>
-        <p:cNvGrpSpPr/>
-        <p:nvPr/>
-      </p:nvGrpSpPr>
-      <p:grpSpPr>
-        <a:xfrm>
-          <a:off x="0" y="0"/>
-          <a:ext cx="0" cy="0"/>
-          <a:chOff x="0" y="0"/>
-          <a:chExt cx="0" cy="0"/>
-        </a:xfrm>
-      </p:grpSpPr>
-      <p:sp>
-        <p:nvSpPr>
-          <p:cNvPr id="2" name="Slide Image Placeholder 1">
-            <a:extLst>
-              <a:ext uri="{FF2B5EF4-FFF2-40B4-BE49-F238E27FC236}">
-                <a16:creationId xmlns:a16="http://schemas.microsoft.com/office/drawing/2014/main" id="{FAB7EA59-FF18-6101-C3B9-A9E808FEE456}"/>
-              </a:ext>
-            </a:extLst>
-          </p:cNvPr>
-          <p:cNvSpPr>
-            <a:spLocks noGrp="1" noRot="1" noChangeAspect="1"/>
-          </p:cNvSpPr>
-          <p:nvPr>
-            <p:ph type="sldImg"/>
-          </p:nvPr>
-        </p:nvSpPr>
-        <p:spPr/>
-      </p:sp>
-      <p:sp>
-        <p:nvSpPr>
-          <p:cNvPr id="3" name="Notes Placeholder 2">
-            <a:extLst>
-              <a:ext uri="{FF2B5EF4-FFF2-40B4-BE49-F238E27FC236}">
-                <a16:creationId xmlns:a16="http://schemas.microsoft.com/office/drawing/2014/main" id="{F62F3CF9-8F06-1FBD-581A-29A668F3B3D2}"/>
-              </a:ext>
-            </a:extLst>
-          </p:cNvPr>
-          <p:cNvSpPr>
-            <a:spLocks noGrp="1"/>
-          </p:cNvSpPr>
-          <p:nvPr>
-            <p:ph type="body" idx="1"/>
-          </p:nvPr>
-        </p:nvSpPr>
-        <p:spPr/>
-        <p:txBody>
-          <a:bodyPr/>
-          <a:lstStyle/>
-          <a:p>
-            <a:endParaRPr lang="en-US" dirty="0"/>
-          </a:p>
-        </p:txBody>
-      </p:sp>
-      <p:sp>
-        <p:nvSpPr>
-          <p:cNvPr id="4" name="Slide Number Placeholder 3">
-            <a:extLst>
-              <a:ext uri="{FF2B5EF4-FFF2-40B4-BE49-F238E27FC236}">
-                <a16:creationId xmlns:a16="http://schemas.microsoft.com/office/drawing/2014/main" id="{83AF3720-730E-9476-95AA-C800296916AA}"/>
-              </a:ext>
-            </a:extLst>
-          </p:cNvPr>
-          <p:cNvSpPr>
-            <a:spLocks noGrp="1"/>
-          </p:cNvSpPr>
-          <p:nvPr>
-            <p:ph type="sldNum" sz="quarter" idx="5"/>
-          </p:nvPr>
-        </p:nvSpPr>
-        <p:spPr/>
-        <p:txBody>
-          <a:bodyPr/>
-          <a:lstStyle/>
-          <a:p>
-            <a:fld id="{B3F43537-14D9-9349-AA70-B1088F1298F1}" type="slidenum">
-              <a:rPr lang="en-US" smtClean="0"/>
-              <a:t>9</a:t>
-            </a:fld>
-            <a:endParaRPr lang="en-US"/>
-          </a:p>
-        </p:txBody>
-      </p:sp>
-    </p:spTree>
-    <p:extLst>
-      <p:ext uri="{BB962C8B-B14F-4D97-AF65-F5344CB8AC3E}">
-        <p14:creationId xmlns:p14="http://schemas.microsoft.com/office/powerpoint/2010/main" val="1370636603"/>
       </p:ext>
     </p:extLst>
   </p:cSld>
@@ -6681,7 +9014,7 @@
         <p:cNvPr id="1" name="">
           <a:extLst>
             <a:ext uri="{FF2B5EF4-FFF2-40B4-BE49-F238E27FC236}">
-              <a16:creationId xmlns:a16="http://schemas.microsoft.com/office/drawing/2014/main" id="{6A2C1864-B821-A354-EF4D-BEA1BAB91A28}"/>
+              <a16:creationId xmlns:a16="http://schemas.microsoft.com/office/drawing/2014/main" id="{D86B5D17-03D9-44FB-2525-A230A9DCFA2A}"/>
             </a:ext>
           </a:extLst>
         </p:cNvPr>
@@ -6698,10 +9031,10 @@
       </p:grpSpPr>
       <p:sp>
         <p:nvSpPr>
-          <p:cNvPr id="3" name="Freeform 2">
+          <p:cNvPr id="12" name="Freeform 11">
             <a:extLst>
               <a:ext uri="{FF2B5EF4-FFF2-40B4-BE49-F238E27FC236}">
-                <a16:creationId xmlns:a16="http://schemas.microsoft.com/office/drawing/2014/main" id="{C8E9BA9D-DCF3-4861-65EB-D29E6BD5BF6E}"/>
+                <a16:creationId xmlns:a16="http://schemas.microsoft.com/office/drawing/2014/main" id="{879D5AE1-D670-17B5-C1A3-0D759721D43E}"/>
               </a:ext>
             </a:extLst>
           </p:cNvPr>
@@ -6790,10 +9123,10 @@
       </p:sp>
       <p:sp>
         <p:nvSpPr>
-          <p:cNvPr id="5" name="Freeform 4">
+          <p:cNvPr id="15" name="Freeform 14">
             <a:extLst>
               <a:ext uri="{FF2B5EF4-FFF2-40B4-BE49-F238E27FC236}">
-                <a16:creationId xmlns:a16="http://schemas.microsoft.com/office/drawing/2014/main" id="{E120A76A-6063-D435-D8DA-689329698EAB}"/>
+                <a16:creationId xmlns:a16="http://schemas.microsoft.com/office/drawing/2014/main" id="{D37E2142-0FFF-FBCA-977C-BD6E52F367DE}"/>
               </a:ext>
             </a:extLst>
           </p:cNvPr>
@@ -6885,7 +9218,7 @@
           <p:cNvPr id="1026" name="Picture 2" descr="Waymo Logo">
             <a:extLst>
               <a:ext uri="{FF2B5EF4-FFF2-40B4-BE49-F238E27FC236}">
-                <a16:creationId xmlns:a16="http://schemas.microsoft.com/office/drawing/2014/main" id="{CE773485-6780-02DC-B58E-3EECCE6B675F}"/>
+                <a16:creationId xmlns:a16="http://schemas.microsoft.com/office/drawing/2014/main" id="{08C5FC6B-2A30-8CF0-4995-D7BFA29BFDA5}"/>
               </a:ext>
             </a:extLst>
           </p:cNvPr>
@@ -6932,7 +9265,7 @@
           <p:cNvPr id="4" name="Title 3">
             <a:extLst>
               <a:ext uri="{FF2B5EF4-FFF2-40B4-BE49-F238E27FC236}">
-                <a16:creationId xmlns:a16="http://schemas.microsoft.com/office/drawing/2014/main" id="{12EA372C-6D3A-EED6-6C44-E63BC22B6F82}"/>
+                <a16:creationId xmlns:a16="http://schemas.microsoft.com/office/drawing/2014/main" id="{4BDC90D8-8254-451E-8A54-63DD1F1D44D3}"/>
               </a:ext>
             </a:extLst>
           </p:cNvPr>
@@ -6963,7 +9296,7 @@
                 </a:solidFill>
                 <a:latin typeface="GT Walsheim Trial Rg" pitchFamily="2" charset="77"/>
               </a:rPr>
-              <a:t>SECTION B - RESULTS  </a:t>
+              <a:t>SECTION A - RESULTS  </a:t>
             </a:r>
           </a:p>
         </p:txBody>
@@ -6973,7 +9306,7 @@
           <p:cNvPr id="8" name="TextBox 7">
             <a:extLst>
               <a:ext uri="{FF2B5EF4-FFF2-40B4-BE49-F238E27FC236}">
-                <a16:creationId xmlns:a16="http://schemas.microsoft.com/office/drawing/2014/main" id="{F9CA362B-3511-B893-5B5B-8C6464343376}"/>
+                <a16:creationId xmlns:a16="http://schemas.microsoft.com/office/drawing/2014/main" id="{CA5BCE23-5067-2282-04B1-B7A52B3128DB}"/>
               </a:ext>
             </a:extLst>
           </p:cNvPr>
@@ -7000,7 +9333,7 @@
               <a:rPr lang="en-US" sz="3500" dirty="0">
                 <a:latin typeface="GT Walsheim Trial Rg" pitchFamily="2" charset="77"/>
               </a:rPr>
-              <a:t>Results: Anomaly Detection Results</a:t>
+              <a:t>Results: Descriptive Statistics</a:t>
             </a:r>
           </a:p>
         </p:txBody>
@@ -7010,7 +9343,7 @@
           <p:cNvPr id="6" name="Rectangle 5">
             <a:extLst>
               <a:ext uri="{FF2B5EF4-FFF2-40B4-BE49-F238E27FC236}">
-                <a16:creationId xmlns:a16="http://schemas.microsoft.com/office/drawing/2014/main" id="{20AA69BA-C691-5B0A-9C77-BCF673AA2090}"/>
+                <a16:creationId xmlns:a16="http://schemas.microsoft.com/office/drawing/2014/main" id="{C9115712-845E-BD5C-5877-2CC7215556E8}"/>
               </a:ext>
             </a:extLst>
           </p:cNvPr>
@@ -7026,7 +9359,7 @@
             <a:avLst/>
           </a:prstGeom>
           <a:solidFill>
-            <a:srgbClr val="949AA0"/>
+            <a:srgbClr val="0078FF"/>
           </a:solidFill>
           <a:ln>
             <a:noFill/>
@@ -7062,7 +9395,7 @@
           <p:cNvPr id="10" name="TextBox 9">
             <a:extLst>
               <a:ext uri="{FF2B5EF4-FFF2-40B4-BE49-F238E27FC236}">
-                <a16:creationId xmlns:a16="http://schemas.microsoft.com/office/drawing/2014/main" id="{0FB96CA1-CB36-826F-5576-3E7A3D1F46E7}"/>
+                <a16:creationId xmlns:a16="http://schemas.microsoft.com/office/drawing/2014/main" id="{F30DBAAC-CC45-B6C4-5865-26D213AD62FB}"/>
               </a:ext>
             </a:extLst>
           </p:cNvPr>
@@ -7071,8 +9404,8 @@
         </p:nvSpPr>
         <p:spPr>
           <a:xfrm>
-            <a:off x="4001985" y="1892389"/>
-            <a:ext cx="4188029" cy="369332"/>
+            <a:off x="4270171" y="1880076"/>
+            <a:ext cx="3651657" cy="369332"/>
           </a:xfrm>
           <a:prstGeom prst="rect">
             <a:avLst/>
@@ -7094,7 +9427,7 @@
                 <a:effectLst/>
                 <a:latin typeface="GT Walsheim Trial Rg" pitchFamily="2" charset="77"/>
               </a:rPr>
-              <a:t>Random Forest Classifier Performance</a:t>
+              <a:t>Mean Speed by Agent Type (m/s)</a:t>
             </a:r>
           </a:p>
         </p:txBody>
@@ -7104,7 +9437,7 @@
           <p:cNvPr id="19" name="TextBox 18">
             <a:extLst>
               <a:ext uri="{FF2B5EF4-FFF2-40B4-BE49-F238E27FC236}">
-                <a16:creationId xmlns:a16="http://schemas.microsoft.com/office/drawing/2014/main" id="{7763328F-5B74-FF89-6105-41348B1621B6}"/>
+                <a16:creationId xmlns:a16="http://schemas.microsoft.com/office/drawing/2014/main" id="{D967FE5B-F13A-94B5-C02F-038A0C8990B0}"/>
               </a:ext>
             </a:extLst>
           </p:cNvPr>
@@ -7166,7 +9499,7 @@
           <p:cNvPr id="20" name="Rectangle 19">
             <a:extLst>
               <a:ext uri="{FF2B5EF4-FFF2-40B4-BE49-F238E27FC236}">
-                <a16:creationId xmlns:a16="http://schemas.microsoft.com/office/drawing/2014/main" id="{B8A315BA-FB29-FE05-79F7-04FDFFF015FC}"/>
+                <a16:creationId xmlns:a16="http://schemas.microsoft.com/office/drawing/2014/main" id="{0909F16F-0A5C-F265-F0A0-690C41791F6A}"/>
               </a:ext>
             </a:extLst>
           </p:cNvPr>
@@ -7218,7 +9551,7 @@
           <p:cNvPr id="21" name="TextBox 20">
             <a:extLst>
               <a:ext uri="{FF2B5EF4-FFF2-40B4-BE49-F238E27FC236}">
-                <a16:creationId xmlns:a16="http://schemas.microsoft.com/office/drawing/2014/main" id="{612B3246-6737-9678-1B7D-7F8D35A1BFDE}"/>
+                <a16:creationId xmlns:a16="http://schemas.microsoft.com/office/drawing/2014/main" id="{D8723AF3-74A0-D29C-3621-6F5F9EFF648E}"/>
               </a:ext>
             </a:extLst>
           </p:cNvPr>
@@ -7260,7 +9593,7 @@
           <p:cNvPr id="22" name="TextBox 21">
             <a:extLst>
               <a:ext uri="{FF2B5EF4-FFF2-40B4-BE49-F238E27FC236}">
-                <a16:creationId xmlns:a16="http://schemas.microsoft.com/office/drawing/2014/main" id="{153CB52F-9BFB-85AD-4F24-2D7EA4309EC4}"/>
+                <a16:creationId xmlns:a16="http://schemas.microsoft.com/office/drawing/2014/main" id="{31CF2942-2A27-BC3B-2E88-D72CF9981F3D}"/>
               </a:ext>
             </a:extLst>
           </p:cNvPr>
@@ -7306,7 +9639,7 @@
           <p:cNvPr id="9" name="Table 8">
             <a:extLst>
               <a:ext uri="{FF2B5EF4-FFF2-40B4-BE49-F238E27FC236}">
-                <a16:creationId xmlns:a16="http://schemas.microsoft.com/office/drawing/2014/main" id="{2F351178-9490-D064-1CA6-081BE3C8614C}"/>
+                <a16:creationId xmlns:a16="http://schemas.microsoft.com/office/drawing/2014/main" id="{CF32A97D-8C0A-55E5-E1FC-D4E82FD5E137}"/>
               </a:ext>
             </a:extLst>
           </p:cNvPr>
@@ -7316,14 +9649,14 @@
           <p:nvPr>
             <p:extLst>
               <p:ext uri="{D42A27DB-BD31-4B8C-83A1-F6EECF244321}">
-                <p14:modId xmlns:p14="http://schemas.microsoft.com/office/powerpoint/2010/main" val="782688522"/>
+                <p14:modId xmlns:p14="http://schemas.microsoft.com/office/powerpoint/2010/main" val="1540186146"/>
               </p:ext>
             </p:extLst>
           </p:nvPr>
         </p:nvGraphicFramePr>
         <p:xfrm>
-          <a:off x="854438" y="2513195"/>
-          <a:ext cx="10723843" cy="2885920"/>
+          <a:off x="854438" y="2721367"/>
+          <a:ext cx="10723843" cy="2064642"/>
         </p:xfrm>
         <a:graphic>
           <a:graphicData uri="http://schemas.openxmlformats.org/drawingml/2006/table">
@@ -7354,7 +9687,7 @@
                   </a:extLst>
                 </a:gridCol>
               </a:tblGrid>
-              <a:tr h="282420">
+              <a:tr h="296694">
                 <a:tc>
                   <a:txBody>
                     <a:bodyPr/>
@@ -7367,7 +9700,7 @@
                           </a:solidFill>
                           <a:latin typeface="GT Walsheim Trial Rg" pitchFamily="2" charset="77"/>
                         </a:rPr>
-                        <a:t>Metric</a:t>
+                        <a:t>Agent Type</a:t>
                       </a:r>
                     </a:p>
                   </a:txBody>
@@ -7409,7 +9742,7 @@
                       <a:prstDash val="solid"/>
                     </a:lnBlToTr>
                     <a:solidFill>
-                      <a:srgbClr val="949AA0"/>
+                      <a:srgbClr val="0078FF"/>
                     </a:solidFill>
                   </a:tcPr>
                 </a:tc>
@@ -7425,7 +9758,7 @@
                           </a:solidFill>
                           <a:latin typeface="GT Walsheim Trial Rg" pitchFamily="2" charset="77"/>
                         </a:rPr>
-                        <a:t>CV (Train)</a:t>
+                        <a:t>All Agent</a:t>
                       </a:r>
                     </a:p>
                   </a:txBody>
@@ -7467,7 +9800,7 @@
                       <a:prstDash val="solid"/>
                     </a:lnBlToTr>
                     <a:solidFill>
-                      <a:srgbClr val="949AA0"/>
+                      <a:srgbClr val="0078FF"/>
                     </a:solidFill>
                   </a:tcPr>
                 </a:tc>
@@ -7483,7 +9816,7 @@
                           </a:solidFill>
                           <a:latin typeface="GT Walsheim Trial Rg" pitchFamily="2" charset="77"/>
                         </a:rPr>
-                        <a:t>Test (Hold-out)</a:t>
+                        <a:t>Moving Only</a:t>
                       </a:r>
                     </a:p>
                   </a:txBody>
@@ -7525,7 +9858,7 @@
                       <a:prstDash val="solid"/>
                     </a:lnBlToTr>
                     <a:solidFill>
-                      <a:srgbClr val="949AA0"/>
+                      <a:srgbClr val="0078FF"/>
                     </a:solidFill>
                   </a:tcPr>
                 </a:tc>
@@ -7535,7 +9868,7 @@
                   </a:ext>
                 </a:extLst>
               </a:tr>
-              <a:tr h="513176">
+              <a:tr h="581534">
                 <a:tc>
                   <a:txBody>
                     <a:bodyPr/>
@@ -7548,7 +9881,7 @@
                           </a:solidFill>
                           <a:latin typeface="GT Walsheim Trial Rg" pitchFamily="2" charset="77"/>
                         </a:rPr>
-                        <a:t>AUC-ROC</a:t>
+                        <a:t>Vehicle</a:t>
                       </a:r>
                     </a:p>
                   </a:txBody>
@@ -7608,7 +9941,7 @@
                           </a:solidFill>
                           <a:latin typeface="GT Walsheim Trial Rg" pitchFamily="2" charset="77"/>
                         </a:rPr>
-                        <a:t>0.887</a:t>
+                        <a:t>2.47</a:t>
                       </a:r>
                     </a:p>
                   </a:txBody>
@@ -7661,12 +9994,15 @@
                     <a:bodyPr/>
                     <a:lstStyle/>
                     <a:p>
-                      <a:endParaRPr lang="en-US" sz="1500" b="0" i="0" dirty="0">
-                        <a:solidFill>
-                          <a:schemeClr val="tx1"/>
-                        </a:solidFill>
-                        <a:latin typeface="GT Walsheim Trial Rg" pitchFamily="2" charset="77"/>
-                      </a:endParaRPr>
+                      <a:r>
+                        <a:rPr lang="en-US" sz="1500" b="0" i="0" dirty="0">
+                          <a:solidFill>
+                            <a:schemeClr val="tx1"/>
+                          </a:solidFill>
+                          <a:latin typeface="GT Walsheim Trial Rg" pitchFamily="2" charset="77"/>
+                        </a:rPr>
+                        <a:t>6.74</a:t>
+                      </a:r>
                     </a:p>
                   </a:txBody>
                   <a:tcPr>
@@ -7698,29 +10034,13 @@
                       <a:headEnd type="none" w="med" len="med"/>
                       <a:tailEnd type="none" w="med" len="med"/>
                     </a:lnB>
-                    <a:lnTlToBr w="12700" cap="flat" cmpd="sng" algn="ctr">
-                      <a:solidFill>
-                        <a:schemeClr val="tx1">
-                          <a:lumMod val="50000"/>
-                          <a:lumOff val="50000"/>
-                        </a:schemeClr>
-                      </a:solidFill>
-                      <a:prstDash val="solid"/>
-                      <a:round/>
-                      <a:headEnd type="none" w="med" len="med"/>
-                      <a:tailEnd type="none" w="med" len="med"/>
+                    <a:lnTlToBr w="12700" cmpd="sng">
+                      <a:noFill/>
+                      <a:prstDash val="solid"/>
                     </a:lnTlToBr>
-                    <a:lnBlToTr w="12700" cap="flat" cmpd="sng" algn="ctr">
-                      <a:solidFill>
-                        <a:schemeClr val="tx1">
-                          <a:lumMod val="50000"/>
-                          <a:lumOff val="50000"/>
-                        </a:schemeClr>
-                      </a:solidFill>
-                      <a:prstDash val="solid"/>
-                      <a:round/>
-                      <a:headEnd type="none" w="med" len="med"/>
-                      <a:tailEnd type="none" w="med" len="med"/>
+                    <a:lnBlToTr w="12700" cmpd="sng">
+                      <a:noFill/>
+                      <a:prstDash val="solid"/>
                     </a:lnBlToTr>
                     <a:solidFill>
                       <a:schemeClr val="bg1">
@@ -7735,7 +10055,7 @@
                   </a:ext>
                 </a:extLst>
               </a:tr>
-              <a:tr h="513176">
+              <a:tr h="581534">
                 <a:tc>
                   <a:txBody>
                     <a:bodyPr/>
@@ -7748,7 +10068,7 @@
                           </a:solidFill>
                           <a:latin typeface="GT Walsheim Trial Rg" pitchFamily="2" charset="77"/>
                         </a:rPr>
-                        <a:t>Sensitivity</a:t>
+                        <a:t>Pedestrian</a:t>
                       </a:r>
                     </a:p>
                   </a:txBody>
@@ -7808,7 +10128,7 @@
                           </a:solidFill>
                           <a:latin typeface="GT Walsheim Trial Rg" pitchFamily="2" charset="77"/>
                         </a:rPr>
-                        <a:t>0.836</a:t>
+                        <a:t>4.20</a:t>
                       </a:r>
                     </a:p>
                   </a:txBody>
@@ -7868,7 +10188,7 @@
                           </a:solidFill>
                           <a:latin typeface="GT Walsheim Trial Rg" pitchFamily="2" charset="77"/>
                         </a:rPr>
-                        <a:t>0.796</a:t>
+                        <a:t>3.92</a:t>
                       </a:r>
                     </a:p>
                   </a:txBody>
@@ -7922,7 +10242,7 @@
                   </a:ext>
                 </a:extLst>
               </a:tr>
-              <a:tr h="513176">
+              <a:tr h="581534">
                 <a:tc>
                   <a:txBody>
                     <a:bodyPr/>
@@ -7935,7 +10255,7 @@
                           </a:solidFill>
                           <a:latin typeface="GT Walsheim Trial Rg" pitchFamily="2" charset="77"/>
                         </a:rPr>
-                        <a:t>Specificity</a:t>
+                        <a:t>Cyclist</a:t>
                       </a:r>
                     </a:p>
                   </a:txBody>
@@ -7995,7 +10315,7 @@
                           </a:solidFill>
                           <a:latin typeface="GT Walsheim Trial Rg" pitchFamily="2" charset="77"/>
                         </a:rPr>
-                        <a:t>0.839</a:t>
+                        <a:t>1.01</a:t>
                       </a:r>
                     </a:p>
                   </a:txBody>
@@ -8055,7 +10375,7 @@
                           </a:solidFill>
                           <a:latin typeface="GT Walsheim Trial Rg" pitchFamily="2" charset="77"/>
                         </a:rPr>
-                        <a:t>0.667</a:t>
+                        <a:t>1.01</a:t>
                       </a:r>
                     </a:p>
                   </a:txBody>
@@ -8109,406 +10429,6 @@
                   </a:ext>
                 </a:extLst>
               </a:tr>
-              <a:tr h="513176">
-                <a:tc>
-                  <a:txBody>
-                    <a:bodyPr/>
-                    <a:lstStyle/>
-                    <a:p>
-                      <a:r>
-                        <a:rPr lang="en-US" sz="1500" b="0" i="0" dirty="0">
-                          <a:solidFill>
-                            <a:schemeClr val="tx1"/>
-                          </a:solidFill>
-                          <a:latin typeface="GT Walsheim Trial Rg" pitchFamily="2" charset="77"/>
-                        </a:rPr>
-                        <a:t>Accuracy</a:t>
-                      </a:r>
-                    </a:p>
-                  </a:txBody>
-                  <a:tcPr>
-                    <a:lnL w="12700" cap="flat" cmpd="sng" algn="ctr">
-                      <a:noFill/>
-                      <a:prstDash val="solid"/>
-                      <a:round/>
-                      <a:headEnd type="none" w="med" len="med"/>
-                      <a:tailEnd type="none" w="med" len="med"/>
-                    </a:lnL>
-                    <a:lnR w="12700" cap="flat" cmpd="sng" algn="ctr">
-                      <a:noFill/>
-                      <a:prstDash val="solid"/>
-                      <a:round/>
-                      <a:headEnd type="none" w="med" len="med"/>
-                      <a:tailEnd type="none" w="med" len="med"/>
-                    </a:lnR>
-                    <a:lnT w="12700" cap="flat" cmpd="sng" algn="ctr">
-                      <a:noFill/>
-                      <a:prstDash val="solid"/>
-                      <a:round/>
-                      <a:headEnd type="none" w="med" len="med"/>
-                      <a:tailEnd type="none" w="med" len="med"/>
-                    </a:lnT>
-                    <a:lnB w="12700" cap="flat" cmpd="sng" algn="ctr">
-                      <a:noFill/>
-                      <a:prstDash val="solid"/>
-                      <a:round/>
-                      <a:headEnd type="none" w="med" len="med"/>
-                      <a:tailEnd type="none" w="med" len="med"/>
-                    </a:lnB>
-                    <a:lnTlToBr w="12700" cmpd="sng">
-                      <a:noFill/>
-                      <a:prstDash val="solid"/>
-                    </a:lnTlToBr>
-                    <a:lnBlToTr w="12700" cmpd="sng">
-                      <a:noFill/>
-                      <a:prstDash val="solid"/>
-                    </a:lnBlToTr>
-                    <a:solidFill>
-                      <a:schemeClr val="bg1">
-                        <a:lumMod val="85000"/>
-                      </a:schemeClr>
-                    </a:solidFill>
-                  </a:tcPr>
-                </a:tc>
-                <a:tc>
-                  <a:txBody>
-                    <a:bodyPr/>
-                    <a:lstStyle/>
-                    <a:p>
-                      <a:endParaRPr lang="en-US" sz="1500" b="0" i="0" dirty="0">
-                        <a:solidFill>
-                          <a:schemeClr val="tx1"/>
-                        </a:solidFill>
-                        <a:latin typeface="GT Walsheim Trial Rg" pitchFamily="2" charset="77"/>
-                      </a:endParaRPr>
-                    </a:p>
-                  </a:txBody>
-                  <a:tcPr>
-                    <a:lnL w="12700" cap="flat" cmpd="sng" algn="ctr">
-                      <a:noFill/>
-                      <a:prstDash val="solid"/>
-                      <a:round/>
-                      <a:headEnd type="none" w="med" len="med"/>
-                      <a:tailEnd type="none" w="med" len="med"/>
-                    </a:lnL>
-                    <a:lnR w="12700" cap="flat" cmpd="sng" algn="ctr">
-                      <a:noFill/>
-                      <a:prstDash val="solid"/>
-                      <a:round/>
-                      <a:headEnd type="none" w="med" len="med"/>
-                      <a:tailEnd type="none" w="med" len="med"/>
-                    </a:lnR>
-                    <a:lnT w="12700" cap="flat" cmpd="sng" algn="ctr">
-                      <a:noFill/>
-                      <a:prstDash val="solid"/>
-                      <a:round/>
-                      <a:headEnd type="none" w="med" len="med"/>
-                      <a:tailEnd type="none" w="med" len="med"/>
-                    </a:lnT>
-                    <a:lnB w="12700" cap="flat" cmpd="sng" algn="ctr">
-                      <a:noFill/>
-                      <a:prstDash val="solid"/>
-                      <a:round/>
-                      <a:headEnd type="none" w="med" len="med"/>
-                      <a:tailEnd type="none" w="med" len="med"/>
-                    </a:lnB>
-                    <a:lnTlToBr w="12700" cap="flat" cmpd="sng" algn="ctr">
-                      <a:solidFill>
-                        <a:schemeClr val="tx1">
-                          <a:lumMod val="50000"/>
-                          <a:lumOff val="50000"/>
-                        </a:schemeClr>
-                      </a:solidFill>
-                      <a:prstDash val="solid"/>
-                      <a:round/>
-                      <a:headEnd type="none" w="med" len="med"/>
-                      <a:tailEnd type="none" w="med" len="med"/>
-                    </a:lnTlToBr>
-                    <a:lnBlToTr w="12700" cap="flat" cmpd="sng" algn="ctr">
-                      <a:solidFill>
-                        <a:schemeClr val="tx1">
-                          <a:lumMod val="50000"/>
-                          <a:lumOff val="50000"/>
-                        </a:schemeClr>
-                      </a:solidFill>
-                      <a:prstDash val="solid"/>
-                      <a:round/>
-                      <a:headEnd type="none" w="med" len="med"/>
-                      <a:tailEnd type="none" w="med" len="med"/>
-                    </a:lnBlToTr>
-                    <a:solidFill>
-                      <a:schemeClr val="bg1">
-                        <a:lumMod val="85000"/>
-                      </a:schemeClr>
-                    </a:solidFill>
-                  </a:tcPr>
-                </a:tc>
-                <a:tc>
-                  <a:txBody>
-                    <a:bodyPr/>
-                    <a:lstStyle/>
-                    <a:p>
-                      <a:r>
-                        <a:rPr lang="en-US" sz="1500" b="0" i="0" dirty="0">
-                          <a:solidFill>
-                            <a:schemeClr val="tx1"/>
-                          </a:solidFill>
-                          <a:latin typeface="GT Walsheim Trial Rg" pitchFamily="2" charset="77"/>
-                        </a:rPr>
-                        <a:t>79.5%</a:t>
-                      </a:r>
-                    </a:p>
-                  </a:txBody>
-                  <a:tcPr>
-                    <a:lnL w="12700" cap="flat" cmpd="sng" algn="ctr">
-                      <a:noFill/>
-                      <a:prstDash val="solid"/>
-                      <a:round/>
-                      <a:headEnd type="none" w="med" len="med"/>
-                      <a:tailEnd type="none" w="med" len="med"/>
-                    </a:lnL>
-                    <a:lnR w="12700" cap="flat" cmpd="sng" algn="ctr">
-                      <a:noFill/>
-                      <a:prstDash val="solid"/>
-                      <a:round/>
-                      <a:headEnd type="none" w="med" len="med"/>
-                      <a:tailEnd type="none" w="med" len="med"/>
-                    </a:lnR>
-                    <a:lnT w="12700" cap="flat" cmpd="sng" algn="ctr">
-                      <a:noFill/>
-                      <a:prstDash val="solid"/>
-                      <a:round/>
-                      <a:headEnd type="none" w="med" len="med"/>
-                      <a:tailEnd type="none" w="med" len="med"/>
-                    </a:lnT>
-                    <a:lnB w="12700" cap="flat" cmpd="sng" algn="ctr">
-                      <a:noFill/>
-                      <a:prstDash val="solid"/>
-                      <a:round/>
-                      <a:headEnd type="none" w="med" len="med"/>
-                      <a:tailEnd type="none" w="med" len="med"/>
-                    </a:lnB>
-                    <a:lnTlToBr w="12700" cmpd="sng">
-                      <a:noFill/>
-                      <a:prstDash val="solid"/>
-                    </a:lnTlToBr>
-                    <a:lnBlToTr w="12700" cmpd="sng">
-                      <a:noFill/>
-                      <a:prstDash val="solid"/>
-                    </a:lnBlToTr>
-                    <a:solidFill>
-                      <a:schemeClr val="bg1">
-                        <a:lumMod val="85000"/>
-                      </a:schemeClr>
-                    </a:solidFill>
-                  </a:tcPr>
-                </a:tc>
-                <a:extLst>
-                  <a:ext uri="{0D108BD9-81ED-4DB2-BD59-A6C34878D82A}">
-                    <a16:rowId xmlns:a16="http://schemas.microsoft.com/office/drawing/2014/main" val="2383985548"/>
-                  </a:ext>
-                </a:extLst>
-              </a:tr>
-              <a:tr h="513176">
-                <a:tc>
-                  <a:txBody>
-                    <a:bodyPr/>
-                    <a:lstStyle/>
-                    <a:p>
-                      <a:r>
-                        <a:rPr lang="en-US" sz="1500" b="0" i="0" dirty="0">
-                          <a:solidFill>
-                            <a:schemeClr val="tx1"/>
-                          </a:solidFill>
-                          <a:latin typeface="GT Walsheim Trial Rg" pitchFamily="2" charset="77"/>
-                        </a:rPr>
-                        <a:t>Balanced Accuracy	</a:t>
-                      </a:r>
-                    </a:p>
-                  </a:txBody>
-                  <a:tcPr>
-                    <a:lnL w="12700" cap="flat" cmpd="sng" algn="ctr">
-                      <a:noFill/>
-                      <a:prstDash val="solid"/>
-                      <a:round/>
-                      <a:headEnd type="none" w="med" len="med"/>
-                      <a:tailEnd type="none" w="med" len="med"/>
-                    </a:lnL>
-                    <a:lnR w="12700" cap="flat" cmpd="sng" algn="ctr">
-                      <a:noFill/>
-                      <a:prstDash val="solid"/>
-                      <a:round/>
-                      <a:headEnd type="none" w="med" len="med"/>
-                      <a:tailEnd type="none" w="med" len="med"/>
-                    </a:lnR>
-                    <a:lnT w="12700" cap="flat" cmpd="sng" algn="ctr">
-                      <a:noFill/>
-                      <a:prstDash val="solid"/>
-                      <a:round/>
-                      <a:headEnd type="none" w="med" len="med"/>
-                      <a:tailEnd type="none" w="med" len="med"/>
-                    </a:lnT>
-                    <a:lnB w="12700" cap="flat" cmpd="sng" algn="ctr">
-                      <a:noFill/>
-                      <a:prstDash val="solid"/>
-                      <a:round/>
-                      <a:headEnd type="none" w="med" len="med"/>
-                      <a:tailEnd type="none" w="med" len="med"/>
-                    </a:lnB>
-                    <a:lnTlToBr w="12700" cmpd="sng">
-                      <a:noFill/>
-                      <a:prstDash val="solid"/>
-                    </a:lnTlToBr>
-                    <a:lnBlToTr w="12700" cmpd="sng">
-                      <a:noFill/>
-                      <a:prstDash val="solid"/>
-                    </a:lnBlToTr>
-                    <a:solidFill>
-                      <a:schemeClr val="bg1">
-                        <a:lumMod val="95000"/>
-                      </a:schemeClr>
-                    </a:solidFill>
-                  </a:tcPr>
-                </a:tc>
-                <a:tc>
-                  <a:txBody>
-                    <a:bodyPr/>
-                    <a:lstStyle/>
-                    <a:p>
-                      <a:endParaRPr lang="en-US" sz="1500" b="0" i="0" dirty="0">
-                        <a:solidFill>
-                          <a:schemeClr val="tx1"/>
-                        </a:solidFill>
-                        <a:latin typeface="GT Walsheim Trial Rg" pitchFamily="2" charset="77"/>
-                      </a:endParaRPr>
-                    </a:p>
-                  </a:txBody>
-                  <a:tcPr>
-                    <a:lnL w="12700" cap="flat" cmpd="sng" algn="ctr">
-                      <a:noFill/>
-                      <a:prstDash val="solid"/>
-                      <a:round/>
-                      <a:headEnd type="none" w="med" len="med"/>
-                      <a:tailEnd type="none" w="med" len="med"/>
-                    </a:lnL>
-                    <a:lnR w="12700" cap="flat" cmpd="sng" algn="ctr">
-                      <a:noFill/>
-                      <a:prstDash val="solid"/>
-                      <a:round/>
-                      <a:headEnd type="none" w="med" len="med"/>
-                      <a:tailEnd type="none" w="med" len="med"/>
-                    </a:lnR>
-                    <a:lnT w="12700" cap="flat" cmpd="sng" algn="ctr">
-                      <a:noFill/>
-                      <a:prstDash val="solid"/>
-                      <a:round/>
-                      <a:headEnd type="none" w="med" len="med"/>
-                      <a:tailEnd type="none" w="med" len="med"/>
-                    </a:lnT>
-                    <a:lnB w="12700" cap="flat" cmpd="sng" algn="ctr">
-                      <a:noFill/>
-                      <a:prstDash val="solid"/>
-                      <a:round/>
-                      <a:headEnd type="none" w="med" len="med"/>
-                      <a:tailEnd type="none" w="med" len="med"/>
-                    </a:lnB>
-                    <a:lnTlToBr w="12700" cap="flat" cmpd="sng" algn="ctr">
-                      <a:solidFill>
-                        <a:schemeClr val="tx1">
-                          <a:lumMod val="50000"/>
-                          <a:lumOff val="50000"/>
-                        </a:schemeClr>
-                      </a:solidFill>
-                      <a:prstDash val="solid"/>
-                      <a:round/>
-                      <a:headEnd type="none" w="med" len="med"/>
-                      <a:tailEnd type="none" w="med" len="med"/>
-                    </a:lnTlToBr>
-                    <a:lnBlToTr w="12700" cap="flat" cmpd="sng" algn="ctr">
-                      <a:solidFill>
-                        <a:schemeClr val="tx1">
-                          <a:lumMod val="50000"/>
-                          <a:lumOff val="50000"/>
-                        </a:schemeClr>
-                      </a:solidFill>
-                      <a:prstDash val="solid"/>
-                      <a:round/>
-                      <a:headEnd type="none" w="med" len="med"/>
-                      <a:tailEnd type="none" w="med" len="med"/>
-                    </a:lnBlToTr>
-                    <a:solidFill>
-                      <a:schemeClr val="bg1">
-                        <a:lumMod val="95000"/>
-                      </a:schemeClr>
-                    </a:solidFill>
-                  </a:tcPr>
-                </a:tc>
-                <a:tc>
-                  <a:txBody>
-                    <a:bodyPr/>
-                    <a:lstStyle/>
-                    <a:p>
-                      <a:r>
-                        <a:rPr lang="en-US" sz="1500" b="0" i="0" dirty="0">
-                          <a:solidFill>
-                            <a:schemeClr val="tx1"/>
-                          </a:solidFill>
-                          <a:latin typeface="GT Walsheim Trial Rg" pitchFamily="2" charset="77"/>
-                        </a:rPr>
-                        <a:t>73.1%</a:t>
-                      </a:r>
-                    </a:p>
-                  </a:txBody>
-                  <a:tcPr>
-                    <a:lnL w="12700" cap="flat" cmpd="sng" algn="ctr">
-                      <a:noFill/>
-                      <a:prstDash val="solid"/>
-                      <a:round/>
-                      <a:headEnd type="none" w="med" len="med"/>
-                      <a:tailEnd type="none" w="med" len="med"/>
-                    </a:lnL>
-                    <a:lnR w="12700" cap="flat" cmpd="sng" algn="ctr">
-                      <a:noFill/>
-                      <a:prstDash val="solid"/>
-                      <a:round/>
-                      <a:headEnd type="none" w="med" len="med"/>
-                      <a:tailEnd type="none" w="med" len="med"/>
-                    </a:lnR>
-                    <a:lnT w="12700" cap="flat" cmpd="sng" algn="ctr">
-                      <a:noFill/>
-                      <a:prstDash val="solid"/>
-                      <a:round/>
-                      <a:headEnd type="none" w="med" len="med"/>
-                      <a:tailEnd type="none" w="med" len="med"/>
-                    </a:lnT>
-                    <a:lnB w="12700" cap="flat" cmpd="sng" algn="ctr">
-                      <a:noFill/>
-                      <a:prstDash val="solid"/>
-                      <a:round/>
-                      <a:headEnd type="none" w="med" len="med"/>
-                      <a:tailEnd type="none" w="med" len="med"/>
-                    </a:lnB>
-                    <a:lnTlToBr w="12700" cmpd="sng">
-                      <a:noFill/>
-                      <a:prstDash val="solid"/>
-                    </a:lnTlToBr>
-                    <a:lnBlToTr w="12700" cmpd="sng">
-                      <a:noFill/>
-                      <a:prstDash val="solid"/>
-                    </a:lnBlToTr>
-                    <a:solidFill>
-                      <a:schemeClr val="bg1">
-                        <a:lumMod val="95000"/>
-                      </a:schemeClr>
-                    </a:solidFill>
-                  </a:tcPr>
-                </a:tc>
-                <a:extLst>
-                  <a:ext uri="{0D108BD9-81ED-4DB2-BD59-A6C34878D82A}">
-                    <a16:rowId xmlns:a16="http://schemas.microsoft.com/office/drawing/2014/main" val="71306824"/>
-                  </a:ext>
-                </a:extLst>
-              </a:tr>
             </a:tbl>
           </a:graphicData>
         </a:graphic>
@@ -8518,7 +10438,7 @@
           <p:cNvPr id="11" name="TextBox 10">
             <a:extLst>
               <a:ext uri="{FF2B5EF4-FFF2-40B4-BE49-F238E27FC236}">
-                <a16:creationId xmlns:a16="http://schemas.microsoft.com/office/drawing/2014/main" id="{A8370A88-D7AF-5FE5-ED80-AEF8EF0AA74E}"/>
+                <a16:creationId xmlns:a16="http://schemas.microsoft.com/office/drawing/2014/main" id="{81A8C484-CD19-7BCB-8ED6-8DA75F360705}"/>
               </a:ext>
             </a:extLst>
           </p:cNvPr>
@@ -8527,8 +10447,8 @@
         </p:nvSpPr>
         <p:spPr>
           <a:xfrm>
-            <a:off x="854438" y="5637952"/>
-            <a:ext cx="10786478" cy="369332"/>
+            <a:off x="791803" y="5177461"/>
+            <a:ext cx="10786478" cy="646331"/>
           </a:xfrm>
           <a:prstGeom prst="rect">
             <a:avLst/>
@@ -8547,7 +10467,7 @@
                 <a:effectLst/>
                 <a:latin typeface="GT Walsheim Trial Rg" pitchFamily="2" charset="77"/>
               </a:rPr>
-              <a:t>Fisher's Exact Test: p = 0.0005 — anomalies are non-uniformly distributed across agent types.</a:t>
+              <a:t>Without filtering: vehicles appear slower than cyclists due to stopped cars at intersections. Filtering restores expected ordering.</a:t>
             </a:r>
             <a:endParaRPr lang="en-US" dirty="0">
               <a:effectLst/>
@@ -8556,57 +10476,10 @@
           </a:p>
         </p:txBody>
       </p:sp>
-      <p:pic>
-        <p:nvPicPr>
-          <p:cNvPr id="2" name="Picture 4" descr="Waymo branded color scheme">
-            <a:extLst>
-              <a:ext uri="{FF2B5EF4-FFF2-40B4-BE49-F238E27FC236}">
-                <a16:creationId xmlns:a16="http://schemas.microsoft.com/office/drawing/2014/main" id="{2EEF9C1F-B66B-6B4A-9B7B-F8AC1776C572}"/>
-              </a:ext>
-            </a:extLst>
-          </p:cNvPr>
-          <p:cNvPicPr>
-            <a:picLocks noChangeAspect="1" noChangeArrowheads="1"/>
-          </p:cNvPicPr>
-          <p:nvPr/>
-        </p:nvPicPr>
-        <p:blipFill>
-          <a:blip r:embed="rId4">
-            <a:extLst>
-              <a:ext uri="{28A0092B-C50C-407E-A947-70E740481C1C}">
-                <a14:useLocalDpi xmlns:a14="http://schemas.microsoft.com/office/drawing/2010/main" val="0"/>
-              </a:ext>
-            </a:extLst>
-          </a:blip>
-          <a:srcRect/>
-          <a:stretch>
-            <a:fillRect/>
-          </a:stretch>
-        </p:blipFill>
-        <p:spPr bwMode="auto">
-          <a:xfrm>
-            <a:off x="13089835" y="-1189446"/>
-            <a:ext cx="5334000" cy="2006600"/>
-          </a:xfrm>
-          <a:prstGeom prst="rect">
-            <a:avLst/>
-          </a:prstGeom>
-          <a:noFill/>
-          <a:extLst>
-            <a:ext uri="{909E8E84-426E-40DD-AFC4-6F175D3DCCD1}">
-              <a14:hiddenFill xmlns:a14="http://schemas.microsoft.com/office/drawing/2010/main">
-                <a:solidFill>
-                  <a:srgbClr val="FFFFFF"/>
-                </a:solidFill>
-              </a14:hiddenFill>
-            </a:ext>
-          </a:extLst>
-        </p:spPr>
-      </p:pic>
     </p:spTree>
     <p:extLst>
       <p:ext uri="{BB962C8B-B14F-4D97-AF65-F5344CB8AC3E}">
-        <p14:creationId xmlns:p14="http://schemas.microsoft.com/office/powerpoint/2010/main" val="3688322972"/>
+        <p14:creationId xmlns:p14="http://schemas.microsoft.com/office/powerpoint/2010/main" val="3511431320"/>
       </p:ext>
     </p:extLst>
   </p:cSld>
@@ -8617,14 +10490,14 @@
 </file>
 
 <file path=ppt/slides/slide11.xml><?xml version="1.0" encoding="utf-8"?>
-<p:sld xmlns:a="http://schemas.openxmlformats.org/drawingml/2006/main" xmlns:r="http://schemas.openxmlformats.org/officeDocument/2006/relationships" xmlns:p="http://schemas.openxmlformats.org/presentationml/2006/main">
+<p:sld xmlns:a="http://schemas.openxmlformats.org/drawingml/2006/main" xmlns:r="http://schemas.openxmlformats.org/officeDocument/2006/relationships" xmlns:p="http://schemas.openxmlformats.org/presentationml/2006/main" show="0">
   <p:cSld>
     <p:spTree>
       <p:nvGrpSpPr>
         <p:cNvPr id="1" name="">
           <a:extLst>
             <a:ext uri="{FF2B5EF4-FFF2-40B4-BE49-F238E27FC236}">
-              <a16:creationId xmlns:a16="http://schemas.microsoft.com/office/drawing/2014/main" id="{A31F0CC6-4FF6-0E4E-CF61-DBA7A29F10E0}"/>
+              <a16:creationId xmlns:a16="http://schemas.microsoft.com/office/drawing/2014/main" id="{6A2C1864-B821-A354-EF4D-BEA1BAB91A28}"/>
             </a:ext>
           </a:extLst>
         </p:cNvPr>
@@ -8644,7 +10517,7 @@
           <p:cNvPr id="3" name="Freeform 2">
             <a:extLst>
               <a:ext uri="{FF2B5EF4-FFF2-40B4-BE49-F238E27FC236}">
-                <a16:creationId xmlns:a16="http://schemas.microsoft.com/office/drawing/2014/main" id="{B627A361-7570-7601-C26C-091F1FFDB3EB}"/>
+                <a16:creationId xmlns:a16="http://schemas.microsoft.com/office/drawing/2014/main" id="{C8E9BA9D-DCF3-4861-65EB-D29E6BD5BF6E}"/>
               </a:ext>
             </a:extLst>
           </p:cNvPr>
@@ -8736,7 +10609,7 @@
           <p:cNvPr id="5" name="Freeform 4">
             <a:extLst>
               <a:ext uri="{FF2B5EF4-FFF2-40B4-BE49-F238E27FC236}">
-                <a16:creationId xmlns:a16="http://schemas.microsoft.com/office/drawing/2014/main" id="{E34AB5F9-1251-1ADB-EB39-767E848BDE32}"/>
+                <a16:creationId xmlns:a16="http://schemas.microsoft.com/office/drawing/2014/main" id="{E120A76A-6063-D435-D8DA-689329698EAB}"/>
               </a:ext>
             </a:extLst>
           </p:cNvPr>
@@ -8828,6 +10701,1949 @@
           <p:cNvPr id="1026" name="Picture 2" descr="Waymo Logo">
             <a:extLst>
               <a:ext uri="{FF2B5EF4-FFF2-40B4-BE49-F238E27FC236}">
+                <a16:creationId xmlns:a16="http://schemas.microsoft.com/office/drawing/2014/main" id="{CE773485-6780-02DC-B58E-3EECCE6B675F}"/>
+              </a:ext>
+            </a:extLst>
+          </p:cNvPr>
+          <p:cNvPicPr>
+            <a:picLocks noChangeAspect="1" noChangeArrowheads="1"/>
+          </p:cNvPicPr>
+          <p:nvPr/>
+        </p:nvPicPr>
+        <p:blipFill>
+          <a:blip r:embed="rId3">
+            <a:extLst>
+              <a:ext uri="{28A0092B-C50C-407E-A947-70E740481C1C}">
+                <a14:useLocalDpi xmlns:a14="http://schemas.microsoft.com/office/drawing/2010/main" val="0"/>
+              </a:ext>
+            </a:extLst>
+          </a:blip>
+          <a:srcRect/>
+          <a:stretch>
+            <a:fillRect/>
+          </a:stretch>
+        </p:blipFill>
+        <p:spPr bwMode="auto">
+          <a:xfrm>
+            <a:off x="10795378" y="425703"/>
+            <a:ext cx="782903" cy="782903"/>
+          </a:xfrm>
+          <a:prstGeom prst="rect">
+            <a:avLst/>
+          </a:prstGeom>
+          <a:noFill/>
+          <a:extLst>
+            <a:ext uri="{909E8E84-426E-40DD-AFC4-6F175D3DCCD1}">
+              <a14:hiddenFill xmlns:a14="http://schemas.microsoft.com/office/drawing/2010/main">
+                <a:solidFill>
+                  <a:srgbClr val="FFFFFF"/>
+                </a:solidFill>
+              </a14:hiddenFill>
+            </a:ext>
+          </a:extLst>
+        </p:spPr>
+      </p:pic>
+      <p:sp>
+        <p:nvSpPr>
+          <p:cNvPr id="4" name="Title 3">
+            <a:extLst>
+              <a:ext uri="{FF2B5EF4-FFF2-40B4-BE49-F238E27FC236}">
+                <a16:creationId xmlns:a16="http://schemas.microsoft.com/office/drawing/2014/main" id="{12EA372C-6D3A-EED6-6C44-E63BC22B6F82}"/>
+              </a:ext>
+            </a:extLst>
+          </p:cNvPr>
+          <p:cNvSpPr>
+            <a:spLocks noGrp="1"/>
+          </p:cNvSpPr>
+          <p:nvPr>
+            <p:ph type="ctrTitle"/>
+          </p:nvPr>
+        </p:nvSpPr>
+        <p:spPr>
+          <a:xfrm>
+            <a:off x="716478" y="447821"/>
+            <a:ext cx="3073202" cy="369333"/>
+          </a:xfrm>
+        </p:spPr>
+        <p:txBody>
+          <a:bodyPr>
+            <a:normAutofit/>
+          </a:bodyPr>
+          <a:lstStyle/>
+          <a:p>
+            <a:pPr algn="l"/>
+            <a:r>
+              <a:rPr lang="en-US" sz="1500" dirty="0">
+                <a:solidFill>
+                  <a:srgbClr val="989DA2"/>
+                </a:solidFill>
+                <a:latin typeface="GT Walsheim Trial Rg" pitchFamily="2" charset="77"/>
+              </a:rPr>
+              <a:t>SECTION B - RESULTS  </a:t>
+            </a:r>
+          </a:p>
+        </p:txBody>
+      </p:sp>
+      <p:sp>
+        <p:nvSpPr>
+          <p:cNvPr id="8" name="TextBox 7">
+            <a:extLst>
+              <a:ext uri="{FF2B5EF4-FFF2-40B4-BE49-F238E27FC236}">
+                <a16:creationId xmlns:a16="http://schemas.microsoft.com/office/drawing/2014/main" id="{F9CA362B-3511-B893-5B5B-8C6464343376}"/>
+              </a:ext>
+            </a:extLst>
+          </p:cNvPr>
+          <p:cNvSpPr txBox="1"/>
+          <p:nvPr/>
+        </p:nvSpPr>
+        <p:spPr>
+          <a:xfrm>
+            <a:off x="716476" y="952090"/>
+            <a:ext cx="9236415" cy="630942"/>
+          </a:xfrm>
+          <a:prstGeom prst="rect">
+            <a:avLst/>
+          </a:prstGeom>
+          <a:noFill/>
+        </p:spPr>
+        <p:txBody>
+          <a:bodyPr wrap="square">
+            <a:spAutoFit/>
+          </a:bodyPr>
+          <a:lstStyle/>
+          <a:p>
+            <a:r>
+              <a:rPr lang="en-US" sz="3500" dirty="0">
+                <a:latin typeface="GT Walsheim Trial Rg" pitchFamily="2" charset="77"/>
+              </a:rPr>
+              <a:t>Results: Anomaly Detection Results</a:t>
+            </a:r>
+          </a:p>
+        </p:txBody>
+      </p:sp>
+      <p:sp>
+        <p:nvSpPr>
+          <p:cNvPr id="6" name="Rectangle 5">
+            <a:extLst>
+              <a:ext uri="{FF2B5EF4-FFF2-40B4-BE49-F238E27FC236}">
+                <a16:creationId xmlns:a16="http://schemas.microsoft.com/office/drawing/2014/main" id="{20AA69BA-C691-5B0A-9C77-BCF673AA2090}"/>
+              </a:ext>
+            </a:extLst>
+          </p:cNvPr>
+          <p:cNvSpPr/>
+          <p:nvPr/>
+        </p:nvSpPr>
+        <p:spPr>
+          <a:xfrm>
+            <a:off x="854438" y="1839301"/>
+            <a:ext cx="10723843" cy="450883"/>
+          </a:xfrm>
+          <a:prstGeom prst="rect">
+            <a:avLst/>
+          </a:prstGeom>
+          <a:solidFill>
+            <a:srgbClr val="949AA0"/>
+          </a:solidFill>
+          <a:ln>
+            <a:noFill/>
+          </a:ln>
+        </p:spPr>
+        <p:style>
+          <a:lnRef idx="2">
+            <a:schemeClr val="accent1">
+              <a:shade val="15000"/>
+            </a:schemeClr>
+          </a:lnRef>
+          <a:fillRef idx="1">
+            <a:schemeClr val="accent1"/>
+          </a:fillRef>
+          <a:effectRef idx="0">
+            <a:schemeClr val="accent1"/>
+          </a:effectRef>
+          <a:fontRef idx="minor">
+            <a:schemeClr val="lt1"/>
+          </a:fontRef>
+        </p:style>
+        <p:txBody>
+          <a:bodyPr rtlCol="0" anchor="ctr"/>
+          <a:lstStyle/>
+          <a:p>
+            <a:pPr algn="ctr"/>
+            <a:endParaRPr lang="en-US"/>
+          </a:p>
+        </p:txBody>
+      </p:sp>
+      <p:sp>
+        <p:nvSpPr>
+          <p:cNvPr id="10" name="TextBox 9">
+            <a:extLst>
+              <a:ext uri="{FF2B5EF4-FFF2-40B4-BE49-F238E27FC236}">
+                <a16:creationId xmlns:a16="http://schemas.microsoft.com/office/drawing/2014/main" id="{0FB96CA1-CB36-826F-5576-3E7A3D1F46E7}"/>
+              </a:ext>
+            </a:extLst>
+          </p:cNvPr>
+          <p:cNvSpPr txBox="1"/>
+          <p:nvPr/>
+        </p:nvSpPr>
+        <p:spPr>
+          <a:xfrm>
+            <a:off x="4001985" y="1892389"/>
+            <a:ext cx="4188029" cy="369332"/>
+          </a:xfrm>
+          <a:prstGeom prst="rect">
+            <a:avLst/>
+          </a:prstGeom>
+          <a:noFill/>
+        </p:spPr>
+        <p:txBody>
+          <a:bodyPr wrap="square">
+            <a:spAutoFit/>
+          </a:bodyPr>
+          <a:lstStyle/>
+          <a:p>
+            <a:pPr algn="l"/>
+            <a:r>
+              <a:rPr lang="en-US" dirty="0">
+                <a:solidFill>
+                  <a:schemeClr val="bg1"/>
+                </a:solidFill>
+                <a:effectLst/>
+                <a:latin typeface="GT Walsheim Trial Rg" pitchFamily="2" charset="77"/>
+              </a:rPr>
+              <a:t>Random Forest Classifier Performance</a:t>
+            </a:r>
+          </a:p>
+        </p:txBody>
+      </p:sp>
+      <p:sp>
+        <p:nvSpPr>
+          <p:cNvPr id="19" name="TextBox 18">
+            <a:extLst>
+              <a:ext uri="{FF2B5EF4-FFF2-40B4-BE49-F238E27FC236}">
+                <a16:creationId xmlns:a16="http://schemas.microsoft.com/office/drawing/2014/main" id="{7763328F-5B74-FF89-6105-41348B1621B6}"/>
+              </a:ext>
+            </a:extLst>
+          </p:cNvPr>
+          <p:cNvSpPr txBox="1"/>
+          <p:nvPr/>
+        </p:nvSpPr>
+        <p:spPr>
+          <a:xfrm>
+            <a:off x="7520578" y="9301668"/>
+            <a:ext cx="3390637" cy="1200329"/>
+          </a:xfrm>
+          <a:prstGeom prst="rect">
+            <a:avLst/>
+          </a:prstGeom>
+          <a:noFill/>
+        </p:spPr>
+        <p:txBody>
+          <a:bodyPr wrap="square" rtlCol="0">
+            <a:spAutoFit/>
+          </a:bodyPr>
+          <a:lstStyle/>
+          <a:p>
+            <a:r>
+              <a:rPr lang="en-US" dirty="0">
+                <a:solidFill>
+                  <a:schemeClr val="bg1"/>
+                </a:solidFill>
+                <a:latin typeface="GT Walsheim Trial Rg" pitchFamily="2" charset="77"/>
+              </a:rPr>
+              <a:t>— 80 / 20 train / test split</a:t>
+            </a:r>
+          </a:p>
+          <a:p>
+            <a:r>
+              <a:rPr lang="en-US" dirty="0">
+                <a:solidFill>
+                  <a:schemeClr val="bg1"/>
+                </a:solidFill>
+                <a:latin typeface="GT Walsheim Trial Rg" pitchFamily="2" charset="77"/>
+              </a:rPr>
+              <a:t>— 5-fold cross-validation on training set.</a:t>
+            </a:r>
+          </a:p>
+          <a:p>
+            <a:r>
+              <a:rPr lang="en-US" dirty="0">
+                <a:solidFill>
+                  <a:schemeClr val="bg1"/>
+                </a:solidFill>
+                <a:latin typeface="GT Walsheim Trial Rg" pitchFamily="2" charset="77"/>
+              </a:rPr>
+              <a:t>— Metrics: RMSE (meters) · R²</a:t>
+            </a:r>
+          </a:p>
+        </p:txBody>
+      </p:sp>
+      <p:sp>
+        <p:nvSpPr>
+          <p:cNvPr id="20" name="Rectangle 19">
+            <a:extLst>
+              <a:ext uri="{FF2B5EF4-FFF2-40B4-BE49-F238E27FC236}">
+                <a16:creationId xmlns:a16="http://schemas.microsoft.com/office/drawing/2014/main" id="{B8A315BA-FB29-FE05-79F7-04FDFFF015FC}"/>
+              </a:ext>
+            </a:extLst>
+          </p:cNvPr>
+          <p:cNvSpPr/>
+          <p:nvPr/>
+        </p:nvSpPr>
+        <p:spPr>
+          <a:xfrm>
+            <a:off x="-223735" y="10155892"/>
+            <a:ext cx="6602278" cy="1156496"/>
+          </a:xfrm>
+          <a:prstGeom prst="rect">
+            <a:avLst/>
+          </a:prstGeom>
+          <a:solidFill>
+            <a:srgbClr val="0078FF"/>
+          </a:solidFill>
+          <a:ln>
+            <a:noFill/>
+          </a:ln>
+        </p:spPr>
+        <p:style>
+          <a:lnRef idx="2">
+            <a:schemeClr val="accent1">
+              <a:shade val="15000"/>
+            </a:schemeClr>
+          </a:lnRef>
+          <a:fillRef idx="1">
+            <a:schemeClr val="accent1"/>
+          </a:fillRef>
+          <a:effectRef idx="0">
+            <a:schemeClr val="accent1"/>
+          </a:effectRef>
+          <a:fontRef idx="minor">
+            <a:schemeClr val="lt1"/>
+          </a:fontRef>
+        </p:style>
+        <p:txBody>
+          <a:bodyPr rtlCol="0" anchor="ctr"/>
+          <a:lstStyle/>
+          <a:p>
+            <a:pPr algn="ctr"/>
+            <a:endParaRPr lang="en-US"/>
+          </a:p>
+        </p:txBody>
+      </p:sp>
+      <p:sp>
+        <p:nvSpPr>
+          <p:cNvPr id="21" name="TextBox 20">
+            <a:extLst>
+              <a:ext uri="{FF2B5EF4-FFF2-40B4-BE49-F238E27FC236}">
+                <a16:creationId xmlns:a16="http://schemas.microsoft.com/office/drawing/2014/main" id="{612B3246-6737-9678-1B7D-7F8D35A1BFDE}"/>
+              </a:ext>
+            </a:extLst>
+          </p:cNvPr>
+          <p:cNvSpPr txBox="1"/>
+          <p:nvPr/>
+        </p:nvSpPr>
+        <p:spPr>
+          <a:xfrm>
+            <a:off x="541195" y="10314693"/>
+            <a:ext cx="5458087" cy="784830"/>
+          </a:xfrm>
+          <a:prstGeom prst="rect">
+            <a:avLst/>
+          </a:prstGeom>
+          <a:noFill/>
+        </p:spPr>
+        <p:txBody>
+          <a:bodyPr wrap="square">
+            <a:spAutoFit/>
+          </a:bodyPr>
+          <a:lstStyle/>
+          <a:p>
+            <a:pPr algn="l"/>
+            <a:r>
+              <a:rPr lang="en-US" sz="1500" dirty="0">
+                <a:solidFill>
+                  <a:schemeClr val="bg1"/>
+                </a:solidFill>
+                <a:effectLst/>
+                <a:latin typeface="GT Walsheim Trial Lt" pitchFamily="2" charset="77"/>
+              </a:rPr>
+              <a:t>Stationary agents have near-zero displacement — trivially easy to predict. The two conditions reveal whether R² reflects real predictive power or dataset composition.</a:t>
+            </a:r>
+          </a:p>
+        </p:txBody>
+      </p:sp>
+      <p:sp>
+        <p:nvSpPr>
+          <p:cNvPr id="22" name="TextBox 21">
+            <a:extLst>
+              <a:ext uri="{FF2B5EF4-FFF2-40B4-BE49-F238E27FC236}">
+                <a16:creationId xmlns:a16="http://schemas.microsoft.com/office/drawing/2014/main" id="{153CB52F-9BFB-85AD-4F24-2D7EA4309EC4}"/>
+              </a:ext>
+            </a:extLst>
+          </p:cNvPr>
+          <p:cNvSpPr txBox="1"/>
+          <p:nvPr/>
+        </p:nvSpPr>
+        <p:spPr>
+          <a:xfrm>
+            <a:off x="-688275" y="9607790"/>
+            <a:ext cx="1582840" cy="2400657"/>
+          </a:xfrm>
+          <a:prstGeom prst="rect">
+            <a:avLst/>
+          </a:prstGeom>
+          <a:noFill/>
+        </p:spPr>
+        <p:txBody>
+          <a:bodyPr wrap="square">
+            <a:spAutoFit/>
+          </a:bodyPr>
+          <a:lstStyle/>
+          <a:p>
+            <a:pPr algn="ctr">
+              <a:buNone/>
+            </a:pPr>
+            <a:r>
+              <a:rPr lang="en-US" sz="15000" b="0" i="0" dirty="0">
+                <a:solidFill>
+                  <a:schemeClr val="bg1">
+                    <a:alpha val="20000"/>
+                  </a:schemeClr>
+                </a:solidFill>
+                <a:effectLst/>
+                <a:latin typeface="GT Walsheim Trial Rg" pitchFamily="2" charset="77"/>
+              </a:rPr>
+              <a:t>"</a:t>
+            </a:r>
+          </a:p>
+        </p:txBody>
+      </p:sp>
+      <p:graphicFrame>
+        <p:nvGraphicFramePr>
+          <p:cNvPr id="9" name="Table 8">
+            <a:extLst>
+              <a:ext uri="{FF2B5EF4-FFF2-40B4-BE49-F238E27FC236}">
+                <a16:creationId xmlns:a16="http://schemas.microsoft.com/office/drawing/2014/main" id="{2F351178-9490-D064-1CA6-081BE3C8614C}"/>
+              </a:ext>
+            </a:extLst>
+          </p:cNvPr>
+          <p:cNvGraphicFramePr>
+            <a:graphicFrameLocks noGrp="1"/>
+          </p:cNvGraphicFramePr>
+          <p:nvPr>
+            <p:extLst>
+              <p:ext uri="{D42A27DB-BD31-4B8C-83A1-F6EECF244321}">
+                <p14:modId xmlns:p14="http://schemas.microsoft.com/office/powerpoint/2010/main" val="782688522"/>
+              </p:ext>
+            </p:extLst>
+          </p:nvPr>
+        </p:nvGraphicFramePr>
+        <p:xfrm>
+          <a:off x="854438" y="2513195"/>
+          <a:ext cx="10723843" cy="2885920"/>
+        </p:xfrm>
+        <a:graphic>
+          <a:graphicData uri="http://schemas.openxmlformats.org/drawingml/2006/table">
+            <a:tbl>
+              <a:tblPr firstRow="1" bandRow="1">
+                <a:tableStyleId>{073A0DAA-6AF3-43AB-8588-CEC1D06C72B9}</a:tableStyleId>
+              </a:tblPr>
+              <a:tblGrid>
+                <a:gridCol w="2413651">
+                  <a:extLst>
+                    <a:ext uri="{9D8B030D-6E8A-4147-A177-3AD203B41FA5}">
+                      <a16:colId xmlns:a16="http://schemas.microsoft.com/office/drawing/2014/main" val="1610543496"/>
+                    </a:ext>
+                  </a:extLst>
+                </a:gridCol>
+                <a:gridCol w="3747930">
+                  <a:extLst>
+                    <a:ext uri="{9D8B030D-6E8A-4147-A177-3AD203B41FA5}">
+                      <a16:colId xmlns:a16="http://schemas.microsoft.com/office/drawing/2014/main" val="2940384537"/>
+                    </a:ext>
+                  </a:extLst>
+                </a:gridCol>
+                <a:gridCol w="4562262">
+                  <a:extLst>
+                    <a:ext uri="{9D8B030D-6E8A-4147-A177-3AD203B41FA5}">
+                      <a16:colId xmlns:a16="http://schemas.microsoft.com/office/drawing/2014/main" val="3740313691"/>
+                    </a:ext>
+                  </a:extLst>
+                </a:gridCol>
+              </a:tblGrid>
+              <a:tr h="282420">
+                <a:tc>
+                  <a:txBody>
+                    <a:bodyPr/>
+                    <a:lstStyle/>
+                    <a:p>
+                      <a:r>
+                        <a:rPr lang="en-US" sz="1500" b="0" i="0" dirty="0">
+                          <a:solidFill>
+                            <a:schemeClr val="bg1"/>
+                          </a:solidFill>
+                          <a:latin typeface="GT Walsheim Trial Rg" pitchFamily="2" charset="77"/>
+                        </a:rPr>
+                        <a:t>Metric</a:t>
+                      </a:r>
+                    </a:p>
+                  </a:txBody>
+                  <a:tcPr>
+                    <a:lnL w="12700" cap="flat" cmpd="sng" algn="ctr">
+                      <a:noFill/>
+                      <a:prstDash val="solid"/>
+                      <a:round/>
+                      <a:headEnd type="none" w="med" len="med"/>
+                      <a:tailEnd type="none" w="med" len="med"/>
+                    </a:lnL>
+                    <a:lnR w="12700" cap="flat" cmpd="sng" algn="ctr">
+                      <a:noFill/>
+                      <a:prstDash val="solid"/>
+                      <a:round/>
+                      <a:headEnd type="none" w="med" len="med"/>
+                      <a:tailEnd type="none" w="med" len="med"/>
+                    </a:lnR>
+                    <a:lnT w="12700" cap="flat" cmpd="sng" algn="ctr">
+                      <a:noFill/>
+                      <a:prstDash val="solid"/>
+                      <a:round/>
+                      <a:headEnd type="none" w="med" len="med"/>
+                      <a:tailEnd type="none" w="med" len="med"/>
+                    </a:lnT>
+                    <a:lnB w="12700" cap="flat" cmpd="sng" algn="ctr">
+                      <a:noFill/>
+                      <a:prstDash val="solid"/>
+                      <a:round/>
+                      <a:headEnd type="none" w="med" len="med"/>
+                      <a:tailEnd type="none" w="med" len="med"/>
+                    </a:lnB>
+                    <a:lnTlToBr w="12700" cmpd="sng">
+                      <a:noFill/>
+                      <a:prstDash val="solid"/>
+                    </a:lnTlToBr>
+                    <a:lnBlToTr w="12700" cmpd="sng">
+                      <a:noFill/>
+                      <a:prstDash val="solid"/>
+                    </a:lnBlToTr>
+                    <a:solidFill>
+                      <a:srgbClr val="949AA0"/>
+                    </a:solidFill>
+                  </a:tcPr>
+                </a:tc>
+                <a:tc>
+                  <a:txBody>
+                    <a:bodyPr/>
+                    <a:lstStyle/>
+                    <a:p>
+                      <a:r>
+                        <a:rPr lang="en-US" sz="1500" b="0" i="0" dirty="0">
+                          <a:solidFill>
+                            <a:schemeClr val="bg1"/>
+                          </a:solidFill>
+                          <a:latin typeface="GT Walsheim Trial Rg" pitchFamily="2" charset="77"/>
+                        </a:rPr>
+                        <a:t>CV (Train)</a:t>
+                      </a:r>
+                    </a:p>
+                  </a:txBody>
+                  <a:tcPr>
+                    <a:lnL w="12700" cap="flat" cmpd="sng" algn="ctr">
+                      <a:noFill/>
+                      <a:prstDash val="solid"/>
+                      <a:round/>
+                      <a:headEnd type="none" w="med" len="med"/>
+                      <a:tailEnd type="none" w="med" len="med"/>
+                    </a:lnL>
+                    <a:lnR w="12700" cap="flat" cmpd="sng" algn="ctr">
+                      <a:noFill/>
+                      <a:prstDash val="solid"/>
+                      <a:round/>
+                      <a:headEnd type="none" w="med" len="med"/>
+                      <a:tailEnd type="none" w="med" len="med"/>
+                    </a:lnR>
+                    <a:lnT w="12700" cap="flat" cmpd="sng" algn="ctr">
+                      <a:noFill/>
+                      <a:prstDash val="solid"/>
+                      <a:round/>
+                      <a:headEnd type="none" w="med" len="med"/>
+                      <a:tailEnd type="none" w="med" len="med"/>
+                    </a:lnT>
+                    <a:lnB w="12700" cap="flat" cmpd="sng" algn="ctr">
+                      <a:noFill/>
+                      <a:prstDash val="solid"/>
+                      <a:round/>
+                      <a:headEnd type="none" w="med" len="med"/>
+                      <a:tailEnd type="none" w="med" len="med"/>
+                    </a:lnB>
+                    <a:lnTlToBr w="12700" cmpd="sng">
+                      <a:noFill/>
+                      <a:prstDash val="solid"/>
+                    </a:lnTlToBr>
+                    <a:lnBlToTr w="12700" cmpd="sng">
+                      <a:noFill/>
+                      <a:prstDash val="solid"/>
+                    </a:lnBlToTr>
+                    <a:solidFill>
+                      <a:srgbClr val="949AA0"/>
+                    </a:solidFill>
+                  </a:tcPr>
+                </a:tc>
+                <a:tc>
+                  <a:txBody>
+                    <a:bodyPr/>
+                    <a:lstStyle/>
+                    <a:p>
+                      <a:r>
+                        <a:rPr lang="en-US" sz="1500" b="0" i="0" dirty="0">
+                          <a:solidFill>
+                            <a:schemeClr val="bg1"/>
+                          </a:solidFill>
+                          <a:latin typeface="GT Walsheim Trial Rg" pitchFamily="2" charset="77"/>
+                        </a:rPr>
+                        <a:t>Test (Hold-out)</a:t>
+                      </a:r>
+                    </a:p>
+                  </a:txBody>
+                  <a:tcPr>
+                    <a:lnL w="12700" cap="flat" cmpd="sng" algn="ctr">
+                      <a:noFill/>
+                      <a:prstDash val="solid"/>
+                      <a:round/>
+                      <a:headEnd type="none" w="med" len="med"/>
+                      <a:tailEnd type="none" w="med" len="med"/>
+                    </a:lnL>
+                    <a:lnR w="12700" cap="flat" cmpd="sng" algn="ctr">
+                      <a:noFill/>
+                      <a:prstDash val="solid"/>
+                      <a:round/>
+                      <a:headEnd type="none" w="med" len="med"/>
+                      <a:tailEnd type="none" w="med" len="med"/>
+                    </a:lnR>
+                    <a:lnT w="12700" cap="flat" cmpd="sng" algn="ctr">
+                      <a:noFill/>
+                      <a:prstDash val="solid"/>
+                      <a:round/>
+                      <a:headEnd type="none" w="med" len="med"/>
+                      <a:tailEnd type="none" w="med" len="med"/>
+                    </a:lnT>
+                    <a:lnB w="12700" cap="flat" cmpd="sng" algn="ctr">
+                      <a:noFill/>
+                      <a:prstDash val="solid"/>
+                      <a:round/>
+                      <a:headEnd type="none" w="med" len="med"/>
+                      <a:tailEnd type="none" w="med" len="med"/>
+                    </a:lnB>
+                    <a:lnTlToBr w="12700" cmpd="sng">
+                      <a:noFill/>
+                      <a:prstDash val="solid"/>
+                    </a:lnTlToBr>
+                    <a:lnBlToTr w="12700" cmpd="sng">
+                      <a:noFill/>
+                      <a:prstDash val="solid"/>
+                    </a:lnBlToTr>
+                    <a:solidFill>
+                      <a:srgbClr val="949AA0"/>
+                    </a:solidFill>
+                  </a:tcPr>
+                </a:tc>
+                <a:extLst>
+                  <a:ext uri="{0D108BD9-81ED-4DB2-BD59-A6C34878D82A}">
+                    <a16:rowId xmlns:a16="http://schemas.microsoft.com/office/drawing/2014/main" val="4220759275"/>
+                  </a:ext>
+                </a:extLst>
+              </a:tr>
+              <a:tr h="513176">
+                <a:tc>
+                  <a:txBody>
+                    <a:bodyPr/>
+                    <a:lstStyle/>
+                    <a:p>
+                      <a:r>
+                        <a:rPr lang="en-US" sz="1500" b="0" i="0" dirty="0">
+                          <a:solidFill>
+                            <a:schemeClr val="tx1"/>
+                          </a:solidFill>
+                          <a:latin typeface="GT Walsheim Trial Rg" pitchFamily="2" charset="77"/>
+                        </a:rPr>
+                        <a:t>AUC-ROC</a:t>
+                      </a:r>
+                    </a:p>
+                  </a:txBody>
+                  <a:tcPr>
+                    <a:lnL w="12700" cap="flat" cmpd="sng" algn="ctr">
+                      <a:noFill/>
+                      <a:prstDash val="solid"/>
+                      <a:round/>
+                      <a:headEnd type="none" w="med" len="med"/>
+                      <a:tailEnd type="none" w="med" len="med"/>
+                    </a:lnL>
+                    <a:lnR w="12700" cap="flat" cmpd="sng" algn="ctr">
+                      <a:noFill/>
+                      <a:prstDash val="solid"/>
+                      <a:round/>
+                      <a:headEnd type="none" w="med" len="med"/>
+                      <a:tailEnd type="none" w="med" len="med"/>
+                    </a:lnR>
+                    <a:lnT w="12700" cap="flat" cmpd="sng" algn="ctr">
+                      <a:noFill/>
+                      <a:prstDash val="solid"/>
+                      <a:round/>
+                      <a:headEnd type="none" w="med" len="med"/>
+                      <a:tailEnd type="none" w="med" len="med"/>
+                    </a:lnT>
+                    <a:lnB w="12700" cap="flat" cmpd="sng" algn="ctr">
+                      <a:noFill/>
+                      <a:prstDash val="solid"/>
+                      <a:round/>
+                      <a:headEnd type="none" w="med" len="med"/>
+                      <a:tailEnd type="none" w="med" len="med"/>
+                    </a:lnB>
+                    <a:lnTlToBr w="12700" cmpd="sng">
+                      <a:noFill/>
+                      <a:prstDash val="solid"/>
+                    </a:lnTlToBr>
+                    <a:lnBlToTr w="12700" cmpd="sng">
+                      <a:noFill/>
+                      <a:prstDash val="solid"/>
+                    </a:lnBlToTr>
+                    <a:solidFill>
+                      <a:schemeClr val="bg1">
+                        <a:lumMod val="95000"/>
+                      </a:schemeClr>
+                    </a:solidFill>
+                  </a:tcPr>
+                </a:tc>
+                <a:tc>
+                  <a:txBody>
+                    <a:bodyPr/>
+                    <a:lstStyle/>
+                    <a:p>
+                      <a:r>
+                        <a:rPr lang="en-US" sz="1500" b="0" i="0" dirty="0">
+                          <a:solidFill>
+                            <a:schemeClr val="tx1"/>
+                          </a:solidFill>
+                          <a:latin typeface="GT Walsheim Trial Rg" pitchFamily="2" charset="77"/>
+                        </a:rPr>
+                        <a:t>0.887</a:t>
+                      </a:r>
+                    </a:p>
+                  </a:txBody>
+                  <a:tcPr>
+                    <a:lnL w="12700" cap="flat" cmpd="sng" algn="ctr">
+                      <a:noFill/>
+                      <a:prstDash val="solid"/>
+                      <a:round/>
+                      <a:headEnd type="none" w="med" len="med"/>
+                      <a:tailEnd type="none" w="med" len="med"/>
+                    </a:lnL>
+                    <a:lnR w="12700" cap="flat" cmpd="sng" algn="ctr">
+                      <a:noFill/>
+                      <a:prstDash val="solid"/>
+                      <a:round/>
+                      <a:headEnd type="none" w="med" len="med"/>
+                      <a:tailEnd type="none" w="med" len="med"/>
+                    </a:lnR>
+                    <a:lnT w="12700" cap="flat" cmpd="sng" algn="ctr">
+                      <a:noFill/>
+                      <a:prstDash val="solid"/>
+                      <a:round/>
+                      <a:headEnd type="none" w="med" len="med"/>
+                      <a:tailEnd type="none" w="med" len="med"/>
+                    </a:lnT>
+                    <a:lnB w="12700" cap="flat" cmpd="sng" algn="ctr">
+                      <a:noFill/>
+                      <a:prstDash val="solid"/>
+                      <a:round/>
+                      <a:headEnd type="none" w="med" len="med"/>
+                      <a:tailEnd type="none" w="med" len="med"/>
+                    </a:lnB>
+                    <a:lnTlToBr w="12700" cmpd="sng">
+                      <a:noFill/>
+                      <a:prstDash val="solid"/>
+                    </a:lnTlToBr>
+                    <a:lnBlToTr w="12700" cmpd="sng">
+                      <a:noFill/>
+                      <a:prstDash val="solid"/>
+                    </a:lnBlToTr>
+                    <a:solidFill>
+                      <a:schemeClr val="bg1">
+                        <a:lumMod val="95000"/>
+                      </a:schemeClr>
+                    </a:solidFill>
+                  </a:tcPr>
+                </a:tc>
+                <a:tc>
+                  <a:txBody>
+                    <a:bodyPr/>
+                    <a:lstStyle/>
+                    <a:p>
+                      <a:endParaRPr lang="en-US" sz="1500" b="0" i="0" dirty="0">
+                        <a:solidFill>
+                          <a:schemeClr val="tx1"/>
+                        </a:solidFill>
+                        <a:latin typeface="GT Walsheim Trial Rg" pitchFamily="2" charset="77"/>
+                      </a:endParaRPr>
+                    </a:p>
+                  </a:txBody>
+                  <a:tcPr>
+                    <a:lnL w="12700" cap="flat" cmpd="sng" algn="ctr">
+                      <a:noFill/>
+                      <a:prstDash val="solid"/>
+                      <a:round/>
+                      <a:headEnd type="none" w="med" len="med"/>
+                      <a:tailEnd type="none" w="med" len="med"/>
+                    </a:lnL>
+                    <a:lnR w="12700" cap="flat" cmpd="sng" algn="ctr">
+                      <a:noFill/>
+                      <a:prstDash val="solid"/>
+                      <a:round/>
+                      <a:headEnd type="none" w="med" len="med"/>
+                      <a:tailEnd type="none" w="med" len="med"/>
+                    </a:lnR>
+                    <a:lnT w="12700" cap="flat" cmpd="sng" algn="ctr">
+                      <a:noFill/>
+                      <a:prstDash val="solid"/>
+                      <a:round/>
+                      <a:headEnd type="none" w="med" len="med"/>
+                      <a:tailEnd type="none" w="med" len="med"/>
+                    </a:lnT>
+                    <a:lnB w="12700" cap="flat" cmpd="sng" algn="ctr">
+                      <a:noFill/>
+                      <a:prstDash val="solid"/>
+                      <a:round/>
+                      <a:headEnd type="none" w="med" len="med"/>
+                      <a:tailEnd type="none" w="med" len="med"/>
+                    </a:lnB>
+                    <a:lnTlToBr w="12700" cap="flat" cmpd="sng" algn="ctr">
+                      <a:solidFill>
+                        <a:schemeClr val="tx1">
+                          <a:lumMod val="50000"/>
+                          <a:lumOff val="50000"/>
+                        </a:schemeClr>
+                      </a:solidFill>
+                      <a:prstDash val="solid"/>
+                      <a:round/>
+                      <a:headEnd type="none" w="med" len="med"/>
+                      <a:tailEnd type="none" w="med" len="med"/>
+                    </a:lnTlToBr>
+                    <a:lnBlToTr w="12700" cap="flat" cmpd="sng" algn="ctr">
+                      <a:solidFill>
+                        <a:schemeClr val="tx1">
+                          <a:lumMod val="50000"/>
+                          <a:lumOff val="50000"/>
+                        </a:schemeClr>
+                      </a:solidFill>
+                      <a:prstDash val="solid"/>
+                      <a:round/>
+                      <a:headEnd type="none" w="med" len="med"/>
+                      <a:tailEnd type="none" w="med" len="med"/>
+                    </a:lnBlToTr>
+                    <a:solidFill>
+                      <a:schemeClr val="bg1">
+                        <a:lumMod val="95000"/>
+                      </a:schemeClr>
+                    </a:solidFill>
+                  </a:tcPr>
+                </a:tc>
+                <a:extLst>
+                  <a:ext uri="{0D108BD9-81ED-4DB2-BD59-A6C34878D82A}">
+                    <a16:rowId xmlns:a16="http://schemas.microsoft.com/office/drawing/2014/main" val="4152326013"/>
+                  </a:ext>
+                </a:extLst>
+              </a:tr>
+              <a:tr h="513176">
+                <a:tc>
+                  <a:txBody>
+                    <a:bodyPr/>
+                    <a:lstStyle/>
+                    <a:p>
+                      <a:r>
+                        <a:rPr lang="en-US" sz="1500" b="0" i="0" dirty="0">
+                          <a:solidFill>
+                            <a:schemeClr val="tx1"/>
+                          </a:solidFill>
+                          <a:latin typeface="GT Walsheim Trial Rg" pitchFamily="2" charset="77"/>
+                        </a:rPr>
+                        <a:t>Sensitivity</a:t>
+                      </a:r>
+                    </a:p>
+                  </a:txBody>
+                  <a:tcPr>
+                    <a:lnL w="12700" cap="flat" cmpd="sng" algn="ctr">
+                      <a:noFill/>
+                      <a:prstDash val="solid"/>
+                      <a:round/>
+                      <a:headEnd type="none" w="med" len="med"/>
+                      <a:tailEnd type="none" w="med" len="med"/>
+                    </a:lnL>
+                    <a:lnR w="12700" cap="flat" cmpd="sng" algn="ctr">
+                      <a:noFill/>
+                      <a:prstDash val="solid"/>
+                      <a:round/>
+                      <a:headEnd type="none" w="med" len="med"/>
+                      <a:tailEnd type="none" w="med" len="med"/>
+                    </a:lnR>
+                    <a:lnT w="12700" cap="flat" cmpd="sng" algn="ctr">
+                      <a:noFill/>
+                      <a:prstDash val="solid"/>
+                      <a:round/>
+                      <a:headEnd type="none" w="med" len="med"/>
+                      <a:tailEnd type="none" w="med" len="med"/>
+                    </a:lnT>
+                    <a:lnB w="12700" cap="flat" cmpd="sng" algn="ctr">
+                      <a:noFill/>
+                      <a:prstDash val="solid"/>
+                      <a:round/>
+                      <a:headEnd type="none" w="med" len="med"/>
+                      <a:tailEnd type="none" w="med" len="med"/>
+                    </a:lnB>
+                    <a:lnTlToBr w="12700" cmpd="sng">
+                      <a:noFill/>
+                      <a:prstDash val="solid"/>
+                    </a:lnTlToBr>
+                    <a:lnBlToTr w="12700" cmpd="sng">
+                      <a:noFill/>
+                      <a:prstDash val="solid"/>
+                    </a:lnBlToTr>
+                    <a:solidFill>
+                      <a:schemeClr val="bg1">
+                        <a:lumMod val="85000"/>
+                      </a:schemeClr>
+                    </a:solidFill>
+                  </a:tcPr>
+                </a:tc>
+                <a:tc>
+                  <a:txBody>
+                    <a:bodyPr/>
+                    <a:lstStyle/>
+                    <a:p>
+                      <a:r>
+                        <a:rPr lang="en-US" sz="1500" b="0" i="0" dirty="0">
+                          <a:solidFill>
+                            <a:schemeClr val="tx1"/>
+                          </a:solidFill>
+                          <a:latin typeface="GT Walsheim Trial Rg" pitchFamily="2" charset="77"/>
+                        </a:rPr>
+                        <a:t>0.836</a:t>
+                      </a:r>
+                    </a:p>
+                  </a:txBody>
+                  <a:tcPr>
+                    <a:lnL w="12700" cap="flat" cmpd="sng" algn="ctr">
+                      <a:noFill/>
+                      <a:prstDash val="solid"/>
+                      <a:round/>
+                      <a:headEnd type="none" w="med" len="med"/>
+                      <a:tailEnd type="none" w="med" len="med"/>
+                    </a:lnL>
+                    <a:lnR w="12700" cap="flat" cmpd="sng" algn="ctr">
+                      <a:noFill/>
+                      <a:prstDash val="solid"/>
+                      <a:round/>
+                      <a:headEnd type="none" w="med" len="med"/>
+                      <a:tailEnd type="none" w="med" len="med"/>
+                    </a:lnR>
+                    <a:lnT w="12700" cap="flat" cmpd="sng" algn="ctr">
+                      <a:noFill/>
+                      <a:prstDash val="solid"/>
+                      <a:round/>
+                      <a:headEnd type="none" w="med" len="med"/>
+                      <a:tailEnd type="none" w="med" len="med"/>
+                    </a:lnT>
+                    <a:lnB w="12700" cap="flat" cmpd="sng" algn="ctr">
+                      <a:noFill/>
+                      <a:prstDash val="solid"/>
+                      <a:round/>
+                      <a:headEnd type="none" w="med" len="med"/>
+                      <a:tailEnd type="none" w="med" len="med"/>
+                    </a:lnB>
+                    <a:lnTlToBr w="12700" cmpd="sng">
+                      <a:noFill/>
+                      <a:prstDash val="solid"/>
+                    </a:lnTlToBr>
+                    <a:lnBlToTr w="12700" cmpd="sng">
+                      <a:noFill/>
+                      <a:prstDash val="solid"/>
+                    </a:lnBlToTr>
+                    <a:solidFill>
+                      <a:schemeClr val="bg1">
+                        <a:lumMod val="85000"/>
+                      </a:schemeClr>
+                    </a:solidFill>
+                  </a:tcPr>
+                </a:tc>
+                <a:tc>
+                  <a:txBody>
+                    <a:bodyPr/>
+                    <a:lstStyle/>
+                    <a:p>
+                      <a:r>
+                        <a:rPr lang="en-US" sz="1500" b="0" i="0" dirty="0">
+                          <a:solidFill>
+                            <a:schemeClr val="tx1"/>
+                          </a:solidFill>
+                          <a:latin typeface="GT Walsheim Trial Rg" pitchFamily="2" charset="77"/>
+                        </a:rPr>
+                        <a:t>0.796</a:t>
+                      </a:r>
+                    </a:p>
+                  </a:txBody>
+                  <a:tcPr>
+                    <a:lnL w="12700" cap="flat" cmpd="sng" algn="ctr">
+                      <a:noFill/>
+                      <a:prstDash val="solid"/>
+                      <a:round/>
+                      <a:headEnd type="none" w="med" len="med"/>
+                      <a:tailEnd type="none" w="med" len="med"/>
+                    </a:lnL>
+                    <a:lnR w="12700" cap="flat" cmpd="sng" algn="ctr">
+                      <a:noFill/>
+                      <a:prstDash val="solid"/>
+                      <a:round/>
+                      <a:headEnd type="none" w="med" len="med"/>
+                      <a:tailEnd type="none" w="med" len="med"/>
+                    </a:lnR>
+                    <a:lnT w="12700" cap="flat" cmpd="sng" algn="ctr">
+                      <a:noFill/>
+                      <a:prstDash val="solid"/>
+                      <a:round/>
+                      <a:headEnd type="none" w="med" len="med"/>
+                      <a:tailEnd type="none" w="med" len="med"/>
+                    </a:lnT>
+                    <a:lnB w="12700" cap="flat" cmpd="sng" algn="ctr">
+                      <a:noFill/>
+                      <a:prstDash val="solid"/>
+                      <a:round/>
+                      <a:headEnd type="none" w="med" len="med"/>
+                      <a:tailEnd type="none" w="med" len="med"/>
+                    </a:lnB>
+                    <a:lnTlToBr w="12700" cmpd="sng">
+                      <a:noFill/>
+                      <a:prstDash val="solid"/>
+                    </a:lnTlToBr>
+                    <a:lnBlToTr w="12700" cmpd="sng">
+                      <a:noFill/>
+                      <a:prstDash val="solid"/>
+                    </a:lnBlToTr>
+                    <a:solidFill>
+                      <a:schemeClr val="bg1">
+                        <a:lumMod val="85000"/>
+                      </a:schemeClr>
+                    </a:solidFill>
+                  </a:tcPr>
+                </a:tc>
+                <a:extLst>
+                  <a:ext uri="{0D108BD9-81ED-4DB2-BD59-A6C34878D82A}">
+                    <a16:rowId xmlns:a16="http://schemas.microsoft.com/office/drawing/2014/main" val="3142999530"/>
+                  </a:ext>
+                </a:extLst>
+              </a:tr>
+              <a:tr h="513176">
+                <a:tc>
+                  <a:txBody>
+                    <a:bodyPr/>
+                    <a:lstStyle/>
+                    <a:p>
+                      <a:r>
+                        <a:rPr lang="en-US" sz="1500" b="0" i="0" dirty="0">
+                          <a:solidFill>
+                            <a:schemeClr val="tx1"/>
+                          </a:solidFill>
+                          <a:latin typeface="GT Walsheim Trial Rg" pitchFamily="2" charset="77"/>
+                        </a:rPr>
+                        <a:t>Specificity</a:t>
+                      </a:r>
+                    </a:p>
+                  </a:txBody>
+                  <a:tcPr>
+                    <a:lnL w="12700" cap="flat" cmpd="sng" algn="ctr">
+                      <a:noFill/>
+                      <a:prstDash val="solid"/>
+                      <a:round/>
+                      <a:headEnd type="none" w="med" len="med"/>
+                      <a:tailEnd type="none" w="med" len="med"/>
+                    </a:lnL>
+                    <a:lnR w="12700" cap="flat" cmpd="sng" algn="ctr">
+                      <a:noFill/>
+                      <a:prstDash val="solid"/>
+                      <a:round/>
+                      <a:headEnd type="none" w="med" len="med"/>
+                      <a:tailEnd type="none" w="med" len="med"/>
+                    </a:lnR>
+                    <a:lnT w="12700" cap="flat" cmpd="sng" algn="ctr">
+                      <a:noFill/>
+                      <a:prstDash val="solid"/>
+                      <a:round/>
+                      <a:headEnd type="none" w="med" len="med"/>
+                      <a:tailEnd type="none" w="med" len="med"/>
+                    </a:lnT>
+                    <a:lnB w="12700" cap="flat" cmpd="sng" algn="ctr">
+                      <a:noFill/>
+                      <a:prstDash val="solid"/>
+                      <a:round/>
+                      <a:headEnd type="none" w="med" len="med"/>
+                      <a:tailEnd type="none" w="med" len="med"/>
+                    </a:lnB>
+                    <a:lnTlToBr w="12700" cmpd="sng">
+                      <a:noFill/>
+                      <a:prstDash val="solid"/>
+                    </a:lnTlToBr>
+                    <a:lnBlToTr w="12700" cmpd="sng">
+                      <a:noFill/>
+                      <a:prstDash val="solid"/>
+                    </a:lnBlToTr>
+                    <a:solidFill>
+                      <a:schemeClr val="bg1">
+                        <a:lumMod val="95000"/>
+                      </a:schemeClr>
+                    </a:solidFill>
+                  </a:tcPr>
+                </a:tc>
+                <a:tc>
+                  <a:txBody>
+                    <a:bodyPr/>
+                    <a:lstStyle/>
+                    <a:p>
+                      <a:r>
+                        <a:rPr lang="en-US" sz="1500" b="0" i="0" dirty="0">
+                          <a:solidFill>
+                            <a:schemeClr val="tx1"/>
+                          </a:solidFill>
+                          <a:latin typeface="GT Walsheim Trial Rg" pitchFamily="2" charset="77"/>
+                        </a:rPr>
+                        <a:t>0.839</a:t>
+                      </a:r>
+                    </a:p>
+                  </a:txBody>
+                  <a:tcPr>
+                    <a:lnL w="12700" cap="flat" cmpd="sng" algn="ctr">
+                      <a:noFill/>
+                      <a:prstDash val="solid"/>
+                      <a:round/>
+                      <a:headEnd type="none" w="med" len="med"/>
+                      <a:tailEnd type="none" w="med" len="med"/>
+                    </a:lnL>
+                    <a:lnR w="12700" cap="flat" cmpd="sng" algn="ctr">
+                      <a:noFill/>
+                      <a:prstDash val="solid"/>
+                      <a:round/>
+                      <a:headEnd type="none" w="med" len="med"/>
+                      <a:tailEnd type="none" w="med" len="med"/>
+                    </a:lnR>
+                    <a:lnT w="12700" cap="flat" cmpd="sng" algn="ctr">
+                      <a:noFill/>
+                      <a:prstDash val="solid"/>
+                      <a:round/>
+                      <a:headEnd type="none" w="med" len="med"/>
+                      <a:tailEnd type="none" w="med" len="med"/>
+                    </a:lnT>
+                    <a:lnB w="12700" cap="flat" cmpd="sng" algn="ctr">
+                      <a:noFill/>
+                      <a:prstDash val="solid"/>
+                      <a:round/>
+                      <a:headEnd type="none" w="med" len="med"/>
+                      <a:tailEnd type="none" w="med" len="med"/>
+                    </a:lnB>
+                    <a:lnTlToBr w="12700" cmpd="sng">
+                      <a:noFill/>
+                      <a:prstDash val="solid"/>
+                    </a:lnTlToBr>
+                    <a:lnBlToTr w="12700" cmpd="sng">
+                      <a:noFill/>
+                      <a:prstDash val="solid"/>
+                    </a:lnBlToTr>
+                    <a:solidFill>
+                      <a:schemeClr val="bg1">
+                        <a:lumMod val="95000"/>
+                      </a:schemeClr>
+                    </a:solidFill>
+                  </a:tcPr>
+                </a:tc>
+                <a:tc>
+                  <a:txBody>
+                    <a:bodyPr/>
+                    <a:lstStyle/>
+                    <a:p>
+                      <a:r>
+                        <a:rPr lang="en-US" sz="1500" b="0" i="0" dirty="0">
+                          <a:solidFill>
+                            <a:schemeClr val="tx1"/>
+                          </a:solidFill>
+                          <a:latin typeface="GT Walsheim Trial Rg" pitchFamily="2" charset="77"/>
+                        </a:rPr>
+                        <a:t>0.667</a:t>
+                      </a:r>
+                    </a:p>
+                  </a:txBody>
+                  <a:tcPr>
+                    <a:lnL w="12700" cap="flat" cmpd="sng" algn="ctr">
+                      <a:noFill/>
+                      <a:prstDash val="solid"/>
+                      <a:round/>
+                      <a:headEnd type="none" w="med" len="med"/>
+                      <a:tailEnd type="none" w="med" len="med"/>
+                    </a:lnL>
+                    <a:lnR w="12700" cap="flat" cmpd="sng" algn="ctr">
+                      <a:noFill/>
+                      <a:prstDash val="solid"/>
+                      <a:round/>
+                      <a:headEnd type="none" w="med" len="med"/>
+                      <a:tailEnd type="none" w="med" len="med"/>
+                    </a:lnR>
+                    <a:lnT w="12700" cap="flat" cmpd="sng" algn="ctr">
+                      <a:noFill/>
+                      <a:prstDash val="solid"/>
+                      <a:round/>
+                      <a:headEnd type="none" w="med" len="med"/>
+                      <a:tailEnd type="none" w="med" len="med"/>
+                    </a:lnT>
+                    <a:lnB w="12700" cap="flat" cmpd="sng" algn="ctr">
+                      <a:noFill/>
+                      <a:prstDash val="solid"/>
+                      <a:round/>
+                      <a:headEnd type="none" w="med" len="med"/>
+                      <a:tailEnd type="none" w="med" len="med"/>
+                    </a:lnB>
+                    <a:lnTlToBr w="12700" cmpd="sng">
+                      <a:noFill/>
+                      <a:prstDash val="solid"/>
+                    </a:lnTlToBr>
+                    <a:lnBlToTr w="12700" cmpd="sng">
+                      <a:noFill/>
+                      <a:prstDash val="solid"/>
+                    </a:lnBlToTr>
+                    <a:solidFill>
+                      <a:schemeClr val="bg1">
+                        <a:lumMod val="95000"/>
+                      </a:schemeClr>
+                    </a:solidFill>
+                  </a:tcPr>
+                </a:tc>
+                <a:extLst>
+                  <a:ext uri="{0D108BD9-81ED-4DB2-BD59-A6C34878D82A}">
+                    <a16:rowId xmlns:a16="http://schemas.microsoft.com/office/drawing/2014/main" val="1523425920"/>
+                  </a:ext>
+                </a:extLst>
+              </a:tr>
+              <a:tr h="513176">
+                <a:tc>
+                  <a:txBody>
+                    <a:bodyPr/>
+                    <a:lstStyle/>
+                    <a:p>
+                      <a:r>
+                        <a:rPr lang="en-US" sz="1500" b="0" i="0" dirty="0">
+                          <a:solidFill>
+                            <a:schemeClr val="tx1"/>
+                          </a:solidFill>
+                          <a:latin typeface="GT Walsheim Trial Rg" pitchFamily="2" charset="77"/>
+                        </a:rPr>
+                        <a:t>Accuracy</a:t>
+                      </a:r>
+                    </a:p>
+                  </a:txBody>
+                  <a:tcPr>
+                    <a:lnL w="12700" cap="flat" cmpd="sng" algn="ctr">
+                      <a:noFill/>
+                      <a:prstDash val="solid"/>
+                      <a:round/>
+                      <a:headEnd type="none" w="med" len="med"/>
+                      <a:tailEnd type="none" w="med" len="med"/>
+                    </a:lnL>
+                    <a:lnR w="12700" cap="flat" cmpd="sng" algn="ctr">
+                      <a:noFill/>
+                      <a:prstDash val="solid"/>
+                      <a:round/>
+                      <a:headEnd type="none" w="med" len="med"/>
+                      <a:tailEnd type="none" w="med" len="med"/>
+                    </a:lnR>
+                    <a:lnT w="12700" cap="flat" cmpd="sng" algn="ctr">
+                      <a:noFill/>
+                      <a:prstDash val="solid"/>
+                      <a:round/>
+                      <a:headEnd type="none" w="med" len="med"/>
+                      <a:tailEnd type="none" w="med" len="med"/>
+                    </a:lnT>
+                    <a:lnB w="12700" cap="flat" cmpd="sng" algn="ctr">
+                      <a:noFill/>
+                      <a:prstDash val="solid"/>
+                      <a:round/>
+                      <a:headEnd type="none" w="med" len="med"/>
+                      <a:tailEnd type="none" w="med" len="med"/>
+                    </a:lnB>
+                    <a:lnTlToBr w="12700" cmpd="sng">
+                      <a:noFill/>
+                      <a:prstDash val="solid"/>
+                    </a:lnTlToBr>
+                    <a:lnBlToTr w="12700" cmpd="sng">
+                      <a:noFill/>
+                      <a:prstDash val="solid"/>
+                    </a:lnBlToTr>
+                    <a:solidFill>
+                      <a:schemeClr val="bg1">
+                        <a:lumMod val="85000"/>
+                      </a:schemeClr>
+                    </a:solidFill>
+                  </a:tcPr>
+                </a:tc>
+                <a:tc>
+                  <a:txBody>
+                    <a:bodyPr/>
+                    <a:lstStyle/>
+                    <a:p>
+                      <a:endParaRPr lang="en-US" sz="1500" b="0" i="0" dirty="0">
+                        <a:solidFill>
+                          <a:schemeClr val="tx1"/>
+                        </a:solidFill>
+                        <a:latin typeface="GT Walsheim Trial Rg" pitchFamily="2" charset="77"/>
+                      </a:endParaRPr>
+                    </a:p>
+                  </a:txBody>
+                  <a:tcPr>
+                    <a:lnL w="12700" cap="flat" cmpd="sng" algn="ctr">
+                      <a:noFill/>
+                      <a:prstDash val="solid"/>
+                      <a:round/>
+                      <a:headEnd type="none" w="med" len="med"/>
+                      <a:tailEnd type="none" w="med" len="med"/>
+                    </a:lnL>
+                    <a:lnR w="12700" cap="flat" cmpd="sng" algn="ctr">
+                      <a:noFill/>
+                      <a:prstDash val="solid"/>
+                      <a:round/>
+                      <a:headEnd type="none" w="med" len="med"/>
+                      <a:tailEnd type="none" w="med" len="med"/>
+                    </a:lnR>
+                    <a:lnT w="12700" cap="flat" cmpd="sng" algn="ctr">
+                      <a:noFill/>
+                      <a:prstDash val="solid"/>
+                      <a:round/>
+                      <a:headEnd type="none" w="med" len="med"/>
+                      <a:tailEnd type="none" w="med" len="med"/>
+                    </a:lnT>
+                    <a:lnB w="12700" cap="flat" cmpd="sng" algn="ctr">
+                      <a:noFill/>
+                      <a:prstDash val="solid"/>
+                      <a:round/>
+                      <a:headEnd type="none" w="med" len="med"/>
+                      <a:tailEnd type="none" w="med" len="med"/>
+                    </a:lnB>
+                    <a:lnTlToBr w="12700" cap="flat" cmpd="sng" algn="ctr">
+                      <a:solidFill>
+                        <a:schemeClr val="tx1">
+                          <a:lumMod val="50000"/>
+                          <a:lumOff val="50000"/>
+                        </a:schemeClr>
+                      </a:solidFill>
+                      <a:prstDash val="solid"/>
+                      <a:round/>
+                      <a:headEnd type="none" w="med" len="med"/>
+                      <a:tailEnd type="none" w="med" len="med"/>
+                    </a:lnTlToBr>
+                    <a:lnBlToTr w="12700" cap="flat" cmpd="sng" algn="ctr">
+                      <a:solidFill>
+                        <a:schemeClr val="tx1">
+                          <a:lumMod val="50000"/>
+                          <a:lumOff val="50000"/>
+                        </a:schemeClr>
+                      </a:solidFill>
+                      <a:prstDash val="solid"/>
+                      <a:round/>
+                      <a:headEnd type="none" w="med" len="med"/>
+                      <a:tailEnd type="none" w="med" len="med"/>
+                    </a:lnBlToTr>
+                    <a:solidFill>
+                      <a:schemeClr val="bg1">
+                        <a:lumMod val="85000"/>
+                      </a:schemeClr>
+                    </a:solidFill>
+                  </a:tcPr>
+                </a:tc>
+                <a:tc>
+                  <a:txBody>
+                    <a:bodyPr/>
+                    <a:lstStyle/>
+                    <a:p>
+                      <a:r>
+                        <a:rPr lang="en-US" sz="1500" b="0" i="0" dirty="0">
+                          <a:solidFill>
+                            <a:schemeClr val="tx1"/>
+                          </a:solidFill>
+                          <a:latin typeface="GT Walsheim Trial Rg" pitchFamily="2" charset="77"/>
+                        </a:rPr>
+                        <a:t>79.5%</a:t>
+                      </a:r>
+                    </a:p>
+                  </a:txBody>
+                  <a:tcPr>
+                    <a:lnL w="12700" cap="flat" cmpd="sng" algn="ctr">
+                      <a:noFill/>
+                      <a:prstDash val="solid"/>
+                      <a:round/>
+                      <a:headEnd type="none" w="med" len="med"/>
+                      <a:tailEnd type="none" w="med" len="med"/>
+                    </a:lnL>
+                    <a:lnR w="12700" cap="flat" cmpd="sng" algn="ctr">
+                      <a:noFill/>
+                      <a:prstDash val="solid"/>
+                      <a:round/>
+                      <a:headEnd type="none" w="med" len="med"/>
+                      <a:tailEnd type="none" w="med" len="med"/>
+                    </a:lnR>
+                    <a:lnT w="12700" cap="flat" cmpd="sng" algn="ctr">
+                      <a:noFill/>
+                      <a:prstDash val="solid"/>
+                      <a:round/>
+                      <a:headEnd type="none" w="med" len="med"/>
+                      <a:tailEnd type="none" w="med" len="med"/>
+                    </a:lnT>
+                    <a:lnB w="12700" cap="flat" cmpd="sng" algn="ctr">
+                      <a:noFill/>
+                      <a:prstDash val="solid"/>
+                      <a:round/>
+                      <a:headEnd type="none" w="med" len="med"/>
+                      <a:tailEnd type="none" w="med" len="med"/>
+                    </a:lnB>
+                    <a:lnTlToBr w="12700" cmpd="sng">
+                      <a:noFill/>
+                      <a:prstDash val="solid"/>
+                    </a:lnTlToBr>
+                    <a:lnBlToTr w="12700" cmpd="sng">
+                      <a:noFill/>
+                      <a:prstDash val="solid"/>
+                    </a:lnBlToTr>
+                    <a:solidFill>
+                      <a:schemeClr val="bg1">
+                        <a:lumMod val="85000"/>
+                      </a:schemeClr>
+                    </a:solidFill>
+                  </a:tcPr>
+                </a:tc>
+                <a:extLst>
+                  <a:ext uri="{0D108BD9-81ED-4DB2-BD59-A6C34878D82A}">
+                    <a16:rowId xmlns:a16="http://schemas.microsoft.com/office/drawing/2014/main" val="2383985548"/>
+                  </a:ext>
+                </a:extLst>
+              </a:tr>
+              <a:tr h="513176">
+                <a:tc>
+                  <a:txBody>
+                    <a:bodyPr/>
+                    <a:lstStyle/>
+                    <a:p>
+                      <a:r>
+                        <a:rPr lang="en-US" sz="1500" b="0" i="0" dirty="0">
+                          <a:solidFill>
+                            <a:schemeClr val="tx1"/>
+                          </a:solidFill>
+                          <a:latin typeface="GT Walsheim Trial Rg" pitchFamily="2" charset="77"/>
+                        </a:rPr>
+                        <a:t>Balanced Accuracy	</a:t>
+                      </a:r>
+                    </a:p>
+                  </a:txBody>
+                  <a:tcPr>
+                    <a:lnL w="12700" cap="flat" cmpd="sng" algn="ctr">
+                      <a:noFill/>
+                      <a:prstDash val="solid"/>
+                      <a:round/>
+                      <a:headEnd type="none" w="med" len="med"/>
+                      <a:tailEnd type="none" w="med" len="med"/>
+                    </a:lnL>
+                    <a:lnR w="12700" cap="flat" cmpd="sng" algn="ctr">
+                      <a:noFill/>
+                      <a:prstDash val="solid"/>
+                      <a:round/>
+                      <a:headEnd type="none" w="med" len="med"/>
+                      <a:tailEnd type="none" w="med" len="med"/>
+                    </a:lnR>
+                    <a:lnT w="12700" cap="flat" cmpd="sng" algn="ctr">
+                      <a:noFill/>
+                      <a:prstDash val="solid"/>
+                      <a:round/>
+                      <a:headEnd type="none" w="med" len="med"/>
+                      <a:tailEnd type="none" w="med" len="med"/>
+                    </a:lnT>
+                    <a:lnB w="12700" cap="flat" cmpd="sng" algn="ctr">
+                      <a:noFill/>
+                      <a:prstDash val="solid"/>
+                      <a:round/>
+                      <a:headEnd type="none" w="med" len="med"/>
+                      <a:tailEnd type="none" w="med" len="med"/>
+                    </a:lnB>
+                    <a:lnTlToBr w="12700" cmpd="sng">
+                      <a:noFill/>
+                      <a:prstDash val="solid"/>
+                    </a:lnTlToBr>
+                    <a:lnBlToTr w="12700" cmpd="sng">
+                      <a:noFill/>
+                      <a:prstDash val="solid"/>
+                    </a:lnBlToTr>
+                    <a:solidFill>
+                      <a:schemeClr val="bg1">
+                        <a:lumMod val="95000"/>
+                      </a:schemeClr>
+                    </a:solidFill>
+                  </a:tcPr>
+                </a:tc>
+                <a:tc>
+                  <a:txBody>
+                    <a:bodyPr/>
+                    <a:lstStyle/>
+                    <a:p>
+                      <a:endParaRPr lang="en-US" sz="1500" b="0" i="0" dirty="0">
+                        <a:solidFill>
+                          <a:schemeClr val="tx1"/>
+                        </a:solidFill>
+                        <a:latin typeface="GT Walsheim Trial Rg" pitchFamily="2" charset="77"/>
+                      </a:endParaRPr>
+                    </a:p>
+                  </a:txBody>
+                  <a:tcPr>
+                    <a:lnL w="12700" cap="flat" cmpd="sng" algn="ctr">
+                      <a:noFill/>
+                      <a:prstDash val="solid"/>
+                      <a:round/>
+                      <a:headEnd type="none" w="med" len="med"/>
+                      <a:tailEnd type="none" w="med" len="med"/>
+                    </a:lnL>
+                    <a:lnR w="12700" cap="flat" cmpd="sng" algn="ctr">
+                      <a:noFill/>
+                      <a:prstDash val="solid"/>
+                      <a:round/>
+                      <a:headEnd type="none" w="med" len="med"/>
+                      <a:tailEnd type="none" w="med" len="med"/>
+                    </a:lnR>
+                    <a:lnT w="12700" cap="flat" cmpd="sng" algn="ctr">
+                      <a:noFill/>
+                      <a:prstDash val="solid"/>
+                      <a:round/>
+                      <a:headEnd type="none" w="med" len="med"/>
+                      <a:tailEnd type="none" w="med" len="med"/>
+                    </a:lnT>
+                    <a:lnB w="12700" cap="flat" cmpd="sng" algn="ctr">
+                      <a:noFill/>
+                      <a:prstDash val="solid"/>
+                      <a:round/>
+                      <a:headEnd type="none" w="med" len="med"/>
+                      <a:tailEnd type="none" w="med" len="med"/>
+                    </a:lnB>
+                    <a:lnTlToBr w="12700" cap="flat" cmpd="sng" algn="ctr">
+                      <a:solidFill>
+                        <a:schemeClr val="tx1">
+                          <a:lumMod val="50000"/>
+                          <a:lumOff val="50000"/>
+                        </a:schemeClr>
+                      </a:solidFill>
+                      <a:prstDash val="solid"/>
+                      <a:round/>
+                      <a:headEnd type="none" w="med" len="med"/>
+                      <a:tailEnd type="none" w="med" len="med"/>
+                    </a:lnTlToBr>
+                    <a:lnBlToTr w="12700" cap="flat" cmpd="sng" algn="ctr">
+                      <a:solidFill>
+                        <a:schemeClr val="tx1">
+                          <a:lumMod val="50000"/>
+                          <a:lumOff val="50000"/>
+                        </a:schemeClr>
+                      </a:solidFill>
+                      <a:prstDash val="solid"/>
+                      <a:round/>
+                      <a:headEnd type="none" w="med" len="med"/>
+                      <a:tailEnd type="none" w="med" len="med"/>
+                    </a:lnBlToTr>
+                    <a:solidFill>
+                      <a:schemeClr val="bg1">
+                        <a:lumMod val="95000"/>
+                      </a:schemeClr>
+                    </a:solidFill>
+                  </a:tcPr>
+                </a:tc>
+                <a:tc>
+                  <a:txBody>
+                    <a:bodyPr/>
+                    <a:lstStyle/>
+                    <a:p>
+                      <a:r>
+                        <a:rPr lang="en-US" sz="1500" b="0" i="0" dirty="0">
+                          <a:solidFill>
+                            <a:schemeClr val="tx1"/>
+                          </a:solidFill>
+                          <a:latin typeface="GT Walsheim Trial Rg" pitchFamily="2" charset="77"/>
+                        </a:rPr>
+                        <a:t>73.1%</a:t>
+                      </a:r>
+                    </a:p>
+                  </a:txBody>
+                  <a:tcPr>
+                    <a:lnL w="12700" cap="flat" cmpd="sng" algn="ctr">
+                      <a:noFill/>
+                      <a:prstDash val="solid"/>
+                      <a:round/>
+                      <a:headEnd type="none" w="med" len="med"/>
+                      <a:tailEnd type="none" w="med" len="med"/>
+                    </a:lnL>
+                    <a:lnR w="12700" cap="flat" cmpd="sng" algn="ctr">
+                      <a:noFill/>
+                      <a:prstDash val="solid"/>
+                      <a:round/>
+                      <a:headEnd type="none" w="med" len="med"/>
+                      <a:tailEnd type="none" w="med" len="med"/>
+                    </a:lnR>
+                    <a:lnT w="12700" cap="flat" cmpd="sng" algn="ctr">
+                      <a:noFill/>
+                      <a:prstDash val="solid"/>
+                      <a:round/>
+                      <a:headEnd type="none" w="med" len="med"/>
+                      <a:tailEnd type="none" w="med" len="med"/>
+                    </a:lnT>
+                    <a:lnB w="12700" cap="flat" cmpd="sng" algn="ctr">
+                      <a:noFill/>
+                      <a:prstDash val="solid"/>
+                      <a:round/>
+                      <a:headEnd type="none" w="med" len="med"/>
+                      <a:tailEnd type="none" w="med" len="med"/>
+                    </a:lnB>
+                    <a:lnTlToBr w="12700" cmpd="sng">
+                      <a:noFill/>
+                      <a:prstDash val="solid"/>
+                    </a:lnTlToBr>
+                    <a:lnBlToTr w="12700" cmpd="sng">
+                      <a:noFill/>
+                      <a:prstDash val="solid"/>
+                    </a:lnBlToTr>
+                    <a:solidFill>
+                      <a:schemeClr val="bg1">
+                        <a:lumMod val="95000"/>
+                      </a:schemeClr>
+                    </a:solidFill>
+                  </a:tcPr>
+                </a:tc>
+                <a:extLst>
+                  <a:ext uri="{0D108BD9-81ED-4DB2-BD59-A6C34878D82A}">
+                    <a16:rowId xmlns:a16="http://schemas.microsoft.com/office/drawing/2014/main" val="71306824"/>
+                  </a:ext>
+                </a:extLst>
+              </a:tr>
+            </a:tbl>
+          </a:graphicData>
+        </a:graphic>
+      </p:graphicFrame>
+      <p:sp>
+        <p:nvSpPr>
+          <p:cNvPr id="11" name="TextBox 10">
+            <a:extLst>
+              <a:ext uri="{FF2B5EF4-FFF2-40B4-BE49-F238E27FC236}">
+                <a16:creationId xmlns:a16="http://schemas.microsoft.com/office/drawing/2014/main" id="{A8370A88-D7AF-5FE5-ED80-AEF8EF0AA74E}"/>
+              </a:ext>
+            </a:extLst>
+          </p:cNvPr>
+          <p:cNvSpPr txBox="1"/>
+          <p:nvPr/>
+        </p:nvSpPr>
+        <p:spPr>
+          <a:xfrm>
+            <a:off x="854438" y="5637952"/>
+            <a:ext cx="10786478" cy="369332"/>
+          </a:xfrm>
+          <a:prstGeom prst="rect">
+            <a:avLst/>
+          </a:prstGeom>
+          <a:noFill/>
+        </p:spPr>
+        <p:txBody>
+          <a:bodyPr wrap="square">
+            <a:spAutoFit/>
+          </a:bodyPr>
+          <a:lstStyle/>
+          <a:p>
+            <a:pPr algn="l"/>
+            <a:r>
+              <a:rPr lang="en-US" b="1" dirty="0">
+                <a:effectLst/>
+                <a:latin typeface="GT Walsheim Trial Rg" pitchFamily="2" charset="77"/>
+              </a:rPr>
+              <a:t>Fisher's Exact Test: p = 0.0005 — anomalies are non-uniformly distributed across agent types.</a:t>
+            </a:r>
+            <a:endParaRPr lang="en-US" dirty="0">
+              <a:effectLst/>
+              <a:latin typeface="GT Walsheim Trial Rg" pitchFamily="2" charset="77"/>
+            </a:endParaRPr>
+          </a:p>
+        </p:txBody>
+      </p:sp>
+      <p:pic>
+        <p:nvPicPr>
+          <p:cNvPr id="2" name="Picture 4" descr="Waymo branded color scheme">
+            <a:extLst>
+              <a:ext uri="{FF2B5EF4-FFF2-40B4-BE49-F238E27FC236}">
+                <a16:creationId xmlns:a16="http://schemas.microsoft.com/office/drawing/2014/main" id="{2EEF9C1F-B66B-6B4A-9B7B-F8AC1776C572}"/>
+              </a:ext>
+            </a:extLst>
+          </p:cNvPr>
+          <p:cNvPicPr>
+            <a:picLocks noChangeAspect="1" noChangeArrowheads="1"/>
+          </p:cNvPicPr>
+          <p:nvPr/>
+        </p:nvPicPr>
+        <p:blipFill>
+          <a:blip r:embed="rId4">
+            <a:extLst>
+              <a:ext uri="{28A0092B-C50C-407E-A947-70E740481C1C}">
+                <a14:useLocalDpi xmlns:a14="http://schemas.microsoft.com/office/drawing/2010/main" val="0"/>
+              </a:ext>
+            </a:extLst>
+          </a:blip>
+          <a:srcRect/>
+          <a:stretch>
+            <a:fillRect/>
+          </a:stretch>
+        </p:blipFill>
+        <p:spPr bwMode="auto">
+          <a:xfrm>
+            <a:off x="13089835" y="-1189446"/>
+            <a:ext cx="5334000" cy="2006600"/>
+          </a:xfrm>
+          <a:prstGeom prst="rect">
+            <a:avLst/>
+          </a:prstGeom>
+          <a:noFill/>
+          <a:extLst>
+            <a:ext uri="{909E8E84-426E-40DD-AFC4-6F175D3DCCD1}">
+              <a14:hiddenFill xmlns:a14="http://schemas.microsoft.com/office/drawing/2010/main">
+                <a:solidFill>
+                  <a:srgbClr val="FFFFFF"/>
+                </a:solidFill>
+              </a14:hiddenFill>
+            </a:ext>
+          </a:extLst>
+        </p:spPr>
+      </p:pic>
+    </p:spTree>
+    <p:extLst>
+      <p:ext uri="{BB962C8B-B14F-4D97-AF65-F5344CB8AC3E}">
+        <p14:creationId xmlns:p14="http://schemas.microsoft.com/office/powerpoint/2010/main" val="3688322972"/>
+      </p:ext>
+    </p:extLst>
+  </p:cSld>
+  <p:clrMapOvr>
+    <a:masterClrMapping/>
+  </p:clrMapOvr>
+</p:sld>
+</file>
+
+<file path=ppt/slides/slide12.xml><?xml version="1.0" encoding="utf-8"?>
+<p:sld xmlns:a="http://schemas.openxmlformats.org/drawingml/2006/main" xmlns:r="http://schemas.openxmlformats.org/officeDocument/2006/relationships" xmlns:p="http://schemas.openxmlformats.org/presentationml/2006/main">
+  <p:cSld>
+    <p:spTree>
+      <p:nvGrpSpPr>
+        <p:cNvPr id="1" name="">
+          <a:extLst>
+            <a:ext uri="{FF2B5EF4-FFF2-40B4-BE49-F238E27FC236}">
+              <a16:creationId xmlns:a16="http://schemas.microsoft.com/office/drawing/2014/main" id="{A31F0CC6-4FF6-0E4E-CF61-DBA7A29F10E0}"/>
+            </a:ext>
+          </a:extLst>
+        </p:cNvPr>
+        <p:cNvGrpSpPr/>
+        <p:nvPr/>
+      </p:nvGrpSpPr>
+      <p:grpSpPr>
+        <a:xfrm>
+          <a:off x="0" y="0"/>
+          <a:ext cx="0" cy="0"/>
+          <a:chOff x="0" y="0"/>
+          <a:chExt cx="0" cy="0"/>
+        </a:xfrm>
+      </p:grpSpPr>
+      <p:sp>
+        <p:nvSpPr>
+          <p:cNvPr id="3" name="Freeform 2">
+            <a:extLst>
+              <a:ext uri="{FF2B5EF4-FFF2-40B4-BE49-F238E27FC236}">
+                <a16:creationId xmlns:a16="http://schemas.microsoft.com/office/drawing/2014/main" id="{B627A361-7570-7601-C26C-091F1FFDB3EB}"/>
+              </a:ext>
+            </a:extLst>
+          </p:cNvPr>
+          <p:cNvSpPr/>
+          <p:nvPr/>
+        </p:nvSpPr>
+        <p:spPr>
+          <a:xfrm rot="8442973">
+            <a:off x="-9874934" y="-3842844"/>
+            <a:ext cx="18800064" cy="7187173"/>
+          </a:xfrm>
+          <a:custGeom>
+            <a:avLst/>
+            <a:gdLst>
+              <a:gd name="csX0" fmla="*/ 0 w 18800064"/>
+              <a:gd name="csY0" fmla="*/ 7187173 h 7187173"/>
+              <a:gd name="csX1" fmla="*/ 7863840 w 18800064"/>
+              <a:gd name="csY1" fmla="*/ 18277 h 7187173"/>
+              <a:gd name="csX2" fmla="*/ 18800064 w 18800064"/>
+              <a:gd name="csY2" fmla="*/ 5248645 h 7187173"/>
+            </a:gdLst>
+            <a:ahLst/>
+            <a:cxnLst>
+              <a:cxn ang="0">
+                <a:pos x="csX0" y="csY0"/>
+              </a:cxn>
+              <a:cxn ang="0">
+                <a:pos x="csX1" y="csY1"/>
+              </a:cxn>
+              <a:cxn ang="0">
+                <a:pos x="csX2" y="csY2"/>
+              </a:cxn>
+            </a:cxnLst>
+            <a:rect l="l" t="t" r="r" b="b"/>
+            <a:pathLst>
+              <a:path w="18800064" h="7187173">
+                <a:moveTo>
+                  <a:pt x="0" y="7187173"/>
+                </a:moveTo>
+                <a:cubicBezTo>
+                  <a:pt x="2365248" y="3764269"/>
+                  <a:pt x="4730496" y="341365"/>
+                  <a:pt x="7863840" y="18277"/>
+                </a:cubicBezTo>
+                <a:cubicBezTo>
+                  <a:pt x="10997184" y="-304811"/>
+                  <a:pt x="17586960" y="3742933"/>
+                  <a:pt x="18800064" y="5248645"/>
+                </a:cubicBezTo>
+              </a:path>
+            </a:pathLst>
+          </a:custGeom>
+          <a:noFill/>
+          <a:ln w="635000">
+            <a:solidFill>
+              <a:schemeClr val="tx1">
+                <a:alpha val="3000"/>
+              </a:schemeClr>
+            </a:solidFill>
+          </a:ln>
+        </p:spPr>
+        <p:style>
+          <a:lnRef idx="2">
+            <a:schemeClr val="accent1">
+              <a:shade val="15000"/>
+            </a:schemeClr>
+          </a:lnRef>
+          <a:fillRef idx="1">
+            <a:schemeClr val="accent1"/>
+          </a:fillRef>
+          <a:effectRef idx="0">
+            <a:schemeClr val="accent1"/>
+          </a:effectRef>
+          <a:fontRef idx="minor">
+            <a:schemeClr val="lt1"/>
+          </a:fontRef>
+        </p:style>
+        <p:txBody>
+          <a:bodyPr rtlCol="0" anchor="ctr"/>
+          <a:lstStyle/>
+          <a:p>
+            <a:pPr algn="ctr"/>
+            <a:endParaRPr lang="en-US"/>
+          </a:p>
+        </p:txBody>
+      </p:sp>
+      <p:sp>
+        <p:nvSpPr>
+          <p:cNvPr id="5" name="Freeform 4">
+            <a:extLst>
+              <a:ext uri="{FF2B5EF4-FFF2-40B4-BE49-F238E27FC236}">
+                <a16:creationId xmlns:a16="http://schemas.microsoft.com/office/drawing/2014/main" id="{E34AB5F9-1251-1ADB-EB39-767E848BDE32}"/>
+              </a:ext>
+            </a:extLst>
+          </p:cNvPr>
+          <p:cNvSpPr/>
+          <p:nvPr/>
+        </p:nvSpPr>
+        <p:spPr>
+          <a:xfrm rot="18406025">
+            <a:off x="2075489" y="3958667"/>
+            <a:ext cx="18800064" cy="7187173"/>
+          </a:xfrm>
+          <a:custGeom>
+            <a:avLst/>
+            <a:gdLst>
+              <a:gd name="csX0" fmla="*/ 0 w 18800064"/>
+              <a:gd name="csY0" fmla="*/ 7187173 h 7187173"/>
+              <a:gd name="csX1" fmla="*/ 7863840 w 18800064"/>
+              <a:gd name="csY1" fmla="*/ 18277 h 7187173"/>
+              <a:gd name="csX2" fmla="*/ 18800064 w 18800064"/>
+              <a:gd name="csY2" fmla="*/ 5248645 h 7187173"/>
+            </a:gdLst>
+            <a:ahLst/>
+            <a:cxnLst>
+              <a:cxn ang="0">
+                <a:pos x="csX0" y="csY0"/>
+              </a:cxn>
+              <a:cxn ang="0">
+                <a:pos x="csX1" y="csY1"/>
+              </a:cxn>
+              <a:cxn ang="0">
+                <a:pos x="csX2" y="csY2"/>
+              </a:cxn>
+            </a:cxnLst>
+            <a:rect l="l" t="t" r="r" b="b"/>
+            <a:pathLst>
+              <a:path w="18800064" h="7187173">
+                <a:moveTo>
+                  <a:pt x="0" y="7187173"/>
+                </a:moveTo>
+                <a:cubicBezTo>
+                  <a:pt x="2365248" y="3764269"/>
+                  <a:pt x="4730496" y="341365"/>
+                  <a:pt x="7863840" y="18277"/>
+                </a:cubicBezTo>
+                <a:cubicBezTo>
+                  <a:pt x="10997184" y="-304811"/>
+                  <a:pt x="17586960" y="3742933"/>
+                  <a:pt x="18800064" y="5248645"/>
+                </a:cubicBezTo>
+              </a:path>
+            </a:pathLst>
+          </a:custGeom>
+          <a:noFill/>
+          <a:ln w="635000">
+            <a:solidFill>
+              <a:schemeClr val="tx1">
+                <a:alpha val="3000"/>
+              </a:schemeClr>
+            </a:solidFill>
+          </a:ln>
+        </p:spPr>
+        <p:style>
+          <a:lnRef idx="2">
+            <a:schemeClr val="accent1">
+              <a:shade val="15000"/>
+            </a:schemeClr>
+          </a:lnRef>
+          <a:fillRef idx="1">
+            <a:schemeClr val="accent1"/>
+          </a:fillRef>
+          <a:effectRef idx="0">
+            <a:schemeClr val="accent1"/>
+          </a:effectRef>
+          <a:fontRef idx="minor">
+            <a:schemeClr val="lt1"/>
+          </a:fontRef>
+        </p:style>
+        <p:txBody>
+          <a:bodyPr rtlCol="0" anchor="ctr"/>
+          <a:lstStyle/>
+          <a:p>
+            <a:pPr algn="ctr"/>
+            <a:endParaRPr lang="en-US"/>
+          </a:p>
+        </p:txBody>
+      </p:sp>
+      <p:pic>
+        <p:nvPicPr>
+          <p:cNvPr id="1026" name="Picture 2" descr="Waymo Logo">
+            <a:extLst>
+              <a:ext uri="{FF2B5EF4-FFF2-40B4-BE49-F238E27FC236}">
                 <a16:creationId xmlns:a16="http://schemas.microsoft.com/office/drawing/2014/main" id="{C50B9A37-2D86-6D3F-4E2F-9CF7F59F9FA1}"/>
               </a:ext>
             </a:extLst>
@@ -10301,7 +14117,7 @@
 </p:sld>
 </file>
 
-<file path=ppt/slides/slide12.xml><?xml version="1.0" encoding="utf-8"?>
+<file path=ppt/slides/slide13.xml><?xml version="1.0" encoding="utf-8"?>
 <p:sld xmlns:a="http://schemas.openxmlformats.org/drawingml/2006/main" xmlns:r="http://schemas.openxmlformats.org/officeDocument/2006/relationships" xmlns:p="http://schemas.openxmlformats.org/presentationml/2006/main">
   <p:cSld>
     <p:bg>
@@ -11400,7 +15216,7 @@
 </p:sld>
 </file>
 
-<file path=ppt/slides/slide13.xml><?xml version="1.0" encoding="utf-8"?>
+<file path=ppt/slides/slide14.xml><?xml version="1.0" encoding="utf-8"?>
 <p:sld xmlns:a="http://schemas.openxmlformats.org/drawingml/2006/main" xmlns:r="http://schemas.openxmlformats.org/officeDocument/2006/relationships" xmlns:p="http://schemas.openxmlformats.org/presentationml/2006/main">
   <p:cSld>
     <p:bg>
@@ -12515,7 +16331,7 @@
 </p:sld>
 </file>
 
-<file path=ppt/slides/slide14.xml><?xml version="1.0" encoding="utf-8"?>
+<file path=ppt/slides/slide15.xml><?xml version="1.0" encoding="utf-8"?>
 <p:sld xmlns:a="http://schemas.openxmlformats.org/drawingml/2006/main" xmlns:r="http://schemas.openxmlformats.org/officeDocument/2006/relationships" xmlns:p="http://schemas.openxmlformats.org/presentationml/2006/main">
   <p:cSld>
     <p:spTree>
@@ -18907,59 +22723,12 @@
           <a:chExt cx="0" cy="0"/>
         </a:xfrm>
       </p:grpSpPr>
-      <p:pic>
-        <p:nvPicPr>
-          <p:cNvPr id="1026" name="Picture 2" descr="Waymo Logo">
-            <a:extLst>
-              <a:ext uri="{FF2B5EF4-FFF2-40B4-BE49-F238E27FC236}">
-                <a16:creationId xmlns:a16="http://schemas.microsoft.com/office/drawing/2014/main" id="{098CF723-BBB0-69D1-210D-A92B374A241A}"/>
-              </a:ext>
-            </a:extLst>
-          </p:cNvPr>
-          <p:cNvPicPr>
-            <a:picLocks noChangeAspect="1" noChangeArrowheads="1"/>
-          </p:cNvPicPr>
-          <p:nvPr/>
-        </p:nvPicPr>
-        <p:blipFill>
-          <a:blip r:embed="rId3">
-            <a:extLst>
-              <a:ext uri="{28A0092B-C50C-407E-A947-70E740481C1C}">
-                <a14:useLocalDpi xmlns:a14="http://schemas.microsoft.com/office/drawing/2010/main" val="0"/>
-              </a:ext>
-            </a:extLst>
-          </a:blip>
-          <a:srcRect/>
-          <a:stretch>
-            <a:fillRect/>
-          </a:stretch>
-        </p:blipFill>
-        <p:spPr bwMode="auto">
-          <a:xfrm>
-            <a:off x="10795378" y="425703"/>
-            <a:ext cx="782903" cy="782903"/>
-          </a:xfrm>
-          <a:prstGeom prst="rect">
-            <a:avLst/>
-          </a:prstGeom>
-          <a:noFill/>
-          <a:extLst>
-            <a:ext uri="{909E8E84-426E-40DD-AFC4-6F175D3DCCD1}">
-              <a14:hiddenFill xmlns:a14="http://schemas.microsoft.com/office/drawing/2010/main">
-                <a:solidFill>
-                  <a:srgbClr val="FFFFFF"/>
-                </a:solidFill>
-              </a14:hiddenFill>
-            </a:ext>
-          </a:extLst>
-        </p:spPr>
-      </p:pic>
       <p:sp>
         <p:nvSpPr>
-          <p:cNvPr id="4" name="Title 3">
+          <p:cNvPr id="3" name="Title 2">
             <a:extLst>
               <a:ext uri="{FF2B5EF4-FFF2-40B4-BE49-F238E27FC236}">
-                <a16:creationId xmlns:a16="http://schemas.microsoft.com/office/drawing/2014/main" id="{7C72B4AF-3303-D5F9-B0F5-2775BA6C11A3}"/>
+                <a16:creationId xmlns:a16="http://schemas.microsoft.com/office/drawing/2014/main" id="{CE7B1E02-7E04-CB0C-3314-A673C2BD6DEC}"/>
               </a:ext>
             </a:extLst>
           </p:cNvPr>
@@ -18970,591 +22739,12 @@
             <p:ph type="ctrTitle"/>
           </p:nvPr>
         </p:nvSpPr>
-        <p:spPr>
-          <a:xfrm>
-            <a:off x="716478" y="447821"/>
-            <a:ext cx="3073202" cy="369333"/>
-          </a:xfrm>
-        </p:spPr>
+        <p:spPr/>
         <p:txBody>
-          <a:bodyPr>
-            <a:normAutofit fontScale="90000"/>
-          </a:bodyPr>
+          <a:bodyPr/>
           <a:lstStyle/>
           <a:p>
-            <a:pPr algn="l"/>
-            <a:r>
-              <a:rPr lang="en-US" sz="1500" dirty="0">
-                <a:solidFill>
-                  <a:srgbClr val="989DA2"/>
-                </a:solidFill>
-                <a:latin typeface="GT Walsheim Trial Rg" pitchFamily="2" charset="77"/>
-              </a:rPr>
-              <a:t>METHODS: ANOMALY DETECTION</a:t>
-            </a:r>
-          </a:p>
-        </p:txBody>
-      </p:sp>
-      <p:sp>
-        <p:nvSpPr>
-          <p:cNvPr id="8" name="TextBox 7">
-            <a:extLst>
-              <a:ext uri="{FF2B5EF4-FFF2-40B4-BE49-F238E27FC236}">
-                <a16:creationId xmlns:a16="http://schemas.microsoft.com/office/drawing/2014/main" id="{3B39957A-7A79-0237-F7BA-3507FB224EBF}"/>
-              </a:ext>
-            </a:extLst>
-          </p:cNvPr>
-          <p:cNvSpPr txBox="1"/>
-          <p:nvPr/>
-        </p:nvSpPr>
-        <p:spPr>
-          <a:xfrm>
-            <a:off x="716477" y="952090"/>
-            <a:ext cx="8440970" cy="630942"/>
-          </a:xfrm>
-          <a:prstGeom prst="rect">
-            <a:avLst/>
-          </a:prstGeom>
-          <a:noFill/>
-        </p:spPr>
-        <p:txBody>
-          <a:bodyPr wrap="square">
-            <a:spAutoFit/>
-          </a:bodyPr>
-          <a:lstStyle/>
-          <a:p>
-            <a:r>
-              <a:rPr lang="en-US" sz="3500" dirty="0">
-                <a:latin typeface="GT Walsheim Trial Rg" pitchFamily="2" charset="77"/>
-              </a:rPr>
-              <a:t>Three-Layer Anomaly Detection Pipeline</a:t>
-            </a:r>
-          </a:p>
-        </p:txBody>
-      </p:sp>
-      <p:sp>
-        <p:nvSpPr>
-          <p:cNvPr id="2" name="Rectangle 1">
-            <a:extLst>
-              <a:ext uri="{FF2B5EF4-FFF2-40B4-BE49-F238E27FC236}">
-                <a16:creationId xmlns:a16="http://schemas.microsoft.com/office/drawing/2014/main" id="{7A68A61C-4608-E59F-E53A-ACC82BDE3BFB}"/>
-              </a:ext>
-            </a:extLst>
-          </p:cNvPr>
-          <p:cNvSpPr/>
-          <p:nvPr/>
-        </p:nvSpPr>
-        <p:spPr>
-          <a:xfrm>
-            <a:off x="854439" y="1790769"/>
-            <a:ext cx="10483122" cy="450883"/>
-          </a:xfrm>
-          <a:prstGeom prst="rect">
-            <a:avLst/>
-          </a:prstGeom>
-          <a:solidFill>
-            <a:srgbClr val="0078FF"/>
-          </a:solidFill>
-          <a:ln>
-            <a:noFill/>
-          </a:ln>
-        </p:spPr>
-        <p:style>
-          <a:lnRef idx="2">
-            <a:schemeClr val="accent1">
-              <a:shade val="15000"/>
-            </a:schemeClr>
-          </a:lnRef>
-          <a:fillRef idx="1">
-            <a:schemeClr val="accent1"/>
-          </a:fillRef>
-          <a:effectRef idx="0">
-            <a:schemeClr val="accent1"/>
-          </a:effectRef>
-          <a:fontRef idx="minor">
-            <a:schemeClr val="lt1"/>
-          </a:fontRef>
-        </p:style>
-        <p:txBody>
-          <a:bodyPr rtlCol="0" anchor="ctr"/>
-          <a:lstStyle/>
-          <a:p>
-            <a:pPr algn="ctr"/>
             <a:endParaRPr lang="en-US"/>
-          </a:p>
-        </p:txBody>
-      </p:sp>
-      <p:sp>
-        <p:nvSpPr>
-          <p:cNvPr id="5" name="TextBox 4">
-            <a:extLst>
-              <a:ext uri="{FF2B5EF4-FFF2-40B4-BE49-F238E27FC236}">
-                <a16:creationId xmlns:a16="http://schemas.microsoft.com/office/drawing/2014/main" id="{D7373F07-4ACA-1B01-241E-AF7E7DC70674}"/>
-              </a:ext>
-            </a:extLst>
-          </p:cNvPr>
-          <p:cNvSpPr txBox="1"/>
-          <p:nvPr/>
-        </p:nvSpPr>
-        <p:spPr>
-          <a:xfrm>
-            <a:off x="985276" y="1831544"/>
-            <a:ext cx="2866106" cy="369332"/>
-          </a:xfrm>
-          <a:prstGeom prst="rect">
-            <a:avLst/>
-          </a:prstGeom>
-          <a:noFill/>
-        </p:spPr>
-        <p:txBody>
-          <a:bodyPr wrap="none" rtlCol="0">
-            <a:spAutoFit/>
-          </a:bodyPr>
-          <a:lstStyle/>
-          <a:p>
-            <a:r>
-              <a:rPr lang="en-US" dirty="0">
-                <a:solidFill>
-                  <a:schemeClr val="bg1"/>
-                </a:solidFill>
-                <a:latin typeface="GT Walsheim Trial Rg" pitchFamily="2" charset="77"/>
-              </a:rPr>
-              <a:t>Layer 1 — Isolation Forest</a:t>
-            </a:r>
-          </a:p>
-        </p:txBody>
-      </p:sp>
-      <p:sp>
-        <p:nvSpPr>
-          <p:cNvPr id="7" name="Rectangle 6">
-            <a:extLst>
-              <a:ext uri="{FF2B5EF4-FFF2-40B4-BE49-F238E27FC236}">
-                <a16:creationId xmlns:a16="http://schemas.microsoft.com/office/drawing/2014/main" id="{9C0FDC66-D3E4-E203-0DF1-C8F46FC5F057}"/>
-              </a:ext>
-            </a:extLst>
-          </p:cNvPr>
-          <p:cNvSpPr/>
-          <p:nvPr/>
-        </p:nvSpPr>
-        <p:spPr>
-          <a:xfrm>
-            <a:off x="854438" y="2292538"/>
-            <a:ext cx="5241562" cy="2166636"/>
-          </a:xfrm>
-          <a:prstGeom prst="rect">
-            <a:avLst/>
-          </a:prstGeom>
-          <a:solidFill>
-            <a:schemeClr val="bg1">
-              <a:lumMod val="95000"/>
-            </a:schemeClr>
-          </a:solidFill>
-          <a:ln>
-            <a:noFill/>
-          </a:ln>
-        </p:spPr>
-        <p:style>
-          <a:lnRef idx="2">
-            <a:schemeClr val="accent1">
-              <a:shade val="15000"/>
-            </a:schemeClr>
-          </a:lnRef>
-          <a:fillRef idx="1">
-            <a:schemeClr val="accent1"/>
-          </a:fillRef>
-          <a:effectRef idx="0">
-            <a:schemeClr val="accent1"/>
-          </a:effectRef>
-          <a:fontRef idx="minor">
-            <a:schemeClr val="lt1"/>
-          </a:fontRef>
-        </p:style>
-        <p:txBody>
-          <a:bodyPr rtlCol="0" anchor="ctr"/>
-          <a:lstStyle/>
-          <a:p>
-            <a:pPr algn="ctr"/>
-            <a:endParaRPr lang="en-US">
-              <a:solidFill>
-                <a:schemeClr val="bg1">
-                  <a:lumMod val="95000"/>
-                </a:schemeClr>
-              </a:solidFill>
-            </a:endParaRPr>
-          </a:p>
-        </p:txBody>
-      </p:sp>
-      <p:sp>
-        <p:nvSpPr>
-          <p:cNvPr id="10" name="TextBox 9">
-            <a:extLst>
-              <a:ext uri="{FF2B5EF4-FFF2-40B4-BE49-F238E27FC236}">
-                <a16:creationId xmlns:a16="http://schemas.microsoft.com/office/drawing/2014/main" id="{88F07873-F556-363B-D82F-5070AC0E40F8}"/>
-              </a:ext>
-            </a:extLst>
-          </p:cNvPr>
-          <p:cNvSpPr txBox="1"/>
-          <p:nvPr/>
-        </p:nvSpPr>
-        <p:spPr>
-          <a:xfrm>
-            <a:off x="1066805" y="2637192"/>
-            <a:ext cx="6096000" cy="1477328"/>
-          </a:xfrm>
-          <a:prstGeom prst="rect">
-            <a:avLst/>
-          </a:prstGeom>
-          <a:noFill/>
-        </p:spPr>
-        <p:txBody>
-          <a:bodyPr wrap="square">
-            <a:spAutoFit/>
-          </a:bodyPr>
-          <a:lstStyle/>
-          <a:p>
-            <a:pPr algn="l"/>
-            <a:r>
-              <a:rPr lang="en-US" b="1" dirty="0">
-                <a:effectLst/>
-                <a:latin typeface="GT Walsheim Trial Rg" pitchFamily="2" charset="77"/>
-              </a:rPr>
-              <a:t>Input features: </a:t>
-            </a:r>
-            <a:r>
-              <a:rPr lang="en-US" dirty="0">
-                <a:effectLst/>
-                <a:latin typeface="GT Walsheim Trial Rg" pitchFamily="2" charset="77"/>
-              </a:rPr>
-              <a:t>Speed, Acceleration, </a:t>
-            </a:r>
-            <a:r>
-              <a:rPr lang="en-US" dirty="0" err="1">
-                <a:effectLst/>
-                <a:latin typeface="GT Walsheim Trial Rg" pitchFamily="2" charset="77"/>
-              </a:rPr>
-              <a:t>YawRate</a:t>
-            </a:r>
-            <a:endParaRPr lang="en-US" dirty="0">
-              <a:effectLst/>
-              <a:latin typeface="GT Walsheim Trial Rg" pitchFamily="2" charset="77"/>
-            </a:endParaRPr>
-          </a:p>
-          <a:p>
-            <a:pPr algn="l"/>
-            <a:r>
-              <a:rPr lang="en-US" dirty="0">
-                <a:effectLst/>
-                <a:latin typeface="GT Walsheim Trial Rg" pitchFamily="2" charset="77"/>
-              </a:rPr>
-              <a:t>100 trees, unsupervised, no labels</a:t>
-            </a:r>
-          </a:p>
-          <a:p>
-            <a:pPr algn="l"/>
-            <a:r>
-              <a:rPr lang="en-US" dirty="0">
-                <a:effectLst/>
-                <a:latin typeface="GT Walsheim Trial Rg" pitchFamily="2" charset="77"/>
-              </a:rPr>
-              <a:t>Assigns anomaly score ∈ [0, 1] to each agent</a:t>
-            </a:r>
-          </a:p>
-          <a:p>
-            <a:pPr algn="l"/>
-            <a:r>
-              <a:rPr lang="en-US" b="1" dirty="0">
-                <a:effectLst/>
-                <a:latin typeface="GT Walsheim Trial Rg" pitchFamily="2" charset="77"/>
-              </a:rPr>
-              <a:t>Threshold: </a:t>
-            </a:r>
-            <a:r>
-              <a:rPr lang="en-US" dirty="0">
-                <a:effectLst/>
-                <a:latin typeface="GT Walsheim Trial Rg" pitchFamily="2" charset="77"/>
-              </a:rPr>
-              <a:t>99th percentile → top 1% flagged</a:t>
-            </a:r>
-          </a:p>
-          <a:p>
-            <a:pPr algn="l"/>
-            <a:r>
-              <a:rPr lang="en-US" b="1" dirty="0">
-                <a:effectLst/>
-                <a:latin typeface="GT Walsheim Trial Rg" pitchFamily="2" charset="77"/>
-              </a:rPr>
-              <a:t>Result: </a:t>
-            </a:r>
-            <a:r>
-              <a:rPr lang="en-US" dirty="0">
-                <a:effectLst/>
-                <a:latin typeface="GT Walsheim Trial Rg" pitchFamily="2" charset="77"/>
-              </a:rPr>
-              <a:t>46 anomalous agents out of 4,538</a:t>
-            </a:r>
-          </a:p>
-        </p:txBody>
-      </p:sp>
-      <p:sp>
-        <p:nvSpPr>
-          <p:cNvPr id="15" name="Rectangle 14">
-            <a:extLst>
-              <a:ext uri="{FF2B5EF4-FFF2-40B4-BE49-F238E27FC236}">
-                <a16:creationId xmlns:a16="http://schemas.microsoft.com/office/drawing/2014/main" id="{93ED1794-7A9B-1693-FDA5-2205F28AED0A}"/>
-              </a:ext>
-            </a:extLst>
-          </p:cNvPr>
-          <p:cNvSpPr/>
-          <p:nvPr/>
-        </p:nvSpPr>
-        <p:spPr>
-          <a:xfrm>
-            <a:off x="854439" y="4850626"/>
-            <a:ext cx="10483123" cy="450883"/>
-          </a:xfrm>
-          <a:prstGeom prst="rect">
-            <a:avLst/>
-          </a:prstGeom>
-          <a:solidFill>
-            <a:srgbClr val="00E9A0"/>
-          </a:solidFill>
-          <a:ln>
-            <a:noFill/>
-          </a:ln>
-        </p:spPr>
-        <p:style>
-          <a:lnRef idx="2">
-            <a:schemeClr val="accent1">
-              <a:shade val="15000"/>
-            </a:schemeClr>
-          </a:lnRef>
-          <a:fillRef idx="1">
-            <a:schemeClr val="accent1"/>
-          </a:fillRef>
-          <a:effectRef idx="0">
-            <a:schemeClr val="accent1"/>
-          </a:effectRef>
-          <a:fontRef idx="minor">
-            <a:schemeClr val="lt1"/>
-          </a:fontRef>
-        </p:style>
-        <p:txBody>
-          <a:bodyPr rtlCol="0" anchor="ctr"/>
-          <a:lstStyle/>
-          <a:p>
-            <a:pPr algn="ctr"/>
-            <a:endParaRPr lang="en-US"/>
-          </a:p>
-        </p:txBody>
-      </p:sp>
-      <p:sp>
-        <p:nvSpPr>
-          <p:cNvPr id="16" name="TextBox 15">
-            <a:extLst>
-              <a:ext uri="{FF2B5EF4-FFF2-40B4-BE49-F238E27FC236}">
-                <a16:creationId xmlns:a16="http://schemas.microsoft.com/office/drawing/2014/main" id="{A9B3A18B-1E6C-CA70-05A1-CB6DEEF0205D}"/>
-              </a:ext>
-            </a:extLst>
-          </p:cNvPr>
-          <p:cNvSpPr txBox="1"/>
-          <p:nvPr/>
-        </p:nvSpPr>
-        <p:spPr>
-          <a:xfrm>
-            <a:off x="1066806" y="4891401"/>
-            <a:ext cx="5569153" cy="369332"/>
-          </a:xfrm>
-          <a:prstGeom prst="rect">
-            <a:avLst/>
-          </a:prstGeom>
-          <a:noFill/>
-        </p:spPr>
-        <p:txBody>
-          <a:bodyPr wrap="square" rtlCol="0">
-            <a:spAutoFit/>
-          </a:bodyPr>
-          <a:lstStyle/>
-          <a:p>
-            <a:r>
-              <a:rPr lang="en-US" dirty="0">
-                <a:solidFill>
-                  <a:schemeClr val="bg1"/>
-                </a:solidFill>
-                <a:latin typeface="GT Walsheim Trial Rg" pitchFamily="2" charset="77"/>
-              </a:rPr>
-              <a:t>Layer 2 — Statistical Validation (Fisher's Exact Test)</a:t>
-            </a:r>
-          </a:p>
-        </p:txBody>
-      </p:sp>
-      <p:sp>
-        <p:nvSpPr>
-          <p:cNvPr id="17" name="Rectangle 16">
-            <a:extLst>
-              <a:ext uri="{FF2B5EF4-FFF2-40B4-BE49-F238E27FC236}">
-                <a16:creationId xmlns:a16="http://schemas.microsoft.com/office/drawing/2014/main" id="{ADE500D8-7D23-EFBE-E974-8C8A094C2972}"/>
-              </a:ext>
-            </a:extLst>
-          </p:cNvPr>
-          <p:cNvSpPr/>
-          <p:nvPr/>
-        </p:nvSpPr>
-        <p:spPr>
-          <a:xfrm>
-            <a:off x="9901518" y="125288"/>
-            <a:ext cx="5241562" cy="2166636"/>
-          </a:xfrm>
-          <a:prstGeom prst="rect">
-            <a:avLst/>
-          </a:prstGeom>
-          <a:solidFill>
-            <a:schemeClr val="bg1">
-              <a:lumMod val="95000"/>
-            </a:schemeClr>
-          </a:solidFill>
-          <a:ln>
-            <a:noFill/>
-          </a:ln>
-        </p:spPr>
-        <p:style>
-          <a:lnRef idx="2">
-            <a:schemeClr val="accent1">
-              <a:shade val="15000"/>
-            </a:schemeClr>
-          </a:lnRef>
-          <a:fillRef idx="1">
-            <a:schemeClr val="accent1"/>
-          </a:fillRef>
-          <a:effectRef idx="0">
-            <a:schemeClr val="accent1"/>
-          </a:effectRef>
-          <a:fontRef idx="minor">
-            <a:schemeClr val="lt1"/>
-          </a:fontRef>
-        </p:style>
-        <p:txBody>
-          <a:bodyPr rtlCol="0" anchor="ctr"/>
-          <a:lstStyle/>
-          <a:p>
-            <a:pPr algn="ctr"/>
-            <a:endParaRPr lang="en-US">
-              <a:solidFill>
-                <a:schemeClr val="bg1">
-                  <a:lumMod val="95000"/>
-                </a:schemeClr>
-              </a:solidFill>
-            </a:endParaRPr>
-          </a:p>
-        </p:txBody>
-      </p:sp>
-      <p:sp>
-        <p:nvSpPr>
-          <p:cNvPr id="18" name="TextBox 17">
-            <a:extLst>
-              <a:ext uri="{FF2B5EF4-FFF2-40B4-BE49-F238E27FC236}">
-                <a16:creationId xmlns:a16="http://schemas.microsoft.com/office/drawing/2014/main" id="{7689519C-D504-BA4F-29D1-F8A65AB56BCC}"/>
-              </a:ext>
-            </a:extLst>
-          </p:cNvPr>
-          <p:cNvSpPr txBox="1"/>
-          <p:nvPr/>
-        </p:nvSpPr>
-        <p:spPr>
-          <a:xfrm>
-            <a:off x="10113885" y="469942"/>
-            <a:ext cx="6096000" cy="1477328"/>
-          </a:xfrm>
-          <a:prstGeom prst="rect">
-            <a:avLst/>
-          </a:prstGeom>
-          <a:noFill/>
-        </p:spPr>
-        <p:txBody>
-          <a:bodyPr wrap="square">
-            <a:spAutoFit/>
-          </a:bodyPr>
-          <a:lstStyle/>
-          <a:p>
-            <a:pPr algn="l"/>
-            <a:r>
-              <a:rPr lang="en-US" b="1" dirty="0">
-                <a:effectLst/>
-                <a:latin typeface="GT Walsheim Trial Rg" pitchFamily="2" charset="77"/>
-              </a:rPr>
-              <a:t>Input features: </a:t>
-            </a:r>
-            <a:r>
-              <a:rPr lang="en-US" dirty="0">
-                <a:effectLst/>
-                <a:latin typeface="GT Walsheim Trial Rg" pitchFamily="2" charset="77"/>
-              </a:rPr>
-              <a:t>Speed, Acceleration, </a:t>
-            </a:r>
-            <a:r>
-              <a:rPr lang="en-US" dirty="0" err="1">
-                <a:effectLst/>
-                <a:latin typeface="GT Walsheim Trial Rg" pitchFamily="2" charset="77"/>
-              </a:rPr>
-              <a:t>YawRate</a:t>
-            </a:r>
-            <a:endParaRPr lang="en-US" dirty="0">
-              <a:effectLst/>
-              <a:latin typeface="GT Walsheim Trial Rg" pitchFamily="2" charset="77"/>
-            </a:endParaRPr>
-          </a:p>
-          <a:p>
-            <a:pPr algn="l"/>
-            <a:r>
-              <a:rPr lang="en-US" dirty="0">
-                <a:effectLst/>
-                <a:latin typeface="GT Walsheim Trial Rg" pitchFamily="2" charset="77"/>
-              </a:rPr>
-              <a:t>100 trees, unsupervised, no labels</a:t>
-            </a:r>
-          </a:p>
-          <a:p>
-            <a:pPr algn="l"/>
-            <a:r>
-              <a:rPr lang="en-US" dirty="0">
-                <a:effectLst/>
-                <a:latin typeface="GT Walsheim Trial Rg" pitchFamily="2" charset="77"/>
-              </a:rPr>
-              <a:t>Assigns anomaly score ∈ [0, 1] to each agent</a:t>
-            </a:r>
-          </a:p>
-          <a:p>
-            <a:pPr algn="l"/>
-            <a:r>
-              <a:rPr lang="en-US" b="1" dirty="0">
-                <a:effectLst/>
-                <a:latin typeface="GT Walsheim Trial Rg" pitchFamily="2" charset="77"/>
-              </a:rPr>
-              <a:t>Threshold: </a:t>
-            </a:r>
-            <a:r>
-              <a:rPr lang="en-US" dirty="0">
-                <a:effectLst/>
-                <a:latin typeface="GT Walsheim Trial Rg" pitchFamily="2" charset="77"/>
-              </a:rPr>
-              <a:t>99th percentile → top 1% flagged</a:t>
-            </a:r>
-          </a:p>
-          <a:p>
-            <a:pPr algn="l"/>
-            <a:r>
-              <a:rPr lang="en-US" b="1" dirty="0">
-                <a:effectLst/>
-                <a:latin typeface="GT Walsheim Trial Rg" pitchFamily="2" charset="77"/>
-              </a:rPr>
-              <a:t>Result: </a:t>
-            </a:r>
-            <a:r>
-              <a:rPr lang="en-US" dirty="0">
-                <a:effectLst/>
-                <a:latin typeface="GT Walsheim Trial Rg" pitchFamily="2" charset="77"/>
-              </a:rPr>
-              <a:t>46 anomalous agents out of 4,538</a:t>
-            </a:r>
           </a:p>
         </p:txBody>
       </p:sp>
@@ -19572,6 +22762,67 @@
 </file>
 
 <file path=ppt/slides/slide8.xml><?xml version="1.0" encoding="utf-8"?>
+<p:sld xmlns:a="http://schemas.openxmlformats.org/drawingml/2006/main" xmlns:r="http://schemas.openxmlformats.org/officeDocument/2006/relationships" xmlns:p="http://schemas.openxmlformats.org/presentationml/2006/main" show="0">
+  <p:cSld>
+    <p:spTree>
+      <p:nvGrpSpPr>
+        <p:cNvPr id="1" name="">
+          <a:extLst>
+            <a:ext uri="{FF2B5EF4-FFF2-40B4-BE49-F238E27FC236}">
+              <a16:creationId xmlns:a16="http://schemas.microsoft.com/office/drawing/2014/main" id="{9E5C9765-B19F-2DA8-B49F-3989A712FA5D}"/>
+            </a:ext>
+          </a:extLst>
+        </p:cNvPr>
+        <p:cNvGrpSpPr/>
+        <p:nvPr/>
+      </p:nvGrpSpPr>
+      <p:grpSpPr>
+        <a:xfrm>
+          <a:off x="0" y="0"/>
+          <a:ext cx="0" cy="0"/>
+          <a:chOff x="0" y="0"/>
+          <a:chExt cx="0" cy="0"/>
+        </a:xfrm>
+      </p:grpSpPr>
+      <p:sp>
+        <p:nvSpPr>
+          <p:cNvPr id="3" name="Title 2">
+            <a:extLst>
+              <a:ext uri="{FF2B5EF4-FFF2-40B4-BE49-F238E27FC236}">
+                <a16:creationId xmlns:a16="http://schemas.microsoft.com/office/drawing/2014/main" id="{FCAB2BF5-F20F-C31F-3CA6-179525C2DB7D}"/>
+              </a:ext>
+            </a:extLst>
+          </p:cNvPr>
+          <p:cNvSpPr>
+            <a:spLocks noGrp="1"/>
+          </p:cNvSpPr>
+          <p:nvPr>
+            <p:ph type="ctrTitle"/>
+          </p:nvPr>
+        </p:nvSpPr>
+        <p:spPr/>
+        <p:txBody>
+          <a:bodyPr/>
+          <a:lstStyle/>
+          <a:p>
+            <a:endParaRPr lang="en-US"/>
+          </a:p>
+        </p:txBody>
+      </p:sp>
+    </p:spTree>
+    <p:extLst>
+      <p:ext uri="{BB962C8B-B14F-4D97-AF65-F5344CB8AC3E}">
+        <p14:creationId xmlns:p14="http://schemas.microsoft.com/office/powerpoint/2010/main" val="1015887060"/>
+      </p:ext>
+    </p:extLst>
+  </p:cSld>
+  <p:clrMapOvr>
+    <a:masterClrMapping/>
+  </p:clrMapOvr>
+</p:sld>
+</file>
+
+<file path=ppt/slides/slide9.xml><?xml version="1.0" encoding="utf-8"?>
 <p:sld xmlns:a="http://schemas.openxmlformats.org/drawingml/2006/main" xmlns:r="http://schemas.openxmlformats.org/officeDocument/2006/relationships" xmlns:p="http://schemas.openxmlformats.org/presentationml/2006/main">
   <p:cSld>
     <p:spTree>
@@ -21646,1489 +24897,6 @@
     <p:extLst>
       <p:ext uri="{BB962C8B-B14F-4D97-AF65-F5344CB8AC3E}">
         <p14:creationId xmlns:p14="http://schemas.microsoft.com/office/powerpoint/2010/main" val="1500307707"/>
-      </p:ext>
-    </p:extLst>
-  </p:cSld>
-  <p:clrMapOvr>
-    <a:masterClrMapping/>
-  </p:clrMapOvr>
-</p:sld>
-</file>
-
-<file path=ppt/slides/slide9.xml><?xml version="1.0" encoding="utf-8"?>
-<p:sld xmlns:a="http://schemas.openxmlformats.org/drawingml/2006/main" xmlns:r="http://schemas.openxmlformats.org/officeDocument/2006/relationships" xmlns:p="http://schemas.openxmlformats.org/presentationml/2006/main">
-  <p:cSld>
-    <p:spTree>
-      <p:nvGrpSpPr>
-        <p:cNvPr id="1" name="">
-          <a:extLst>
-            <a:ext uri="{FF2B5EF4-FFF2-40B4-BE49-F238E27FC236}">
-              <a16:creationId xmlns:a16="http://schemas.microsoft.com/office/drawing/2014/main" id="{D86B5D17-03D9-44FB-2525-A230A9DCFA2A}"/>
-            </a:ext>
-          </a:extLst>
-        </p:cNvPr>
-        <p:cNvGrpSpPr/>
-        <p:nvPr/>
-      </p:nvGrpSpPr>
-      <p:grpSpPr>
-        <a:xfrm>
-          <a:off x="0" y="0"/>
-          <a:ext cx="0" cy="0"/>
-          <a:chOff x="0" y="0"/>
-          <a:chExt cx="0" cy="0"/>
-        </a:xfrm>
-      </p:grpSpPr>
-      <p:sp>
-        <p:nvSpPr>
-          <p:cNvPr id="12" name="Freeform 11">
-            <a:extLst>
-              <a:ext uri="{FF2B5EF4-FFF2-40B4-BE49-F238E27FC236}">
-                <a16:creationId xmlns:a16="http://schemas.microsoft.com/office/drawing/2014/main" id="{879D5AE1-D670-17B5-C1A3-0D759721D43E}"/>
-              </a:ext>
-            </a:extLst>
-          </p:cNvPr>
-          <p:cNvSpPr/>
-          <p:nvPr/>
-        </p:nvSpPr>
-        <p:spPr>
-          <a:xfrm rot="8442973">
-            <a:off x="-9874934" y="-3842844"/>
-            <a:ext cx="18800064" cy="7187173"/>
-          </a:xfrm>
-          <a:custGeom>
-            <a:avLst/>
-            <a:gdLst>
-              <a:gd name="csX0" fmla="*/ 0 w 18800064"/>
-              <a:gd name="csY0" fmla="*/ 7187173 h 7187173"/>
-              <a:gd name="csX1" fmla="*/ 7863840 w 18800064"/>
-              <a:gd name="csY1" fmla="*/ 18277 h 7187173"/>
-              <a:gd name="csX2" fmla="*/ 18800064 w 18800064"/>
-              <a:gd name="csY2" fmla="*/ 5248645 h 7187173"/>
-            </a:gdLst>
-            <a:ahLst/>
-            <a:cxnLst>
-              <a:cxn ang="0">
-                <a:pos x="csX0" y="csY0"/>
-              </a:cxn>
-              <a:cxn ang="0">
-                <a:pos x="csX1" y="csY1"/>
-              </a:cxn>
-              <a:cxn ang="0">
-                <a:pos x="csX2" y="csY2"/>
-              </a:cxn>
-            </a:cxnLst>
-            <a:rect l="l" t="t" r="r" b="b"/>
-            <a:pathLst>
-              <a:path w="18800064" h="7187173">
-                <a:moveTo>
-                  <a:pt x="0" y="7187173"/>
-                </a:moveTo>
-                <a:cubicBezTo>
-                  <a:pt x="2365248" y="3764269"/>
-                  <a:pt x="4730496" y="341365"/>
-                  <a:pt x="7863840" y="18277"/>
-                </a:cubicBezTo>
-                <a:cubicBezTo>
-                  <a:pt x="10997184" y="-304811"/>
-                  <a:pt x="17586960" y="3742933"/>
-                  <a:pt x="18800064" y="5248645"/>
-                </a:cubicBezTo>
-              </a:path>
-            </a:pathLst>
-          </a:custGeom>
-          <a:noFill/>
-          <a:ln w="635000">
-            <a:solidFill>
-              <a:schemeClr val="tx1">
-                <a:alpha val="3000"/>
-              </a:schemeClr>
-            </a:solidFill>
-          </a:ln>
-        </p:spPr>
-        <p:style>
-          <a:lnRef idx="2">
-            <a:schemeClr val="accent1">
-              <a:shade val="15000"/>
-            </a:schemeClr>
-          </a:lnRef>
-          <a:fillRef idx="1">
-            <a:schemeClr val="accent1"/>
-          </a:fillRef>
-          <a:effectRef idx="0">
-            <a:schemeClr val="accent1"/>
-          </a:effectRef>
-          <a:fontRef idx="minor">
-            <a:schemeClr val="lt1"/>
-          </a:fontRef>
-        </p:style>
-        <p:txBody>
-          <a:bodyPr rtlCol="0" anchor="ctr"/>
-          <a:lstStyle/>
-          <a:p>
-            <a:pPr algn="ctr"/>
-            <a:endParaRPr lang="en-US"/>
-          </a:p>
-        </p:txBody>
-      </p:sp>
-      <p:sp>
-        <p:nvSpPr>
-          <p:cNvPr id="15" name="Freeform 14">
-            <a:extLst>
-              <a:ext uri="{FF2B5EF4-FFF2-40B4-BE49-F238E27FC236}">
-                <a16:creationId xmlns:a16="http://schemas.microsoft.com/office/drawing/2014/main" id="{D37E2142-0FFF-FBCA-977C-BD6E52F367DE}"/>
-              </a:ext>
-            </a:extLst>
-          </p:cNvPr>
-          <p:cNvSpPr/>
-          <p:nvPr/>
-        </p:nvSpPr>
-        <p:spPr>
-          <a:xfrm rot="18406025">
-            <a:off x="2075489" y="3958667"/>
-            <a:ext cx="18800064" cy="7187173"/>
-          </a:xfrm>
-          <a:custGeom>
-            <a:avLst/>
-            <a:gdLst>
-              <a:gd name="csX0" fmla="*/ 0 w 18800064"/>
-              <a:gd name="csY0" fmla="*/ 7187173 h 7187173"/>
-              <a:gd name="csX1" fmla="*/ 7863840 w 18800064"/>
-              <a:gd name="csY1" fmla="*/ 18277 h 7187173"/>
-              <a:gd name="csX2" fmla="*/ 18800064 w 18800064"/>
-              <a:gd name="csY2" fmla="*/ 5248645 h 7187173"/>
-            </a:gdLst>
-            <a:ahLst/>
-            <a:cxnLst>
-              <a:cxn ang="0">
-                <a:pos x="csX0" y="csY0"/>
-              </a:cxn>
-              <a:cxn ang="0">
-                <a:pos x="csX1" y="csY1"/>
-              </a:cxn>
-              <a:cxn ang="0">
-                <a:pos x="csX2" y="csY2"/>
-              </a:cxn>
-            </a:cxnLst>
-            <a:rect l="l" t="t" r="r" b="b"/>
-            <a:pathLst>
-              <a:path w="18800064" h="7187173">
-                <a:moveTo>
-                  <a:pt x="0" y="7187173"/>
-                </a:moveTo>
-                <a:cubicBezTo>
-                  <a:pt x="2365248" y="3764269"/>
-                  <a:pt x="4730496" y="341365"/>
-                  <a:pt x="7863840" y="18277"/>
-                </a:cubicBezTo>
-                <a:cubicBezTo>
-                  <a:pt x="10997184" y="-304811"/>
-                  <a:pt x="17586960" y="3742933"/>
-                  <a:pt x="18800064" y="5248645"/>
-                </a:cubicBezTo>
-              </a:path>
-            </a:pathLst>
-          </a:custGeom>
-          <a:noFill/>
-          <a:ln w="635000">
-            <a:solidFill>
-              <a:schemeClr val="tx1">
-                <a:alpha val="3000"/>
-              </a:schemeClr>
-            </a:solidFill>
-          </a:ln>
-        </p:spPr>
-        <p:style>
-          <a:lnRef idx="2">
-            <a:schemeClr val="accent1">
-              <a:shade val="15000"/>
-            </a:schemeClr>
-          </a:lnRef>
-          <a:fillRef idx="1">
-            <a:schemeClr val="accent1"/>
-          </a:fillRef>
-          <a:effectRef idx="0">
-            <a:schemeClr val="accent1"/>
-          </a:effectRef>
-          <a:fontRef idx="minor">
-            <a:schemeClr val="lt1"/>
-          </a:fontRef>
-        </p:style>
-        <p:txBody>
-          <a:bodyPr rtlCol="0" anchor="ctr"/>
-          <a:lstStyle/>
-          <a:p>
-            <a:pPr algn="ctr"/>
-            <a:endParaRPr lang="en-US"/>
-          </a:p>
-        </p:txBody>
-      </p:sp>
-      <p:pic>
-        <p:nvPicPr>
-          <p:cNvPr id="1026" name="Picture 2" descr="Waymo Logo">
-            <a:extLst>
-              <a:ext uri="{FF2B5EF4-FFF2-40B4-BE49-F238E27FC236}">
-                <a16:creationId xmlns:a16="http://schemas.microsoft.com/office/drawing/2014/main" id="{08C5FC6B-2A30-8CF0-4995-D7BFA29BFDA5}"/>
-              </a:ext>
-            </a:extLst>
-          </p:cNvPr>
-          <p:cNvPicPr>
-            <a:picLocks noChangeAspect="1" noChangeArrowheads="1"/>
-          </p:cNvPicPr>
-          <p:nvPr/>
-        </p:nvPicPr>
-        <p:blipFill>
-          <a:blip r:embed="rId3">
-            <a:extLst>
-              <a:ext uri="{28A0092B-C50C-407E-A947-70E740481C1C}">
-                <a14:useLocalDpi xmlns:a14="http://schemas.microsoft.com/office/drawing/2010/main" val="0"/>
-              </a:ext>
-            </a:extLst>
-          </a:blip>
-          <a:srcRect/>
-          <a:stretch>
-            <a:fillRect/>
-          </a:stretch>
-        </p:blipFill>
-        <p:spPr bwMode="auto">
-          <a:xfrm>
-            <a:off x="10795378" y="425703"/>
-            <a:ext cx="782903" cy="782903"/>
-          </a:xfrm>
-          <a:prstGeom prst="rect">
-            <a:avLst/>
-          </a:prstGeom>
-          <a:noFill/>
-          <a:extLst>
-            <a:ext uri="{909E8E84-426E-40DD-AFC4-6F175D3DCCD1}">
-              <a14:hiddenFill xmlns:a14="http://schemas.microsoft.com/office/drawing/2010/main">
-                <a:solidFill>
-                  <a:srgbClr val="FFFFFF"/>
-                </a:solidFill>
-              </a14:hiddenFill>
-            </a:ext>
-          </a:extLst>
-        </p:spPr>
-      </p:pic>
-      <p:sp>
-        <p:nvSpPr>
-          <p:cNvPr id="4" name="Title 3">
-            <a:extLst>
-              <a:ext uri="{FF2B5EF4-FFF2-40B4-BE49-F238E27FC236}">
-                <a16:creationId xmlns:a16="http://schemas.microsoft.com/office/drawing/2014/main" id="{4BDC90D8-8254-451E-8A54-63DD1F1D44D3}"/>
-              </a:ext>
-            </a:extLst>
-          </p:cNvPr>
-          <p:cNvSpPr>
-            <a:spLocks noGrp="1"/>
-          </p:cNvSpPr>
-          <p:nvPr>
-            <p:ph type="ctrTitle"/>
-          </p:nvPr>
-        </p:nvSpPr>
-        <p:spPr>
-          <a:xfrm>
-            <a:off x="716478" y="447821"/>
-            <a:ext cx="3073202" cy="369333"/>
-          </a:xfrm>
-        </p:spPr>
-        <p:txBody>
-          <a:bodyPr>
-            <a:normAutofit/>
-          </a:bodyPr>
-          <a:lstStyle/>
-          <a:p>
-            <a:pPr algn="l"/>
-            <a:r>
-              <a:rPr lang="en-US" sz="1500" dirty="0">
-                <a:solidFill>
-                  <a:srgbClr val="989DA2"/>
-                </a:solidFill>
-                <a:latin typeface="GT Walsheim Trial Rg" pitchFamily="2" charset="77"/>
-              </a:rPr>
-              <a:t>SECTION A - RESULTS  </a:t>
-            </a:r>
-          </a:p>
-        </p:txBody>
-      </p:sp>
-      <p:sp>
-        <p:nvSpPr>
-          <p:cNvPr id="8" name="TextBox 7">
-            <a:extLst>
-              <a:ext uri="{FF2B5EF4-FFF2-40B4-BE49-F238E27FC236}">
-                <a16:creationId xmlns:a16="http://schemas.microsoft.com/office/drawing/2014/main" id="{CA5BCE23-5067-2282-04B1-B7A52B3128DB}"/>
-              </a:ext>
-            </a:extLst>
-          </p:cNvPr>
-          <p:cNvSpPr txBox="1"/>
-          <p:nvPr/>
-        </p:nvSpPr>
-        <p:spPr>
-          <a:xfrm>
-            <a:off x="716476" y="952090"/>
-            <a:ext cx="9236415" cy="630942"/>
-          </a:xfrm>
-          <a:prstGeom prst="rect">
-            <a:avLst/>
-          </a:prstGeom>
-          <a:noFill/>
-        </p:spPr>
-        <p:txBody>
-          <a:bodyPr wrap="square">
-            <a:spAutoFit/>
-          </a:bodyPr>
-          <a:lstStyle/>
-          <a:p>
-            <a:r>
-              <a:rPr lang="en-US" sz="3500" dirty="0">
-                <a:latin typeface="GT Walsheim Trial Rg" pitchFamily="2" charset="77"/>
-              </a:rPr>
-              <a:t>Results: Descriptive Statistics</a:t>
-            </a:r>
-          </a:p>
-        </p:txBody>
-      </p:sp>
-      <p:sp>
-        <p:nvSpPr>
-          <p:cNvPr id="6" name="Rectangle 5">
-            <a:extLst>
-              <a:ext uri="{FF2B5EF4-FFF2-40B4-BE49-F238E27FC236}">
-                <a16:creationId xmlns:a16="http://schemas.microsoft.com/office/drawing/2014/main" id="{C9115712-845E-BD5C-5877-2CC7215556E8}"/>
-              </a:ext>
-            </a:extLst>
-          </p:cNvPr>
-          <p:cNvSpPr/>
-          <p:nvPr/>
-        </p:nvSpPr>
-        <p:spPr>
-          <a:xfrm>
-            <a:off x="854438" y="1839301"/>
-            <a:ext cx="10723843" cy="450883"/>
-          </a:xfrm>
-          <a:prstGeom prst="rect">
-            <a:avLst/>
-          </a:prstGeom>
-          <a:solidFill>
-            <a:srgbClr val="0078FF"/>
-          </a:solidFill>
-          <a:ln>
-            <a:noFill/>
-          </a:ln>
-        </p:spPr>
-        <p:style>
-          <a:lnRef idx="2">
-            <a:schemeClr val="accent1">
-              <a:shade val="15000"/>
-            </a:schemeClr>
-          </a:lnRef>
-          <a:fillRef idx="1">
-            <a:schemeClr val="accent1"/>
-          </a:fillRef>
-          <a:effectRef idx="0">
-            <a:schemeClr val="accent1"/>
-          </a:effectRef>
-          <a:fontRef idx="minor">
-            <a:schemeClr val="lt1"/>
-          </a:fontRef>
-        </p:style>
-        <p:txBody>
-          <a:bodyPr rtlCol="0" anchor="ctr"/>
-          <a:lstStyle/>
-          <a:p>
-            <a:pPr algn="ctr"/>
-            <a:endParaRPr lang="en-US"/>
-          </a:p>
-        </p:txBody>
-      </p:sp>
-      <p:sp>
-        <p:nvSpPr>
-          <p:cNvPr id="10" name="TextBox 9">
-            <a:extLst>
-              <a:ext uri="{FF2B5EF4-FFF2-40B4-BE49-F238E27FC236}">
-                <a16:creationId xmlns:a16="http://schemas.microsoft.com/office/drawing/2014/main" id="{F30DBAAC-CC45-B6C4-5865-26D213AD62FB}"/>
-              </a:ext>
-            </a:extLst>
-          </p:cNvPr>
-          <p:cNvSpPr txBox="1"/>
-          <p:nvPr/>
-        </p:nvSpPr>
-        <p:spPr>
-          <a:xfrm>
-            <a:off x="4270171" y="1880076"/>
-            <a:ext cx="3651657" cy="369332"/>
-          </a:xfrm>
-          <a:prstGeom prst="rect">
-            <a:avLst/>
-          </a:prstGeom>
-          <a:noFill/>
-        </p:spPr>
-        <p:txBody>
-          <a:bodyPr wrap="square">
-            <a:spAutoFit/>
-          </a:bodyPr>
-          <a:lstStyle/>
-          <a:p>
-            <a:pPr algn="l"/>
-            <a:r>
-              <a:rPr lang="en-US" dirty="0">
-                <a:solidFill>
-                  <a:schemeClr val="bg1"/>
-                </a:solidFill>
-                <a:effectLst/>
-                <a:latin typeface="GT Walsheim Trial Rg" pitchFamily="2" charset="77"/>
-              </a:rPr>
-              <a:t>Mean Speed by Agent Type (m/s)</a:t>
-            </a:r>
-          </a:p>
-        </p:txBody>
-      </p:sp>
-      <p:sp>
-        <p:nvSpPr>
-          <p:cNvPr id="19" name="TextBox 18">
-            <a:extLst>
-              <a:ext uri="{FF2B5EF4-FFF2-40B4-BE49-F238E27FC236}">
-                <a16:creationId xmlns:a16="http://schemas.microsoft.com/office/drawing/2014/main" id="{D967FE5B-F13A-94B5-C02F-038A0C8990B0}"/>
-              </a:ext>
-            </a:extLst>
-          </p:cNvPr>
-          <p:cNvSpPr txBox="1"/>
-          <p:nvPr/>
-        </p:nvSpPr>
-        <p:spPr>
-          <a:xfrm>
-            <a:off x="7520578" y="9301668"/>
-            <a:ext cx="3390637" cy="1200329"/>
-          </a:xfrm>
-          <a:prstGeom prst="rect">
-            <a:avLst/>
-          </a:prstGeom>
-          <a:noFill/>
-        </p:spPr>
-        <p:txBody>
-          <a:bodyPr wrap="square" rtlCol="0">
-            <a:spAutoFit/>
-          </a:bodyPr>
-          <a:lstStyle/>
-          <a:p>
-            <a:r>
-              <a:rPr lang="en-US" dirty="0">
-                <a:solidFill>
-                  <a:schemeClr val="bg1"/>
-                </a:solidFill>
-                <a:latin typeface="GT Walsheim Trial Rg" pitchFamily="2" charset="77"/>
-              </a:rPr>
-              <a:t>— 80 / 20 train / test split</a:t>
-            </a:r>
-          </a:p>
-          <a:p>
-            <a:r>
-              <a:rPr lang="en-US" dirty="0">
-                <a:solidFill>
-                  <a:schemeClr val="bg1"/>
-                </a:solidFill>
-                <a:latin typeface="GT Walsheim Trial Rg" pitchFamily="2" charset="77"/>
-              </a:rPr>
-              <a:t>— 5-fold cross-validation on training set.</a:t>
-            </a:r>
-          </a:p>
-          <a:p>
-            <a:r>
-              <a:rPr lang="en-US" dirty="0">
-                <a:solidFill>
-                  <a:schemeClr val="bg1"/>
-                </a:solidFill>
-                <a:latin typeface="GT Walsheim Trial Rg" pitchFamily="2" charset="77"/>
-              </a:rPr>
-              <a:t>— Metrics: RMSE (meters) · R²</a:t>
-            </a:r>
-          </a:p>
-        </p:txBody>
-      </p:sp>
-      <p:sp>
-        <p:nvSpPr>
-          <p:cNvPr id="20" name="Rectangle 19">
-            <a:extLst>
-              <a:ext uri="{FF2B5EF4-FFF2-40B4-BE49-F238E27FC236}">
-                <a16:creationId xmlns:a16="http://schemas.microsoft.com/office/drawing/2014/main" id="{0909F16F-0A5C-F265-F0A0-690C41791F6A}"/>
-              </a:ext>
-            </a:extLst>
-          </p:cNvPr>
-          <p:cNvSpPr/>
-          <p:nvPr/>
-        </p:nvSpPr>
-        <p:spPr>
-          <a:xfrm>
-            <a:off x="-223735" y="10155892"/>
-            <a:ext cx="6602278" cy="1156496"/>
-          </a:xfrm>
-          <a:prstGeom prst="rect">
-            <a:avLst/>
-          </a:prstGeom>
-          <a:solidFill>
-            <a:srgbClr val="0078FF"/>
-          </a:solidFill>
-          <a:ln>
-            <a:noFill/>
-          </a:ln>
-        </p:spPr>
-        <p:style>
-          <a:lnRef idx="2">
-            <a:schemeClr val="accent1">
-              <a:shade val="15000"/>
-            </a:schemeClr>
-          </a:lnRef>
-          <a:fillRef idx="1">
-            <a:schemeClr val="accent1"/>
-          </a:fillRef>
-          <a:effectRef idx="0">
-            <a:schemeClr val="accent1"/>
-          </a:effectRef>
-          <a:fontRef idx="minor">
-            <a:schemeClr val="lt1"/>
-          </a:fontRef>
-        </p:style>
-        <p:txBody>
-          <a:bodyPr rtlCol="0" anchor="ctr"/>
-          <a:lstStyle/>
-          <a:p>
-            <a:pPr algn="ctr"/>
-            <a:endParaRPr lang="en-US"/>
-          </a:p>
-        </p:txBody>
-      </p:sp>
-      <p:sp>
-        <p:nvSpPr>
-          <p:cNvPr id="21" name="TextBox 20">
-            <a:extLst>
-              <a:ext uri="{FF2B5EF4-FFF2-40B4-BE49-F238E27FC236}">
-                <a16:creationId xmlns:a16="http://schemas.microsoft.com/office/drawing/2014/main" id="{D8723AF3-74A0-D29C-3621-6F5F9EFF648E}"/>
-              </a:ext>
-            </a:extLst>
-          </p:cNvPr>
-          <p:cNvSpPr txBox="1"/>
-          <p:nvPr/>
-        </p:nvSpPr>
-        <p:spPr>
-          <a:xfrm>
-            <a:off x="541195" y="10314693"/>
-            <a:ext cx="5458087" cy="784830"/>
-          </a:xfrm>
-          <a:prstGeom prst="rect">
-            <a:avLst/>
-          </a:prstGeom>
-          <a:noFill/>
-        </p:spPr>
-        <p:txBody>
-          <a:bodyPr wrap="square">
-            <a:spAutoFit/>
-          </a:bodyPr>
-          <a:lstStyle/>
-          <a:p>
-            <a:pPr algn="l"/>
-            <a:r>
-              <a:rPr lang="en-US" sz="1500" dirty="0">
-                <a:solidFill>
-                  <a:schemeClr val="bg1"/>
-                </a:solidFill>
-                <a:effectLst/>
-                <a:latin typeface="GT Walsheim Trial Lt" pitchFamily="2" charset="77"/>
-              </a:rPr>
-              <a:t>Stationary agents have near-zero displacement — trivially easy to predict. The two conditions reveal whether R² reflects real predictive power or dataset composition.</a:t>
-            </a:r>
-          </a:p>
-        </p:txBody>
-      </p:sp>
-      <p:sp>
-        <p:nvSpPr>
-          <p:cNvPr id="22" name="TextBox 21">
-            <a:extLst>
-              <a:ext uri="{FF2B5EF4-FFF2-40B4-BE49-F238E27FC236}">
-                <a16:creationId xmlns:a16="http://schemas.microsoft.com/office/drawing/2014/main" id="{31CF2942-2A27-BC3B-2E88-D72CF9981F3D}"/>
-              </a:ext>
-            </a:extLst>
-          </p:cNvPr>
-          <p:cNvSpPr txBox="1"/>
-          <p:nvPr/>
-        </p:nvSpPr>
-        <p:spPr>
-          <a:xfrm>
-            <a:off x="-688275" y="9607790"/>
-            <a:ext cx="1582840" cy="2400657"/>
-          </a:xfrm>
-          <a:prstGeom prst="rect">
-            <a:avLst/>
-          </a:prstGeom>
-          <a:noFill/>
-        </p:spPr>
-        <p:txBody>
-          <a:bodyPr wrap="square">
-            <a:spAutoFit/>
-          </a:bodyPr>
-          <a:lstStyle/>
-          <a:p>
-            <a:pPr algn="ctr">
-              <a:buNone/>
-            </a:pPr>
-            <a:r>
-              <a:rPr lang="en-US" sz="15000" b="0" i="0" dirty="0">
-                <a:solidFill>
-                  <a:schemeClr val="bg1">
-                    <a:alpha val="20000"/>
-                  </a:schemeClr>
-                </a:solidFill>
-                <a:effectLst/>
-                <a:latin typeface="GT Walsheim Trial Rg" pitchFamily="2" charset="77"/>
-              </a:rPr>
-              <a:t>"</a:t>
-            </a:r>
-          </a:p>
-        </p:txBody>
-      </p:sp>
-      <p:graphicFrame>
-        <p:nvGraphicFramePr>
-          <p:cNvPr id="9" name="Table 8">
-            <a:extLst>
-              <a:ext uri="{FF2B5EF4-FFF2-40B4-BE49-F238E27FC236}">
-                <a16:creationId xmlns:a16="http://schemas.microsoft.com/office/drawing/2014/main" id="{CF32A97D-8C0A-55E5-E1FC-D4E82FD5E137}"/>
-              </a:ext>
-            </a:extLst>
-          </p:cNvPr>
-          <p:cNvGraphicFramePr>
-            <a:graphicFrameLocks noGrp="1"/>
-          </p:cNvGraphicFramePr>
-          <p:nvPr>
-            <p:extLst>
-              <p:ext uri="{D42A27DB-BD31-4B8C-83A1-F6EECF244321}">
-                <p14:modId xmlns:p14="http://schemas.microsoft.com/office/powerpoint/2010/main" val="1540186146"/>
-              </p:ext>
-            </p:extLst>
-          </p:nvPr>
-        </p:nvGraphicFramePr>
-        <p:xfrm>
-          <a:off x="854438" y="2721367"/>
-          <a:ext cx="10723843" cy="2064642"/>
-        </p:xfrm>
-        <a:graphic>
-          <a:graphicData uri="http://schemas.openxmlformats.org/drawingml/2006/table">
-            <a:tbl>
-              <a:tblPr firstRow="1" bandRow="1">
-                <a:tableStyleId>{073A0DAA-6AF3-43AB-8588-CEC1D06C72B9}</a:tableStyleId>
-              </a:tblPr>
-              <a:tblGrid>
-                <a:gridCol w="2413651">
-                  <a:extLst>
-                    <a:ext uri="{9D8B030D-6E8A-4147-A177-3AD203B41FA5}">
-                      <a16:colId xmlns:a16="http://schemas.microsoft.com/office/drawing/2014/main" val="1610543496"/>
-                    </a:ext>
-                  </a:extLst>
-                </a:gridCol>
-                <a:gridCol w="3747930">
-                  <a:extLst>
-                    <a:ext uri="{9D8B030D-6E8A-4147-A177-3AD203B41FA5}">
-                      <a16:colId xmlns:a16="http://schemas.microsoft.com/office/drawing/2014/main" val="2940384537"/>
-                    </a:ext>
-                  </a:extLst>
-                </a:gridCol>
-                <a:gridCol w="4562262">
-                  <a:extLst>
-                    <a:ext uri="{9D8B030D-6E8A-4147-A177-3AD203B41FA5}">
-                      <a16:colId xmlns:a16="http://schemas.microsoft.com/office/drawing/2014/main" val="3740313691"/>
-                    </a:ext>
-                  </a:extLst>
-                </a:gridCol>
-              </a:tblGrid>
-              <a:tr h="296694">
-                <a:tc>
-                  <a:txBody>
-                    <a:bodyPr/>
-                    <a:lstStyle/>
-                    <a:p>
-                      <a:r>
-                        <a:rPr lang="en-US" sz="1500" b="0" i="0" dirty="0">
-                          <a:solidFill>
-                            <a:schemeClr val="bg1"/>
-                          </a:solidFill>
-                          <a:latin typeface="GT Walsheim Trial Rg" pitchFamily="2" charset="77"/>
-                        </a:rPr>
-                        <a:t>Agent Type</a:t>
-                      </a:r>
-                    </a:p>
-                  </a:txBody>
-                  <a:tcPr>
-                    <a:lnL w="12700" cap="flat" cmpd="sng" algn="ctr">
-                      <a:noFill/>
-                      <a:prstDash val="solid"/>
-                      <a:round/>
-                      <a:headEnd type="none" w="med" len="med"/>
-                      <a:tailEnd type="none" w="med" len="med"/>
-                    </a:lnL>
-                    <a:lnR w="12700" cap="flat" cmpd="sng" algn="ctr">
-                      <a:noFill/>
-                      <a:prstDash val="solid"/>
-                      <a:round/>
-                      <a:headEnd type="none" w="med" len="med"/>
-                      <a:tailEnd type="none" w="med" len="med"/>
-                    </a:lnR>
-                    <a:lnT w="12700" cap="flat" cmpd="sng" algn="ctr">
-                      <a:noFill/>
-                      <a:prstDash val="solid"/>
-                      <a:round/>
-                      <a:headEnd type="none" w="med" len="med"/>
-                      <a:tailEnd type="none" w="med" len="med"/>
-                    </a:lnT>
-                    <a:lnB w="12700" cap="flat" cmpd="sng" algn="ctr">
-                      <a:noFill/>
-                      <a:prstDash val="solid"/>
-                      <a:round/>
-                      <a:headEnd type="none" w="med" len="med"/>
-                      <a:tailEnd type="none" w="med" len="med"/>
-                    </a:lnB>
-                    <a:lnTlToBr w="12700" cmpd="sng">
-                      <a:noFill/>
-                      <a:prstDash val="solid"/>
-                    </a:lnTlToBr>
-                    <a:lnBlToTr w="12700" cmpd="sng">
-                      <a:noFill/>
-                      <a:prstDash val="solid"/>
-                    </a:lnBlToTr>
-                    <a:solidFill>
-                      <a:srgbClr val="0078FF"/>
-                    </a:solidFill>
-                  </a:tcPr>
-                </a:tc>
-                <a:tc>
-                  <a:txBody>
-                    <a:bodyPr/>
-                    <a:lstStyle/>
-                    <a:p>
-                      <a:r>
-                        <a:rPr lang="en-US" sz="1500" b="0" i="0" dirty="0">
-                          <a:solidFill>
-                            <a:schemeClr val="bg1"/>
-                          </a:solidFill>
-                          <a:latin typeface="GT Walsheim Trial Rg" pitchFamily="2" charset="77"/>
-                        </a:rPr>
-                        <a:t>All Agent</a:t>
-                      </a:r>
-                    </a:p>
-                  </a:txBody>
-                  <a:tcPr>
-                    <a:lnL w="12700" cap="flat" cmpd="sng" algn="ctr">
-                      <a:noFill/>
-                      <a:prstDash val="solid"/>
-                      <a:round/>
-                      <a:headEnd type="none" w="med" len="med"/>
-                      <a:tailEnd type="none" w="med" len="med"/>
-                    </a:lnL>
-                    <a:lnR w="12700" cap="flat" cmpd="sng" algn="ctr">
-                      <a:noFill/>
-                      <a:prstDash val="solid"/>
-                      <a:round/>
-                      <a:headEnd type="none" w="med" len="med"/>
-                      <a:tailEnd type="none" w="med" len="med"/>
-                    </a:lnR>
-                    <a:lnT w="12700" cap="flat" cmpd="sng" algn="ctr">
-                      <a:noFill/>
-                      <a:prstDash val="solid"/>
-                      <a:round/>
-                      <a:headEnd type="none" w="med" len="med"/>
-                      <a:tailEnd type="none" w="med" len="med"/>
-                    </a:lnT>
-                    <a:lnB w="12700" cap="flat" cmpd="sng" algn="ctr">
-                      <a:noFill/>
-                      <a:prstDash val="solid"/>
-                      <a:round/>
-                      <a:headEnd type="none" w="med" len="med"/>
-                      <a:tailEnd type="none" w="med" len="med"/>
-                    </a:lnB>
-                    <a:lnTlToBr w="12700" cmpd="sng">
-                      <a:noFill/>
-                      <a:prstDash val="solid"/>
-                    </a:lnTlToBr>
-                    <a:lnBlToTr w="12700" cmpd="sng">
-                      <a:noFill/>
-                      <a:prstDash val="solid"/>
-                    </a:lnBlToTr>
-                    <a:solidFill>
-                      <a:srgbClr val="0078FF"/>
-                    </a:solidFill>
-                  </a:tcPr>
-                </a:tc>
-                <a:tc>
-                  <a:txBody>
-                    <a:bodyPr/>
-                    <a:lstStyle/>
-                    <a:p>
-                      <a:r>
-                        <a:rPr lang="en-US" sz="1500" b="0" i="0" dirty="0">
-                          <a:solidFill>
-                            <a:schemeClr val="bg1"/>
-                          </a:solidFill>
-                          <a:latin typeface="GT Walsheim Trial Rg" pitchFamily="2" charset="77"/>
-                        </a:rPr>
-                        <a:t>Moving Only</a:t>
-                      </a:r>
-                    </a:p>
-                  </a:txBody>
-                  <a:tcPr>
-                    <a:lnL w="12700" cap="flat" cmpd="sng" algn="ctr">
-                      <a:noFill/>
-                      <a:prstDash val="solid"/>
-                      <a:round/>
-                      <a:headEnd type="none" w="med" len="med"/>
-                      <a:tailEnd type="none" w="med" len="med"/>
-                    </a:lnL>
-                    <a:lnR w="12700" cap="flat" cmpd="sng" algn="ctr">
-                      <a:noFill/>
-                      <a:prstDash val="solid"/>
-                      <a:round/>
-                      <a:headEnd type="none" w="med" len="med"/>
-                      <a:tailEnd type="none" w="med" len="med"/>
-                    </a:lnR>
-                    <a:lnT w="12700" cap="flat" cmpd="sng" algn="ctr">
-                      <a:noFill/>
-                      <a:prstDash val="solid"/>
-                      <a:round/>
-                      <a:headEnd type="none" w="med" len="med"/>
-                      <a:tailEnd type="none" w="med" len="med"/>
-                    </a:lnT>
-                    <a:lnB w="12700" cap="flat" cmpd="sng" algn="ctr">
-                      <a:noFill/>
-                      <a:prstDash val="solid"/>
-                      <a:round/>
-                      <a:headEnd type="none" w="med" len="med"/>
-                      <a:tailEnd type="none" w="med" len="med"/>
-                    </a:lnB>
-                    <a:lnTlToBr w="12700" cmpd="sng">
-                      <a:noFill/>
-                      <a:prstDash val="solid"/>
-                    </a:lnTlToBr>
-                    <a:lnBlToTr w="12700" cmpd="sng">
-                      <a:noFill/>
-                      <a:prstDash val="solid"/>
-                    </a:lnBlToTr>
-                    <a:solidFill>
-                      <a:srgbClr val="0078FF"/>
-                    </a:solidFill>
-                  </a:tcPr>
-                </a:tc>
-                <a:extLst>
-                  <a:ext uri="{0D108BD9-81ED-4DB2-BD59-A6C34878D82A}">
-                    <a16:rowId xmlns:a16="http://schemas.microsoft.com/office/drawing/2014/main" val="4220759275"/>
-                  </a:ext>
-                </a:extLst>
-              </a:tr>
-              <a:tr h="581534">
-                <a:tc>
-                  <a:txBody>
-                    <a:bodyPr/>
-                    <a:lstStyle/>
-                    <a:p>
-                      <a:r>
-                        <a:rPr lang="en-US" sz="1500" b="0" i="0" dirty="0">
-                          <a:solidFill>
-                            <a:schemeClr val="tx1"/>
-                          </a:solidFill>
-                          <a:latin typeface="GT Walsheim Trial Rg" pitchFamily="2" charset="77"/>
-                        </a:rPr>
-                        <a:t>Vehicle</a:t>
-                      </a:r>
-                    </a:p>
-                  </a:txBody>
-                  <a:tcPr>
-                    <a:lnL w="12700" cap="flat" cmpd="sng" algn="ctr">
-                      <a:noFill/>
-                      <a:prstDash val="solid"/>
-                      <a:round/>
-                      <a:headEnd type="none" w="med" len="med"/>
-                      <a:tailEnd type="none" w="med" len="med"/>
-                    </a:lnL>
-                    <a:lnR w="12700" cap="flat" cmpd="sng" algn="ctr">
-                      <a:noFill/>
-                      <a:prstDash val="solid"/>
-                      <a:round/>
-                      <a:headEnd type="none" w="med" len="med"/>
-                      <a:tailEnd type="none" w="med" len="med"/>
-                    </a:lnR>
-                    <a:lnT w="12700" cap="flat" cmpd="sng" algn="ctr">
-                      <a:noFill/>
-                      <a:prstDash val="solid"/>
-                      <a:round/>
-                      <a:headEnd type="none" w="med" len="med"/>
-                      <a:tailEnd type="none" w="med" len="med"/>
-                    </a:lnT>
-                    <a:lnB w="12700" cap="flat" cmpd="sng" algn="ctr">
-                      <a:noFill/>
-                      <a:prstDash val="solid"/>
-                      <a:round/>
-                      <a:headEnd type="none" w="med" len="med"/>
-                      <a:tailEnd type="none" w="med" len="med"/>
-                    </a:lnB>
-                    <a:lnTlToBr w="12700" cmpd="sng">
-                      <a:noFill/>
-                      <a:prstDash val="solid"/>
-                    </a:lnTlToBr>
-                    <a:lnBlToTr w="12700" cmpd="sng">
-                      <a:noFill/>
-                      <a:prstDash val="solid"/>
-                    </a:lnBlToTr>
-                    <a:solidFill>
-                      <a:schemeClr val="bg1">
-                        <a:lumMod val="95000"/>
-                      </a:schemeClr>
-                    </a:solidFill>
-                  </a:tcPr>
-                </a:tc>
-                <a:tc>
-                  <a:txBody>
-                    <a:bodyPr/>
-                    <a:lstStyle/>
-                    <a:p>
-                      <a:r>
-                        <a:rPr lang="en-US" sz="1500" b="0" i="0" dirty="0">
-                          <a:solidFill>
-                            <a:schemeClr val="tx1"/>
-                          </a:solidFill>
-                          <a:latin typeface="GT Walsheim Trial Rg" pitchFamily="2" charset="77"/>
-                        </a:rPr>
-                        <a:t>2.47</a:t>
-                      </a:r>
-                    </a:p>
-                  </a:txBody>
-                  <a:tcPr>
-                    <a:lnL w="12700" cap="flat" cmpd="sng" algn="ctr">
-                      <a:noFill/>
-                      <a:prstDash val="solid"/>
-                      <a:round/>
-                      <a:headEnd type="none" w="med" len="med"/>
-                      <a:tailEnd type="none" w="med" len="med"/>
-                    </a:lnL>
-                    <a:lnR w="12700" cap="flat" cmpd="sng" algn="ctr">
-                      <a:noFill/>
-                      <a:prstDash val="solid"/>
-                      <a:round/>
-                      <a:headEnd type="none" w="med" len="med"/>
-                      <a:tailEnd type="none" w="med" len="med"/>
-                    </a:lnR>
-                    <a:lnT w="12700" cap="flat" cmpd="sng" algn="ctr">
-                      <a:noFill/>
-                      <a:prstDash val="solid"/>
-                      <a:round/>
-                      <a:headEnd type="none" w="med" len="med"/>
-                      <a:tailEnd type="none" w="med" len="med"/>
-                    </a:lnT>
-                    <a:lnB w="12700" cap="flat" cmpd="sng" algn="ctr">
-                      <a:noFill/>
-                      <a:prstDash val="solid"/>
-                      <a:round/>
-                      <a:headEnd type="none" w="med" len="med"/>
-                      <a:tailEnd type="none" w="med" len="med"/>
-                    </a:lnB>
-                    <a:lnTlToBr w="12700" cmpd="sng">
-                      <a:noFill/>
-                      <a:prstDash val="solid"/>
-                    </a:lnTlToBr>
-                    <a:lnBlToTr w="12700" cmpd="sng">
-                      <a:noFill/>
-                      <a:prstDash val="solid"/>
-                    </a:lnBlToTr>
-                    <a:solidFill>
-                      <a:schemeClr val="bg1">
-                        <a:lumMod val="95000"/>
-                      </a:schemeClr>
-                    </a:solidFill>
-                  </a:tcPr>
-                </a:tc>
-                <a:tc>
-                  <a:txBody>
-                    <a:bodyPr/>
-                    <a:lstStyle/>
-                    <a:p>
-                      <a:r>
-                        <a:rPr lang="en-US" sz="1500" b="0" i="0" dirty="0">
-                          <a:solidFill>
-                            <a:schemeClr val="tx1"/>
-                          </a:solidFill>
-                          <a:latin typeface="GT Walsheim Trial Rg" pitchFamily="2" charset="77"/>
-                        </a:rPr>
-                        <a:t>6.74</a:t>
-                      </a:r>
-                    </a:p>
-                  </a:txBody>
-                  <a:tcPr>
-                    <a:lnL w="12700" cap="flat" cmpd="sng" algn="ctr">
-                      <a:noFill/>
-                      <a:prstDash val="solid"/>
-                      <a:round/>
-                      <a:headEnd type="none" w="med" len="med"/>
-                      <a:tailEnd type="none" w="med" len="med"/>
-                    </a:lnL>
-                    <a:lnR w="12700" cap="flat" cmpd="sng" algn="ctr">
-                      <a:noFill/>
-                      <a:prstDash val="solid"/>
-                      <a:round/>
-                      <a:headEnd type="none" w="med" len="med"/>
-                      <a:tailEnd type="none" w="med" len="med"/>
-                    </a:lnR>
-                    <a:lnT w="12700" cap="flat" cmpd="sng" algn="ctr">
-                      <a:noFill/>
-                      <a:prstDash val="solid"/>
-                      <a:round/>
-                      <a:headEnd type="none" w="med" len="med"/>
-                      <a:tailEnd type="none" w="med" len="med"/>
-                    </a:lnT>
-                    <a:lnB w="12700" cap="flat" cmpd="sng" algn="ctr">
-                      <a:noFill/>
-                      <a:prstDash val="solid"/>
-                      <a:round/>
-                      <a:headEnd type="none" w="med" len="med"/>
-                      <a:tailEnd type="none" w="med" len="med"/>
-                    </a:lnB>
-                    <a:lnTlToBr w="12700" cmpd="sng">
-                      <a:noFill/>
-                      <a:prstDash val="solid"/>
-                    </a:lnTlToBr>
-                    <a:lnBlToTr w="12700" cmpd="sng">
-                      <a:noFill/>
-                      <a:prstDash val="solid"/>
-                    </a:lnBlToTr>
-                    <a:solidFill>
-                      <a:schemeClr val="bg1">
-                        <a:lumMod val="95000"/>
-                      </a:schemeClr>
-                    </a:solidFill>
-                  </a:tcPr>
-                </a:tc>
-                <a:extLst>
-                  <a:ext uri="{0D108BD9-81ED-4DB2-BD59-A6C34878D82A}">
-                    <a16:rowId xmlns:a16="http://schemas.microsoft.com/office/drawing/2014/main" val="4152326013"/>
-                  </a:ext>
-                </a:extLst>
-              </a:tr>
-              <a:tr h="581534">
-                <a:tc>
-                  <a:txBody>
-                    <a:bodyPr/>
-                    <a:lstStyle/>
-                    <a:p>
-                      <a:r>
-                        <a:rPr lang="en-US" sz="1500" b="0" i="0" dirty="0">
-                          <a:solidFill>
-                            <a:schemeClr val="tx1"/>
-                          </a:solidFill>
-                          <a:latin typeface="GT Walsheim Trial Rg" pitchFamily="2" charset="77"/>
-                        </a:rPr>
-                        <a:t>Pedestrian</a:t>
-                      </a:r>
-                    </a:p>
-                  </a:txBody>
-                  <a:tcPr>
-                    <a:lnL w="12700" cap="flat" cmpd="sng" algn="ctr">
-                      <a:noFill/>
-                      <a:prstDash val="solid"/>
-                      <a:round/>
-                      <a:headEnd type="none" w="med" len="med"/>
-                      <a:tailEnd type="none" w="med" len="med"/>
-                    </a:lnL>
-                    <a:lnR w="12700" cap="flat" cmpd="sng" algn="ctr">
-                      <a:noFill/>
-                      <a:prstDash val="solid"/>
-                      <a:round/>
-                      <a:headEnd type="none" w="med" len="med"/>
-                      <a:tailEnd type="none" w="med" len="med"/>
-                    </a:lnR>
-                    <a:lnT w="12700" cap="flat" cmpd="sng" algn="ctr">
-                      <a:noFill/>
-                      <a:prstDash val="solid"/>
-                      <a:round/>
-                      <a:headEnd type="none" w="med" len="med"/>
-                      <a:tailEnd type="none" w="med" len="med"/>
-                    </a:lnT>
-                    <a:lnB w="12700" cap="flat" cmpd="sng" algn="ctr">
-                      <a:noFill/>
-                      <a:prstDash val="solid"/>
-                      <a:round/>
-                      <a:headEnd type="none" w="med" len="med"/>
-                      <a:tailEnd type="none" w="med" len="med"/>
-                    </a:lnB>
-                    <a:lnTlToBr w="12700" cmpd="sng">
-                      <a:noFill/>
-                      <a:prstDash val="solid"/>
-                    </a:lnTlToBr>
-                    <a:lnBlToTr w="12700" cmpd="sng">
-                      <a:noFill/>
-                      <a:prstDash val="solid"/>
-                    </a:lnBlToTr>
-                    <a:solidFill>
-                      <a:schemeClr val="bg1">
-                        <a:lumMod val="85000"/>
-                      </a:schemeClr>
-                    </a:solidFill>
-                  </a:tcPr>
-                </a:tc>
-                <a:tc>
-                  <a:txBody>
-                    <a:bodyPr/>
-                    <a:lstStyle/>
-                    <a:p>
-                      <a:r>
-                        <a:rPr lang="en-US" sz="1500" b="0" i="0" dirty="0">
-                          <a:solidFill>
-                            <a:schemeClr val="tx1"/>
-                          </a:solidFill>
-                          <a:latin typeface="GT Walsheim Trial Rg" pitchFamily="2" charset="77"/>
-                        </a:rPr>
-                        <a:t>4.20</a:t>
-                      </a:r>
-                    </a:p>
-                  </a:txBody>
-                  <a:tcPr>
-                    <a:lnL w="12700" cap="flat" cmpd="sng" algn="ctr">
-                      <a:noFill/>
-                      <a:prstDash val="solid"/>
-                      <a:round/>
-                      <a:headEnd type="none" w="med" len="med"/>
-                      <a:tailEnd type="none" w="med" len="med"/>
-                    </a:lnL>
-                    <a:lnR w="12700" cap="flat" cmpd="sng" algn="ctr">
-                      <a:noFill/>
-                      <a:prstDash val="solid"/>
-                      <a:round/>
-                      <a:headEnd type="none" w="med" len="med"/>
-                      <a:tailEnd type="none" w="med" len="med"/>
-                    </a:lnR>
-                    <a:lnT w="12700" cap="flat" cmpd="sng" algn="ctr">
-                      <a:noFill/>
-                      <a:prstDash val="solid"/>
-                      <a:round/>
-                      <a:headEnd type="none" w="med" len="med"/>
-                      <a:tailEnd type="none" w="med" len="med"/>
-                    </a:lnT>
-                    <a:lnB w="12700" cap="flat" cmpd="sng" algn="ctr">
-                      <a:noFill/>
-                      <a:prstDash val="solid"/>
-                      <a:round/>
-                      <a:headEnd type="none" w="med" len="med"/>
-                      <a:tailEnd type="none" w="med" len="med"/>
-                    </a:lnB>
-                    <a:lnTlToBr w="12700" cmpd="sng">
-                      <a:noFill/>
-                      <a:prstDash val="solid"/>
-                    </a:lnTlToBr>
-                    <a:lnBlToTr w="12700" cmpd="sng">
-                      <a:noFill/>
-                      <a:prstDash val="solid"/>
-                    </a:lnBlToTr>
-                    <a:solidFill>
-                      <a:schemeClr val="bg1">
-                        <a:lumMod val="85000"/>
-                      </a:schemeClr>
-                    </a:solidFill>
-                  </a:tcPr>
-                </a:tc>
-                <a:tc>
-                  <a:txBody>
-                    <a:bodyPr/>
-                    <a:lstStyle/>
-                    <a:p>
-                      <a:r>
-                        <a:rPr lang="en-US" sz="1500" b="0" i="0" dirty="0">
-                          <a:solidFill>
-                            <a:schemeClr val="tx1"/>
-                          </a:solidFill>
-                          <a:latin typeface="GT Walsheim Trial Rg" pitchFamily="2" charset="77"/>
-                        </a:rPr>
-                        <a:t>3.92</a:t>
-                      </a:r>
-                    </a:p>
-                  </a:txBody>
-                  <a:tcPr>
-                    <a:lnL w="12700" cap="flat" cmpd="sng" algn="ctr">
-                      <a:noFill/>
-                      <a:prstDash val="solid"/>
-                      <a:round/>
-                      <a:headEnd type="none" w="med" len="med"/>
-                      <a:tailEnd type="none" w="med" len="med"/>
-                    </a:lnL>
-                    <a:lnR w="12700" cap="flat" cmpd="sng" algn="ctr">
-                      <a:noFill/>
-                      <a:prstDash val="solid"/>
-                      <a:round/>
-                      <a:headEnd type="none" w="med" len="med"/>
-                      <a:tailEnd type="none" w="med" len="med"/>
-                    </a:lnR>
-                    <a:lnT w="12700" cap="flat" cmpd="sng" algn="ctr">
-                      <a:noFill/>
-                      <a:prstDash val="solid"/>
-                      <a:round/>
-                      <a:headEnd type="none" w="med" len="med"/>
-                      <a:tailEnd type="none" w="med" len="med"/>
-                    </a:lnT>
-                    <a:lnB w="12700" cap="flat" cmpd="sng" algn="ctr">
-                      <a:noFill/>
-                      <a:prstDash val="solid"/>
-                      <a:round/>
-                      <a:headEnd type="none" w="med" len="med"/>
-                      <a:tailEnd type="none" w="med" len="med"/>
-                    </a:lnB>
-                    <a:lnTlToBr w="12700" cmpd="sng">
-                      <a:noFill/>
-                      <a:prstDash val="solid"/>
-                    </a:lnTlToBr>
-                    <a:lnBlToTr w="12700" cmpd="sng">
-                      <a:noFill/>
-                      <a:prstDash val="solid"/>
-                    </a:lnBlToTr>
-                    <a:solidFill>
-                      <a:schemeClr val="bg1">
-                        <a:lumMod val="85000"/>
-                      </a:schemeClr>
-                    </a:solidFill>
-                  </a:tcPr>
-                </a:tc>
-                <a:extLst>
-                  <a:ext uri="{0D108BD9-81ED-4DB2-BD59-A6C34878D82A}">
-                    <a16:rowId xmlns:a16="http://schemas.microsoft.com/office/drawing/2014/main" val="3142999530"/>
-                  </a:ext>
-                </a:extLst>
-              </a:tr>
-              <a:tr h="581534">
-                <a:tc>
-                  <a:txBody>
-                    <a:bodyPr/>
-                    <a:lstStyle/>
-                    <a:p>
-                      <a:r>
-                        <a:rPr lang="en-US" sz="1500" b="0" i="0" dirty="0">
-                          <a:solidFill>
-                            <a:schemeClr val="tx1"/>
-                          </a:solidFill>
-                          <a:latin typeface="GT Walsheim Trial Rg" pitchFamily="2" charset="77"/>
-                        </a:rPr>
-                        <a:t>Cyclist</a:t>
-                      </a:r>
-                    </a:p>
-                  </a:txBody>
-                  <a:tcPr>
-                    <a:lnL w="12700" cap="flat" cmpd="sng" algn="ctr">
-                      <a:noFill/>
-                      <a:prstDash val="solid"/>
-                      <a:round/>
-                      <a:headEnd type="none" w="med" len="med"/>
-                      <a:tailEnd type="none" w="med" len="med"/>
-                    </a:lnL>
-                    <a:lnR w="12700" cap="flat" cmpd="sng" algn="ctr">
-                      <a:noFill/>
-                      <a:prstDash val="solid"/>
-                      <a:round/>
-                      <a:headEnd type="none" w="med" len="med"/>
-                      <a:tailEnd type="none" w="med" len="med"/>
-                    </a:lnR>
-                    <a:lnT w="12700" cap="flat" cmpd="sng" algn="ctr">
-                      <a:noFill/>
-                      <a:prstDash val="solid"/>
-                      <a:round/>
-                      <a:headEnd type="none" w="med" len="med"/>
-                      <a:tailEnd type="none" w="med" len="med"/>
-                    </a:lnT>
-                    <a:lnB w="12700" cap="flat" cmpd="sng" algn="ctr">
-                      <a:noFill/>
-                      <a:prstDash val="solid"/>
-                      <a:round/>
-                      <a:headEnd type="none" w="med" len="med"/>
-                      <a:tailEnd type="none" w="med" len="med"/>
-                    </a:lnB>
-                    <a:lnTlToBr w="12700" cmpd="sng">
-                      <a:noFill/>
-                      <a:prstDash val="solid"/>
-                    </a:lnTlToBr>
-                    <a:lnBlToTr w="12700" cmpd="sng">
-                      <a:noFill/>
-                      <a:prstDash val="solid"/>
-                    </a:lnBlToTr>
-                    <a:solidFill>
-                      <a:schemeClr val="bg1">
-                        <a:lumMod val="95000"/>
-                      </a:schemeClr>
-                    </a:solidFill>
-                  </a:tcPr>
-                </a:tc>
-                <a:tc>
-                  <a:txBody>
-                    <a:bodyPr/>
-                    <a:lstStyle/>
-                    <a:p>
-                      <a:r>
-                        <a:rPr lang="en-US" sz="1500" b="0" i="0" dirty="0">
-                          <a:solidFill>
-                            <a:schemeClr val="tx1"/>
-                          </a:solidFill>
-                          <a:latin typeface="GT Walsheim Trial Rg" pitchFamily="2" charset="77"/>
-                        </a:rPr>
-                        <a:t>1.01</a:t>
-                      </a:r>
-                    </a:p>
-                  </a:txBody>
-                  <a:tcPr>
-                    <a:lnL w="12700" cap="flat" cmpd="sng" algn="ctr">
-                      <a:noFill/>
-                      <a:prstDash val="solid"/>
-                      <a:round/>
-                      <a:headEnd type="none" w="med" len="med"/>
-                      <a:tailEnd type="none" w="med" len="med"/>
-                    </a:lnL>
-                    <a:lnR w="12700" cap="flat" cmpd="sng" algn="ctr">
-                      <a:noFill/>
-                      <a:prstDash val="solid"/>
-                      <a:round/>
-                      <a:headEnd type="none" w="med" len="med"/>
-                      <a:tailEnd type="none" w="med" len="med"/>
-                    </a:lnR>
-                    <a:lnT w="12700" cap="flat" cmpd="sng" algn="ctr">
-                      <a:noFill/>
-                      <a:prstDash val="solid"/>
-                      <a:round/>
-                      <a:headEnd type="none" w="med" len="med"/>
-                      <a:tailEnd type="none" w="med" len="med"/>
-                    </a:lnT>
-                    <a:lnB w="12700" cap="flat" cmpd="sng" algn="ctr">
-                      <a:noFill/>
-                      <a:prstDash val="solid"/>
-                      <a:round/>
-                      <a:headEnd type="none" w="med" len="med"/>
-                      <a:tailEnd type="none" w="med" len="med"/>
-                    </a:lnB>
-                    <a:lnTlToBr w="12700" cmpd="sng">
-                      <a:noFill/>
-                      <a:prstDash val="solid"/>
-                    </a:lnTlToBr>
-                    <a:lnBlToTr w="12700" cmpd="sng">
-                      <a:noFill/>
-                      <a:prstDash val="solid"/>
-                    </a:lnBlToTr>
-                    <a:solidFill>
-                      <a:schemeClr val="bg1">
-                        <a:lumMod val="95000"/>
-                      </a:schemeClr>
-                    </a:solidFill>
-                  </a:tcPr>
-                </a:tc>
-                <a:tc>
-                  <a:txBody>
-                    <a:bodyPr/>
-                    <a:lstStyle/>
-                    <a:p>
-                      <a:r>
-                        <a:rPr lang="en-US" sz="1500" b="0" i="0" dirty="0">
-                          <a:solidFill>
-                            <a:schemeClr val="tx1"/>
-                          </a:solidFill>
-                          <a:latin typeface="GT Walsheim Trial Rg" pitchFamily="2" charset="77"/>
-                        </a:rPr>
-                        <a:t>1.01</a:t>
-                      </a:r>
-                    </a:p>
-                  </a:txBody>
-                  <a:tcPr>
-                    <a:lnL w="12700" cap="flat" cmpd="sng" algn="ctr">
-                      <a:noFill/>
-                      <a:prstDash val="solid"/>
-                      <a:round/>
-                      <a:headEnd type="none" w="med" len="med"/>
-                      <a:tailEnd type="none" w="med" len="med"/>
-                    </a:lnL>
-                    <a:lnR w="12700" cap="flat" cmpd="sng" algn="ctr">
-                      <a:noFill/>
-                      <a:prstDash val="solid"/>
-                      <a:round/>
-                      <a:headEnd type="none" w="med" len="med"/>
-                      <a:tailEnd type="none" w="med" len="med"/>
-                    </a:lnR>
-                    <a:lnT w="12700" cap="flat" cmpd="sng" algn="ctr">
-                      <a:noFill/>
-                      <a:prstDash val="solid"/>
-                      <a:round/>
-                      <a:headEnd type="none" w="med" len="med"/>
-                      <a:tailEnd type="none" w="med" len="med"/>
-                    </a:lnT>
-                    <a:lnB w="12700" cap="flat" cmpd="sng" algn="ctr">
-                      <a:noFill/>
-                      <a:prstDash val="solid"/>
-                      <a:round/>
-                      <a:headEnd type="none" w="med" len="med"/>
-                      <a:tailEnd type="none" w="med" len="med"/>
-                    </a:lnB>
-                    <a:lnTlToBr w="12700" cmpd="sng">
-                      <a:noFill/>
-                      <a:prstDash val="solid"/>
-                    </a:lnTlToBr>
-                    <a:lnBlToTr w="12700" cmpd="sng">
-                      <a:noFill/>
-                      <a:prstDash val="solid"/>
-                    </a:lnBlToTr>
-                    <a:solidFill>
-                      <a:schemeClr val="bg1">
-                        <a:lumMod val="95000"/>
-                      </a:schemeClr>
-                    </a:solidFill>
-                  </a:tcPr>
-                </a:tc>
-                <a:extLst>
-                  <a:ext uri="{0D108BD9-81ED-4DB2-BD59-A6C34878D82A}">
-                    <a16:rowId xmlns:a16="http://schemas.microsoft.com/office/drawing/2014/main" val="1523425920"/>
-                  </a:ext>
-                </a:extLst>
-              </a:tr>
-            </a:tbl>
-          </a:graphicData>
-        </a:graphic>
-      </p:graphicFrame>
-      <p:sp>
-        <p:nvSpPr>
-          <p:cNvPr id="11" name="TextBox 10">
-            <a:extLst>
-              <a:ext uri="{FF2B5EF4-FFF2-40B4-BE49-F238E27FC236}">
-                <a16:creationId xmlns:a16="http://schemas.microsoft.com/office/drawing/2014/main" id="{81A8C484-CD19-7BCB-8ED6-8DA75F360705}"/>
-              </a:ext>
-            </a:extLst>
-          </p:cNvPr>
-          <p:cNvSpPr txBox="1"/>
-          <p:nvPr/>
-        </p:nvSpPr>
-        <p:spPr>
-          <a:xfrm>
-            <a:off x="791803" y="5177461"/>
-            <a:ext cx="10786478" cy="646331"/>
-          </a:xfrm>
-          <a:prstGeom prst="rect">
-            <a:avLst/>
-          </a:prstGeom>
-          <a:noFill/>
-        </p:spPr>
-        <p:txBody>
-          <a:bodyPr wrap="square">
-            <a:spAutoFit/>
-          </a:bodyPr>
-          <a:lstStyle/>
-          <a:p>
-            <a:pPr algn="l"/>
-            <a:r>
-              <a:rPr lang="en-US" b="1" dirty="0">
-                <a:effectLst/>
-                <a:latin typeface="GT Walsheim Trial Rg" pitchFamily="2" charset="77"/>
-              </a:rPr>
-              <a:t>Without filtering: vehicles appear slower than cyclists due to stopped cars at intersections. Filtering restores expected ordering.</a:t>
-            </a:r>
-            <a:endParaRPr lang="en-US" dirty="0">
-              <a:effectLst/>
-              <a:latin typeface="GT Walsheim Trial Rg" pitchFamily="2" charset="77"/>
-            </a:endParaRPr>
-          </a:p>
-        </p:txBody>
-      </p:sp>
-    </p:spTree>
-    <p:extLst>
-      <p:ext uri="{BB962C8B-B14F-4D97-AF65-F5344CB8AC3E}">
-        <p14:creationId xmlns:p14="http://schemas.microsoft.com/office/powerpoint/2010/main" val="3511431320"/>
       </p:ext>
     </p:extLst>
   </p:cSld>

--- a/docs/presentation/Unsupervised Statistical Learning for Kinematic Anomaly Detection in Autonomous Driving Scenarios.pptx
+++ b/docs/presentation/Unsupervised Statistical Learning for Kinematic Anomaly Detection in Autonomous Driving Scenarios.pptx
@@ -132,7 +132,7 @@
 <file path=ppt/revisionInfo.xml><?xml version="1.0" encoding="utf-8"?>
 <p1510:revInfo xmlns:a="http://schemas.openxmlformats.org/drawingml/2006/main" xmlns:r="http://schemas.openxmlformats.org/officeDocument/2006/relationships" xmlns:p1510="http://schemas.microsoft.com/office/powerpoint/2015/10/main">
   <p1510:revLst>
-    <p1510:client id="{E91D200D-BFFE-DF45-BD3E-DC36CCF88744}" v="37" dt="2026-04-12T02:44:56.824"/>
+    <p1510:client id="{E91D200D-BFFE-DF45-BD3E-DC36CCF88744}" v="57" dt="2026-04-12T03:18:04.601"/>
   </p1510:revLst>
 </p1510:revInfo>
 </file>
@@ -141,8 +141,8 @@
 <pc:chgInfo xmlns:a="http://schemas.openxmlformats.org/drawingml/2006/main" xmlns:r="http://schemas.openxmlformats.org/officeDocument/2006/relationships" xmlns:ac="http://schemas.microsoft.com/office/drawing/2013/main/command" xmlns:pc="http://schemas.microsoft.com/office/powerpoint/2013/main/command">
   <pc:docChgLst>
     <pc:chgData name="Stepanov, Pavel Aleksandrovich" userId="b85f6bca-230c-483e-a25b-e13e873626fd" providerId="ADAL" clId="{AB235781-41D1-50B9-86EA-51A98A5F500A}"/>
-    <pc:docChg chg="undo custSel addSld modSld">
-      <pc:chgData name="Stepanov, Pavel Aleksandrovich" userId="b85f6bca-230c-483e-a25b-e13e873626fd" providerId="ADAL" clId="{AB235781-41D1-50B9-86EA-51A98A5F500A}" dt="2026-04-12T02:45:35.358" v="214" actId="20577"/>
+    <pc:docChg chg="undo redo custSel addSld modSld">
+      <pc:chgData name="Stepanov, Pavel Aleksandrovich" userId="b85f6bca-230c-483e-a25b-e13e873626fd" providerId="ADAL" clId="{AB235781-41D1-50B9-86EA-51A98A5F500A}" dt="2026-04-12T03:18:07.237" v="432" actId="1076"/>
       <pc:docMkLst>
         <pc:docMk/>
       </pc:docMkLst>
@@ -199,25 +199,49 @@
           </ac:picMkLst>
         </pc:picChg>
       </pc:sldChg>
-      <pc:sldChg chg="modNotesTx">
-        <pc:chgData name="Stepanov, Pavel Aleksandrovich" userId="b85f6bca-230c-483e-a25b-e13e873626fd" providerId="ADAL" clId="{AB235781-41D1-50B9-86EA-51A98A5F500A}" dt="2026-04-12T02:04:00.518" v="62" actId="20577"/>
+      <pc:sldChg chg="modSp mod modNotesTx">
+        <pc:chgData name="Stepanov, Pavel Aleksandrovich" userId="b85f6bca-230c-483e-a25b-e13e873626fd" providerId="ADAL" clId="{AB235781-41D1-50B9-86EA-51A98A5F500A}" dt="2026-04-12T03:10:56.989" v="313" actId="1076"/>
         <pc:sldMkLst>
           <pc:docMk/>
           <pc:sldMk cId="34899088" sldId="260"/>
         </pc:sldMkLst>
+        <pc:spChg chg="mod">
+          <ac:chgData name="Stepanov, Pavel Aleksandrovich" userId="b85f6bca-230c-483e-a25b-e13e873626fd" providerId="ADAL" clId="{AB235781-41D1-50B9-86EA-51A98A5F500A}" dt="2026-04-12T03:10:56.989" v="313" actId="1076"/>
+          <ac:spMkLst>
+            <pc:docMk/>
+            <pc:sldMk cId="34899088" sldId="260"/>
+            <ac:spMk id="2" creationId="{568FC75A-02FA-BB25-0851-770322A46375}"/>
+          </ac:spMkLst>
+        </pc:spChg>
       </pc:sldChg>
-      <pc:sldChg chg="modSp mod modNotesTx">
-        <pc:chgData name="Stepanov, Pavel Aleksandrovich" userId="b85f6bca-230c-483e-a25b-e13e873626fd" providerId="ADAL" clId="{AB235781-41D1-50B9-86EA-51A98A5F500A}" dt="2026-04-12T02:08:41.912" v="84" actId="1076"/>
+      <pc:sldChg chg="addSp modSp mod modNotesTx">
+        <pc:chgData name="Stepanov, Pavel Aleksandrovich" userId="b85f6bca-230c-483e-a25b-e13e873626fd" providerId="ADAL" clId="{AB235781-41D1-50B9-86EA-51A98A5F500A}" dt="2026-04-12T03:08:47.395" v="304" actId="20577"/>
         <pc:sldMkLst>
           <pc:docMk/>
           <pc:sldMk cId="1027313753" sldId="262"/>
         </pc:sldMkLst>
+        <pc:spChg chg="add mod">
+          <ac:chgData name="Stepanov, Pavel Aleksandrovich" userId="b85f6bca-230c-483e-a25b-e13e873626fd" providerId="ADAL" clId="{AB235781-41D1-50B9-86EA-51A98A5F500A}" dt="2026-04-12T03:07:05.363" v="297" actId="1076"/>
+          <ac:spMkLst>
+            <pc:docMk/>
+            <pc:sldMk cId="1027313753" sldId="262"/>
+            <ac:spMk id="3" creationId="{6FF11A2A-EA04-CBEA-5259-2D7D1F89B0FD}"/>
+          </ac:spMkLst>
+        </pc:spChg>
         <pc:spChg chg="mod">
           <ac:chgData name="Stepanov, Pavel Aleksandrovich" userId="b85f6bca-230c-483e-a25b-e13e873626fd" providerId="ADAL" clId="{AB235781-41D1-50B9-86EA-51A98A5F500A}" dt="2026-04-12T02:08:37.478" v="83" actId="1076"/>
           <ac:spMkLst>
             <pc:docMk/>
             <pc:sldMk cId="1027313753" sldId="262"/>
             <ac:spMk id="16" creationId="{F7FF29CB-B9A0-D774-8556-025972A6411F}"/>
+          </ac:spMkLst>
+        </pc:spChg>
+        <pc:spChg chg="mod">
+          <ac:chgData name="Stepanov, Pavel Aleksandrovich" userId="b85f6bca-230c-483e-a25b-e13e873626fd" providerId="ADAL" clId="{AB235781-41D1-50B9-86EA-51A98A5F500A}" dt="2026-04-12T03:05:35.452" v="277" actId="207"/>
+          <ac:spMkLst>
+            <pc:docMk/>
+            <pc:sldMk cId="1027313753" sldId="262"/>
+            <ac:spMk id="22" creationId="{758A5016-C08E-98B3-26B4-A2802863211D}"/>
           </ac:spMkLst>
         </pc:spChg>
         <pc:spChg chg="mod">
@@ -229,15 +253,119 @@
           </ac:spMkLst>
         </pc:spChg>
       </pc:sldChg>
-      <pc:sldChg chg="modNotesTx">
-        <pc:chgData name="Stepanov, Pavel Aleksandrovich" userId="b85f6bca-230c-483e-a25b-e13e873626fd" providerId="ADAL" clId="{AB235781-41D1-50B9-86EA-51A98A5F500A}" dt="2026-04-12T02:02:03.614" v="58" actId="20577"/>
+      <pc:sldChg chg="addSp delSp modSp mod setBg modNotesTx">
+        <pc:chgData name="Stepanov, Pavel Aleksandrovich" userId="b85f6bca-230c-483e-a25b-e13e873626fd" providerId="ADAL" clId="{AB235781-41D1-50B9-86EA-51A98A5F500A}" dt="2026-04-12T03:18:07.237" v="432" actId="1076"/>
         <pc:sldMkLst>
           <pc:docMk/>
           <pc:sldMk cId="2414567693" sldId="263"/>
         </pc:sldMkLst>
+        <pc:spChg chg="mod">
+          <ac:chgData name="Stepanov, Pavel Aleksandrovich" userId="b85f6bca-230c-483e-a25b-e13e873626fd" providerId="ADAL" clId="{AB235781-41D1-50B9-86EA-51A98A5F500A}" dt="2026-04-12T03:10:36.616" v="307" actId="207"/>
+          <ac:spMkLst>
+            <pc:docMk/>
+            <pc:sldMk cId="2414567693" sldId="263"/>
+            <ac:spMk id="4" creationId="{03C362FE-26C6-9E59-253C-0E8E33DFB89E}"/>
+          </ac:spMkLst>
+        </pc:spChg>
+        <pc:spChg chg="del">
+          <ac:chgData name="Stepanov, Pavel Aleksandrovich" userId="b85f6bca-230c-483e-a25b-e13e873626fd" providerId="ADAL" clId="{AB235781-41D1-50B9-86EA-51A98A5F500A}" dt="2026-04-12T03:10:54.387" v="311" actId="478"/>
+          <ac:spMkLst>
+            <pc:docMk/>
+            <pc:sldMk cId="2414567693" sldId="263"/>
+            <ac:spMk id="5" creationId="{1A7F5B05-687E-2A4C-A8CD-9F064CE84592}"/>
+          </ac:spMkLst>
+        </pc:spChg>
+        <pc:spChg chg="del mod">
+          <ac:chgData name="Stepanov, Pavel Aleksandrovich" userId="b85f6bca-230c-483e-a25b-e13e873626fd" providerId="ADAL" clId="{AB235781-41D1-50B9-86EA-51A98A5F500A}" dt="2026-04-12T03:10:42.705" v="309" actId="478"/>
+          <ac:spMkLst>
+            <pc:docMk/>
+            <pc:sldMk cId="2414567693" sldId="263"/>
+            <ac:spMk id="6" creationId="{63141582-FD1E-F62F-4490-D627EFD530A0}"/>
+          </ac:spMkLst>
+        </pc:spChg>
+        <pc:spChg chg="add del mod">
+          <ac:chgData name="Stepanov, Pavel Aleksandrovich" userId="b85f6bca-230c-483e-a25b-e13e873626fd" providerId="ADAL" clId="{AB235781-41D1-50B9-86EA-51A98A5F500A}" dt="2026-04-12T03:02:18.848" v="261" actId="478"/>
+          <ac:spMkLst>
+            <pc:docMk/>
+            <pc:sldMk cId="2414567693" sldId="263"/>
+            <ac:spMk id="7" creationId="{D3A371C0-86C1-D020-1A66-D42D2E55A14F}"/>
+          </ac:spMkLst>
+        </pc:spChg>
+        <pc:spChg chg="mod">
+          <ac:chgData name="Stepanov, Pavel Aleksandrovich" userId="b85f6bca-230c-483e-a25b-e13e873626fd" providerId="ADAL" clId="{AB235781-41D1-50B9-86EA-51A98A5F500A}" dt="2026-04-12T03:10:34.901" v="306" actId="207"/>
+          <ac:spMkLst>
+            <pc:docMk/>
+            <pc:sldMk cId="2414567693" sldId="263"/>
+            <ac:spMk id="8" creationId="{AA0B286F-ACC4-E15E-FE10-F81A14DF3948}"/>
+          </ac:spMkLst>
+        </pc:spChg>
+        <pc:spChg chg="add mod">
+          <ac:chgData name="Stepanov, Pavel Aleksandrovich" userId="b85f6bca-230c-483e-a25b-e13e873626fd" providerId="ADAL" clId="{AB235781-41D1-50B9-86EA-51A98A5F500A}" dt="2026-04-12T03:17:56.342" v="429" actId="167"/>
+          <ac:spMkLst>
+            <pc:docMk/>
+            <pc:sldMk cId="2414567693" sldId="263"/>
+            <ac:spMk id="11" creationId="{00515834-BC50-0B18-62CA-A70C9A9333E0}"/>
+          </ac:spMkLst>
+        </pc:spChg>
+        <pc:spChg chg="add mod">
+          <ac:chgData name="Stepanov, Pavel Aleksandrovich" userId="b85f6bca-230c-483e-a25b-e13e873626fd" providerId="ADAL" clId="{AB235781-41D1-50B9-86EA-51A98A5F500A}" dt="2026-04-12T03:17:31.374" v="421" actId="1076"/>
+          <ac:spMkLst>
+            <pc:docMk/>
+            <pc:sldMk cId="2414567693" sldId="263"/>
+            <ac:spMk id="15" creationId="{CEF7CCBE-156F-9D4E-6D62-90F42BD0C322}"/>
+          </ac:spMkLst>
+        </pc:spChg>
+        <pc:spChg chg="add del mod">
+          <ac:chgData name="Stepanov, Pavel Aleksandrovich" userId="b85f6bca-230c-483e-a25b-e13e873626fd" providerId="ADAL" clId="{AB235781-41D1-50B9-86EA-51A98A5F500A}" dt="2026-04-12T03:18:07.237" v="432" actId="1076"/>
+          <ac:spMkLst>
+            <pc:docMk/>
+            <pc:sldMk cId="2414567693" sldId="263"/>
+            <ac:spMk id="24" creationId="{11818D86-B172-7F3C-A000-ECBB85ED72A7}"/>
+          </ac:spMkLst>
+        </pc:spChg>
+        <pc:graphicFrameChg chg="mod modGraphic">
+          <ac:chgData name="Stepanov, Pavel Aleksandrovich" userId="b85f6bca-230c-483e-a25b-e13e873626fd" providerId="ADAL" clId="{AB235781-41D1-50B9-86EA-51A98A5F500A}" dt="2026-04-12T03:17:44.642" v="427" actId="14100"/>
+          <ac:graphicFrameMkLst>
+            <pc:docMk/>
+            <pc:sldMk cId="2414567693" sldId="263"/>
+            <ac:graphicFrameMk id="3" creationId="{6E5ED46D-9A9D-45B4-50C0-E4B617433E8C}"/>
+          </ac:graphicFrameMkLst>
+        </pc:graphicFrameChg>
+        <pc:picChg chg="del">
+          <ac:chgData name="Stepanov, Pavel Aleksandrovich" userId="b85f6bca-230c-483e-a25b-e13e873626fd" providerId="ADAL" clId="{AB235781-41D1-50B9-86EA-51A98A5F500A}" dt="2026-04-12T03:12:14.648" v="331" actId="478"/>
+          <ac:picMkLst>
+            <pc:docMk/>
+            <pc:sldMk cId="2414567693" sldId="263"/>
+            <ac:picMk id="2" creationId="{0E3246AA-DF2A-798A-F5B3-ED4A58B466E9}"/>
+          </ac:picMkLst>
+        </pc:picChg>
+        <pc:picChg chg="add del mod">
+          <ac:chgData name="Stepanov, Pavel Aleksandrovich" userId="b85f6bca-230c-483e-a25b-e13e873626fd" providerId="ADAL" clId="{AB235781-41D1-50B9-86EA-51A98A5F500A}" dt="2026-04-12T03:02:27.859" v="263" actId="478"/>
+          <ac:picMkLst>
+            <pc:docMk/>
+            <pc:sldMk cId="2414567693" sldId="263"/>
+            <ac:picMk id="10" creationId="{3AF1DCB4-D198-2FC1-AE71-B8ADD1B6AF8D}"/>
+          </ac:picMkLst>
+        </pc:picChg>
+        <pc:picChg chg="add mod">
+          <ac:chgData name="Stepanov, Pavel Aleksandrovich" userId="b85f6bca-230c-483e-a25b-e13e873626fd" providerId="ADAL" clId="{AB235781-41D1-50B9-86EA-51A98A5F500A}" dt="2026-04-12T03:13:42.851" v="347" actId="1076"/>
+          <ac:picMkLst>
+            <pc:docMk/>
+            <pc:sldMk cId="2414567693" sldId="263"/>
+            <ac:picMk id="13" creationId="{9505BAAA-21BA-2316-4D5C-506901CAEEDA}"/>
+          </ac:picMkLst>
+        </pc:picChg>
+        <pc:picChg chg="add mod">
+          <ac:chgData name="Stepanov, Pavel Aleksandrovich" userId="b85f6bca-230c-483e-a25b-e13e873626fd" providerId="ADAL" clId="{AB235781-41D1-50B9-86EA-51A98A5F500A}" dt="2026-04-12T03:12:15.097" v="332"/>
+          <ac:picMkLst>
+            <pc:docMk/>
+            <pc:sldMk cId="2414567693" sldId="263"/>
+            <ac:picMk id="14" creationId="{0AB81574-B623-A466-0C44-7AD8EF55DE3E}"/>
+          </ac:picMkLst>
+        </pc:picChg>
       </pc:sldChg>
-      <pc:sldChg chg="addSp delSp modSp modNotesTx">
-        <pc:chgData name="Stepanov, Pavel Aleksandrovich" userId="b85f6bca-230c-483e-a25b-e13e873626fd" providerId="ADAL" clId="{AB235781-41D1-50B9-86EA-51A98A5F500A}" dt="2026-04-12T02:44:44.652" v="212" actId="20577"/>
+      <pc:sldChg chg="addSp delSp modSp mod modShow modNotesTx">
+        <pc:chgData name="Stepanov, Pavel Aleksandrovich" userId="b85f6bca-230c-483e-a25b-e13e873626fd" providerId="ADAL" clId="{AB235781-41D1-50B9-86EA-51A98A5F500A}" dt="2026-04-12T02:51:55.024" v="225" actId="20577"/>
         <pc:sldMkLst>
           <pc:docMk/>
           <pc:sldMk cId="2606525707" sldId="264"/>
@@ -250,8 +378,8 @@
             <ac:spMk id="2" creationId="{7A68A61C-4608-E59F-E53A-ACC82BDE3BFB}"/>
           </ac:spMkLst>
         </pc:spChg>
-        <pc:spChg chg="add mod">
-          <ac:chgData name="Stepanov, Pavel Aleksandrovich" userId="b85f6bca-230c-483e-a25b-e13e873626fd" providerId="ADAL" clId="{AB235781-41D1-50B9-86EA-51A98A5F500A}" dt="2026-04-12T02:44:33.442" v="210" actId="478"/>
+        <pc:spChg chg="add del mod">
+          <ac:chgData name="Stepanov, Pavel Aleksandrovich" userId="b85f6bca-230c-483e-a25b-e13e873626fd" providerId="ADAL" clId="{AB235781-41D1-50B9-86EA-51A98A5F500A}" dt="2026-04-12T02:51:41.085" v="219" actId="478"/>
           <ac:spMkLst>
             <pc:docMk/>
             <pc:sldMk cId="2606525707" sldId="264"/>
@@ -290,12 +418,28 @@
             <ac:spMk id="8" creationId="{3B39957A-7A79-0237-F7BA-3507FB224EBF}"/>
           </ac:spMkLst>
         </pc:spChg>
+        <pc:spChg chg="add mod">
+          <ac:chgData name="Stepanov, Pavel Aleksandrovich" userId="b85f6bca-230c-483e-a25b-e13e873626fd" providerId="ADAL" clId="{AB235781-41D1-50B9-86EA-51A98A5F500A}" dt="2026-04-12T02:51:29.667" v="217"/>
+          <ac:spMkLst>
+            <pc:docMk/>
+            <pc:sldMk cId="2606525707" sldId="264"/>
+            <ac:spMk id="9" creationId="{048C4A0F-704A-1B42-09A0-E1CEA1F85F1A}"/>
+          </ac:spMkLst>
+        </pc:spChg>
         <pc:spChg chg="del">
           <ac:chgData name="Stepanov, Pavel Aleksandrovich" userId="b85f6bca-230c-483e-a25b-e13e873626fd" providerId="ADAL" clId="{AB235781-41D1-50B9-86EA-51A98A5F500A}" dt="2026-04-12T02:44:33.442" v="210" actId="478"/>
           <ac:spMkLst>
             <pc:docMk/>
             <pc:sldMk cId="2606525707" sldId="264"/>
             <ac:spMk id="10" creationId="{88F07873-F556-363B-D82F-5070AC0E40F8}"/>
+          </ac:spMkLst>
+        </pc:spChg>
+        <pc:spChg chg="add mod">
+          <ac:chgData name="Stepanov, Pavel Aleksandrovich" userId="b85f6bca-230c-483e-a25b-e13e873626fd" providerId="ADAL" clId="{AB235781-41D1-50B9-86EA-51A98A5F500A}" dt="2026-04-12T02:51:39.190" v="218"/>
+          <ac:spMkLst>
+            <pc:docMk/>
+            <pc:sldMk cId="2606525707" sldId="264"/>
+            <ac:spMk id="11" creationId="{B6033FA2-EB1F-F693-6FA4-7BB8813D9CDA}"/>
           </ac:spMkLst>
         </pc:spChg>
         <pc:spChg chg="del">
@@ -322,6 +466,22 @@
             <ac:spMk id="17" creationId="{ADE500D8-7D23-EFBE-E974-8C8A094C2972}"/>
           </ac:spMkLst>
         </pc:spChg>
+        <pc:graphicFrameChg chg="add mod modGraphic">
+          <ac:chgData name="Stepanov, Pavel Aleksandrovich" userId="b85f6bca-230c-483e-a25b-e13e873626fd" providerId="ADAL" clId="{AB235781-41D1-50B9-86EA-51A98A5F500A}" dt="2026-04-12T02:51:55.024" v="225" actId="20577"/>
+          <ac:graphicFrameMkLst>
+            <pc:docMk/>
+            <pc:sldMk cId="2606525707" sldId="264"/>
+            <ac:graphicFrameMk id="12" creationId="{060EF4B2-4504-8D76-A4E4-69FA63C93789}"/>
+          </ac:graphicFrameMkLst>
+        </pc:graphicFrameChg>
+        <pc:picChg chg="add mod">
+          <ac:chgData name="Stepanov, Pavel Aleksandrovich" userId="b85f6bca-230c-483e-a25b-e13e873626fd" providerId="ADAL" clId="{AB235781-41D1-50B9-86EA-51A98A5F500A}" dt="2026-04-12T02:51:10.410" v="215"/>
+          <ac:picMkLst>
+            <pc:docMk/>
+            <pc:sldMk cId="2606525707" sldId="264"/>
+            <ac:picMk id="6" creationId="{73A17D98-85BB-1349-8904-4995BA7F417F}"/>
+          </ac:picMkLst>
+        </pc:picChg>
       </pc:sldChg>
       <pc:sldChg chg="addSp delSp mod modNotesTx">
         <pc:chgData name="Stepanov, Pavel Aleksandrovich" userId="b85f6bca-230c-483e-a25b-e13e873626fd" providerId="ADAL" clId="{AB235781-41D1-50B9-86EA-51A98A5F500A}" dt="2026-04-12T02:44:57.589" v="213" actId="113"/>
@@ -2526,7 +2686,7 @@
               <a:t>PAVEL:</a:t>
             </a:r>
             <a:br>
-              <a:rPr lang="en-US" b="1"/>
+              <a:rPr lang="en-US" b="1" dirty="0"/>
             </a:br>
             <a:endParaRPr lang="en-US" b="1" dirty="0"/>
           </a:p>
@@ -4115,10 +4275,12 @@
                 <a:ea typeface="+mn-ea"/>
                 <a:cs typeface="+mn-cs"/>
               </a:rPr>
-              <a:t>Our pipeline has two stages. First, Python running in Google </a:t>
-            </a:r>
-            <a:r>
-              <a:rPr lang="en-US" sz="1200" b="0" i="0" kern="1200" dirty="0" err="1">
+              <a:t>Our pipeline has two stages. </a:t>
+            </a:r>
+          </a:p>
+          <a:p>
+            <a:r>
+              <a:rPr lang="en-US" sz="1200" b="0" i="0" kern="1200" dirty="0">
                 <a:solidFill>
                   <a:schemeClr val="tx1"/>
                 </a:solidFill>
@@ -4127,10 +4289,10 @@
                 <a:ea typeface="+mn-ea"/>
                 <a:cs typeface="+mn-cs"/>
               </a:rPr>
-              <a:t>Colab</a:t>
-            </a:r>
-            <a:r>
-              <a:rPr lang="en-US" sz="1200" b="0" i="0" kern="1200" dirty="0">
+              <a:t>First, Python running in Google </a:t>
+            </a:r>
+            <a:r>
+              <a:rPr lang="en-US" sz="1200" b="0" i="0" kern="1200" dirty="0" err="1">
                 <a:solidFill>
                   <a:schemeClr val="tx1"/>
                 </a:solidFill>
@@ -4139,10 +4301,10 @@
                 <a:ea typeface="+mn-ea"/>
                 <a:cs typeface="+mn-cs"/>
               </a:rPr>
-              <a:t> pulls raw </a:t>
-            </a:r>
-            <a:r>
-              <a:rPr lang="en-US" sz="1200" b="0" i="0" kern="1200" dirty="0" err="1">
+              <a:t>Colab</a:t>
+            </a:r>
+            <a:r>
+              <a:rPr lang="en-US" sz="1200" b="0" i="0" kern="1200" dirty="0">
                 <a:solidFill>
                   <a:schemeClr val="tx1"/>
                 </a:solidFill>
@@ -4151,10 +4313,10 @@
                 <a:ea typeface="+mn-ea"/>
                 <a:cs typeface="+mn-cs"/>
               </a:rPr>
-              <a:t>TFRecord</a:t>
-            </a:r>
-            <a:r>
-              <a:rPr lang="en-US" sz="1200" b="0" i="0" kern="1200" dirty="0">
+              <a:t> pulls raw </a:t>
+            </a:r>
+            <a:r>
+              <a:rPr lang="en-US" sz="1200" b="0" i="0" kern="1200" dirty="0" err="1">
                 <a:solidFill>
                   <a:schemeClr val="tx1"/>
                 </a:solidFill>
@@ -4163,10 +4325,10 @@
                 <a:ea typeface="+mn-ea"/>
                 <a:cs typeface="+mn-cs"/>
               </a:rPr>
-              <a:t> shards from Waymo's Google Cloud Storage bucket and extracts a tabular feature set for over </a:t>
-            </a:r>
-            <a:r>
-              <a:rPr lang="en-US" sz="1200" b="1" i="0" kern="1200" dirty="0">
+              <a:t>TFRecord</a:t>
+            </a:r>
+            <a:r>
+              <a:rPr lang="en-US" sz="1200" b="0" i="0" kern="1200" dirty="0">
                 <a:solidFill>
                   <a:schemeClr val="tx1"/>
                 </a:solidFill>
@@ -4175,10 +4337,10 @@
                 <a:ea typeface="+mn-ea"/>
                 <a:cs typeface="+mn-cs"/>
               </a:rPr>
-              <a:t>18,000 agents</a:t>
-            </a:r>
-            <a:r>
-              <a:rPr lang="en-US" sz="1200" b="0" i="0" kern="1200" dirty="0">
+              <a:t> shards from Waymo's Google Cloud Storage bucket and extracts a tabular feature set for over </a:t>
+            </a:r>
+            <a:r>
+              <a:rPr lang="en-US" sz="1200" b="1" i="0" kern="1200" dirty="0">
                 <a:solidFill>
                   <a:schemeClr val="tx1"/>
                 </a:solidFill>
@@ -4187,10 +4349,8 @@
                 <a:ea typeface="+mn-ea"/>
                 <a:cs typeface="+mn-cs"/>
               </a:rPr>
-              <a:t> across hundreds of scenarios. We extract the kinematic state at the prediction moment: speed, acceleration, yaw rate, velocity components, and the future 5-second displacement.</a:t>
-            </a:r>
-          </a:p>
-          <a:p>
+              <a:t>18,000 agents</a:t>
+            </a:r>
             <a:r>
               <a:rPr lang="en-US" sz="1200" b="0" i="0" kern="1200" dirty="0">
                 <a:solidFill>
@@ -4201,8 +4361,131 @@
                 <a:ea typeface="+mn-ea"/>
                 <a:cs typeface="+mn-cs"/>
               </a:rPr>
+              <a:t> across hundreds of scenarios. </a:t>
+            </a:r>
+          </a:p>
+          <a:p>
+            <a:endParaRPr lang="en-US" sz="1200" b="0" i="0" kern="1200" dirty="0">
+              <a:solidFill>
+                <a:schemeClr val="tx1"/>
+              </a:solidFill>
+              <a:effectLst/>
+              <a:latin typeface="+mn-lt"/>
+              <a:ea typeface="+mn-ea"/>
+              <a:cs typeface="+mn-cs"/>
+            </a:endParaRPr>
+          </a:p>
+          <a:p>
+            <a:r>
+              <a:rPr lang="en-US" sz="1200" b="0" i="0" kern="1200" dirty="0">
+                <a:solidFill>
+                  <a:schemeClr val="tx1"/>
+                </a:solidFill>
+                <a:effectLst/>
+                <a:latin typeface="+mn-lt"/>
+                <a:ea typeface="+mn-ea"/>
+                <a:cs typeface="+mn-cs"/>
+              </a:rPr>
+              <a:t>We extract the kinematic state at the prediction moment: speed, acceleration, yaw rate, velocity components, and the future 5-second displacement.</a:t>
+            </a:r>
+          </a:p>
+          <a:p>
+            <a:r>
+              <a:rPr lang="en-US" sz="1200" b="0" i="0" kern="1200" dirty="0">
+                <a:solidFill>
+                  <a:schemeClr val="tx1"/>
+                </a:solidFill>
+                <a:effectLst/>
+                <a:latin typeface="+mn-lt"/>
+                <a:ea typeface="+mn-ea"/>
+                <a:cs typeface="+mn-cs"/>
+              </a:rPr>
               <a:t>That CSV then flows into R, where all statistical modeling happens.</a:t>
             </a:r>
+          </a:p>
+          <a:p>
+            <a:endParaRPr lang="en-US" sz="1200" b="1" i="0" kern="1200" dirty="0">
+              <a:solidFill>
+                <a:schemeClr val="tx1"/>
+              </a:solidFill>
+              <a:effectLst/>
+              <a:latin typeface="+mn-lt"/>
+              <a:ea typeface="+mn-ea"/>
+              <a:cs typeface="+mn-cs"/>
+            </a:endParaRPr>
+          </a:p>
+          <a:p>
+            <a:r>
+              <a:rPr lang="en-US" sz="1200" b="0" i="0" kern="1200" dirty="0">
+                <a:solidFill>
+                  <a:schemeClr val="tx1"/>
+                </a:solidFill>
+                <a:effectLst/>
+                <a:latin typeface="+mn-lt"/>
+                <a:ea typeface="+mn-ea"/>
+                <a:cs typeface="+mn-cs"/>
+              </a:rPr>
+              <a:t>The two analyses use different preprocessing. For anomaly detection, we apply the strictest filter: valid sensor frames only, stationary agents removed, and complete cases across all kinematic and geometric features — leaving </a:t>
+            </a:r>
+            <a:r>
+              <a:rPr lang="en-US" sz="1200" b="1" i="0" kern="1200" dirty="0">
+                <a:solidFill>
+                  <a:schemeClr val="tx1"/>
+                </a:solidFill>
+                <a:effectLst/>
+                <a:latin typeface="+mn-lt"/>
+                <a:ea typeface="+mn-ea"/>
+                <a:cs typeface="+mn-cs"/>
+              </a:rPr>
+              <a:t>4,538 moving agents</a:t>
+            </a:r>
+            <a:r>
+              <a:rPr lang="en-US" sz="1200" b="0" i="0" kern="1200" dirty="0">
+                <a:solidFill>
+                  <a:schemeClr val="tx1"/>
+                </a:solidFill>
+                <a:effectLst/>
+                <a:latin typeface="+mn-lt"/>
+                <a:ea typeface="+mn-ea"/>
+                <a:cs typeface="+mn-cs"/>
+              </a:rPr>
+              <a:t>. For regression, the goal is different — we actually want to compare behavior with and without stationary agents — so we start from a more permissive filter: NA removal only, no speed cutoff. That gives us </a:t>
+            </a:r>
+            <a:r>
+              <a:rPr lang="en-US" sz="1200" b="1" i="0" kern="1200" dirty="0">
+                <a:solidFill>
+                  <a:schemeClr val="tx1"/>
+                </a:solidFill>
+                <a:effectLst/>
+                <a:latin typeface="+mn-lt"/>
+                <a:ea typeface="+mn-ea"/>
+                <a:cs typeface="+mn-cs"/>
+              </a:rPr>
+              <a:t>6,614 agents</a:t>
+            </a:r>
+            <a:r>
+              <a:rPr lang="en-US" sz="1200" b="0" i="0" kern="1200" dirty="0">
+                <a:solidFill>
+                  <a:schemeClr val="tx1"/>
+                </a:solidFill>
+                <a:effectLst/>
+                <a:latin typeface="+mn-lt"/>
+                <a:ea typeface="+mn-ea"/>
+                <a:cs typeface="+mn-cs"/>
+              </a:rPr>
+              <a:t> including stationary ones, which we then split into two conditions for the comparison.</a:t>
+            </a:r>
+          </a:p>
+          <a:p>
+            <a:endParaRPr lang="en-US" sz="1200" b="0" i="0" kern="1200" dirty="0">
+              <a:solidFill>
+                <a:schemeClr val="tx1"/>
+              </a:solidFill>
+              <a:effectLst/>
+              <a:latin typeface="+mn-lt"/>
+              <a:ea typeface="+mn-ea"/>
+              <a:cs typeface="+mn-cs"/>
+            </a:endParaRPr>
           </a:p>
         </p:txBody>
       </p:sp>
@@ -4320,7 +4603,7 @@
                 <a:ea typeface="+mn-ea"/>
                 <a:cs typeface="+mn-cs"/>
               </a:rPr>
-              <a:t>PAVEL:</a:t>
+              <a:t>JUSTIN:</a:t>
             </a:r>
           </a:p>
           <a:p>
@@ -4345,10 +4628,12 @@
                 <a:ea typeface="+mn-ea"/>
                 <a:cs typeface="+mn-cs"/>
               </a:rPr>
-              <a:t>The two analyses use different preprocessing. For anomaly detection, we apply the strictest filter: valid sensor frames only, stationary agents removed, and complete cases across all kinematic and geometric features — leaving </a:t>
-            </a:r>
-            <a:r>
-              <a:rPr lang="en-US" sz="1200" b="1" i="0" kern="1200" dirty="0">
+              <a:t>Before diving into the models, let me give you a sense of what this data actually looks like.</a:t>
+            </a:r>
+          </a:p>
+          <a:p>
+            <a:r>
+              <a:rPr lang="en-US" sz="1200" b="0" i="0" kern="1200" dirty="0">
                 <a:solidFill>
                   <a:schemeClr val="tx1"/>
                 </a:solidFill>
@@ -4357,10 +4642,10 @@
                 <a:ea typeface="+mn-ea"/>
                 <a:cs typeface="+mn-cs"/>
               </a:rPr>
-              <a:t>4,538 moving agents</a:t>
-            </a:r>
-            <a:r>
-              <a:rPr lang="en-US" sz="1200" b="0" i="0" kern="1200" dirty="0">
+              <a:t>We extracted from </a:t>
+            </a:r>
+            <a:r>
+              <a:rPr lang="en-US" sz="1200" b="1" i="0" kern="1200" dirty="0">
                 <a:solidFill>
                   <a:schemeClr val="tx1"/>
                 </a:solidFill>
@@ -4369,10 +4654,10 @@
                 <a:ea typeface="+mn-ea"/>
                 <a:cs typeface="+mn-cs"/>
               </a:rPr>
-              <a:t>. For regression, the goal is different — we actually want to compare behavior with and without stationary agents — so we start from a more permissive filter: NA removal only, no speed cutoff. That gives us </a:t>
-            </a:r>
-            <a:r>
-              <a:rPr lang="en-US" sz="1200" b="1" i="0" kern="1200" dirty="0">
+              <a:t>300 scenarios</a:t>
+            </a:r>
+            <a:r>
+              <a:rPr lang="en-US" sz="1200" b="0" i="0" kern="1200" dirty="0">
                 <a:solidFill>
                   <a:schemeClr val="tx1"/>
                 </a:solidFill>
@@ -4381,10 +4666,10 @@
                 <a:ea typeface="+mn-ea"/>
                 <a:cs typeface="+mn-cs"/>
               </a:rPr>
-              <a:t>6,614 agents</a:t>
-            </a:r>
-            <a:r>
-              <a:rPr lang="en-US" sz="1200" b="0" i="0" kern="1200" dirty="0">
+              <a:t> from the validation split of the Waymo Open Motion Dataset — specifically shard 00000-of-00150. That gives us </a:t>
+            </a:r>
+            <a:r>
+              <a:rPr lang="en-US" sz="1200" b="1" i="0" kern="1200" dirty="0">
                 <a:solidFill>
                   <a:schemeClr val="tx1"/>
                 </a:solidFill>
@@ -4393,7 +4678,109 @@
                 <a:ea typeface="+mn-ea"/>
                 <a:cs typeface="+mn-cs"/>
               </a:rPr>
-              <a:t> including stationary ones, which we then split into two conditions for the comparison.</a:t>
+              <a:t>18,311 raw agent observations</a:t>
+            </a:r>
+            <a:r>
+              <a:rPr lang="en-US" sz="1200" b="0" i="0" kern="1200" dirty="0">
+                <a:solidFill>
+                  <a:schemeClr val="tx1"/>
+                </a:solidFill>
+                <a:effectLst/>
+                <a:latin typeface="+mn-lt"/>
+                <a:ea typeface="+mn-ea"/>
+                <a:cs typeface="+mn-cs"/>
+              </a:rPr>
+              <a:t> across vehicles, pedestrians, cyclists, and the Waymo self-driving car itself, which we exclude from all analysis.</a:t>
+            </a:r>
+          </a:p>
+          <a:p>
+            <a:r>
+              <a:rPr lang="en-US" sz="1200" b="0" i="0" kern="1200" dirty="0">
+                <a:solidFill>
+                  <a:schemeClr val="tx1"/>
+                </a:solidFill>
+                <a:effectLst/>
+                <a:latin typeface="+mn-lt"/>
+                <a:ea typeface="+mn-ea"/>
+                <a:cs typeface="+mn-cs"/>
+              </a:rPr>
+              <a:t>In terms of composition: vehicles make up the clear majority of the dataset, pedestrians account for roughly 25%, and cyclists around 5%. This imbalance matters because it affects both the anomaly detection and how we interpret per-class statistics.</a:t>
+            </a:r>
+          </a:p>
+          <a:p>
+            <a:r>
+              <a:rPr lang="en-US" sz="1200" b="0" i="0" kern="1200" dirty="0">
+                <a:solidFill>
+                  <a:schemeClr val="tx1"/>
+                </a:solidFill>
+                <a:effectLst/>
+                <a:latin typeface="+mn-lt"/>
+                <a:ea typeface="+mn-ea"/>
+                <a:cs typeface="+mn-cs"/>
+              </a:rPr>
+              <a:t>A few things worth noting about the raw data before any filtering. When you look at mean speeds including stationary agents, vehicles actually appear slower than cyclists — counterintuitive, and it's entirely because a large fraction of vehicles are stopped at intersections. The moment you filter to moving agents only, the expected ordering returns: vehicles fastest, then cyclists, then pedestrians.</a:t>
+            </a:r>
+          </a:p>
+          <a:p>
+            <a:r>
+              <a:rPr lang="en-US" sz="1200" b="0" i="0" kern="1200" dirty="0">
+                <a:solidFill>
+                  <a:schemeClr val="tx1"/>
+                </a:solidFill>
+                <a:effectLst/>
+                <a:latin typeface="+mn-lt"/>
+                <a:ea typeface="+mn-ea"/>
+                <a:cs typeface="+mn-cs"/>
+              </a:rPr>
+              <a:t>Waymo also provides behavioral flags: </a:t>
+            </a:r>
+            <a:r>
+              <a:rPr lang="en-US" sz="1200" b="0" i="0" kern="1200" dirty="0" err="1">
+                <a:solidFill>
+                  <a:schemeClr val="tx1"/>
+                </a:solidFill>
+                <a:effectLst/>
+                <a:latin typeface="+mn-lt"/>
+                <a:ea typeface="+mn-ea"/>
+                <a:cs typeface="+mn-cs"/>
+              </a:rPr>
+              <a:t>IsInteractive</a:t>
+            </a:r>
+            <a:r>
+              <a:rPr lang="en-US" sz="1200" b="0" i="0" kern="1200" dirty="0">
+                <a:solidFill>
+                  <a:schemeClr val="tx1"/>
+                </a:solidFill>
+                <a:effectLst/>
+                <a:latin typeface="+mn-lt"/>
+                <a:ea typeface="+mn-ea"/>
+                <a:cs typeface="+mn-cs"/>
+              </a:rPr>
+              <a:t> marks agents relevant to the AV's immediate planning — typically nearby vehicles in adjacent lanes or at intersections. </a:t>
+            </a:r>
+            <a:r>
+              <a:rPr lang="en-US" sz="1200" b="0" i="0" kern="1200" dirty="0" err="1">
+                <a:solidFill>
+                  <a:schemeClr val="tx1"/>
+                </a:solidFill>
+                <a:effectLst/>
+                <a:latin typeface="+mn-lt"/>
+                <a:ea typeface="+mn-ea"/>
+                <a:cs typeface="+mn-cs"/>
+              </a:rPr>
+              <a:t>IsSDC</a:t>
+            </a:r>
+            <a:r>
+              <a:rPr lang="en-US" sz="1200" b="0" i="0" kern="1200" dirty="0">
+                <a:solidFill>
+                  <a:schemeClr val="tx1"/>
+                </a:solidFill>
+                <a:effectLst/>
+                <a:latin typeface="+mn-lt"/>
+                <a:ea typeface="+mn-ea"/>
+                <a:cs typeface="+mn-cs"/>
+              </a:rPr>
+              <a:t> identifies the self-driving car itself. These flags are not safety-incident labels — they're proximity-based planning annotations — and that distinction will matter when we interpret the anomaly results.</a:t>
             </a:r>
           </a:p>
           <a:p>
@@ -20879,9 +21266,6 @@
             </a:pPr>
             <a:r>
               <a:rPr lang="en-US" b="0" i="0" dirty="0">
-                <a:solidFill>
-                  <a:schemeClr val="bg1"/>
-                </a:solidFill>
                 <a:effectLst/>
                 <a:latin typeface="GT Walsheim Trial Rg" pitchFamily="2" charset="77"/>
               </a:rPr>
@@ -21207,6 +21591,93 @@
           </a:extLst>
         </p:spPr>
       </p:pic>
+      <p:sp>
+        <p:nvSpPr>
+          <p:cNvPr id="3" name="TextBox 2">
+            <a:extLst>
+              <a:ext uri="{FF2B5EF4-FFF2-40B4-BE49-F238E27FC236}">
+                <a16:creationId xmlns:a16="http://schemas.microsoft.com/office/drawing/2014/main" id="{6FF11A2A-EA04-CBEA-5259-2D7D1F89B0FD}"/>
+              </a:ext>
+            </a:extLst>
+          </p:cNvPr>
+          <p:cNvSpPr txBox="1"/>
+          <p:nvPr/>
+        </p:nvSpPr>
+        <p:spPr>
+          <a:xfrm>
+            <a:off x="2014302" y="6400034"/>
+            <a:ext cx="8266142" cy="323165"/>
+          </a:xfrm>
+          <a:prstGeom prst="rect">
+            <a:avLst/>
+          </a:prstGeom>
+          <a:noFill/>
+        </p:spPr>
+        <p:txBody>
+          <a:bodyPr wrap="square">
+            <a:spAutoFit/>
+          </a:bodyPr>
+          <a:lstStyle/>
+          <a:p>
+            <a:pPr algn="ctr"/>
+            <a:r>
+              <a:rPr lang="en-US" sz="1500" dirty="0">
+                <a:solidFill>
+                  <a:schemeClr val="bg1">
+                    <a:lumMod val="50000"/>
+                  </a:schemeClr>
+                </a:solidFill>
+                <a:latin typeface="GT Walsheim Trial Rg" pitchFamily="2" charset="77"/>
+              </a:rPr>
+              <a:t>*Features extracted: Speed, Acceleration, Yaw Rate, </a:t>
+            </a:r>
+            <a:r>
+              <a:rPr lang="en-US" sz="1500" dirty="0" err="1">
+                <a:solidFill>
+                  <a:schemeClr val="bg1">
+                    <a:lumMod val="50000"/>
+                  </a:schemeClr>
+                </a:solidFill>
+                <a:latin typeface="GT Walsheim Trial Rg" pitchFamily="2" charset="77"/>
+              </a:rPr>
+              <a:t>Vel_X</a:t>
+            </a:r>
+            <a:r>
+              <a:rPr lang="en-US" sz="1500" dirty="0">
+                <a:solidFill>
+                  <a:schemeClr val="bg1">
+                    <a:lumMod val="50000"/>
+                  </a:schemeClr>
+                </a:solidFill>
+                <a:latin typeface="GT Walsheim Trial Rg" pitchFamily="2" charset="77"/>
+              </a:rPr>
+              <a:t>, </a:t>
+            </a:r>
+            <a:r>
+              <a:rPr lang="en-US" sz="1500" dirty="0" err="1">
+                <a:solidFill>
+                  <a:schemeClr val="bg1">
+                    <a:lumMod val="50000"/>
+                  </a:schemeClr>
+                </a:solidFill>
+                <a:latin typeface="GT Walsheim Trial Rg" pitchFamily="2" charset="77"/>
+              </a:rPr>
+              <a:t>Vel_Y</a:t>
+            </a:r>
+            <a:r>
+              <a:rPr lang="en-US" sz="1500" dirty="0">
+                <a:solidFill>
+                  <a:schemeClr val="bg1">
+                    <a:lumMod val="50000"/>
+                  </a:schemeClr>
+                </a:solidFill>
+                <a:latin typeface="GT Walsheim Trial Rg" pitchFamily="2" charset="77"/>
+              </a:rPr>
+              <a:t> Length, Width, FutureDist_5s</a:t>
+            </a:r>
+          </a:p>
+        </p:txBody>
+      </p:sp>
     </p:spTree>
     <p:extLst>
       <p:ext uri="{BB962C8B-B14F-4D97-AF65-F5344CB8AC3E}">
@@ -21226,7 +21697,7 @@
     <p:bg>
       <p:bgPr>
         <a:solidFill>
-          <a:schemeClr val="tx1"/>
+          <a:schemeClr val="bg1"/>
         </a:solidFill>
         <a:effectLst/>
       </p:bgPr>
@@ -21253,10 +21724,1148 @@
       </p:grpSpPr>
       <p:sp>
         <p:nvSpPr>
-          <p:cNvPr id="5" name="Freeform 4">
+          <p:cNvPr id="4" name="Title 3">
             <a:extLst>
               <a:ext uri="{FF2B5EF4-FFF2-40B4-BE49-F238E27FC236}">
-                <a16:creationId xmlns:a16="http://schemas.microsoft.com/office/drawing/2014/main" id="{1A7F5B05-687E-2A4C-A8CD-9F064CE84592}"/>
+                <a16:creationId xmlns:a16="http://schemas.microsoft.com/office/drawing/2014/main" id="{03C362FE-26C6-9E59-253C-0E8E33DFB89E}"/>
+              </a:ext>
+            </a:extLst>
+          </p:cNvPr>
+          <p:cNvSpPr>
+            <a:spLocks noGrp="1"/>
+          </p:cNvSpPr>
+          <p:nvPr>
+            <p:ph type="ctrTitle"/>
+          </p:nvPr>
+        </p:nvSpPr>
+        <p:spPr>
+          <a:xfrm>
+            <a:off x="716478" y="447821"/>
+            <a:ext cx="3347522" cy="369333"/>
+          </a:xfrm>
+        </p:spPr>
+        <p:txBody>
+          <a:bodyPr>
+            <a:normAutofit/>
+          </a:bodyPr>
+          <a:lstStyle/>
+          <a:p>
+            <a:pPr algn="l"/>
+            <a:r>
+              <a:rPr lang="en-US" sz="1500" dirty="0">
+                <a:latin typeface="GT Walsheim Trial Rg" pitchFamily="2" charset="77"/>
+              </a:rPr>
+              <a:t>DATASET STATISTICS</a:t>
+            </a:r>
+          </a:p>
+        </p:txBody>
+      </p:sp>
+      <p:sp>
+        <p:nvSpPr>
+          <p:cNvPr id="8" name="TextBox 7">
+            <a:extLst>
+              <a:ext uri="{FF2B5EF4-FFF2-40B4-BE49-F238E27FC236}">
+                <a16:creationId xmlns:a16="http://schemas.microsoft.com/office/drawing/2014/main" id="{AA0B286F-ACC4-E15E-FE10-F81A14DF3948}"/>
+              </a:ext>
+            </a:extLst>
+          </p:cNvPr>
+          <p:cNvSpPr txBox="1"/>
+          <p:nvPr/>
+        </p:nvSpPr>
+        <p:spPr>
+          <a:xfrm>
+            <a:off x="716477" y="952090"/>
+            <a:ext cx="7346867" cy="630942"/>
+          </a:xfrm>
+          <a:prstGeom prst="rect">
+            <a:avLst/>
+          </a:prstGeom>
+          <a:noFill/>
+        </p:spPr>
+        <p:txBody>
+          <a:bodyPr wrap="square">
+            <a:spAutoFit/>
+          </a:bodyPr>
+          <a:lstStyle/>
+          <a:p>
+            <a:r>
+              <a:rPr lang="en-US" sz="3500" dirty="0">
+                <a:latin typeface="GT Walsheim Trial Rg" pitchFamily="2" charset="77"/>
+              </a:rPr>
+              <a:t>What the Data Looks Like</a:t>
+            </a:r>
+          </a:p>
+        </p:txBody>
+      </p:sp>
+      <p:graphicFrame>
+        <p:nvGraphicFramePr>
+          <p:cNvPr id="3" name="Table 2">
+            <a:extLst>
+              <a:ext uri="{FF2B5EF4-FFF2-40B4-BE49-F238E27FC236}">
+                <a16:creationId xmlns:a16="http://schemas.microsoft.com/office/drawing/2014/main" id="{6E5ED46D-9A9D-45B4-50C0-E4B617433E8C}"/>
+              </a:ext>
+            </a:extLst>
+          </p:cNvPr>
+          <p:cNvGraphicFramePr>
+            <a:graphicFrameLocks noGrp="1"/>
+          </p:cNvGraphicFramePr>
+          <p:nvPr>
+            <p:extLst>
+              <p:ext uri="{D42A27DB-BD31-4B8C-83A1-F6EECF244321}">
+                <p14:modId xmlns:p14="http://schemas.microsoft.com/office/powerpoint/2010/main" val="3111455078"/>
+              </p:ext>
+            </p:extLst>
+          </p:nvPr>
+        </p:nvGraphicFramePr>
+        <p:xfrm>
+          <a:off x="716478" y="1932132"/>
+          <a:ext cx="5117164" cy="2247981"/>
+        </p:xfrm>
+        <a:graphic>
+          <a:graphicData uri="http://schemas.openxmlformats.org/drawingml/2006/table">
+            <a:tbl>
+              <a:tblPr firstRow="1" bandRow="1">
+                <a:tableStyleId>{073A0DAA-6AF3-43AB-8588-CEC1D06C72B9}</a:tableStyleId>
+              </a:tblPr>
+              <a:tblGrid>
+                <a:gridCol w="1671122">
+                  <a:extLst>
+                    <a:ext uri="{9D8B030D-6E8A-4147-A177-3AD203B41FA5}">
+                      <a16:colId xmlns:a16="http://schemas.microsoft.com/office/drawing/2014/main" val="1610543496"/>
+                    </a:ext>
+                  </a:extLst>
+                </a:gridCol>
+                <a:gridCol w="1253067">
+                  <a:extLst>
+                    <a:ext uri="{9D8B030D-6E8A-4147-A177-3AD203B41FA5}">
+                      <a16:colId xmlns:a16="http://schemas.microsoft.com/office/drawing/2014/main" val="2940384537"/>
+                    </a:ext>
+                  </a:extLst>
+                </a:gridCol>
+                <a:gridCol w="2192975">
+                  <a:extLst>
+                    <a:ext uri="{9D8B030D-6E8A-4147-A177-3AD203B41FA5}">
+                      <a16:colId xmlns:a16="http://schemas.microsoft.com/office/drawing/2014/main" val="3740313691"/>
+                    </a:ext>
+                  </a:extLst>
+                </a:gridCol>
+              </a:tblGrid>
+              <a:tr h="334565">
+                <a:tc>
+                  <a:txBody>
+                    <a:bodyPr/>
+                    <a:lstStyle/>
+                    <a:p>
+                      <a:r>
+                        <a:rPr lang="en-US" sz="1500" b="0" i="0" dirty="0">
+                          <a:solidFill>
+                            <a:schemeClr val="bg1"/>
+                          </a:solidFill>
+                          <a:latin typeface="GT Walsheim Trial Rg" pitchFamily="2" charset="77"/>
+                        </a:rPr>
+                        <a:t>Agent Type</a:t>
+                      </a:r>
+                    </a:p>
+                  </a:txBody>
+                  <a:tcPr>
+                    <a:lnL w="12700" cap="flat" cmpd="sng" algn="ctr">
+                      <a:noFill/>
+                      <a:prstDash val="solid"/>
+                      <a:round/>
+                      <a:headEnd type="none" w="med" len="med"/>
+                      <a:tailEnd type="none" w="med" len="med"/>
+                    </a:lnL>
+                    <a:lnR w="12700" cap="flat" cmpd="sng" algn="ctr">
+                      <a:noFill/>
+                      <a:prstDash val="solid"/>
+                      <a:round/>
+                      <a:headEnd type="none" w="med" len="med"/>
+                      <a:tailEnd type="none" w="med" len="med"/>
+                    </a:lnR>
+                    <a:lnT w="12700" cap="flat" cmpd="sng" algn="ctr">
+                      <a:noFill/>
+                      <a:prstDash val="solid"/>
+                      <a:round/>
+                      <a:headEnd type="none" w="med" len="med"/>
+                      <a:tailEnd type="none" w="med" len="med"/>
+                    </a:lnT>
+                    <a:lnB w="12700" cap="flat" cmpd="sng" algn="ctr">
+                      <a:noFill/>
+                      <a:prstDash val="solid"/>
+                      <a:round/>
+                      <a:headEnd type="none" w="med" len="med"/>
+                      <a:tailEnd type="none" w="med" len="med"/>
+                    </a:lnB>
+                    <a:lnTlToBr w="12700" cmpd="sng">
+                      <a:noFill/>
+                      <a:prstDash val="solid"/>
+                    </a:lnTlToBr>
+                    <a:lnBlToTr w="12700" cmpd="sng">
+                      <a:noFill/>
+                      <a:prstDash val="solid"/>
+                    </a:lnBlToTr>
+                    <a:solidFill>
+                      <a:srgbClr val="0078FF"/>
+                    </a:solidFill>
+                  </a:tcPr>
+                </a:tc>
+                <a:tc>
+                  <a:txBody>
+                    <a:bodyPr/>
+                    <a:lstStyle/>
+                    <a:p>
+                      <a:r>
+                        <a:rPr lang="en-US" sz="1500" b="0" i="0" dirty="0">
+                          <a:solidFill>
+                            <a:schemeClr val="bg1"/>
+                          </a:solidFill>
+                          <a:latin typeface="GT Walsheim Trial Rg" pitchFamily="2" charset="77"/>
+                        </a:rPr>
+                        <a:t>Count (raw)</a:t>
+                      </a:r>
+                    </a:p>
+                  </a:txBody>
+                  <a:tcPr>
+                    <a:lnL w="12700" cap="flat" cmpd="sng" algn="ctr">
+                      <a:noFill/>
+                      <a:prstDash val="solid"/>
+                      <a:round/>
+                      <a:headEnd type="none" w="med" len="med"/>
+                      <a:tailEnd type="none" w="med" len="med"/>
+                    </a:lnL>
+                    <a:lnR w="12700" cap="flat" cmpd="sng" algn="ctr">
+                      <a:noFill/>
+                      <a:prstDash val="solid"/>
+                      <a:round/>
+                      <a:headEnd type="none" w="med" len="med"/>
+                      <a:tailEnd type="none" w="med" len="med"/>
+                    </a:lnR>
+                    <a:lnT w="12700" cap="flat" cmpd="sng" algn="ctr">
+                      <a:noFill/>
+                      <a:prstDash val="solid"/>
+                      <a:round/>
+                      <a:headEnd type="none" w="med" len="med"/>
+                      <a:tailEnd type="none" w="med" len="med"/>
+                    </a:lnT>
+                    <a:lnB w="12700" cap="flat" cmpd="sng" algn="ctr">
+                      <a:noFill/>
+                      <a:prstDash val="solid"/>
+                      <a:round/>
+                      <a:headEnd type="none" w="med" len="med"/>
+                      <a:tailEnd type="none" w="med" len="med"/>
+                    </a:lnB>
+                    <a:lnTlToBr w="12700" cmpd="sng">
+                      <a:noFill/>
+                      <a:prstDash val="solid"/>
+                    </a:lnTlToBr>
+                    <a:lnBlToTr w="12700" cmpd="sng">
+                      <a:noFill/>
+                      <a:prstDash val="solid"/>
+                    </a:lnBlToTr>
+                    <a:solidFill>
+                      <a:srgbClr val="0078FF"/>
+                    </a:solidFill>
+                  </a:tcPr>
+                </a:tc>
+                <a:tc>
+                  <a:txBody>
+                    <a:bodyPr/>
+                    <a:lstStyle/>
+                    <a:p>
+                      <a:r>
+                        <a:rPr lang="en-US" sz="1500" b="0" i="0" dirty="0">
+                          <a:solidFill>
+                            <a:schemeClr val="bg1"/>
+                          </a:solidFill>
+                          <a:latin typeface="GT Walsheim Trial Rg" pitchFamily="2" charset="77"/>
+                        </a:rPr>
+                        <a:t>After preprocessing</a:t>
+                      </a:r>
+                    </a:p>
+                  </a:txBody>
+                  <a:tcPr>
+                    <a:lnL w="12700" cap="flat" cmpd="sng" algn="ctr">
+                      <a:noFill/>
+                      <a:prstDash val="solid"/>
+                      <a:round/>
+                      <a:headEnd type="none" w="med" len="med"/>
+                      <a:tailEnd type="none" w="med" len="med"/>
+                    </a:lnL>
+                    <a:lnR w="12700" cap="flat" cmpd="sng" algn="ctr">
+                      <a:noFill/>
+                      <a:prstDash val="solid"/>
+                      <a:round/>
+                      <a:headEnd type="none" w="med" len="med"/>
+                      <a:tailEnd type="none" w="med" len="med"/>
+                    </a:lnR>
+                    <a:lnT w="12700" cap="flat" cmpd="sng" algn="ctr">
+                      <a:noFill/>
+                      <a:prstDash val="solid"/>
+                      <a:round/>
+                      <a:headEnd type="none" w="med" len="med"/>
+                      <a:tailEnd type="none" w="med" len="med"/>
+                    </a:lnT>
+                    <a:lnB w="12700" cap="flat" cmpd="sng" algn="ctr">
+                      <a:noFill/>
+                      <a:prstDash val="solid"/>
+                      <a:round/>
+                      <a:headEnd type="none" w="med" len="med"/>
+                      <a:tailEnd type="none" w="med" len="med"/>
+                    </a:lnB>
+                    <a:lnTlToBr w="12700" cmpd="sng">
+                      <a:noFill/>
+                      <a:prstDash val="solid"/>
+                    </a:lnTlToBr>
+                    <a:lnBlToTr w="12700" cmpd="sng">
+                      <a:noFill/>
+                      <a:prstDash val="solid"/>
+                    </a:lnBlToTr>
+                    <a:solidFill>
+                      <a:srgbClr val="0078FF"/>
+                    </a:solidFill>
+                  </a:tcPr>
+                </a:tc>
+                <a:extLst>
+                  <a:ext uri="{0D108BD9-81ED-4DB2-BD59-A6C34878D82A}">
+                    <a16:rowId xmlns:a16="http://schemas.microsoft.com/office/drawing/2014/main" val="4220759275"/>
+                  </a:ext>
+                </a:extLst>
+              </a:tr>
+              <a:tr h="446626">
+                <a:tc>
+                  <a:txBody>
+                    <a:bodyPr/>
+                    <a:lstStyle/>
+                    <a:p>
+                      <a:r>
+                        <a:rPr lang="en-US" sz="1500" b="0" i="0" dirty="0">
+                          <a:solidFill>
+                            <a:schemeClr val="tx1"/>
+                          </a:solidFill>
+                          <a:latin typeface="GT Walsheim Trial Rg" pitchFamily="2" charset="77"/>
+                        </a:rPr>
+                        <a:t>Vehicle</a:t>
+                      </a:r>
+                    </a:p>
+                  </a:txBody>
+                  <a:tcPr>
+                    <a:lnL w="12700" cap="flat" cmpd="sng" algn="ctr">
+                      <a:noFill/>
+                      <a:prstDash val="solid"/>
+                      <a:round/>
+                      <a:headEnd type="none" w="med" len="med"/>
+                      <a:tailEnd type="none" w="med" len="med"/>
+                    </a:lnL>
+                    <a:lnR w="12700" cap="flat" cmpd="sng" algn="ctr">
+                      <a:noFill/>
+                      <a:prstDash val="solid"/>
+                      <a:round/>
+                      <a:headEnd type="none" w="med" len="med"/>
+                      <a:tailEnd type="none" w="med" len="med"/>
+                    </a:lnR>
+                    <a:lnT w="12700" cap="flat" cmpd="sng" algn="ctr">
+                      <a:noFill/>
+                      <a:prstDash val="solid"/>
+                      <a:round/>
+                      <a:headEnd type="none" w="med" len="med"/>
+                      <a:tailEnd type="none" w="med" len="med"/>
+                    </a:lnT>
+                    <a:lnB w="12700" cap="flat" cmpd="sng" algn="ctr">
+                      <a:noFill/>
+                      <a:prstDash val="solid"/>
+                      <a:round/>
+                      <a:headEnd type="none" w="med" len="med"/>
+                      <a:tailEnd type="none" w="med" len="med"/>
+                    </a:lnB>
+                    <a:lnTlToBr w="12700" cmpd="sng">
+                      <a:noFill/>
+                      <a:prstDash val="solid"/>
+                    </a:lnTlToBr>
+                    <a:lnBlToTr w="12700" cmpd="sng">
+                      <a:noFill/>
+                      <a:prstDash val="solid"/>
+                    </a:lnBlToTr>
+                    <a:solidFill>
+                      <a:schemeClr val="bg1">
+                        <a:lumMod val="95000"/>
+                      </a:schemeClr>
+                    </a:solidFill>
+                  </a:tcPr>
+                </a:tc>
+                <a:tc>
+                  <a:txBody>
+                    <a:bodyPr/>
+                    <a:lstStyle/>
+                    <a:p>
+                      <a:r>
+                        <a:rPr lang="en-US" sz="1500" b="0" i="0" dirty="0">
+                          <a:solidFill>
+                            <a:schemeClr val="tx1"/>
+                          </a:solidFill>
+                          <a:latin typeface="GT Walsheim Trial Rg" pitchFamily="2" charset="77"/>
+                        </a:rPr>
+                        <a:t>majority</a:t>
+                      </a:r>
+                    </a:p>
+                  </a:txBody>
+                  <a:tcPr>
+                    <a:lnL w="12700" cap="flat" cmpd="sng" algn="ctr">
+                      <a:noFill/>
+                      <a:prstDash val="solid"/>
+                      <a:round/>
+                      <a:headEnd type="none" w="med" len="med"/>
+                      <a:tailEnd type="none" w="med" len="med"/>
+                    </a:lnL>
+                    <a:lnR w="12700" cap="flat" cmpd="sng" algn="ctr">
+                      <a:noFill/>
+                      <a:prstDash val="solid"/>
+                      <a:round/>
+                      <a:headEnd type="none" w="med" len="med"/>
+                      <a:tailEnd type="none" w="med" len="med"/>
+                    </a:lnR>
+                    <a:lnT w="12700" cap="flat" cmpd="sng" algn="ctr">
+                      <a:noFill/>
+                      <a:prstDash val="solid"/>
+                      <a:round/>
+                      <a:headEnd type="none" w="med" len="med"/>
+                      <a:tailEnd type="none" w="med" len="med"/>
+                    </a:lnT>
+                    <a:lnB w="12700" cap="flat" cmpd="sng" algn="ctr">
+                      <a:noFill/>
+                      <a:prstDash val="solid"/>
+                      <a:round/>
+                      <a:headEnd type="none" w="med" len="med"/>
+                      <a:tailEnd type="none" w="med" len="med"/>
+                    </a:lnB>
+                    <a:lnTlToBr w="12700" cmpd="sng">
+                      <a:noFill/>
+                      <a:prstDash val="solid"/>
+                    </a:lnTlToBr>
+                    <a:lnBlToTr w="12700" cmpd="sng">
+                      <a:noFill/>
+                      <a:prstDash val="solid"/>
+                    </a:lnBlToTr>
+                    <a:solidFill>
+                      <a:schemeClr val="bg1">
+                        <a:lumMod val="95000"/>
+                      </a:schemeClr>
+                    </a:solidFill>
+                  </a:tcPr>
+                </a:tc>
+                <a:tc>
+                  <a:txBody>
+                    <a:bodyPr/>
+                    <a:lstStyle/>
+                    <a:p>
+                      <a:r>
+                        <a:rPr lang="en-US" sz="1500" b="0" i="0" dirty="0">
+                          <a:solidFill>
+                            <a:schemeClr val="tx1"/>
+                          </a:solidFill>
+                          <a:latin typeface="GT Walsheim Trial Rg" pitchFamily="2" charset="77"/>
+                        </a:rPr>
+                        <a:t>included</a:t>
+                      </a:r>
+                    </a:p>
+                  </a:txBody>
+                  <a:tcPr>
+                    <a:lnL w="12700" cap="flat" cmpd="sng" algn="ctr">
+                      <a:noFill/>
+                      <a:prstDash val="solid"/>
+                      <a:round/>
+                      <a:headEnd type="none" w="med" len="med"/>
+                      <a:tailEnd type="none" w="med" len="med"/>
+                    </a:lnL>
+                    <a:lnR w="12700" cap="flat" cmpd="sng" algn="ctr">
+                      <a:noFill/>
+                      <a:prstDash val="solid"/>
+                      <a:round/>
+                      <a:headEnd type="none" w="med" len="med"/>
+                      <a:tailEnd type="none" w="med" len="med"/>
+                    </a:lnR>
+                    <a:lnT w="12700" cap="flat" cmpd="sng" algn="ctr">
+                      <a:noFill/>
+                      <a:prstDash val="solid"/>
+                      <a:round/>
+                      <a:headEnd type="none" w="med" len="med"/>
+                      <a:tailEnd type="none" w="med" len="med"/>
+                    </a:lnT>
+                    <a:lnB w="12700" cap="flat" cmpd="sng" algn="ctr">
+                      <a:noFill/>
+                      <a:prstDash val="solid"/>
+                      <a:round/>
+                      <a:headEnd type="none" w="med" len="med"/>
+                      <a:tailEnd type="none" w="med" len="med"/>
+                    </a:lnB>
+                    <a:lnTlToBr w="12700" cmpd="sng">
+                      <a:noFill/>
+                      <a:prstDash val="solid"/>
+                    </a:lnTlToBr>
+                    <a:lnBlToTr w="12700" cmpd="sng">
+                      <a:noFill/>
+                      <a:prstDash val="solid"/>
+                    </a:lnBlToTr>
+                    <a:solidFill>
+                      <a:schemeClr val="bg1">
+                        <a:lumMod val="95000"/>
+                      </a:schemeClr>
+                    </a:solidFill>
+                  </a:tcPr>
+                </a:tc>
+                <a:extLst>
+                  <a:ext uri="{0D108BD9-81ED-4DB2-BD59-A6C34878D82A}">
+                    <a16:rowId xmlns:a16="http://schemas.microsoft.com/office/drawing/2014/main" val="4152326013"/>
+                  </a:ext>
+                </a:extLst>
+              </a:tr>
+              <a:tr h="446626">
+                <a:tc>
+                  <a:txBody>
+                    <a:bodyPr/>
+                    <a:lstStyle/>
+                    <a:p>
+                      <a:r>
+                        <a:rPr lang="en-US" sz="1500" b="0" i="0" dirty="0">
+                          <a:solidFill>
+                            <a:schemeClr val="tx1"/>
+                          </a:solidFill>
+                          <a:latin typeface="GT Walsheim Trial Rg" pitchFamily="2" charset="77"/>
+                        </a:rPr>
+                        <a:t>Pedestrian</a:t>
+                      </a:r>
+                    </a:p>
+                  </a:txBody>
+                  <a:tcPr>
+                    <a:lnL w="12700" cap="flat" cmpd="sng" algn="ctr">
+                      <a:noFill/>
+                      <a:prstDash val="solid"/>
+                      <a:round/>
+                      <a:headEnd type="none" w="med" len="med"/>
+                      <a:tailEnd type="none" w="med" len="med"/>
+                    </a:lnL>
+                    <a:lnR w="12700" cap="flat" cmpd="sng" algn="ctr">
+                      <a:noFill/>
+                      <a:prstDash val="solid"/>
+                      <a:round/>
+                      <a:headEnd type="none" w="med" len="med"/>
+                      <a:tailEnd type="none" w="med" len="med"/>
+                    </a:lnR>
+                    <a:lnT w="12700" cap="flat" cmpd="sng" algn="ctr">
+                      <a:noFill/>
+                      <a:prstDash val="solid"/>
+                      <a:round/>
+                      <a:headEnd type="none" w="med" len="med"/>
+                      <a:tailEnd type="none" w="med" len="med"/>
+                    </a:lnT>
+                    <a:lnB w="12700" cap="flat" cmpd="sng" algn="ctr">
+                      <a:noFill/>
+                      <a:prstDash val="solid"/>
+                      <a:round/>
+                      <a:headEnd type="none" w="med" len="med"/>
+                      <a:tailEnd type="none" w="med" len="med"/>
+                    </a:lnB>
+                    <a:lnTlToBr w="12700" cmpd="sng">
+                      <a:noFill/>
+                      <a:prstDash val="solid"/>
+                    </a:lnTlToBr>
+                    <a:lnBlToTr w="12700" cmpd="sng">
+                      <a:noFill/>
+                      <a:prstDash val="solid"/>
+                    </a:lnBlToTr>
+                    <a:solidFill>
+                      <a:schemeClr val="bg1">
+                        <a:lumMod val="85000"/>
+                      </a:schemeClr>
+                    </a:solidFill>
+                  </a:tcPr>
+                </a:tc>
+                <a:tc>
+                  <a:txBody>
+                    <a:bodyPr/>
+                    <a:lstStyle/>
+                    <a:p>
+                      <a:r>
+                        <a:rPr lang="en-US" sz="1500" b="0" i="0" dirty="0">
+                          <a:solidFill>
+                            <a:schemeClr val="tx1"/>
+                          </a:solidFill>
+                          <a:latin typeface="GT Walsheim Trial Rg" pitchFamily="2" charset="77"/>
+                        </a:rPr>
+                        <a:t>~25%</a:t>
+                      </a:r>
+                    </a:p>
+                  </a:txBody>
+                  <a:tcPr>
+                    <a:lnL w="12700" cap="flat" cmpd="sng" algn="ctr">
+                      <a:noFill/>
+                      <a:prstDash val="solid"/>
+                      <a:round/>
+                      <a:headEnd type="none" w="med" len="med"/>
+                      <a:tailEnd type="none" w="med" len="med"/>
+                    </a:lnL>
+                    <a:lnR w="12700" cap="flat" cmpd="sng" algn="ctr">
+                      <a:noFill/>
+                      <a:prstDash val="solid"/>
+                      <a:round/>
+                      <a:headEnd type="none" w="med" len="med"/>
+                      <a:tailEnd type="none" w="med" len="med"/>
+                    </a:lnR>
+                    <a:lnT w="12700" cap="flat" cmpd="sng" algn="ctr">
+                      <a:noFill/>
+                      <a:prstDash val="solid"/>
+                      <a:round/>
+                      <a:headEnd type="none" w="med" len="med"/>
+                      <a:tailEnd type="none" w="med" len="med"/>
+                    </a:lnT>
+                    <a:lnB w="12700" cap="flat" cmpd="sng" algn="ctr">
+                      <a:noFill/>
+                      <a:prstDash val="solid"/>
+                      <a:round/>
+                      <a:headEnd type="none" w="med" len="med"/>
+                      <a:tailEnd type="none" w="med" len="med"/>
+                    </a:lnB>
+                    <a:lnTlToBr w="12700" cmpd="sng">
+                      <a:noFill/>
+                      <a:prstDash val="solid"/>
+                    </a:lnTlToBr>
+                    <a:lnBlToTr w="12700" cmpd="sng">
+                      <a:noFill/>
+                      <a:prstDash val="solid"/>
+                    </a:lnBlToTr>
+                    <a:solidFill>
+                      <a:schemeClr val="bg1">
+                        <a:lumMod val="85000"/>
+                      </a:schemeClr>
+                    </a:solidFill>
+                  </a:tcPr>
+                </a:tc>
+                <a:tc>
+                  <a:txBody>
+                    <a:bodyPr/>
+                    <a:lstStyle/>
+                    <a:p>
+                      <a:r>
+                        <a:rPr lang="en-US" sz="1500" b="0" i="0" dirty="0">
+                          <a:solidFill>
+                            <a:schemeClr val="tx1"/>
+                          </a:solidFill>
+                          <a:latin typeface="GT Walsheim Trial Rg" pitchFamily="2" charset="77"/>
+                        </a:rPr>
+                        <a:t>included</a:t>
+                      </a:r>
+                    </a:p>
+                  </a:txBody>
+                  <a:tcPr>
+                    <a:lnL w="12700" cap="flat" cmpd="sng" algn="ctr">
+                      <a:noFill/>
+                      <a:prstDash val="solid"/>
+                      <a:round/>
+                      <a:headEnd type="none" w="med" len="med"/>
+                      <a:tailEnd type="none" w="med" len="med"/>
+                    </a:lnL>
+                    <a:lnR w="12700" cap="flat" cmpd="sng" algn="ctr">
+                      <a:noFill/>
+                      <a:prstDash val="solid"/>
+                      <a:round/>
+                      <a:headEnd type="none" w="med" len="med"/>
+                      <a:tailEnd type="none" w="med" len="med"/>
+                    </a:lnR>
+                    <a:lnT w="12700" cap="flat" cmpd="sng" algn="ctr">
+                      <a:noFill/>
+                      <a:prstDash val="solid"/>
+                      <a:round/>
+                      <a:headEnd type="none" w="med" len="med"/>
+                      <a:tailEnd type="none" w="med" len="med"/>
+                    </a:lnT>
+                    <a:lnB w="12700" cap="flat" cmpd="sng" algn="ctr">
+                      <a:noFill/>
+                      <a:prstDash val="solid"/>
+                      <a:round/>
+                      <a:headEnd type="none" w="med" len="med"/>
+                      <a:tailEnd type="none" w="med" len="med"/>
+                    </a:lnB>
+                    <a:lnTlToBr w="12700" cmpd="sng">
+                      <a:noFill/>
+                      <a:prstDash val="solid"/>
+                    </a:lnTlToBr>
+                    <a:lnBlToTr w="12700" cmpd="sng">
+                      <a:noFill/>
+                      <a:prstDash val="solid"/>
+                    </a:lnBlToTr>
+                    <a:solidFill>
+                      <a:schemeClr val="bg1">
+                        <a:lumMod val="85000"/>
+                      </a:schemeClr>
+                    </a:solidFill>
+                  </a:tcPr>
+                </a:tc>
+                <a:extLst>
+                  <a:ext uri="{0D108BD9-81ED-4DB2-BD59-A6C34878D82A}">
+                    <a16:rowId xmlns:a16="http://schemas.microsoft.com/office/drawing/2014/main" val="3142999530"/>
+                  </a:ext>
+                </a:extLst>
+              </a:tr>
+              <a:tr h="446626">
+                <a:tc>
+                  <a:txBody>
+                    <a:bodyPr/>
+                    <a:lstStyle/>
+                    <a:p>
+                      <a:r>
+                        <a:rPr lang="en-US" sz="1500" b="0" i="0" dirty="0">
+                          <a:solidFill>
+                            <a:schemeClr val="tx1"/>
+                          </a:solidFill>
+                          <a:latin typeface="GT Walsheim Trial Rg" pitchFamily="2" charset="77"/>
+                        </a:rPr>
+                        <a:t>Cyclist</a:t>
+                      </a:r>
+                    </a:p>
+                  </a:txBody>
+                  <a:tcPr>
+                    <a:lnL w="12700" cap="flat" cmpd="sng" algn="ctr">
+                      <a:noFill/>
+                      <a:prstDash val="solid"/>
+                      <a:round/>
+                      <a:headEnd type="none" w="med" len="med"/>
+                      <a:tailEnd type="none" w="med" len="med"/>
+                    </a:lnL>
+                    <a:lnR w="12700" cap="flat" cmpd="sng" algn="ctr">
+                      <a:noFill/>
+                      <a:prstDash val="solid"/>
+                      <a:round/>
+                      <a:headEnd type="none" w="med" len="med"/>
+                      <a:tailEnd type="none" w="med" len="med"/>
+                    </a:lnR>
+                    <a:lnT w="12700" cap="flat" cmpd="sng" algn="ctr">
+                      <a:noFill/>
+                      <a:prstDash val="solid"/>
+                      <a:round/>
+                      <a:headEnd type="none" w="med" len="med"/>
+                      <a:tailEnd type="none" w="med" len="med"/>
+                    </a:lnT>
+                    <a:lnB w="12700" cap="flat" cmpd="sng" algn="ctr">
+                      <a:noFill/>
+                      <a:prstDash val="solid"/>
+                      <a:round/>
+                      <a:headEnd type="none" w="med" len="med"/>
+                      <a:tailEnd type="none" w="med" len="med"/>
+                    </a:lnB>
+                    <a:lnTlToBr w="12700" cmpd="sng">
+                      <a:noFill/>
+                      <a:prstDash val="solid"/>
+                    </a:lnTlToBr>
+                    <a:lnBlToTr w="12700" cmpd="sng">
+                      <a:noFill/>
+                      <a:prstDash val="solid"/>
+                    </a:lnBlToTr>
+                    <a:solidFill>
+                      <a:schemeClr val="bg1">
+                        <a:lumMod val="95000"/>
+                      </a:schemeClr>
+                    </a:solidFill>
+                  </a:tcPr>
+                </a:tc>
+                <a:tc>
+                  <a:txBody>
+                    <a:bodyPr/>
+                    <a:lstStyle/>
+                    <a:p>
+                      <a:r>
+                        <a:rPr lang="en-US" sz="1500" b="0" i="0" dirty="0">
+                          <a:solidFill>
+                            <a:schemeClr val="tx1"/>
+                          </a:solidFill>
+                          <a:latin typeface="GT Walsheim Trial Rg" pitchFamily="2" charset="77"/>
+                        </a:rPr>
+                        <a:t>~5%</a:t>
+                      </a:r>
+                    </a:p>
+                  </a:txBody>
+                  <a:tcPr>
+                    <a:lnL w="12700" cap="flat" cmpd="sng" algn="ctr">
+                      <a:noFill/>
+                      <a:prstDash val="solid"/>
+                      <a:round/>
+                      <a:headEnd type="none" w="med" len="med"/>
+                      <a:tailEnd type="none" w="med" len="med"/>
+                    </a:lnL>
+                    <a:lnR w="12700" cap="flat" cmpd="sng" algn="ctr">
+                      <a:noFill/>
+                      <a:prstDash val="solid"/>
+                      <a:round/>
+                      <a:headEnd type="none" w="med" len="med"/>
+                      <a:tailEnd type="none" w="med" len="med"/>
+                    </a:lnR>
+                    <a:lnT w="12700" cap="flat" cmpd="sng" algn="ctr">
+                      <a:noFill/>
+                      <a:prstDash val="solid"/>
+                      <a:round/>
+                      <a:headEnd type="none" w="med" len="med"/>
+                      <a:tailEnd type="none" w="med" len="med"/>
+                    </a:lnT>
+                    <a:lnB w="12700" cap="flat" cmpd="sng" algn="ctr">
+                      <a:noFill/>
+                      <a:prstDash val="solid"/>
+                      <a:round/>
+                      <a:headEnd type="none" w="med" len="med"/>
+                      <a:tailEnd type="none" w="med" len="med"/>
+                    </a:lnB>
+                    <a:lnTlToBr w="12700" cmpd="sng">
+                      <a:noFill/>
+                      <a:prstDash val="solid"/>
+                    </a:lnTlToBr>
+                    <a:lnBlToTr w="12700" cmpd="sng">
+                      <a:noFill/>
+                      <a:prstDash val="solid"/>
+                    </a:lnBlToTr>
+                    <a:solidFill>
+                      <a:schemeClr val="bg1">
+                        <a:lumMod val="95000"/>
+                      </a:schemeClr>
+                    </a:solidFill>
+                  </a:tcPr>
+                </a:tc>
+                <a:tc>
+                  <a:txBody>
+                    <a:bodyPr/>
+                    <a:lstStyle/>
+                    <a:p>
+                      <a:r>
+                        <a:rPr lang="en-US" sz="1500" b="0" i="0" dirty="0">
+                          <a:solidFill>
+                            <a:schemeClr val="tx1"/>
+                          </a:solidFill>
+                          <a:latin typeface="GT Walsheim Trial Rg" pitchFamily="2" charset="77"/>
+                        </a:rPr>
+                        <a:t>included</a:t>
+                      </a:r>
+                    </a:p>
+                  </a:txBody>
+                  <a:tcPr>
+                    <a:lnL w="12700" cap="flat" cmpd="sng" algn="ctr">
+                      <a:noFill/>
+                      <a:prstDash val="solid"/>
+                      <a:round/>
+                      <a:headEnd type="none" w="med" len="med"/>
+                      <a:tailEnd type="none" w="med" len="med"/>
+                    </a:lnL>
+                    <a:lnR w="12700" cap="flat" cmpd="sng" algn="ctr">
+                      <a:noFill/>
+                      <a:prstDash val="solid"/>
+                      <a:round/>
+                      <a:headEnd type="none" w="med" len="med"/>
+                      <a:tailEnd type="none" w="med" len="med"/>
+                    </a:lnR>
+                    <a:lnT w="12700" cap="flat" cmpd="sng" algn="ctr">
+                      <a:noFill/>
+                      <a:prstDash val="solid"/>
+                      <a:round/>
+                      <a:headEnd type="none" w="med" len="med"/>
+                      <a:tailEnd type="none" w="med" len="med"/>
+                    </a:lnT>
+                    <a:lnB w="12700" cap="flat" cmpd="sng" algn="ctr">
+                      <a:noFill/>
+                      <a:prstDash val="solid"/>
+                      <a:round/>
+                      <a:headEnd type="none" w="med" len="med"/>
+                      <a:tailEnd type="none" w="med" len="med"/>
+                    </a:lnB>
+                    <a:lnTlToBr w="12700" cmpd="sng">
+                      <a:noFill/>
+                      <a:prstDash val="solid"/>
+                    </a:lnTlToBr>
+                    <a:lnBlToTr w="12700" cmpd="sng">
+                      <a:noFill/>
+                      <a:prstDash val="solid"/>
+                    </a:lnBlToTr>
+                    <a:solidFill>
+                      <a:schemeClr val="bg1">
+                        <a:lumMod val="95000"/>
+                      </a:schemeClr>
+                    </a:solidFill>
+                  </a:tcPr>
+                </a:tc>
+                <a:extLst>
+                  <a:ext uri="{0D108BD9-81ED-4DB2-BD59-A6C34878D82A}">
+                    <a16:rowId xmlns:a16="http://schemas.microsoft.com/office/drawing/2014/main" val="1523425920"/>
+                  </a:ext>
+                </a:extLst>
+              </a:tr>
+              <a:tr h="573538">
+                <a:tc>
+                  <a:txBody>
+                    <a:bodyPr/>
+                    <a:lstStyle/>
+                    <a:p>
+                      <a:r>
+                        <a:rPr lang="en-US" sz="1500" b="0" i="0" dirty="0">
+                          <a:solidFill>
+                            <a:schemeClr val="tx1"/>
+                          </a:solidFill>
+                          <a:latin typeface="GT Walsheim Trial Rg" pitchFamily="2" charset="77"/>
+                        </a:rPr>
+                        <a:t>SDC (AV itself)</a:t>
+                      </a:r>
+                    </a:p>
+                  </a:txBody>
+                  <a:tcPr>
+                    <a:lnL w="12700" cap="flat" cmpd="sng" algn="ctr">
+                      <a:noFill/>
+                      <a:prstDash val="solid"/>
+                      <a:round/>
+                      <a:headEnd type="none" w="med" len="med"/>
+                      <a:tailEnd type="none" w="med" len="med"/>
+                    </a:lnL>
+                    <a:lnR w="12700" cap="flat" cmpd="sng" algn="ctr">
+                      <a:noFill/>
+                      <a:prstDash val="solid"/>
+                      <a:round/>
+                      <a:headEnd type="none" w="med" len="med"/>
+                      <a:tailEnd type="none" w="med" len="med"/>
+                    </a:lnR>
+                    <a:lnT w="12700" cap="flat" cmpd="sng" algn="ctr">
+                      <a:noFill/>
+                      <a:prstDash val="solid"/>
+                      <a:round/>
+                      <a:headEnd type="none" w="med" len="med"/>
+                      <a:tailEnd type="none" w="med" len="med"/>
+                    </a:lnT>
+                    <a:lnB w="12700" cap="flat" cmpd="sng" algn="ctr">
+                      <a:noFill/>
+                      <a:prstDash val="solid"/>
+                      <a:round/>
+                      <a:headEnd type="none" w="med" len="med"/>
+                      <a:tailEnd type="none" w="med" len="med"/>
+                    </a:lnB>
+                    <a:lnTlToBr w="12700" cmpd="sng">
+                      <a:noFill/>
+                      <a:prstDash val="solid"/>
+                    </a:lnTlToBr>
+                    <a:lnBlToTr w="12700" cmpd="sng">
+                      <a:noFill/>
+                      <a:prstDash val="solid"/>
+                    </a:lnBlToTr>
+                    <a:solidFill>
+                      <a:schemeClr val="bg1">
+                        <a:lumMod val="85000"/>
+                      </a:schemeClr>
+                    </a:solidFill>
+                  </a:tcPr>
+                </a:tc>
+                <a:tc>
+                  <a:txBody>
+                    <a:bodyPr/>
+                    <a:lstStyle/>
+                    <a:p>
+                      <a:r>
+                        <a:rPr lang="en-US" sz="1500" b="0" i="0" dirty="0">
+                          <a:solidFill>
+                            <a:schemeClr val="tx1"/>
+                          </a:solidFill>
+                          <a:latin typeface="GT Walsheim Trial Rg" pitchFamily="2" charset="77"/>
+                        </a:rPr>
+                        <a:t>removed</a:t>
+                      </a:r>
+                    </a:p>
+                  </a:txBody>
+                  <a:tcPr>
+                    <a:lnL w="12700" cap="flat" cmpd="sng" algn="ctr">
+                      <a:noFill/>
+                      <a:prstDash val="solid"/>
+                      <a:round/>
+                      <a:headEnd type="none" w="med" len="med"/>
+                      <a:tailEnd type="none" w="med" len="med"/>
+                    </a:lnL>
+                    <a:lnR w="12700" cap="flat" cmpd="sng" algn="ctr">
+                      <a:noFill/>
+                      <a:prstDash val="solid"/>
+                      <a:round/>
+                      <a:headEnd type="none" w="med" len="med"/>
+                      <a:tailEnd type="none" w="med" len="med"/>
+                    </a:lnR>
+                    <a:lnT w="12700" cap="flat" cmpd="sng" algn="ctr">
+                      <a:noFill/>
+                      <a:prstDash val="solid"/>
+                      <a:round/>
+                      <a:headEnd type="none" w="med" len="med"/>
+                      <a:tailEnd type="none" w="med" len="med"/>
+                    </a:lnT>
+                    <a:lnB w="12700" cap="flat" cmpd="sng" algn="ctr">
+                      <a:noFill/>
+                      <a:prstDash val="solid"/>
+                      <a:round/>
+                      <a:headEnd type="none" w="med" len="med"/>
+                      <a:tailEnd type="none" w="med" len="med"/>
+                    </a:lnB>
+                    <a:lnTlToBr w="12700" cmpd="sng">
+                      <a:noFill/>
+                      <a:prstDash val="solid"/>
+                    </a:lnTlToBr>
+                    <a:lnBlToTr w="12700" cmpd="sng">
+                      <a:noFill/>
+                      <a:prstDash val="solid"/>
+                    </a:lnBlToTr>
+                    <a:solidFill>
+                      <a:schemeClr val="bg1">
+                        <a:lumMod val="85000"/>
+                      </a:schemeClr>
+                    </a:solidFill>
+                  </a:tcPr>
+                </a:tc>
+                <a:tc>
+                  <a:txBody>
+                    <a:bodyPr/>
+                    <a:lstStyle/>
+                    <a:p>
+                      <a:r>
+                        <a:rPr lang="en-US" sz="1500" b="0" i="0" dirty="0">
+                          <a:solidFill>
+                            <a:schemeClr val="tx1"/>
+                          </a:solidFill>
+                          <a:latin typeface="GT Walsheim Trial Rg" pitchFamily="2" charset="77"/>
+                        </a:rPr>
+                        <a:t>excluded</a:t>
+                      </a:r>
+                    </a:p>
+                  </a:txBody>
+                  <a:tcPr>
+                    <a:lnL w="12700" cap="flat" cmpd="sng" algn="ctr">
+                      <a:noFill/>
+                      <a:prstDash val="solid"/>
+                      <a:round/>
+                      <a:headEnd type="none" w="med" len="med"/>
+                      <a:tailEnd type="none" w="med" len="med"/>
+                    </a:lnL>
+                    <a:lnR w="12700" cap="flat" cmpd="sng" algn="ctr">
+                      <a:noFill/>
+                      <a:prstDash val="solid"/>
+                      <a:round/>
+                      <a:headEnd type="none" w="med" len="med"/>
+                      <a:tailEnd type="none" w="med" len="med"/>
+                    </a:lnR>
+                    <a:lnT w="12700" cap="flat" cmpd="sng" algn="ctr">
+                      <a:noFill/>
+                      <a:prstDash val="solid"/>
+                      <a:round/>
+                      <a:headEnd type="none" w="med" len="med"/>
+                      <a:tailEnd type="none" w="med" len="med"/>
+                    </a:lnT>
+                    <a:lnB w="12700" cap="flat" cmpd="sng" algn="ctr">
+                      <a:noFill/>
+                      <a:prstDash val="solid"/>
+                      <a:round/>
+                      <a:headEnd type="none" w="med" len="med"/>
+                      <a:tailEnd type="none" w="med" len="med"/>
+                    </a:lnB>
+                    <a:lnTlToBr w="12700" cmpd="sng">
+                      <a:noFill/>
+                      <a:prstDash val="solid"/>
+                    </a:lnTlToBr>
+                    <a:lnBlToTr w="12700" cmpd="sng">
+                      <a:noFill/>
+                      <a:prstDash val="solid"/>
+                    </a:lnBlToTr>
+                    <a:solidFill>
+                      <a:schemeClr val="bg1">
+                        <a:lumMod val="85000"/>
+                      </a:schemeClr>
+                    </a:solidFill>
+                  </a:tcPr>
+                </a:tc>
+                <a:extLst>
+                  <a:ext uri="{0D108BD9-81ED-4DB2-BD59-A6C34878D82A}">
+                    <a16:rowId xmlns:a16="http://schemas.microsoft.com/office/drawing/2014/main" val="1062120210"/>
+                  </a:ext>
+                </a:extLst>
+              </a:tr>
+            </a:tbl>
+          </a:graphicData>
+        </a:graphic>
+      </p:graphicFrame>
+      <p:pic>
+        <p:nvPicPr>
+          <p:cNvPr id="13" name="Picture 12">
+            <a:extLst>
+              <a:ext uri="{FF2B5EF4-FFF2-40B4-BE49-F238E27FC236}">
+                <a16:creationId xmlns:a16="http://schemas.microsoft.com/office/drawing/2014/main" id="{9505BAAA-21BA-2316-4D5C-506901CAEEDA}"/>
+              </a:ext>
+            </a:extLst>
+          </p:cNvPr>
+          <p:cNvPicPr>
+            <a:picLocks noChangeAspect="1"/>
+          </p:cNvPicPr>
+          <p:nvPr/>
+        </p:nvPicPr>
+        <p:blipFill>
+          <a:blip r:embed="rId3"/>
+          <a:stretch>
+            <a:fillRect/>
+          </a:stretch>
+        </p:blipFill>
+        <p:spPr>
+          <a:xfrm>
+            <a:off x="6342984" y="1583032"/>
+            <a:ext cx="5254264" cy="4503655"/>
+          </a:xfrm>
+          <a:prstGeom prst="rect">
+            <a:avLst/>
+          </a:prstGeom>
+        </p:spPr>
+      </p:pic>
+      <p:pic>
+        <p:nvPicPr>
+          <p:cNvPr id="14" name="Picture 2" descr="Waymo Logo">
+            <a:extLst>
+              <a:ext uri="{FF2B5EF4-FFF2-40B4-BE49-F238E27FC236}">
+                <a16:creationId xmlns:a16="http://schemas.microsoft.com/office/drawing/2014/main" id="{0AB81574-B623-A466-0C44-7AD8EF55DE3E}"/>
+              </a:ext>
+            </a:extLst>
+          </p:cNvPr>
+          <p:cNvPicPr>
+            <a:picLocks noChangeAspect="1" noChangeArrowheads="1"/>
+          </p:cNvPicPr>
+          <p:nvPr/>
+        </p:nvPicPr>
+        <p:blipFill>
+          <a:blip r:embed="rId4">
+            <a:extLst>
+              <a:ext uri="{28A0092B-C50C-407E-A947-70E740481C1C}">
+                <a14:useLocalDpi xmlns:a14="http://schemas.microsoft.com/office/drawing/2010/main" val="0"/>
+              </a:ext>
+            </a:extLst>
+          </a:blip>
+          <a:srcRect/>
+          <a:stretch>
+            <a:fillRect/>
+          </a:stretch>
+        </p:blipFill>
+        <p:spPr bwMode="auto">
+          <a:xfrm>
+            <a:off x="10795378" y="425703"/>
+            <a:ext cx="782903" cy="782903"/>
+          </a:xfrm>
+          <a:prstGeom prst="rect">
+            <a:avLst/>
+          </a:prstGeom>
+          <a:noFill/>
+          <a:extLst>
+            <a:ext uri="{909E8E84-426E-40DD-AFC4-6F175D3DCCD1}">
+              <a14:hiddenFill xmlns:a14="http://schemas.microsoft.com/office/drawing/2010/main">
+                <a:solidFill>
+                  <a:srgbClr val="FFFFFF"/>
+                </a:solidFill>
+              </a14:hiddenFill>
+            </a:ext>
+          </a:extLst>
+        </p:spPr>
+      </p:pic>
+      <p:sp>
+        <p:nvSpPr>
+          <p:cNvPr id="11" name="Freeform 10">
+            <a:extLst>
+              <a:ext uri="{FF2B5EF4-FFF2-40B4-BE49-F238E27FC236}">
+                <a16:creationId xmlns:a16="http://schemas.microsoft.com/office/drawing/2014/main" id="{00515834-BC50-0B18-62CA-A70C9A9333E0}"/>
               </a:ext>
             </a:extLst>
           </p:cNvPr>
@@ -21264,9 +22873,9 @@
           <p:nvPr/>
         </p:nvSpPr>
         <p:spPr>
-          <a:xfrm>
-            <a:off x="-6144266" y="5082576"/>
-            <a:ext cx="18800064" cy="7187173"/>
+          <a:xfrm rot="7893553">
+            <a:off x="-317208" y="-322814"/>
+            <a:ext cx="18800064" cy="6958229"/>
           </a:xfrm>
           <a:custGeom>
             <a:avLst/>
@@ -21312,8 +22921,8 @@
           <a:noFill/>
           <a:ln w="635000">
             <a:solidFill>
-              <a:schemeClr val="bg1">
-                <a:alpha val="10000"/>
+              <a:schemeClr val="tx1">
+                <a:alpha val="3000"/>
               </a:schemeClr>
             </a:solidFill>
           </a:ln>
@@ -21356,8 +22965,8 @@
           <p:nvPr/>
         </p:nvSpPr>
         <p:spPr>
-          <a:xfrm rot="724800">
-            <a:off x="-2872042" y="3203933"/>
+          <a:xfrm rot="967553">
+            <a:off x="-8289652" y="4450746"/>
             <a:ext cx="18325767" cy="1340166"/>
           </a:xfrm>
           <a:custGeom>
@@ -21415,16 +23024,16 @@
           <a:ln w="762000" cap="flat">
             <a:gradFill flip="none" rotWithShape="1">
               <a:gsLst>
-                <a:gs pos="69000">
+                <a:gs pos="49000">
                   <a:srgbClr val="0078FF"/>
                 </a:gs>
                 <a:gs pos="0">
                   <a:srgbClr val="0078FF"/>
                 </a:gs>
-                <a:gs pos="29000">
+                <a:gs pos="21000">
                   <a:srgbClr val="0078FF"/>
                 </a:gs>
-                <a:gs pos="46000">
+                <a:gs pos="36000">
                   <a:srgbClr val="0078FF"/>
                 </a:gs>
                 <a:gs pos="77000">
@@ -21465,55 +23074,155 @@
           </a:p>
         </p:txBody>
       </p:sp>
-      <p:sp>
-        <p:nvSpPr>
-          <p:cNvPr id="4" name="Title 3">
+    </p:spTree>
+    <p:extLst>
+      <p:ext uri="{BB962C8B-B14F-4D97-AF65-F5344CB8AC3E}">
+        <p14:creationId xmlns:p14="http://schemas.microsoft.com/office/powerpoint/2010/main" val="2414567693"/>
+      </p:ext>
+    </p:extLst>
+  </p:cSld>
+  <p:clrMapOvr>
+    <a:masterClrMapping/>
+  </p:clrMapOvr>
+</p:sld>
+</file>
+
+<file path=ppt/slides/slide7.xml><?xml version="1.0" encoding="utf-8"?>
+<p:sld xmlns:a="http://schemas.openxmlformats.org/drawingml/2006/main" xmlns:r="http://schemas.openxmlformats.org/officeDocument/2006/relationships" xmlns:p="http://schemas.openxmlformats.org/presentationml/2006/main">
+  <p:cSld>
+    <p:spTree>
+      <p:nvGrpSpPr>
+        <p:cNvPr id="1" name="">
+          <a:extLst>
+            <a:ext uri="{FF2B5EF4-FFF2-40B4-BE49-F238E27FC236}">
+              <a16:creationId xmlns:a16="http://schemas.microsoft.com/office/drawing/2014/main" id="{684AF451-3682-FF2C-D616-3F71F91C5AC6}"/>
+            </a:ext>
+          </a:extLst>
+        </p:cNvPr>
+        <p:cNvGrpSpPr/>
+        <p:nvPr/>
+      </p:nvGrpSpPr>
+      <p:grpSpPr>
+        <a:xfrm>
+          <a:off x="0" y="0"/>
+          <a:ext cx="0" cy="0"/>
+          <a:chOff x="0" y="0"/>
+          <a:chExt cx="0" cy="0"/>
+        </a:xfrm>
+      </p:grpSpPr>
+      <p:pic>
+        <p:nvPicPr>
+          <p:cNvPr id="6" name="Picture 2" descr="Waymo Logo">
             <a:extLst>
               <a:ext uri="{FF2B5EF4-FFF2-40B4-BE49-F238E27FC236}">
-                <a16:creationId xmlns:a16="http://schemas.microsoft.com/office/drawing/2014/main" id="{03C362FE-26C6-9E59-253C-0E8E33DFB89E}"/>
+                <a16:creationId xmlns:a16="http://schemas.microsoft.com/office/drawing/2014/main" id="{73A17D98-85BB-1349-8904-4995BA7F417F}"/>
               </a:ext>
             </a:extLst>
           </p:cNvPr>
-          <p:cNvSpPr>
-            <a:spLocks noGrp="1"/>
+          <p:cNvPicPr>
+            <a:picLocks noChangeAspect="1" noChangeArrowheads="1"/>
+          </p:cNvPicPr>
+          <p:nvPr/>
+        </p:nvPicPr>
+        <p:blipFill>
+          <a:blip r:embed="rId3">
+            <a:extLst>
+              <a:ext uri="{28A0092B-C50C-407E-A947-70E740481C1C}">
+                <a14:useLocalDpi xmlns:a14="http://schemas.microsoft.com/office/drawing/2010/main" val="0"/>
+              </a:ext>
+            </a:extLst>
+          </a:blip>
+          <a:srcRect/>
+          <a:stretch>
+            <a:fillRect/>
+          </a:stretch>
+        </p:blipFill>
+        <p:spPr bwMode="auto">
+          <a:xfrm>
+            <a:off x="10795378" y="425703"/>
+            <a:ext cx="782903" cy="782903"/>
+          </a:xfrm>
+          <a:prstGeom prst="rect">
+            <a:avLst/>
+          </a:prstGeom>
+          <a:noFill/>
+          <a:extLst>
+            <a:ext uri="{909E8E84-426E-40DD-AFC4-6F175D3DCCD1}">
+              <a14:hiddenFill xmlns:a14="http://schemas.microsoft.com/office/drawing/2010/main">
+                <a:solidFill>
+                  <a:srgbClr val="FFFFFF"/>
+                </a:solidFill>
+              </a14:hiddenFill>
+            </a:ext>
+          </a:extLst>
+        </p:spPr>
+      </p:pic>
+      <p:sp>
+        <p:nvSpPr>
+          <p:cNvPr id="9" name="Title 3">
+            <a:extLst>
+              <a:ext uri="{FF2B5EF4-FFF2-40B4-BE49-F238E27FC236}">
+                <a16:creationId xmlns:a16="http://schemas.microsoft.com/office/drawing/2014/main" id="{048C4A0F-704A-1B42-09A0-E1CEA1F85F1A}"/>
+              </a:ext>
+            </a:extLst>
+          </p:cNvPr>
+          <p:cNvSpPr txBox="1">
+            <a:spLocks/>
           </p:cNvSpPr>
-          <p:nvPr>
-            <p:ph type="ctrTitle"/>
-          </p:nvPr>
+          <p:nvPr/>
         </p:nvSpPr>
         <p:spPr>
           <a:xfrm>
             <a:off x="716478" y="447821"/>
-            <a:ext cx="3347522" cy="369333"/>
+            <a:ext cx="2406732" cy="369333"/>
           </a:xfrm>
+          <a:prstGeom prst="rect">
+            <a:avLst/>
+          </a:prstGeom>
         </p:spPr>
         <p:txBody>
-          <a:bodyPr>
+          <a:bodyPr vert="horz" lIns="91440" tIns="45720" rIns="91440" bIns="45720" rtlCol="0" anchor="b">
             <a:normAutofit/>
           </a:bodyPr>
-          <a:lstStyle/>
+          <a:lstStyle>
+            <a:lvl1pPr algn="ctr" defTabSz="914400" rtl="0" eaLnBrk="1" latinLnBrk="0" hangingPunct="1">
+              <a:lnSpc>
+                <a:spcPct val="90000"/>
+              </a:lnSpc>
+              <a:spcBef>
+                <a:spcPct val="0"/>
+              </a:spcBef>
+              <a:buNone/>
+              <a:defRPr sz="6000" kern="1200">
+                <a:solidFill>
+                  <a:schemeClr val="tx1"/>
+                </a:solidFill>
+                <a:latin typeface="+mj-lt"/>
+                <a:ea typeface="+mj-ea"/>
+                <a:cs typeface="+mj-cs"/>
+              </a:defRPr>
+            </a:lvl1pPr>
+          </a:lstStyle>
           <a:p>
             <a:pPr algn="l"/>
             <a:r>
               <a:rPr lang="en-US" sz="1500" dirty="0">
                 <a:solidFill>
-                  <a:schemeClr val="bg1">
-                    <a:lumMod val="50000"/>
-                  </a:schemeClr>
+                  <a:srgbClr val="989DA2"/>
                 </a:solidFill>
                 <a:latin typeface="GT Walsheim Trial Rg" pitchFamily="2" charset="77"/>
               </a:rPr>
-              <a:t>DATASET &amp; PIPLINE [AGENT TYPE]</a:t>
+              <a:t>DATASET STATISTICS</a:t>
             </a:r>
           </a:p>
         </p:txBody>
       </p:sp>
       <p:sp>
         <p:nvSpPr>
-          <p:cNvPr id="8" name="TextBox 7">
+          <p:cNvPr id="11" name="TextBox 10">
             <a:extLst>
               <a:ext uri="{FF2B5EF4-FFF2-40B4-BE49-F238E27FC236}">
-                <a16:creationId xmlns:a16="http://schemas.microsoft.com/office/drawing/2014/main" id="{AA0B286F-ACC4-E15E-FE10-F81A14DF3948}"/>
+                <a16:creationId xmlns:a16="http://schemas.microsoft.com/office/drawing/2014/main" id="{B6033FA2-EB1F-F693-6FA4-7BB8813D9CDA}"/>
               </a:ext>
             </a:extLst>
           </p:cNvPr>
@@ -21522,8 +23231,8 @@
         </p:nvSpPr>
         <p:spPr>
           <a:xfrm>
-            <a:off x="716477" y="952090"/>
-            <a:ext cx="7346867" cy="630942"/>
+            <a:off x="716478" y="952090"/>
+            <a:ext cx="6097978" cy="630942"/>
           </a:xfrm>
           <a:prstGeom prst="rect">
             <a:avLst/>
@@ -21538,22 +23247,19 @@
           <a:p>
             <a:r>
               <a:rPr lang="en-US" sz="3500" dirty="0">
-                <a:solidFill>
-                  <a:schemeClr val="bg1"/>
-                </a:solidFill>
                 <a:latin typeface="GT Walsheim Trial Rg" pitchFamily="2" charset="77"/>
               </a:rPr>
-              <a:t>Waymo Open Motion Dataset v1.3.1</a:t>
+              <a:t>What the Data Looks Like</a:t>
             </a:r>
           </a:p>
         </p:txBody>
       </p:sp>
       <p:graphicFrame>
         <p:nvGraphicFramePr>
-          <p:cNvPr id="3" name="Table 2">
+          <p:cNvPr id="12" name="Table 11">
             <a:extLst>
               <a:ext uri="{FF2B5EF4-FFF2-40B4-BE49-F238E27FC236}">
-                <a16:creationId xmlns:a16="http://schemas.microsoft.com/office/drawing/2014/main" id="{6E5ED46D-9A9D-45B4-50C0-E4B617433E8C}"/>
+                <a16:creationId xmlns:a16="http://schemas.microsoft.com/office/drawing/2014/main" id="{060EF4B2-4504-8D76-A4E4-69FA63C93789}"/>
               </a:ext>
             </a:extLst>
           </p:cNvPr>
@@ -21563,7 +23269,7 @@
           <p:nvPr>
             <p:extLst>
               <p:ext uri="{D42A27DB-BD31-4B8C-83A1-F6EECF244321}">
-                <p14:modId xmlns:p14="http://schemas.microsoft.com/office/powerpoint/2010/main" val="3777935987"/>
+                <p14:modId xmlns:p14="http://schemas.microsoft.com/office/powerpoint/2010/main" val="4168928733"/>
               </p:ext>
             </p:extLst>
           </p:nvPr>
@@ -21672,7 +23378,7 @@
                           </a:solidFill>
                           <a:latin typeface="GT Walsheim Trial Rg" pitchFamily="2" charset="77"/>
                         </a:rPr>
-                        <a:t>Count (raw)</a:t>
+                        <a:t>Share</a:t>
                       </a:r>
                     </a:p>
                   </a:txBody>
@@ -22534,220 +24240,6 @@
           </a:graphicData>
         </a:graphic>
       </p:graphicFrame>
-      <p:sp>
-        <p:nvSpPr>
-          <p:cNvPr id="6" name="TextBox 5">
-            <a:extLst>
-              <a:ext uri="{FF2B5EF4-FFF2-40B4-BE49-F238E27FC236}">
-                <a16:creationId xmlns:a16="http://schemas.microsoft.com/office/drawing/2014/main" id="{63141582-FD1E-F62F-4490-D627EFD530A0}"/>
-              </a:ext>
-            </a:extLst>
-          </p:cNvPr>
-          <p:cNvSpPr txBox="1"/>
-          <p:nvPr/>
-        </p:nvSpPr>
-        <p:spPr>
-          <a:xfrm>
-            <a:off x="624468" y="5082576"/>
-            <a:ext cx="6676929" cy="1015663"/>
-          </a:xfrm>
-          <a:prstGeom prst="rect">
-            <a:avLst/>
-          </a:prstGeom>
-          <a:noFill/>
-        </p:spPr>
-        <p:txBody>
-          <a:bodyPr wrap="square">
-            <a:spAutoFit/>
-          </a:bodyPr>
-          <a:lstStyle/>
-          <a:p>
-            <a:r>
-              <a:rPr lang="en-US" sz="1500" dirty="0">
-                <a:solidFill>
-                  <a:schemeClr val="bg1"/>
-                </a:solidFill>
-                <a:latin typeface="GT Walsheim Trial Md" pitchFamily="2" charset="77"/>
-              </a:rPr>
-              <a:t>Features extracted: </a:t>
-            </a:r>
-            <a:r>
-              <a:rPr lang="en-US" sz="1500" dirty="0">
-                <a:solidFill>
-                  <a:schemeClr val="bg1"/>
-                </a:solidFill>
-                <a:latin typeface="GT Walsheim Trial Lt" pitchFamily="2" charset="77"/>
-              </a:rPr>
-              <a:t>Speed, Acceleration, Yaw Rate,</a:t>
-            </a:r>
-          </a:p>
-          <a:p>
-            <a:r>
-              <a:rPr lang="en-US" sz="1500" dirty="0" err="1">
-                <a:solidFill>
-                  <a:schemeClr val="bg1"/>
-                </a:solidFill>
-                <a:latin typeface="GT Walsheim Trial Lt" pitchFamily="2" charset="77"/>
-              </a:rPr>
-              <a:t>Vel_X</a:t>
-            </a:r>
-            <a:r>
-              <a:rPr lang="en-US" sz="1500" dirty="0">
-                <a:solidFill>
-                  <a:schemeClr val="bg1"/>
-                </a:solidFill>
-                <a:latin typeface="GT Walsheim Trial Lt" pitchFamily="2" charset="77"/>
-              </a:rPr>
-              <a:t>, </a:t>
-            </a:r>
-            <a:r>
-              <a:rPr lang="en-US" sz="1500" dirty="0" err="1">
-                <a:solidFill>
-                  <a:schemeClr val="bg1"/>
-                </a:solidFill>
-                <a:latin typeface="GT Walsheim Trial Lt" pitchFamily="2" charset="77"/>
-              </a:rPr>
-              <a:t>Vel_Y</a:t>
-            </a:r>
-            <a:endParaRPr lang="en-US" sz="1500" dirty="0">
-              <a:solidFill>
-                <a:schemeClr val="bg1"/>
-              </a:solidFill>
-              <a:latin typeface="GT Walsheim Trial Lt" pitchFamily="2" charset="77"/>
-            </a:endParaRPr>
-          </a:p>
-          <a:p>
-            <a:r>
-              <a:rPr lang="en-US" sz="1500" dirty="0">
-                <a:solidFill>
-                  <a:schemeClr val="bg1"/>
-                </a:solidFill>
-                <a:latin typeface="GT Walsheim Trial Lt" pitchFamily="2" charset="77"/>
-              </a:rPr>
-              <a:t>Length, Width</a:t>
-            </a:r>
-          </a:p>
-          <a:p>
-            <a:r>
-              <a:rPr lang="en-US" sz="1500" dirty="0">
-                <a:solidFill>
-                  <a:schemeClr val="bg1"/>
-                </a:solidFill>
-                <a:latin typeface="GT Walsheim Trial Lt" pitchFamily="2" charset="77"/>
-              </a:rPr>
-              <a:t>FutureDist_5s</a:t>
-            </a:r>
-          </a:p>
-        </p:txBody>
-      </p:sp>
-      <p:pic>
-        <p:nvPicPr>
-          <p:cNvPr id="2" name="Picture 6" descr="Our Trademarks">
-            <a:extLst>
-              <a:ext uri="{FF2B5EF4-FFF2-40B4-BE49-F238E27FC236}">
-                <a16:creationId xmlns:a16="http://schemas.microsoft.com/office/drawing/2014/main" id="{0E3246AA-DF2A-798A-F5B3-ED4A58B466E9}"/>
-              </a:ext>
-            </a:extLst>
-          </p:cNvPr>
-          <p:cNvPicPr>
-            <a:picLocks noChangeAspect="1" noChangeArrowheads="1"/>
-          </p:cNvPicPr>
-          <p:nvPr/>
-        </p:nvPicPr>
-        <p:blipFill>
-          <a:blip r:embed="rId3">
-            <a:extLst>
-              <a:ext uri="{28A0092B-C50C-407E-A947-70E740481C1C}">
-                <a14:useLocalDpi xmlns:a14="http://schemas.microsoft.com/office/drawing/2010/main" val="0"/>
-              </a:ext>
-            </a:extLst>
-          </a:blip>
-          <a:srcRect/>
-          <a:stretch>
-            <a:fillRect/>
-          </a:stretch>
-        </p:blipFill>
-        <p:spPr bwMode="auto">
-          <a:xfrm>
-            <a:off x="10780831" y="411156"/>
-            <a:ext cx="811996" cy="811996"/>
-          </a:xfrm>
-          <a:prstGeom prst="rect">
-            <a:avLst/>
-          </a:prstGeom>
-          <a:noFill/>
-          <a:extLst>
-            <a:ext uri="{909E8E84-426E-40DD-AFC4-6F175D3DCCD1}">
-              <a14:hiddenFill xmlns:a14="http://schemas.microsoft.com/office/drawing/2010/main">
-                <a:solidFill>
-                  <a:srgbClr val="FFFFFF"/>
-                </a:solidFill>
-              </a14:hiddenFill>
-            </a:ext>
-          </a:extLst>
-        </p:spPr>
-      </p:pic>
-    </p:spTree>
-    <p:extLst>
-      <p:ext uri="{BB962C8B-B14F-4D97-AF65-F5344CB8AC3E}">
-        <p14:creationId xmlns:p14="http://schemas.microsoft.com/office/powerpoint/2010/main" val="2414567693"/>
-      </p:ext>
-    </p:extLst>
-  </p:cSld>
-  <p:clrMapOvr>
-    <a:masterClrMapping/>
-  </p:clrMapOvr>
-</p:sld>
-</file>
-
-<file path=ppt/slides/slide7.xml><?xml version="1.0" encoding="utf-8"?>
-<p:sld xmlns:a="http://schemas.openxmlformats.org/drawingml/2006/main" xmlns:r="http://schemas.openxmlformats.org/officeDocument/2006/relationships" xmlns:p="http://schemas.openxmlformats.org/presentationml/2006/main" show="0">
-  <p:cSld>
-    <p:spTree>
-      <p:nvGrpSpPr>
-        <p:cNvPr id="1" name="">
-          <a:extLst>
-            <a:ext uri="{FF2B5EF4-FFF2-40B4-BE49-F238E27FC236}">
-              <a16:creationId xmlns:a16="http://schemas.microsoft.com/office/drawing/2014/main" id="{684AF451-3682-FF2C-D616-3F71F91C5AC6}"/>
-            </a:ext>
-          </a:extLst>
-        </p:cNvPr>
-        <p:cNvGrpSpPr/>
-        <p:nvPr/>
-      </p:nvGrpSpPr>
-      <p:grpSpPr>
-        <a:xfrm>
-          <a:off x="0" y="0"/>
-          <a:ext cx="0" cy="0"/>
-          <a:chOff x="0" y="0"/>
-          <a:chExt cx="0" cy="0"/>
-        </a:xfrm>
-      </p:grpSpPr>
-      <p:sp>
-        <p:nvSpPr>
-          <p:cNvPr id="3" name="Title 2">
-            <a:extLst>
-              <a:ext uri="{FF2B5EF4-FFF2-40B4-BE49-F238E27FC236}">
-                <a16:creationId xmlns:a16="http://schemas.microsoft.com/office/drawing/2014/main" id="{CE7B1E02-7E04-CB0C-3314-A673C2BD6DEC}"/>
-              </a:ext>
-            </a:extLst>
-          </p:cNvPr>
-          <p:cNvSpPr>
-            <a:spLocks noGrp="1"/>
-          </p:cNvSpPr>
-          <p:nvPr>
-            <p:ph type="ctrTitle"/>
-          </p:nvPr>
-        </p:nvSpPr>
-        <p:spPr/>
-        <p:txBody>
-          <a:bodyPr/>
-          <a:lstStyle/>
-          <a:p>
-            <a:endParaRPr lang="en-US"/>
-          </a:p>
-        </p:txBody>
-      </p:sp>
     </p:spTree>
     <p:extLst>
       <p:ext uri="{BB962C8B-B14F-4D97-AF65-F5344CB8AC3E}">

--- a/docs/presentation/Unsupervised Statistical Learning for Kinematic Anomaly Detection in Autonomous Driving Scenarios.pptx
+++ b/docs/presentation/Unsupervised Statistical Learning for Kinematic Anomaly Detection in Autonomous Driving Scenarios.pptx
@@ -14,7 +14,7 @@
     <p:sldId id="260" r:id="rId5"/>
     <p:sldId id="262" r:id="rId6"/>
     <p:sldId id="263" r:id="rId7"/>
-    <p:sldId id="264" r:id="rId8"/>
+    <p:sldId id="273" r:id="rId8"/>
     <p:sldId id="272" r:id="rId9"/>
     <p:sldId id="265" r:id="rId10"/>
     <p:sldId id="266" r:id="rId11"/>
@@ -132,7 +132,7 @@
 <file path=ppt/revisionInfo.xml><?xml version="1.0" encoding="utf-8"?>
 <p1510:revInfo xmlns:a="http://schemas.openxmlformats.org/drawingml/2006/main" xmlns:r="http://schemas.openxmlformats.org/officeDocument/2006/relationships" xmlns:p1510="http://schemas.microsoft.com/office/powerpoint/2015/10/main">
   <p1510:revLst>
-    <p1510:client id="{E91D200D-BFFE-DF45-BD3E-DC36CCF88744}" v="57" dt="2026-04-12T03:18:04.601"/>
+    <p1510:client id="{E91D200D-BFFE-DF45-BD3E-DC36CCF88744}" v="61" dt="2026-04-12T03:20:01.662"/>
   </p1510:revLst>
 </p1510:revInfo>
 </file>
@@ -141,8 +141,8 @@
 <pc:chgInfo xmlns:a="http://schemas.openxmlformats.org/drawingml/2006/main" xmlns:r="http://schemas.openxmlformats.org/officeDocument/2006/relationships" xmlns:ac="http://schemas.microsoft.com/office/drawing/2013/main/command" xmlns:pc="http://schemas.microsoft.com/office/powerpoint/2013/main/command">
   <pc:docChgLst>
     <pc:chgData name="Stepanov, Pavel Aleksandrovich" userId="b85f6bca-230c-483e-a25b-e13e873626fd" providerId="ADAL" clId="{AB235781-41D1-50B9-86EA-51A98A5F500A}"/>
-    <pc:docChg chg="undo redo custSel addSld modSld">
-      <pc:chgData name="Stepanov, Pavel Aleksandrovich" userId="b85f6bca-230c-483e-a25b-e13e873626fd" providerId="ADAL" clId="{AB235781-41D1-50B9-86EA-51A98A5F500A}" dt="2026-04-12T03:18:07.237" v="432" actId="1076"/>
+    <pc:docChg chg="undo redo custSel addSld delSld modSld">
+      <pc:chgData name="Stepanov, Pavel Aleksandrovich" userId="b85f6bca-230c-483e-a25b-e13e873626fd" providerId="ADAL" clId="{AB235781-41D1-50B9-86EA-51A98A5F500A}" dt="2026-04-12T03:20:28.396" v="474" actId="1076"/>
       <pc:docMkLst>
         <pc:docMk/>
       </pc:docMkLst>
@@ -254,13 +254,13 @@
         </pc:spChg>
       </pc:sldChg>
       <pc:sldChg chg="addSp delSp modSp mod setBg modNotesTx">
-        <pc:chgData name="Stepanov, Pavel Aleksandrovich" userId="b85f6bca-230c-483e-a25b-e13e873626fd" providerId="ADAL" clId="{AB235781-41D1-50B9-86EA-51A98A5F500A}" dt="2026-04-12T03:18:07.237" v="432" actId="1076"/>
+        <pc:chgData name="Stepanov, Pavel Aleksandrovich" userId="b85f6bca-230c-483e-a25b-e13e873626fd" providerId="ADAL" clId="{AB235781-41D1-50B9-86EA-51A98A5F500A}" dt="2026-04-12T03:19:45.517" v="461" actId="20577"/>
         <pc:sldMkLst>
           <pc:docMk/>
           <pc:sldMk cId="2414567693" sldId="263"/>
         </pc:sldMkLst>
         <pc:spChg chg="mod">
-          <ac:chgData name="Stepanov, Pavel Aleksandrovich" userId="b85f6bca-230c-483e-a25b-e13e873626fd" providerId="ADAL" clId="{AB235781-41D1-50B9-86EA-51A98A5F500A}" dt="2026-04-12T03:10:36.616" v="307" actId="207"/>
+          <ac:chgData name="Stepanov, Pavel Aleksandrovich" userId="b85f6bca-230c-483e-a25b-e13e873626fd" providerId="ADAL" clId="{AB235781-41D1-50B9-86EA-51A98A5F500A}" dt="2026-04-12T03:19:45.517" v="461" actId="20577"/>
           <ac:spMkLst>
             <pc:docMk/>
             <pc:sldMk cId="2414567693" sldId="263"/>
@@ -364,8 +364,8 @@
           </ac:picMkLst>
         </pc:picChg>
       </pc:sldChg>
-      <pc:sldChg chg="addSp delSp modSp mod modShow modNotesTx">
-        <pc:chgData name="Stepanov, Pavel Aleksandrovich" userId="b85f6bca-230c-483e-a25b-e13e873626fd" providerId="ADAL" clId="{AB235781-41D1-50B9-86EA-51A98A5F500A}" dt="2026-04-12T02:51:55.024" v="225" actId="20577"/>
+      <pc:sldChg chg="addSp delSp modSp del mod modShow modNotesTx">
+        <pc:chgData name="Stepanov, Pavel Aleksandrovich" userId="b85f6bca-230c-483e-a25b-e13e873626fd" providerId="ADAL" clId="{AB235781-41D1-50B9-86EA-51A98A5F500A}" dt="2026-04-12T03:18:40.014" v="433" actId="2696"/>
         <pc:sldMkLst>
           <pc:docMk/>
           <pc:sldMk cId="2606525707" sldId="264"/>
@@ -667,6 +667,69 @@
           </ac:spMkLst>
         </pc:spChg>
       </pc:sldChg>
+      <pc:sldChg chg="addSp delSp modSp add mod setBg">
+        <pc:chgData name="Stepanov, Pavel Aleksandrovich" userId="b85f6bca-230c-483e-a25b-e13e873626fd" providerId="ADAL" clId="{AB235781-41D1-50B9-86EA-51A98A5F500A}" dt="2026-04-12T03:20:28.396" v="474" actId="1076"/>
+        <pc:sldMkLst>
+          <pc:docMk/>
+          <pc:sldMk cId="1281361301" sldId="273"/>
+        </pc:sldMkLst>
+        <pc:spChg chg="mod">
+          <ac:chgData name="Stepanov, Pavel Aleksandrovich" userId="b85f6bca-230c-483e-a25b-e13e873626fd" providerId="ADAL" clId="{AB235781-41D1-50B9-86EA-51A98A5F500A}" dt="2026-04-12T03:19:37.455" v="452" actId="20577"/>
+          <ac:spMkLst>
+            <pc:docMk/>
+            <pc:sldMk cId="1281361301" sldId="273"/>
+            <ac:spMk id="4" creationId="{3BC7CBD6-37D5-6E4F-C6C3-1A6035A75370}"/>
+          </ac:spMkLst>
+        </pc:spChg>
+        <pc:spChg chg="add mod">
+          <ac:chgData name="Stepanov, Pavel Aleksandrovich" userId="b85f6bca-230c-483e-a25b-e13e873626fd" providerId="ADAL" clId="{AB235781-41D1-50B9-86EA-51A98A5F500A}" dt="2026-04-12T03:20:28.396" v="474" actId="1076"/>
+          <ac:spMkLst>
+            <pc:docMk/>
+            <pc:sldMk cId="1281361301" sldId="273"/>
+            <ac:spMk id="6" creationId="{B02F38D1-095A-4D26-04B1-8A6E8A730D5B}"/>
+          </ac:spMkLst>
+        </pc:spChg>
+        <pc:spChg chg="mod">
+          <ac:chgData name="Stepanov, Pavel Aleksandrovich" userId="b85f6bca-230c-483e-a25b-e13e873626fd" providerId="ADAL" clId="{AB235781-41D1-50B9-86EA-51A98A5F500A}" dt="2026-04-12T03:20:00.882" v="464" actId="166"/>
+          <ac:spMkLst>
+            <pc:docMk/>
+            <pc:sldMk cId="1281361301" sldId="273"/>
+            <ac:spMk id="11" creationId="{FAECF00B-BAAD-8062-AE21-7865670210D8}"/>
+          </ac:spMkLst>
+        </pc:spChg>
+        <pc:spChg chg="del">
+          <ac:chgData name="Stepanov, Pavel Aleksandrovich" userId="b85f6bca-230c-483e-a25b-e13e873626fd" providerId="ADAL" clId="{AB235781-41D1-50B9-86EA-51A98A5F500A}" dt="2026-04-12T03:19:54.452" v="462" actId="478"/>
+          <ac:spMkLst>
+            <pc:docMk/>
+            <pc:sldMk cId="1281361301" sldId="273"/>
+            <ac:spMk id="24" creationId="{4199E7C9-C651-748D-B448-AF87E6E635B2}"/>
+          </ac:spMkLst>
+        </pc:spChg>
+        <pc:graphicFrameChg chg="del">
+          <ac:chgData name="Stepanov, Pavel Aleksandrovich" userId="b85f6bca-230c-483e-a25b-e13e873626fd" providerId="ADAL" clId="{AB235781-41D1-50B9-86EA-51A98A5F500A}" dt="2026-04-12T03:19:15.888" v="435" actId="478"/>
+          <ac:graphicFrameMkLst>
+            <pc:docMk/>
+            <pc:sldMk cId="1281361301" sldId="273"/>
+            <ac:graphicFrameMk id="3" creationId="{0A47DA39-5F6F-5D5E-07F9-E8C3F200C9FB}"/>
+          </ac:graphicFrameMkLst>
+        </pc:graphicFrameChg>
+        <pc:picChg chg="add mod">
+          <ac:chgData name="Stepanov, Pavel Aleksandrovich" userId="b85f6bca-230c-483e-a25b-e13e873626fd" providerId="ADAL" clId="{AB235781-41D1-50B9-86EA-51A98A5F500A}" dt="2026-04-12T03:19:24.909" v="439" actId="1076"/>
+          <ac:picMkLst>
+            <pc:docMk/>
+            <pc:sldMk cId="1281361301" sldId="273"/>
+            <ac:picMk id="5" creationId="{4512D806-F24A-215A-2C44-C03E07EBCB16}"/>
+          </ac:picMkLst>
+        </pc:picChg>
+        <pc:picChg chg="del">
+          <ac:chgData name="Stepanov, Pavel Aleksandrovich" userId="b85f6bca-230c-483e-a25b-e13e873626fd" providerId="ADAL" clId="{AB235781-41D1-50B9-86EA-51A98A5F500A}" dt="2026-04-12T03:19:16.846" v="436" actId="478"/>
+          <ac:picMkLst>
+            <pc:docMk/>
+            <pc:sldMk cId="1281361301" sldId="273"/>
+            <ac:picMk id="13" creationId="{8223FEB2-26FA-FB40-A95B-A7F8D4402C7F}"/>
+          </ac:picMkLst>
+        </pc:picChg>
+      </pc:sldChg>
     </pc:docChg>
   </pc:docChgLst>
 </pc:chgInfo>
@@ -4846,7 +4909,7 @@
         <p:cNvPr id="1" name="">
           <a:extLst>
             <a:ext uri="{FF2B5EF4-FFF2-40B4-BE49-F238E27FC236}">
-              <a16:creationId xmlns:a16="http://schemas.microsoft.com/office/drawing/2014/main" id="{458667FE-FC07-046B-D411-11854A1223C6}"/>
+              <a16:creationId xmlns:a16="http://schemas.microsoft.com/office/drawing/2014/main" id="{97109FF3-0E1E-B595-DAB1-1FA74AC77A6A}"/>
             </a:ext>
           </a:extLst>
         </p:cNvPr>
@@ -4866,7 +4929,7 @@
           <p:cNvPr id="2" name="Slide Image Placeholder 1">
             <a:extLst>
               <a:ext uri="{FF2B5EF4-FFF2-40B4-BE49-F238E27FC236}">
-                <a16:creationId xmlns:a16="http://schemas.microsoft.com/office/drawing/2014/main" id="{38352853-3AB6-9C9D-16AF-B6706B83B479}"/>
+                <a16:creationId xmlns:a16="http://schemas.microsoft.com/office/drawing/2014/main" id="{2F3A3788-FE25-11BE-4F0E-38D803CBA1B1}"/>
               </a:ext>
             </a:extLst>
           </p:cNvPr>
@@ -4884,7 +4947,7 @@
           <p:cNvPr id="3" name="Notes Placeholder 2">
             <a:extLst>
               <a:ext uri="{FF2B5EF4-FFF2-40B4-BE49-F238E27FC236}">
-                <a16:creationId xmlns:a16="http://schemas.microsoft.com/office/drawing/2014/main" id="{6662628F-3F1B-9BED-6991-834FD35D8ACB}"/>
+                <a16:creationId xmlns:a16="http://schemas.microsoft.com/office/drawing/2014/main" id="{29E121FB-12F1-FD40-7BB7-77FE142C8838}"/>
               </a:ext>
             </a:extLst>
           </p:cNvPr>
@@ -4901,23 +4964,7 @@
           <a:lstStyle/>
           <a:p>
             <a:r>
-              <a:rPr lang="en-US" sz="1200" b="1" dirty="0">
-                <a:latin typeface="GT Walsheim Trial Th" pitchFamily="2" charset="77"/>
-              </a:rPr>
-              <a:t>JUSTIN:</a:t>
-            </a:r>
-            <a:br>
-              <a:rPr lang="en-US" sz="1200" b="1" dirty="0">
-                <a:latin typeface="GT Walsheim Trial Th" pitchFamily="2" charset="77"/>
-              </a:rPr>
-            </a:br>
-            <a:br>
-              <a:rPr lang="en-US" sz="1200" b="1" dirty="0">
-                <a:latin typeface="GT Walsheim Trial Th" pitchFamily="2" charset="77"/>
-              </a:rPr>
-            </a:br>
-            <a:r>
-              <a:rPr lang="en-US" sz="1200" b="0" i="0" kern="1200" dirty="0">
+              <a:rPr lang="en-US" sz="1200" b="1" i="0" kern="1200" dirty="0">
                 <a:solidFill>
                   <a:schemeClr val="tx1"/>
                 </a:solidFill>
@@ -4926,87 +4973,11 @@
                 <a:ea typeface="+mn-ea"/>
                 <a:cs typeface="+mn-cs"/>
               </a:rPr>
-              <a:t>Before diving into the models, let me give you a sense of what this data actually looks like.</a:t>
-            </a:r>
-          </a:p>
-          <a:p>
-            <a:r>
-              <a:rPr lang="en-US" sz="1200" b="0" i="0" kern="1200" dirty="0">
-                <a:solidFill>
-                  <a:schemeClr val="tx1"/>
-                </a:solidFill>
-                <a:effectLst/>
-                <a:latin typeface="+mn-lt"/>
-                <a:ea typeface="+mn-ea"/>
-                <a:cs typeface="+mn-cs"/>
-              </a:rPr>
-              <a:t>We extracted from </a:t>
-            </a:r>
-            <a:r>
-              <a:rPr lang="en-US" sz="1200" b="1" i="0" kern="1200" dirty="0">
-                <a:solidFill>
-                  <a:schemeClr val="tx1"/>
-                </a:solidFill>
-                <a:effectLst/>
-                <a:latin typeface="+mn-lt"/>
-                <a:ea typeface="+mn-ea"/>
-                <a:cs typeface="+mn-cs"/>
-              </a:rPr>
-              <a:t>300 scenarios</a:t>
-            </a:r>
-            <a:r>
-              <a:rPr lang="en-US" sz="1200" b="0" i="0" kern="1200" dirty="0">
-                <a:solidFill>
-                  <a:schemeClr val="tx1"/>
-                </a:solidFill>
-                <a:effectLst/>
-                <a:latin typeface="+mn-lt"/>
-                <a:ea typeface="+mn-ea"/>
-                <a:cs typeface="+mn-cs"/>
-              </a:rPr>
-              <a:t> from the validation split of the Waymo Open Motion Dataset — specifically shard 00000-of-00150. That gives us </a:t>
-            </a:r>
-            <a:r>
-              <a:rPr lang="en-US" sz="1200" b="1" i="0" kern="1200" dirty="0">
-                <a:solidFill>
-                  <a:schemeClr val="tx1"/>
-                </a:solidFill>
-                <a:effectLst/>
-                <a:latin typeface="+mn-lt"/>
-                <a:ea typeface="+mn-ea"/>
-                <a:cs typeface="+mn-cs"/>
-              </a:rPr>
-              <a:t>18,311 raw agent observations</a:t>
-            </a:r>
-            <a:r>
-              <a:rPr lang="en-US" sz="1200" b="0" i="0" kern="1200" dirty="0">
-                <a:solidFill>
-                  <a:schemeClr val="tx1"/>
-                </a:solidFill>
-                <a:effectLst/>
-                <a:latin typeface="+mn-lt"/>
-                <a:ea typeface="+mn-ea"/>
-                <a:cs typeface="+mn-cs"/>
-              </a:rPr>
-              <a:t> across vehicles, pedestrians, cyclists, and the Waymo self-driving car itself, which we exclude from all analysis.</a:t>
-            </a:r>
-          </a:p>
-          <a:p>
-            <a:r>
-              <a:rPr lang="en-US" sz="1200" b="0" i="0" kern="1200" dirty="0">
-                <a:solidFill>
-                  <a:schemeClr val="tx1"/>
-                </a:solidFill>
-                <a:effectLst/>
-                <a:latin typeface="+mn-lt"/>
-                <a:ea typeface="+mn-ea"/>
-                <a:cs typeface="+mn-cs"/>
-              </a:rPr>
-              <a:t>In terms of composition: vehicles make up the clear majority of the dataset, pedestrians account for roughly 25%, and cyclists around 5%. This imbalance matters because it affects both the anomaly detection and how we interpret per-class statistics.</a:t>
-            </a:r>
-          </a:p>
-          <a:p>
-            <a:endParaRPr lang="en-US" sz="1200" b="0" i="0" kern="1200" dirty="0">
+              <a:t>JUSTIN:</a:t>
+            </a:r>
+          </a:p>
+          <a:p>
+            <a:endParaRPr lang="en-US" sz="1200" b="1" i="0" kern="1200" dirty="0">
               <a:solidFill>
                 <a:schemeClr val="tx1"/>
               </a:solidFill>
@@ -5027,7 +4998,7 @@
                 <a:ea typeface="+mn-ea"/>
                 <a:cs typeface="+mn-cs"/>
               </a:rPr>
-              <a:t>A few things worth noting about the raw data before any filtering. When you look at mean speeds including stationary agents, vehicles actually appear slower than cyclists — counterintuitive, and it's entirely because a large fraction of vehicles are stopped at intersections. The moment you filter to moving agents only, the expected ordering returns: vehicles fastest, then cyclists, then pedestrians.</a:t>
+              <a:t>Before diving into the models, let me give you a sense of what this data actually looks like.</a:t>
             </a:r>
           </a:p>
           <a:p>
@@ -5041,10 +5012,10 @@
                 <a:ea typeface="+mn-ea"/>
                 <a:cs typeface="+mn-cs"/>
               </a:rPr>
-              <a:t>Waymo also provides behavioral flags: </a:t>
-            </a:r>
-            <a:r>
-              <a:rPr lang="en-US" sz="1200" b="0" i="0" kern="1200" dirty="0" err="1">
+              <a:t>We extracted from </a:t>
+            </a:r>
+            <a:r>
+              <a:rPr lang="en-US" sz="1200" b="1" i="0" kern="1200" dirty="0">
                 <a:solidFill>
                   <a:schemeClr val="tx1"/>
                 </a:solidFill>
@@ -5053,7 +5024,7 @@
                 <a:ea typeface="+mn-ea"/>
                 <a:cs typeface="+mn-cs"/>
               </a:rPr>
-              <a:t>IsInteractive</a:t>
+              <a:t>300 scenarios</a:t>
             </a:r>
             <a:r>
               <a:rPr lang="en-US" sz="1200" b="0" i="0" kern="1200" dirty="0">
@@ -5065,10 +5036,10 @@
                 <a:ea typeface="+mn-ea"/>
                 <a:cs typeface="+mn-cs"/>
               </a:rPr>
-              <a:t> marks agents relevant to the AV's immediate planning — typically nearby vehicles in adjacent lanes or at intersections. </a:t>
-            </a:r>
-            <a:r>
-              <a:rPr lang="en-US" sz="1200" b="0" i="0" kern="1200" dirty="0" err="1">
+              <a:t> from the validation split of the Waymo Open Motion Dataset — specifically shard 00000-of-00150. That gives us </a:t>
+            </a:r>
+            <a:r>
+              <a:rPr lang="en-US" sz="1200" b="1" i="0" kern="1200" dirty="0">
                 <a:solidFill>
                   <a:schemeClr val="tx1"/>
                 </a:solidFill>
@@ -5077,7 +5048,7 @@
                 <a:ea typeface="+mn-ea"/>
                 <a:cs typeface="+mn-cs"/>
               </a:rPr>
-              <a:t>IsSDC</a:t>
+              <a:t>18,311 raw agent observations</a:t>
             </a:r>
             <a:r>
               <a:rPr lang="en-US" sz="1200" b="0" i="0" kern="1200" dirty="0">
@@ -5089,11 +5060,109 @@
                 <a:ea typeface="+mn-ea"/>
                 <a:cs typeface="+mn-cs"/>
               </a:rPr>
+              <a:t> across vehicles, pedestrians, cyclists, and the Waymo self-driving car itself, which we exclude from all analysis.</a:t>
+            </a:r>
+          </a:p>
+          <a:p>
+            <a:r>
+              <a:rPr lang="en-US" sz="1200" b="0" i="0" kern="1200" dirty="0">
+                <a:solidFill>
+                  <a:schemeClr val="tx1"/>
+                </a:solidFill>
+                <a:effectLst/>
+                <a:latin typeface="+mn-lt"/>
+                <a:ea typeface="+mn-ea"/>
+                <a:cs typeface="+mn-cs"/>
+              </a:rPr>
+              <a:t>In terms of composition: vehicles make up the clear majority of the dataset, pedestrians account for roughly 25%, and cyclists around 5%. This imbalance matters because it affects both the anomaly detection and how we interpret per-class statistics.</a:t>
+            </a:r>
+          </a:p>
+          <a:p>
+            <a:r>
+              <a:rPr lang="en-US" sz="1200" b="0" i="0" kern="1200" dirty="0">
+                <a:solidFill>
+                  <a:schemeClr val="tx1"/>
+                </a:solidFill>
+                <a:effectLst/>
+                <a:latin typeface="+mn-lt"/>
+                <a:ea typeface="+mn-ea"/>
+                <a:cs typeface="+mn-cs"/>
+              </a:rPr>
+              <a:t>A few things worth noting about the raw data before any filtering. When you look at mean speeds including stationary agents, vehicles actually appear slower than cyclists — counterintuitive, and it's entirely because a large fraction of vehicles are stopped at intersections. The moment you filter to moving agents only, the expected ordering returns: vehicles fastest, then cyclists, then pedestrians.</a:t>
+            </a:r>
+          </a:p>
+          <a:p>
+            <a:r>
+              <a:rPr lang="en-US" sz="1200" b="0" i="0" kern="1200" dirty="0">
+                <a:solidFill>
+                  <a:schemeClr val="tx1"/>
+                </a:solidFill>
+                <a:effectLst/>
+                <a:latin typeface="+mn-lt"/>
+                <a:ea typeface="+mn-ea"/>
+                <a:cs typeface="+mn-cs"/>
+              </a:rPr>
+              <a:t>Waymo also provides behavioral flags: </a:t>
+            </a:r>
+            <a:r>
+              <a:rPr lang="en-US" sz="1200" b="0" i="0" kern="1200" dirty="0" err="1">
+                <a:solidFill>
+                  <a:schemeClr val="tx1"/>
+                </a:solidFill>
+                <a:effectLst/>
+                <a:latin typeface="+mn-lt"/>
+                <a:ea typeface="+mn-ea"/>
+                <a:cs typeface="+mn-cs"/>
+              </a:rPr>
+              <a:t>IsInteractive</a:t>
+            </a:r>
+            <a:r>
+              <a:rPr lang="en-US" sz="1200" b="0" i="0" kern="1200" dirty="0">
+                <a:solidFill>
+                  <a:schemeClr val="tx1"/>
+                </a:solidFill>
+                <a:effectLst/>
+                <a:latin typeface="+mn-lt"/>
+                <a:ea typeface="+mn-ea"/>
+                <a:cs typeface="+mn-cs"/>
+              </a:rPr>
+              <a:t> marks agents relevant to the AV's immediate planning — typically nearby vehicles in adjacent lanes or at intersections. </a:t>
+            </a:r>
+            <a:r>
+              <a:rPr lang="en-US" sz="1200" b="0" i="0" kern="1200" dirty="0" err="1">
+                <a:solidFill>
+                  <a:schemeClr val="tx1"/>
+                </a:solidFill>
+                <a:effectLst/>
+                <a:latin typeface="+mn-lt"/>
+                <a:ea typeface="+mn-ea"/>
+                <a:cs typeface="+mn-cs"/>
+              </a:rPr>
+              <a:t>IsSDC</a:t>
+            </a:r>
+            <a:r>
+              <a:rPr lang="en-US" sz="1200" b="0" i="0" kern="1200" dirty="0">
+                <a:solidFill>
+                  <a:schemeClr val="tx1"/>
+                </a:solidFill>
+                <a:effectLst/>
+                <a:latin typeface="+mn-lt"/>
+                <a:ea typeface="+mn-ea"/>
+                <a:cs typeface="+mn-cs"/>
+              </a:rPr>
               <a:t> identifies the self-driving car itself. These flags are not safety-incident labels — they're proximity-based planning annotations — and that distinction will matter when we interpret the anomaly results.</a:t>
             </a:r>
           </a:p>
           <a:p>
-            <a:endParaRPr lang="en-US" b="1" dirty="0"/>
+            <a:endParaRPr lang="en-US" sz="1200" b="1" i="0" kern="1200" dirty="0">
+              <a:solidFill>
+                <a:schemeClr val="tx1"/>
+              </a:solidFill>
+              <a:effectLst/>
+              <a:latin typeface="+mn-lt"/>
+              <a:ea typeface="+mn-ea"/>
+              <a:cs typeface="+mn-cs"/>
+            </a:endParaRPr>
           </a:p>
         </p:txBody>
       </p:sp>
@@ -5102,7 +5171,7 @@
           <p:cNvPr id="4" name="Slide Number Placeholder 3">
             <a:extLst>
               <a:ext uri="{FF2B5EF4-FFF2-40B4-BE49-F238E27FC236}">
-                <a16:creationId xmlns:a16="http://schemas.microsoft.com/office/drawing/2014/main" id="{858B9044-01F3-7D9D-2FBA-CE7EF15B93B8}"/>
+                <a16:creationId xmlns:a16="http://schemas.microsoft.com/office/drawing/2014/main" id="{5DC55008-2FD4-A8DF-2215-50EE4970E143}"/>
               </a:ext>
             </a:extLst>
           </p:cNvPr>
@@ -5129,7 +5198,7 @@
     </p:spTree>
     <p:extLst>
       <p:ext uri="{BB962C8B-B14F-4D97-AF65-F5344CB8AC3E}">
-        <p14:creationId xmlns:p14="http://schemas.microsoft.com/office/powerpoint/2010/main" val="4041322977"/>
+        <p14:creationId xmlns:p14="http://schemas.microsoft.com/office/powerpoint/2010/main" val="2027805787"/>
       </p:ext>
     </p:extLst>
   </p:cSld>
@@ -21755,7 +21824,7 @@
               <a:rPr lang="en-US" sz="1500" dirty="0">
                 <a:latin typeface="GT Walsheim Trial Rg" pitchFamily="2" charset="77"/>
               </a:rPr>
-              <a:t>DATASET STATISTICS</a:t>
+              <a:t>PART 1: DATASET STATISTICS</a:t>
             </a:r>
           </a:p>
         </p:txBody>
@@ -23095,7 +23164,7 @@
         <p:cNvPr id="1" name="">
           <a:extLst>
             <a:ext uri="{FF2B5EF4-FFF2-40B4-BE49-F238E27FC236}">
-              <a16:creationId xmlns:a16="http://schemas.microsoft.com/office/drawing/2014/main" id="{684AF451-3682-FF2C-D616-3F71F91C5AC6}"/>
+              <a16:creationId xmlns:a16="http://schemas.microsoft.com/office/drawing/2014/main" id="{B7D1694B-ADF8-C7B3-5BF9-D767B9134B8C}"/>
             </a:ext>
           </a:extLst>
         </p:cNvPr>
@@ -23110,12 +23179,87 @@
           <a:chExt cx="0" cy="0"/>
         </a:xfrm>
       </p:grpSpPr>
+      <p:sp>
+        <p:nvSpPr>
+          <p:cNvPr id="4" name="Title 3">
+            <a:extLst>
+              <a:ext uri="{FF2B5EF4-FFF2-40B4-BE49-F238E27FC236}">
+                <a16:creationId xmlns:a16="http://schemas.microsoft.com/office/drawing/2014/main" id="{3BC7CBD6-37D5-6E4F-C6C3-1A6035A75370}"/>
+              </a:ext>
+            </a:extLst>
+          </p:cNvPr>
+          <p:cNvSpPr>
+            <a:spLocks noGrp="1"/>
+          </p:cNvSpPr>
+          <p:nvPr>
+            <p:ph type="ctrTitle"/>
+          </p:nvPr>
+        </p:nvSpPr>
+        <p:spPr>
+          <a:xfrm>
+            <a:off x="716478" y="447821"/>
+            <a:ext cx="3347522" cy="369333"/>
+          </a:xfrm>
+        </p:spPr>
+        <p:txBody>
+          <a:bodyPr>
+            <a:normAutofit/>
+          </a:bodyPr>
+          <a:lstStyle/>
+          <a:p>
+            <a:pPr algn="l"/>
+            <a:r>
+              <a:rPr lang="en-US" sz="1500" dirty="0">
+                <a:latin typeface="GT Walsheim Trial Rg" pitchFamily="2" charset="77"/>
+              </a:rPr>
+              <a:t>PART 2: DATASET STATISTICS </a:t>
+            </a:r>
+          </a:p>
+        </p:txBody>
+      </p:sp>
+      <p:sp>
+        <p:nvSpPr>
+          <p:cNvPr id="8" name="TextBox 7">
+            <a:extLst>
+              <a:ext uri="{FF2B5EF4-FFF2-40B4-BE49-F238E27FC236}">
+                <a16:creationId xmlns:a16="http://schemas.microsoft.com/office/drawing/2014/main" id="{1AD48543-E349-8F3E-32BE-70942649497F}"/>
+              </a:ext>
+            </a:extLst>
+          </p:cNvPr>
+          <p:cNvSpPr txBox="1"/>
+          <p:nvPr/>
+        </p:nvSpPr>
+        <p:spPr>
+          <a:xfrm>
+            <a:off x="716477" y="952090"/>
+            <a:ext cx="7346867" cy="630942"/>
+          </a:xfrm>
+          <a:prstGeom prst="rect">
+            <a:avLst/>
+          </a:prstGeom>
+          <a:noFill/>
+        </p:spPr>
+        <p:txBody>
+          <a:bodyPr wrap="square">
+            <a:spAutoFit/>
+          </a:bodyPr>
+          <a:lstStyle/>
+          <a:p>
+            <a:r>
+              <a:rPr lang="en-US" sz="3500" dirty="0">
+                <a:latin typeface="GT Walsheim Trial Rg" pitchFamily="2" charset="77"/>
+              </a:rPr>
+              <a:t>What the Data Looks Like</a:t>
+            </a:r>
+          </a:p>
+        </p:txBody>
+      </p:sp>
       <p:pic>
         <p:nvPicPr>
-          <p:cNvPr id="6" name="Picture 2" descr="Waymo Logo">
+          <p:cNvPr id="14" name="Picture 2" descr="Waymo Logo">
             <a:extLst>
               <a:ext uri="{FF2B5EF4-FFF2-40B4-BE49-F238E27FC236}">
-                <a16:creationId xmlns:a16="http://schemas.microsoft.com/office/drawing/2014/main" id="{73A17D98-85BB-1349-8904-4995BA7F417F}"/>
+                <a16:creationId xmlns:a16="http://schemas.microsoft.com/office/drawing/2014/main" id="{2B47F978-21C8-273E-24DC-5FC952B51D7C}"/>
               </a:ext>
             </a:extLst>
           </p:cNvPr>
@@ -23157,1093 +23301,224 @@
           </a:extLst>
         </p:spPr>
       </p:pic>
-      <p:sp>
-        <p:nvSpPr>
-          <p:cNvPr id="9" name="Title 3">
+      <p:pic>
+        <p:nvPicPr>
+          <p:cNvPr id="5" name="Picture 4">
             <a:extLst>
               <a:ext uri="{FF2B5EF4-FFF2-40B4-BE49-F238E27FC236}">
-                <a16:creationId xmlns:a16="http://schemas.microsoft.com/office/drawing/2014/main" id="{048C4A0F-704A-1B42-09A0-E1CEA1F85F1A}"/>
+                <a16:creationId xmlns:a16="http://schemas.microsoft.com/office/drawing/2014/main" id="{4512D806-F24A-215A-2C44-C03E07EBCB16}"/>
               </a:ext>
             </a:extLst>
           </p:cNvPr>
-          <p:cNvSpPr txBox="1">
-            <a:spLocks/>
-          </p:cNvSpPr>
+          <p:cNvPicPr>
+            <a:picLocks noChangeAspect="1"/>
+          </p:cNvPicPr>
           <p:nvPr/>
-        </p:nvSpPr>
+        </p:nvPicPr>
+        <p:blipFill>
+          <a:blip r:embed="rId4"/>
+          <a:stretch>
+            <a:fillRect/>
+          </a:stretch>
+        </p:blipFill>
         <p:spPr>
           <a:xfrm>
-            <a:off x="716478" y="447821"/>
-            <a:ext cx="2406732" cy="369333"/>
+            <a:off x="2438400" y="1912451"/>
+            <a:ext cx="7315200" cy="4572000"/>
           </a:xfrm>
           <a:prstGeom prst="rect">
             <a:avLst/>
           </a:prstGeom>
         </p:spPr>
+      </p:pic>
+      <p:sp>
+        <p:nvSpPr>
+          <p:cNvPr id="11" name="Freeform 10">
+            <a:extLst>
+              <a:ext uri="{FF2B5EF4-FFF2-40B4-BE49-F238E27FC236}">
+                <a16:creationId xmlns:a16="http://schemas.microsoft.com/office/drawing/2014/main" id="{FAECF00B-BAAD-8062-AE21-7865670210D8}"/>
+              </a:ext>
+            </a:extLst>
+          </p:cNvPr>
+          <p:cNvSpPr/>
+          <p:nvPr/>
+        </p:nvSpPr>
+        <p:spPr>
+          <a:xfrm rot="7893553">
+            <a:off x="-317208" y="-200894"/>
+            <a:ext cx="18800064" cy="6958229"/>
+          </a:xfrm>
+          <a:custGeom>
+            <a:avLst/>
+            <a:gdLst>
+              <a:gd name="csX0" fmla="*/ 0 w 18800064"/>
+              <a:gd name="csY0" fmla="*/ 7187173 h 7187173"/>
+              <a:gd name="csX1" fmla="*/ 7863840 w 18800064"/>
+              <a:gd name="csY1" fmla="*/ 18277 h 7187173"/>
+              <a:gd name="csX2" fmla="*/ 18800064 w 18800064"/>
+              <a:gd name="csY2" fmla="*/ 5248645 h 7187173"/>
+            </a:gdLst>
+            <a:ahLst/>
+            <a:cxnLst>
+              <a:cxn ang="0">
+                <a:pos x="csX0" y="csY0"/>
+              </a:cxn>
+              <a:cxn ang="0">
+                <a:pos x="csX1" y="csY1"/>
+              </a:cxn>
+              <a:cxn ang="0">
+                <a:pos x="csX2" y="csY2"/>
+              </a:cxn>
+            </a:cxnLst>
+            <a:rect l="l" t="t" r="r" b="b"/>
+            <a:pathLst>
+              <a:path w="18800064" h="7187173">
+                <a:moveTo>
+                  <a:pt x="0" y="7187173"/>
+                </a:moveTo>
+                <a:cubicBezTo>
+                  <a:pt x="2365248" y="3764269"/>
+                  <a:pt x="4730496" y="341365"/>
+                  <a:pt x="7863840" y="18277"/>
+                </a:cubicBezTo>
+                <a:cubicBezTo>
+                  <a:pt x="10997184" y="-304811"/>
+                  <a:pt x="17586960" y="3742933"/>
+                  <a:pt x="18800064" y="5248645"/>
+                </a:cubicBezTo>
+              </a:path>
+            </a:pathLst>
+          </a:custGeom>
+          <a:noFill/>
+          <a:ln w="635000">
+            <a:solidFill>
+              <a:schemeClr val="tx1">
+                <a:alpha val="3000"/>
+              </a:schemeClr>
+            </a:solidFill>
+          </a:ln>
+        </p:spPr>
+        <p:style>
+          <a:lnRef idx="2">
+            <a:schemeClr val="accent1">
+              <a:shade val="15000"/>
+            </a:schemeClr>
+          </a:lnRef>
+          <a:fillRef idx="1">
+            <a:schemeClr val="accent1"/>
+          </a:fillRef>
+          <a:effectRef idx="0">
+            <a:schemeClr val="accent1"/>
+          </a:effectRef>
+          <a:fontRef idx="minor">
+            <a:schemeClr val="lt1"/>
+          </a:fontRef>
+        </p:style>
         <p:txBody>
-          <a:bodyPr vert="horz" lIns="91440" tIns="45720" rIns="91440" bIns="45720" rtlCol="0" anchor="b">
-            <a:normAutofit/>
-          </a:bodyPr>
-          <a:lstStyle>
-            <a:lvl1pPr algn="ctr" defTabSz="914400" rtl="0" eaLnBrk="1" latinLnBrk="0" hangingPunct="1">
-              <a:lnSpc>
-                <a:spcPct val="90000"/>
-              </a:lnSpc>
-              <a:spcBef>
-                <a:spcPct val="0"/>
-              </a:spcBef>
-              <a:buNone/>
-              <a:defRPr sz="6000" kern="1200">
-                <a:solidFill>
-                  <a:schemeClr val="tx1"/>
-                </a:solidFill>
-                <a:latin typeface="+mj-lt"/>
-                <a:ea typeface="+mj-ea"/>
-                <a:cs typeface="+mj-cs"/>
-              </a:defRPr>
-            </a:lvl1pPr>
-          </a:lstStyle>
-          <a:p>
-            <a:pPr algn="l"/>
-            <a:r>
-              <a:rPr lang="en-US" sz="1500" dirty="0">
-                <a:solidFill>
-                  <a:srgbClr val="989DA2"/>
-                </a:solidFill>
-                <a:latin typeface="GT Walsheim Trial Rg" pitchFamily="2" charset="77"/>
-              </a:rPr>
-              <a:t>DATASET STATISTICS</a:t>
-            </a:r>
+          <a:bodyPr rtlCol="0" anchor="ctr"/>
+          <a:lstStyle/>
+          <a:p>
+            <a:pPr algn="ctr"/>
+            <a:endParaRPr lang="en-US"/>
           </a:p>
         </p:txBody>
       </p:sp>
       <p:sp>
         <p:nvSpPr>
-          <p:cNvPr id="11" name="TextBox 10">
+          <p:cNvPr id="6" name="Freeform 5">
             <a:extLst>
               <a:ext uri="{FF2B5EF4-FFF2-40B4-BE49-F238E27FC236}">
-                <a16:creationId xmlns:a16="http://schemas.microsoft.com/office/drawing/2014/main" id="{B6033FA2-EB1F-F693-6FA4-7BB8813D9CDA}"/>
+                <a16:creationId xmlns:a16="http://schemas.microsoft.com/office/drawing/2014/main" id="{B02F38D1-095A-4D26-04B1-8A6E8A730D5B}"/>
               </a:ext>
             </a:extLst>
           </p:cNvPr>
-          <p:cNvSpPr txBox="1"/>
+          <p:cNvSpPr/>
           <p:nvPr/>
         </p:nvSpPr>
         <p:spPr>
-          <a:xfrm>
-            <a:off x="716478" y="952090"/>
-            <a:ext cx="6097978" cy="630942"/>
+          <a:xfrm rot="17550971">
+            <a:off x="-6037072" y="1435617"/>
+            <a:ext cx="18800064" cy="6958229"/>
           </a:xfrm>
-          <a:prstGeom prst="rect">
+          <a:custGeom>
             <a:avLst/>
-          </a:prstGeom>
+            <a:gdLst>
+              <a:gd name="csX0" fmla="*/ 0 w 18800064"/>
+              <a:gd name="csY0" fmla="*/ 7187173 h 7187173"/>
+              <a:gd name="csX1" fmla="*/ 7863840 w 18800064"/>
+              <a:gd name="csY1" fmla="*/ 18277 h 7187173"/>
+              <a:gd name="csX2" fmla="*/ 18800064 w 18800064"/>
+              <a:gd name="csY2" fmla="*/ 5248645 h 7187173"/>
+            </a:gdLst>
+            <a:ahLst/>
+            <a:cxnLst>
+              <a:cxn ang="0">
+                <a:pos x="csX0" y="csY0"/>
+              </a:cxn>
+              <a:cxn ang="0">
+                <a:pos x="csX1" y="csY1"/>
+              </a:cxn>
+              <a:cxn ang="0">
+                <a:pos x="csX2" y="csY2"/>
+              </a:cxn>
+            </a:cxnLst>
+            <a:rect l="l" t="t" r="r" b="b"/>
+            <a:pathLst>
+              <a:path w="18800064" h="7187173">
+                <a:moveTo>
+                  <a:pt x="0" y="7187173"/>
+                </a:moveTo>
+                <a:cubicBezTo>
+                  <a:pt x="2365248" y="3764269"/>
+                  <a:pt x="4730496" y="341365"/>
+                  <a:pt x="7863840" y="18277"/>
+                </a:cubicBezTo>
+                <a:cubicBezTo>
+                  <a:pt x="10997184" y="-304811"/>
+                  <a:pt x="17586960" y="3742933"/>
+                  <a:pt x="18800064" y="5248645"/>
+                </a:cubicBezTo>
+              </a:path>
+            </a:pathLst>
+          </a:custGeom>
           <a:noFill/>
+          <a:ln w="635000">
+            <a:solidFill>
+              <a:schemeClr val="tx1">
+                <a:alpha val="3000"/>
+              </a:schemeClr>
+            </a:solidFill>
+          </a:ln>
         </p:spPr>
+        <p:style>
+          <a:lnRef idx="2">
+            <a:schemeClr val="accent1">
+              <a:shade val="15000"/>
+            </a:schemeClr>
+          </a:lnRef>
+          <a:fillRef idx="1">
+            <a:schemeClr val="accent1"/>
+          </a:fillRef>
+          <a:effectRef idx="0">
+            <a:schemeClr val="accent1"/>
+          </a:effectRef>
+          <a:fontRef idx="minor">
+            <a:schemeClr val="lt1"/>
+          </a:fontRef>
+        </p:style>
         <p:txBody>
-          <a:bodyPr wrap="square">
-            <a:spAutoFit/>
-          </a:bodyPr>
+          <a:bodyPr rtlCol="0" anchor="ctr"/>
           <a:lstStyle/>
           <a:p>
-            <a:r>
-              <a:rPr lang="en-US" sz="3500" dirty="0">
-                <a:latin typeface="GT Walsheim Trial Rg" pitchFamily="2" charset="77"/>
-              </a:rPr>
-              <a:t>What the Data Looks Like</a:t>
-            </a:r>
+            <a:pPr algn="ctr"/>
+            <a:endParaRPr lang="en-US"/>
           </a:p>
         </p:txBody>
       </p:sp>
-      <p:graphicFrame>
-        <p:nvGraphicFramePr>
-          <p:cNvPr id="12" name="Table 11">
-            <a:extLst>
-              <a:ext uri="{FF2B5EF4-FFF2-40B4-BE49-F238E27FC236}">
-                <a16:creationId xmlns:a16="http://schemas.microsoft.com/office/drawing/2014/main" id="{060EF4B2-4504-8D76-A4E4-69FA63C93789}"/>
-              </a:ext>
-            </a:extLst>
-          </p:cNvPr>
-          <p:cNvGraphicFramePr>
-            <a:graphicFrameLocks noGrp="1"/>
-          </p:cNvGraphicFramePr>
-          <p:nvPr>
-            <p:extLst>
-              <p:ext uri="{D42A27DB-BD31-4B8C-83A1-F6EECF244321}">
-                <p14:modId xmlns:p14="http://schemas.microsoft.com/office/powerpoint/2010/main" val="4168928733"/>
-              </p:ext>
-            </p:extLst>
-          </p:nvPr>
-        </p:nvGraphicFramePr>
-        <p:xfrm>
-          <a:off x="716477" y="1932130"/>
-          <a:ext cx="10876350" cy="2646176"/>
-        </p:xfrm>
-        <a:graphic>
-          <a:graphicData uri="http://schemas.openxmlformats.org/drawingml/2006/table">
-            <a:tbl>
-              <a:tblPr firstRow="1" bandRow="1">
-                <a:tableStyleId>{073A0DAA-6AF3-43AB-8588-CEC1D06C72B9}</a:tableStyleId>
-              </a:tblPr>
-              <a:tblGrid>
-                <a:gridCol w="2447977">
-                  <a:extLst>
-                    <a:ext uri="{9D8B030D-6E8A-4147-A177-3AD203B41FA5}">
-                      <a16:colId xmlns:a16="http://schemas.microsoft.com/office/drawing/2014/main" val="1610543496"/>
-                    </a:ext>
-                  </a:extLst>
-                </a:gridCol>
-                <a:gridCol w="3801230">
-                  <a:extLst>
-                    <a:ext uri="{9D8B030D-6E8A-4147-A177-3AD203B41FA5}">
-                      <a16:colId xmlns:a16="http://schemas.microsoft.com/office/drawing/2014/main" val="2940384537"/>
-                    </a:ext>
-                  </a:extLst>
-                </a:gridCol>
-                <a:gridCol w="4627143">
-                  <a:extLst>
-                    <a:ext uri="{9D8B030D-6E8A-4147-A177-3AD203B41FA5}">
-                      <a16:colId xmlns:a16="http://schemas.microsoft.com/office/drawing/2014/main" val="3740313691"/>
-                    </a:ext>
-                  </a:extLst>
-                </a:gridCol>
-              </a:tblGrid>
-              <a:tr h="296694">
-                <a:tc>
-                  <a:txBody>
-                    <a:bodyPr/>
-                    <a:lstStyle/>
-                    <a:p>
-                      <a:r>
-                        <a:rPr lang="en-US" sz="1500" b="0" i="0" dirty="0">
-                          <a:solidFill>
-                            <a:schemeClr val="bg1"/>
-                          </a:solidFill>
-                          <a:latin typeface="GT Walsheim Trial Rg" pitchFamily="2" charset="77"/>
-                        </a:rPr>
-                        <a:t>Agent Type</a:t>
-                      </a:r>
-                    </a:p>
-                  </a:txBody>
-                  <a:tcPr>
-                    <a:lnL w="12700" cap="flat" cmpd="sng" algn="ctr">
-                      <a:noFill/>
-                      <a:prstDash val="solid"/>
-                      <a:round/>
-                      <a:headEnd type="none" w="med" len="med"/>
-                      <a:tailEnd type="none" w="med" len="med"/>
-                    </a:lnL>
-                    <a:lnR w="12700" cap="flat" cmpd="sng" algn="ctr">
-                      <a:noFill/>
-                      <a:prstDash val="solid"/>
-                      <a:round/>
-                      <a:headEnd type="none" w="med" len="med"/>
-                      <a:tailEnd type="none" w="med" len="med"/>
-                    </a:lnR>
-                    <a:lnT w="12700" cap="flat" cmpd="sng" algn="ctr">
-                      <a:noFill/>
-                      <a:prstDash val="solid"/>
-                      <a:round/>
-                      <a:headEnd type="none" w="med" len="med"/>
-                      <a:tailEnd type="none" w="med" len="med"/>
-                    </a:lnT>
-                    <a:lnB w="12700" cap="flat" cmpd="sng" algn="ctr">
-                      <a:noFill/>
-                      <a:prstDash val="solid"/>
-                      <a:round/>
-                      <a:headEnd type="none" w="med" len="med"/>
-                      <a:tailEnd type="none" w="med" len="med"/>
-                    </a:lnB>
-                    <a:lnTlToBr w="12700" cmpd="sng">
-                      <a:noFill/>
-                      <a:prstDash val="solid"/>
-                    </a:lnTlToBr>
-                    <a:lnBlToTr w="12700" cmpd="sng">
-                      <a:noFill/>
-                      <a:prstDash val="solid"/>
-                    </a:lnBlToTr>
-                    <a:solidFill>
-                      <a:srgbClr val="0078FF"/>
-                    </a:solidFill>
-                  </a:tcPr>
-                </a:tc>
-                <a:tc>
-                  <a:txBody>
-                    <a:bodyPr/>
-                    <a:lstStyle/>
-                    <a:p>
-                      <a:r>
-                        <a:rPr lang="en-US" sz="1500" b="0" i="0" dirty="0">
-                          <a:solidFill>
-                            <a:schemeClr val="bg1"/>
-                          </a:solidFill>
-                          <a:latin typeface="GT Walsheim Trial Rg" pitchFamily="2" charset="77"/>
-                        </a:rPr>
-                        <a:t>Share</a:t>
-                      </a:r>
-                    </a:p>
-                  </a:txBody>
-                  <a:tcPr>
-                    <a:lnL w="12700" cap="flat" cmpd="sng" algn="ctr">
-                      <a:noFill/>
-                      <a:prstDash val="solid"/>
-                      <a:round/>
-                      <a:headEnd type="none" w="med" len="med"/>
-                      <a:tailEnd type="none" w="med" len="med"/>
-                    </a:lnL>
-                    <a:lnR w="12700" cap="flat" cmpd="sng" algn="ctr">
-                      <a:noFill/>
-                      <a:prstDash val="solid"/>
-                      <a:round/>
-                      <a:headEnd type="none" w="med" len="med"/>
-                      <a:tailEnd type="none" w="med" len="med"/>
-                    </a:lnR>
-                    <a:lnT w="12700" cap="flat" cmpd="sng" algn="ctr">
-                      <a:noFill/>
-                      <a:prstDash val="solid"/>
-                      <a:round/>
-                      <a:headEnd type="none" w="med" len="med"/>
-                      <a:tailEnd type="none" w="med" len="med"/>
-                    </a:lnT>
-                    <a:lnB w="12700" cap="flat" cmpd="sng" algn="ctr">
-                      <a:noFill/>
-                      <a:prstDash val="solid"/>
-                      <a:round/>
-                      <a:headEnd type="none" w="med" len="med"/>
-                      <a:tailEnd type="none" w="med" len="med"/>
-                    </a:lnB>
-                    <a:lnTlToBr w="12700" cmpd="sng">
-                      <a:noFill/>
-                      <a:prstDash val="solid"/>
-                    </a:lnTlToBr>
-                    <a:lnBlToTr w="12700" cmpd="sng">
-                      <a:noFill/>
-                      <a:prstDash val="solid"/>
-                    </a:lnBlToTr>
-                    <a:solidFill>
-                      <a:srgbClr val="0078FF"/>
-                    </a:solidFill>
-                  </a:tcPr>
-                </a:tc>
-                <a:tc>
-                  <a:txBody>
-                    <a:bodyPr/>
-                    <a:lstStyle/>
-                    <a:p>
-                      <a:r>
-                        <a:rPr lang="en-US" sz="1500" b="0" i="0" dirty="0">
-                          <a:solidFill>
-                            <a:schemeClr val="bg1"/>
-                          </a:solidFill>
-                          <a:latin typeface="GT Walsheim Trial Rg" pitchFamily="2" charset="77"/>
-                        </a:rPr>
-                        <a:t>After preprocessing</a:t>
-                      </a:r>
-                    </a:p>
-                  </a:txBody>
-                  <a:tcPr>
-                    <a:lnL w="12700" cap="flat" cmpd="sng" algn="ctr">
-                      <a:noFill/>
-                      <a:prstDash val="solid"/>
-                      <a:round/>
-                      <a:headEnd type="none" w="med" len="med"/>
-                      <a:tailEnd type="none" w="med" len="med"/>
-                    </a:lnL>
-                    <a:lnR w="12700" cap="flat" cmpd="sng" algn="ctr">
-                      <a:noFill/>
-                      <a:prstDash val="solid"/>
-                      <a:round/>
-                      <a:headEnd type="none" w="med" len="med"/>
-                      <a:tailEnd type="none" w="med" len="med"/>
-                    </a:lnR>
-                    <a:lnT w="12700" cap="flat" cmpd="sng" algn="ctr">
-                      <a:noFill/>
-                      <a:prstDash val="solid"/>
-                      <a:round/>
-                      <a:headEnd type="none" w="med" len="med"/>
-                      <a:tailEnd type="none" w="med" len="med"/>
-                    </a:lnT>
-                    <a:lnB w="12700" cap="flat" cmpd="sng" algn="ctr">
-                      <a:noFill/>
-                      <a:prstDash val="solid"/>
-                      <a:round/>
-                      <a:headEnd type="none" w="med" len="med"/>
-                      <a:tailEnd type="none" w="med" len="med"/>
-                    </a:lnB>
-                    <a:lnTlToBr w="12700" cmpd="sng">
-                      <a:noFill/>
-                      <a:prstDash val="solid"/>
-                    </a:lnTlToBr>
-                    <a:lnBlToTr w="12700" cmpd="sng">
-                      <a:noFill/>
-                      <a:prstDash val="solid"/>
-                    </a:lnBlToTr>
-                    <a:solidFill>
-                      <a:srgbClr val="0078FF"/>
-                    </a:solidFill>
-                  </a:tcPr>
-                </a:tc>
-                <a:extLst>
-                  <a:ext uri="{0D108BD9-81ED-4DB2-BD59-A6C34878D82A}">
-                    <a16:rowId xmlns:a16="http://schemas.microsoft.com/office/drawing/2014/main" val="4220759275"/>
-                  </a:ext>
-                </a:extLst>
-              </a:tr>
-              <a:tr h="581534">
-                <a:tc>
-                  <a:txBody>
-                    <a:bodyPr/>
-                    <a:lstStyle/>
-                    <a:p>
-                      <a:r>
-                        <a:rPr lang="en-US" sz="1500" b="0" i="0" dirty="0">
-                          <a:solidFill>
-                            <a:schemeClr val="tx1"/>
-                          </a:solidFill>
-                          <a:latin typeface="GT Walsheim Trial Rg" pitchFamily="2" charset="77"/>
-                        </a:rPr>
-                        <a:t>Vehicle</a:t>
-                      </a:r>
-                    </a:p>
-                  </a:txBody>
-                  <a:tcPr>
-                    <a:lnL w="12700" cap="flat" cmpd="sng" algn="ctr">
-                      <a:noFill/>
-                      <a:prstDash val="solid"/>
-                      <a:round/>
-                      <a:headEnd type="none" w="med" len="med"/>
-                      <a:tailEnd type="none" w="med" len="med"/>
-                    </a:lnL>
-                    <a:lnR w="12700" cap="flat" cmpd="sng" algn="ctr">
-                      <a:noFill/>
-                      <a:prstDash val="solid"/>
-                      <a:round/>
-                      <a:headEnd type="none" w="med" len="med"/>
-                      <a:tailEnd type="none" w="med" len="med"/>
-                    </a:lnR>
-                    <a:lnT w="12700" cap="flat" cmpd="sng" algn="ctr">
-                      <a:noFill/>
-                      <a:prstDash val="solid"/>
-                      <a:round/>
-                      <a:headEnd type="none" w="med" len="med"/>
-                      <a:tailEnd type="none" w="med" len="med"/>
-                    </a:lnT>
-                    <a:lnB w="12700" cap="flat" cmpd="sng" algn="ctr">
-                      <a:noFill/>
-                      <a:prstDash val="solid"/>
-                      <a:round/>
-                      <a:headEnd type="none" w="med" len="med"/>
-                      <a:tailEnd type="none" w="med" len="med"/>
-                    </a:lnB>
-                    <a:lnTlToBr w="12700" cmpd="sng">
-                      <a:noFill/>
-                      <a:prstDash val="solid"/>
-                    </a:lnTlToBr>
-                    <a:lnBlToTr w="12700" cmpd="sng">
-                      <a:noFill/>
-                      <a:prstDash val="solid"/>
-                    </a:lnBlToTr>
-                    <a:solidFill>
-                      <a:schemeClr val="bg1">
-                        <a:lumMod val="95000"/>
-                      </a:schemeClr>
-                    </a:solidFill>
-                  </a:tcPr>
-                </a:tc>
-                <a:tc>
-                  <a:txBody>
-                    <a:bodyPr/>
-                    <a:lstStyle/>
-                    <a:p>
-                      <a:r>
-                        <a:rPr lang="en-US" sz="1500" b="0" i="0" dirty="0">
-                          <a:solidFill>
-                            <a:schemeClr val="tx1"/>
-                          </a:solidFill>
-                          <a:latin typeface="GT Walsheim Trial Rg" pitchFamily="2" charset="77"/>
-                        </a:rPr>
-                        <a:t>majority</a:t>
-                      </a:r>
-                    </a:p>
-                  </a:txBody>
-                  <a:tcPr>
-                    <a:lnL w="12700" cap="flat" cmpd="sng" algn="ctr">
-                      <a:noFill/>
-                      <a:prstDash val="solid"/>
-                      <a:round/>
-                      <a:headEnd type="none" w="med" len="med"/>
-                      <a:tailEnd type="none" w="med" len="med"/>
-                    </a:lnL>
-                    <a:lnR w="12700" cap="flat" cmpd="sng" algn="ctr">
-                      <a:noFill/>
-                      <a:prstDash val="solid"/>
-                      <a:round/>
-                      <a:headEnd type="none" w="med" len="med"/>
-                      <a:tailEnd type="none" w="med" len="med"/>
-                    </a:lnR>
-                    <a:lnT w="12700" cap="flat" cmpd="sng" algn="ctr">
-                      <a:noFill/>
-                      <a:prstDash val="solid"/>
-                      <a:round/>
-                      <a:headEnd type="none" w="med" len="med"/>
-                      <a:tailEnd type="none" w="med" len="med"/>
-                    </a:lnT>
-                    <a:lnB w="12700" cap="flat" cmpd="sng" algn="ctr">
-                      <a:noFill/>
-                      <a:prstDash val="solid"/>
-                      <a:round/>
-                      <a:headEnd type="none" w="med" len="med"/>
-                      <a:tailEnd type="none" w="med" len="med"/>
-                    </a:lnB>
-                    <a:lnTlToBr w="12700" cmpd="sng">
-                      <a:noFill/>
-                      <a:prstDash val="solid"/>
-                    </a:lnTlToBr>
-                    <a:lnBlToTr w="12700" cmpd="sng">
-                      <a:noFill/>
-                      <a:prstDash val="solid"/>
-                    </a:lnBlToTr>
-                    <a:solidFill>
-                      <a:schemeClr val="bg1">
-                        <a:lumMod val="95000"/>
-                      </a:schemeClr>
-                    </a:solidFill>
-                  </a:tcPr>
-                </a:tc>
-                <a:tc>
-                  <a:txBody>
-                    <a:bodyPr/>
-                    <a:lstStyle/>
-                    <a:p>
-                      <a:r>
-                        <a:rPr lang="en-US" sz="1500" b="0" i="0" dirty="0">
-                          <a:solidFill>
-                            <a:schemeClr val="tx1"/>
-                          </a:solidFill>
-                          <a:latin typeface="GT Walsheim Trial Rg" pitchFamily="2" charset="77"/>
-                        </a:rPr>
-                        <a:t>included</a:t>
-                      </a:r>
-                    </a:p>
-                  </a:txBody>
-                  <a:tcPr>
-                    <a:lnL w="12700" cap="flat" cmpd="sng" algn="ctr">
-                      <a:noFill/>
-                      <a:prstDash val="solid"/>
-                      <a:round/>
-                      <a:headEnd type="none" w="med" len="med"/>
-                      <a:tailEnd type="none" w="med" len="med"/>
-                    </a:lnL>
-                    <a:lnR w="12700" cap="flat" cmpd="sng" algn="ctr">
-                      <a:noFill/>
-                      <a:prstDash val="solid"/>
-                      <a:round/>
-                      <a:headEnd type="none" w="med" len="med"/>
-                      <a:tailEnd type="none" w="med" len="med"/>
-                    </a:lnR>
-                    <a:lnT w="12700" cap="flat" cmpd="sng" algn="ctr">
-                      <a:noFill/>
-                      <a:prstDash val="solid"/>
-                      <a:round/>
-                      <a:headEnd type="none" w="med" len="med"/>
-                      <a:tailEnd type="none" w="med" len="med"/>
-                    </a:lnT>
-                    <a:lnB w="12700" cap="flat" cmpd="sng" algn="ctr">
-                      <a:noFill/>
-                      <a:prstDash val="solid"/>
-                      <a:round/>
-                      <a:headEnd type="none" w="med" len="med"/>
-                      <a:tailEnd type="none" w="med" len="med"/>
-                    </a:lnB>
-                    <a:lnTlToBr w="12700" cmpd="sng">
-                      <a:noFill/>
-                      <a:prstDash val="solid"/>
-                    </a:lnTlToBr>
-                    <a:lnBlToTr w="12700" cmpd="sng">
-                      <a:noFill/>
-                      <a:prstDash val="solid"/>
-                    </a:lnBlToTr>
-                    <a:solidFill>
-                      <a:schemeClr val="bg1">
-                        <a:lumMod val="95000"/>
-                      </a:schemeClr>
-                    </a:solidFill>
-                  </a:tcPr>
-                </a:tc>
-                <a:extLst>
-                  <a:ext uri="{0D108BD9-81ED-4DB2-BD59-A6C34878D82A}">
-                    <a16:rowId xmlns:a16="http://schemas.microsoft.com/office/drawing/2014/main" val="4152326013"/>
-                  </a:ext>
-                </a:extLst>
-              </a:tr>
-              <a:tr h="581534">
-                <a:tc>
-                  <a:txBody>
-                    <a:bodyPr/>
-                    <a:lstStyle/>
-                    <a:p>
-                      <a:r>
-                        <a:rPr lang="en-US" sz="1500" b="0" i="0" dirty="0">
-                          <a:solidFill>
-                            <a:schemeClr val="tx1"/>
-                          </a:solidFill>
-                          <a:latin typeface="GT Walsheim Trial Rg" pitchFamily="2" charset="77"/>
-                        </a:rPr>
-                        <a:t>Pedestrian</a:t>
-                      </a:r>
-                    </a:p>
-                  </a:txBody>
-                  <a:tcPr>
-                    <a:lnL w="12700" cap="flat" cmpd="sng" algn="ctr">
-                      <a:noFill/>
-                      <a:prstDash val="solid"/>
-                      <a:round/>
-                      <a:headEnd type="none" w="med" len="med"/>
-                      <a:tailEnd type="none" w="med" len="med"/>
-                    </a:lnL>
-                    <a:lnR w="12700" cap="flat" cmpd="sng" algn="ctr">
-                      <a:noFill/>
-                      <a:prstDash val="solid"/>
-                      <a:round/>
-                      <a:headEnd type="none" w="med" len="med"/>
-                      <a:tailEnd type="none" w="med" len="med"/>
-                    </a:lnR>
-                    <a:lnT w="12700" cap="flat" cmpd="sng" algn="ctr">
-                      <a:noFill/>
-                      <a:prstDash val="solid"/>
-                      <a:round/>
-                      <a:headEnd type="none" w="med" len="med"/>
-                      <a:tailEnd type="none" w="med" len="med"/>
-                    </a:lnT>
-                    <a:lnB w="12700" cap="flat" cmpd="sng" algn="ctr">
-                      <a:noFill/>
-                      <a:prstDash val="solid"/>
-                      <a:round/>
-                      <a:headEnd type="none" w="med" len="med"/>
-                      <a:tailEnd type="none" w="med" len="med"/>
-                    </a:lnB>
-                    <a:lnTlToBr w="12700" cmpd="sng">
-                      <a:noFill/>
-                      <a:prstDash val="solid"/>
-                    </a:lnTlToBr>
-                    <a:lnBlToTr w="12700" cmpd="sng">
-                      <a:noFill/>
-                      <a:prstDash val="solid"/>
-                    </a:lnBlToTr>
-                    <a:solidFill>
-                      <a:schemeClr val="bg1">
-                        <a:lumMod val="85000"/>
-                      </a:schemeClr>
-                    </a:solidFill>
-                  </a:tcPr>
-                </a:tc>
-                <a:tc>
-                  <a:txBody>
-                    <a:bodyPr/>
-                    <a:lstStyle/>
-                    <a:p>
-                      <a:r>
-                        <a:rPr lang="en-US" sz="1500" b="0" i="0" dirty="0">
-                          <a:solidFill>
-                            <a:schemeClr val="tx1"/>
-                          </a:solidFill>
-                          <a:latin typeface="GT Walsheim Trial Rg" pitchFamily="2" charset="77"/>
-                        </a:rPr>
-                        <a:t>~25%</a:t>
-                      </a:r>
-                    </a:p>
-                  </a:txBody>
-                  <a:tcPr>
-                    <a:lnL w="12700" cap="flat" cmpd="sng" algn="ctr">
-                      <a:noFill/>
-                      <a:prstDash val="solid"/>
-                      <a:round/>
-                      <a:headEnd type="none" w="med" len="med"/>
-                      <a:tailEnd type="none" w="med" len="med"/>
-                    </a:lnL>
-                    <a:lnR w="12700" cap="flat" cmpd="sng" algn="ctr">
-                      <a:noFill/>
-                      <a:prstDash val="solid"/>
-                      <a:round/>
-                      <a:headEnd type="none" w="med" len="med"/>
-                      <a:tailEnd type="none" w="med" len="med"/>
-                    </a:lnR>
-                    <a:lnT w="12700" cap="flat" cmpd="sng" algn="ctr">
-                      <a:noFill/>
-                      <a:prstDash val="solid"/>
-                      <a:round/>
-                      <a:headEnd type="none" w="med" len="med"/>
-                      <a:tailEnd type="none" w="med" len="med"/>
-                    </a:lnT>
-                    <a:lnB w="12700" cap="flat" cmpd="sng" algn="ctr">
-                      <a:noFill/>
-                      <a:prstDash val="solid"/>
-                      <a:round/>
-                      <a:headEnd type="none" w="med" len="med"/>
-                      <a:tailEnd type="none" w="med" len="med"/>
-                    </a:lnB>
-                    <a:lnTlToBr w="12700" cmpd="sng">
-                      <a:noFill/>
-                      <a:prstDash val="solid"/>
-                    </a:lnTlToBr>
-                    <a:lnBlToTr w="12700" cmpd="sng">
-                      <a:noFill/>
-                      <a:prstDash val="solid"/>
-                    </a:lnBlToTr>
-                    <a:solidFill>
-                      <a:schemeClr val="bg1">
-                        <a:lumMod val="85000"/>
-                      </a:schemeClr>
-                    </a:solidFill>
-                  </a:tcPr>
-                </a:tc>
-                <a:tc>
-                  <a:txBody>
-                    <a:bodyPr/>
-                    <a:lstStyle/>
-                    <a:p>
-                      <a:r>
-                        <a:rPr lang="en-US" sz="1500" b="0" i="0" dirty="0">
-                          <a:solidFill>
-                            <a:schemeClr val="tx1"/>
-                          </a:solidFill>
-                          <a:latin typeface="GT Walsheim Trial Rg" pitchFamily="2" charset="77"/>
-                        </a:rPr>
-                        <a:t>included</a:t>
-                      </a:r>
-                    </a:p>
-                  </a:txBody>
-                  <a:tcPr>
-                    <a:lnL w="12700" cap="flat" cmpd="sng" algn="ctr">
-                      <a:noFill/>
-                      <a:prstDash val="solid"/>
-                      <a:round/>
-                      <a:headEnd type="none" w="med" len="med"/>
-                      <a:tailEnd type="none" w="med" len="med"/>
-                    </a:lnL>
-                    <a:lnR w="12700" cap="flat" cmpd="sng" algn="ctr">
-                      <a:noFill/>
-                      <a:prstDash val="solid"/>
-                      <a:round/>
-                      <a:headEnd type="none" w="med" len="med"/>
-                      <a:tailEnd type="none" w="med" len="med"/>
-                    </a:lnR>
-                    <a:lnT w="12700" cap="flat" cmpd="sng" algn="ctr">
-                      <a:noFill/>
-                      <a:prstDash val="solid"/>
-                      <a:round/>
-                      <a:headEnd type="none" w="med" len="med"/>
-                      <a:tailEnd type="none" w="med" len="med"/>
-                    </a:lnT>
-                    <a:lnB w="12700" cap="flat" cmpd="sng" algn="ctr">
-                      <a:noFill/>
-                      <a:prstDash val="solid"/>
-                      <a:round/>
-                      <a:headEnd type="none" w="med" len="med"/>
-                      <a:tailEnd type="none" w="med" len="med"/>
-                    </a:lnB>
-                    <a:lnTlToBr w="12700" cmpd="sng">
-                      <a:noFill/>
-                      <a:prstDash val="solid"/>
-                    </a:lnTlToBr>
-                    <a:lnBlToTr w="12700" cmpd="sng">
-                      <a:noFill/>
-                      <a:prstDash val="solid"/>
-                    </a:lnBlToTr>
-                    <a:solidFill>
-                      <a:schemeClr val="bg1">
-                        <a:lumMod val="85000"/>
-                      </a:schemeClr>
-                    </a:solidFill>
-                  </a:tcPr>
-                </a:tc>
-                <a:extLst>
-                  <a:ext uri="{0D108BD9-81ED-4DB2-BD59-A6C34878D82A}">
-                    <a16:rowId xmlns:a16="http://schemas.microsoft.com/office/drawing/2014/main" val="3142999530"/>
-                  </a:ext>
-                </a:extLst>
-              </a:tr>
-              <a:tr h="581534">
-                <a:tc>
-                  <a:txBody>
-                    <a:bodyPr/>
-                    <a:lstStyle/>
-                    <a:p>
-                      <a:r>
-                        <a:rPr lang="en-US" sz="1500" b="0" i="0" dirty="0">
-                          <a:solidFill>
-                            <a:schemeClr val="tx1"/>
-                          </a:solidFill>
-                          <a:latin typeface="GT Walsheim Trial Rg" pitchFamily="2" charset="77"/>
-                        </a:rPr>
-                        <a:t>Cyclist</a:t>
-                      </a:r>
-                    </a:p>
-                  </a:txBody>
-                  <a:tcPr>
-                    <a:lnL w="12700" cap="flat" cmpd="sng" algn="ctr">
-                      <a:noFill/>
-                      <a:prstDash val="solid"/>
-                      <a:round/>
-                      <a:headEnd type="none" w="med" len="med"/>
-                      <a:tailEnd type="none" w="med" len="med"/>
-                    </a:lnL>
-                    <a:lnR w="12700" cap="flat" cmpd="sng" algn="ctr">
-                      <a:noFill/>
-                      <a:prstDash val="solid"/>
-                      <a:round/>
-                      <a:headEnd type="none" w="med" len="med"/>
-                      <a:tailEnd type="none" w="med" len="med"/>
-                    </a:lnR>
-                    <a:lnT w="12700" cap="flat" cmpd="sng" algn="ctr">
-                      <a:noFill/>
-                      <a:prstDash val="solid"/>
-                      <a:round/>
-                      <a:headEnd type="none" w="med" len="med"/>
-                      <a:tailEnd type="none" w="med" len="med"/>
-                    </a:lnT>
-                    <a:lnB w="12700" cap="flat" cmpd="sng" algn="ctr">
-                      <a:noFill/>
-                      <a:prstDash val="solid"/>
-                      <a:round/>
-                      <a:headEnd type="none" w="med" len="med"/>
-                      <a:tailEnd type="none" w="med" len="med"/>
-                    </a:lnB>
-                    <a:lnTlToBr w="12700" cmpd="sng">
-                      <a:noFill/>
-                      <a:prstDash val="solid"/>
-                    </a:lnTlToBr>
-                    <a:lnBlToTr w="12700" cmpd="sng">
-                      <a:noFill/>
-                      <a:prstDash val="solid"/>
-                    </a:lnBlToTr>
-                    <a:solidFill>
-                      <a:schemeClr val="bg1">
-                        <a:lumMod val="95000"/>
-                      </a:schemeClr>
-                    </a:solidFill>
-                  </a:tcPr>
-                </a:tc>
-                <a:tc>
-                  <a:txBody>
-                    <a:bodyPr/>
-                    <a:lstStyle/>
-                    <a:p>
-                      <a:r>
-                        <a:rPr lang="en-US" sz="1500" b="0" i="0" dirty="0">
-                          <a:solidFill>
-                            <a:schemeClr val="tx1"/>
-                          </a:solidFill>
-                          <a:latin typeface="GT Walsheim Trial Rg" pitchFamily="2" charset="77"/>
-                        </a:rPr>
-                        <a:t>~5%</a:t>
-                      </a:r>
-                    </a:p>
-                  </a:txBody>
-                  <a:tcPr>
-                    <a:lnL w="12700" cap="flat" cmpd="sng" algn="ctr">
-                      <a:noFill/>
-                      <a:prstDash val="solid"/>
-                      <a:round/>
-                      <a:headEnd type="none" w="med" len="med"/>
-                      <a:tailEnd type="none" w="med" len="med"/>
-                    </a:lnL>
-                    <a:lnR w="12700" cap="flat" cmpd="sng" algn="ctr">
-                      <a:noFill/>
-                      <a:prstDash val="solid"/>
-                      <a:round/>
-                      <a:headEnd type="none" w="med" len="med"/>
-                      <a:tailEnd type="none" w="med" len="med"/>
-                    </a:lnR>
-                    <a:lnT w="12700" cap="flat" cmpd="sng" algn="ctr">
-                      <a:noFill/>
-                      <a:prstDash val="solid"/>
-                      <a:round/>
-                      <a:headEnd type="none" w="med" len="med"/>
-                      <a:tailEnd type="none" w="med" len="med"/>
-                    </a:lnT>
-                    <a:lnB w="12700" cap="flat" cmpd="sng" algn="ctr">
-                      <a:noFill/>
-                      <a:prstDash val="solid"/>
-                      <a:round/>
-                      <a:headEnd type="none" w="med" len="med"/>
-                      <a:tailEnd type="none" w="med" len="med"/>
-                    </a:lnB>
-                    <a:lnTlToBr w="12700" cmpd="sng">
-                      <a:noFill/>
-                      <a:prstDash val="solid"/>
-                    </a:lnTlToBr>
-                    <a:lnBlToTr w="12700" cmpd="sng">
-                      <a:noFill/>
-                      <a:prstDash val="solid"/>
-                    </a:lnBlToTr>
-                    <a:solidFill>
-                      <a:schemeClr val="bg1">
-                        <a:lumMod val="95000"/>
-                      </a:schemeClr>
-                    </a:solidFill>
-                  </a:tcPr>
-                </a:tc>
-                <a:tc>
-                  <a:txBody>
-                    <a:bodyPr/>
-                    <a:lstStyle/>
-                    <a:p>
-                      <a:r>
-                        <a:rPr lang="en-US" sz="1500" b="0" i="0" dirty="0">
-                          <a:solidFill>
-                            <a:schemeClr val="tx1"/>
-                          </a:solidFill>
-                          <a:latin typeface="GT Walsheim Trial Rg" pitchFamily="2" charset="77"/>
-                        </a:rPr>
-                        <a:t>included</a:t>
-                      </a:r>
-                    </a:p>
-                  </a:txBody>
-                  <a:tcPr>
-                    <a:lnL w="12700" cap="flat" cmpd="sng" algn="ctr">
-                      <a:noFill/>
-                      <a:prstDash val="solid"/>
-                      <a:round/>
-                      <a:headEnd type="none" w="med" len="med"/>
-                      <a:tailEnd type="none" w="med" len="med"/>
-                    </a:lnL>
-                    <a:lnR w="12700" cap="flat" cmpd="sng" algn="ctr">
-                      <a:noFill/>
-                      <a:prstDash val="solid"/>
-                      <a:round/>
-                      <a:headEnd type="none" w="med" len="med"/>
-                      <a:tailEnd type="none" w="med" len="med"/>
-                    </a:lnR>
-                    <a:lnT w="12700" cap="flat" cmpd="sng" algn="ctr">
-                      <a:noFill/>
-                      <a:prstDash val="solid"/>
-                      <a:round/>
-                      <a:headEnd type="none" w="med" len="med"/>
-                      <a:tailEnd type="none" w="med" len="med"/>
-                    </a:lnT>
-                    <a:lnB w="12700" cap="flat" cmpd="sng" algn="ctr">
-                      <a:noFill/>
-                      <a:prstDash val="solid"/>
-                      <a:round/>
-                      <a:headEnd type="none" w="med" len="med"/>
-                      <a:tailEnd type="none" w="med" len="med"/>
-                    </a:lnB>
-                    <a:lnTlToBr w="12700" cmpd="sng">
-                      <a:noFill/>
-                      <a:prstDash val="solid"/>
-                    </a:lnTlToBr>
-                    <a:lnBlToTr w="12700" cmpd="sng">
-                      <a:noFill/>
-                      <a:prstDash val="solid"/>
-                    </a:lnBlToTr>
-                    <a:solidFill>
-                      <a:schemeClr val="bg1">
-                        <a:lumMod val="95000"/>
-                      </a:schemeClr>
-                    </a:solidFill>
-                  </a:tcPr>
-                </a:tc>
-                <a:extLst>
-                  <a:ext uri="{0D108BD9-81ED-4DB2-BD59-A6C34878D82A}">
-                    <a16:rowId xmlns:a16="http://schemas.microsoft.com/office/drawing/2014/main" val="1523425920"/>
-                  </a:ext>
-                </a:extLst>
-              </a:tr>
-              <a:tr h="581534">
-                <a:tc>
-                  <a:txBody>
-                    <a:bodyPr/>
-                    <a:lstStyle/>
-                    <a:p>
-                      <a:r>
-                        <a:rPr lang="en-US" sz="1500" b="0" i="0" dirty="0">
-                          <a:solidFill>
-                            <a:schemeClr val="tx1"/>
-                          </a:solidFill>
-                          <a:latin typeface="GT Walsheim Trial Rg" pitchFamily="2" charset="77"/>
-                        </a:rPr>
-                        <a:t>SDC (AV itself)</a:t>
-                      </a:r>
-                    </a:p>
-                  </a:txBody>
-                  <a:tcPr>
-                    <a:lnL w="12700" cap="flat" cmpd="sng" algn="ctr">
-                      <a:noFill/>
-                      <a:prstDash val="solid"/>
-                      <a:round/>
-                      <a:headEnd type="none" w="med" len="med"/>
-                      <a:tailEnd type="none" w="med" len="med"/>
-                    </a:lnL>
-                    <a:lnR w="12700" cap="flat" cmpd="sng" algn="ctr">
-                      <a:noFill/>
-                      <a:prstDash val="solid"/>
-                      <a:round/>
-                      <a:headEnd type="none" w="med" len="med"/>
-                      <a:tailEnd type="none" w="med" len="med"/>
-                    </a:lnR>
-                    <a:lnT w="12700" cap="flat" cmpd="sng" algn="ctr">
-                      <a:noFill/>
-                      <a:prstDash val="solid"/>
-                      <a:round/>
-                      <a:headEnd type="none" w="med" len="med"/>
-                      <a:tailEnd type="none" w="med" len="med"/>
-                    </a:lnT>
-                    <a:lnB w="12700" cap="flat" cmpd="sng" algn="ctr">
-                      <a:noFill/>
-                      <a:prstDash val="solid"/>
-                      <a:round/>
-                      <a:headEnd type="none" w="med" len="med"/>
-                      <a:tailEnd type="none" w="med" len="med"/>
-                    </a:lnB>
-                    <a:lnTlToBr w="12700" cmpd="sng">
-                      <a:noFill/>
-                      <a:prstDash val="solid"/>
-                    </a:lnTlToBr>
-                    <a:lnBlToTr w="12700" cmpd="sng">
-                      <a:noFill/>
-                      <a:prstDash val="solid"/>
-                    </a:lnBlToTr>
-                    <a:solidFill>
-                      <a:schemeClr val="bg1">
-                        <a:lumMod val="85000"/>
-                      </a:schemeClr>
-                    </a:solidFill>
-                  </a:tcPr>
-                </a:tc>
-                <a:tc>
-                  <a:txBody>
-                    <a:bodyPr/>
-                    <a:lstStyle/>
-                    <a:p>
-                      <a:r>
-                        <a:rPr lang="en-US" sz="1500" b="0" i="0" dirty="0">
-                          <a:solidFill>
-                            <a:schemeClr val="tx1"/>
-                          </a:solidFill>
-                          <a:latin typeface="GT Walsheim Trial Rg" pitchFamily="2" charset="77"/>
-                        </a:rPr>
-                        <a:t>removed</a:t>
-                      </a:r>
-                    </a:p>
-                  </a:txBody>
-                  <a:tcPr>
-                    <a:lnL w="12700" cap="flat" cmpd="sng" algn="ctr">
-                      <a:noFill/>
-                      <a:prstDash val="solid"/>
-                      <a:round/>
-                      <a:headEnd type="none" w="med" len="med"/>
-                      <a:tailEnd type="none" w="med" len="med"/>
-                    </a:lnL>
-                    <a:lnR w="12700" cap="flat" cmpd="sng" algn="ctr">
-                      <a:noFill/>
-                      <a:prstDash val="solid"/>
-                      <a:round/>
-                      <a:headEnd type="none" w="med" len="med"/>
-                      <a:tailEnd type="none" w="med" len="med"/>
-                    </a:lnR>
-                    <a:lnT w="12700" cap="flat" cmpd="sng" algn="ctr">
-                      <a:noFill/>
-                      <a:prstDash val="solid"/>
-                      <a:round/>
-                      <a:headEnd type="none" w="med" len="med"/>
-                      <a:tailEnd type="none" w="med" len="med"/>
-                    </a:lnT>
-                    <a:lnB w="12700" cap="flat" cmpd="sng" algn="ctr">
-                      <a:noFill/>
-                      <a:prstDash val="solid"/>
-                      <a:round/>
-                      <a:headEnd type="none" w="med" len="med"/>
-                      <a:tailEnd type="none" w="med" len="med"/>
-                    </a:lnB>
-                    <a:lnTlToBr w="12700" cmpd="sng">
-                      <a:noFill/>
-                      <a:prstDash val="solid"/>
-                    </a:lnTlToBr>
-                    <a:lnBlToTr w="12700" cmpd="sng">
-                      <a:noFill/>
-                      <a:prstDash val="solid"/>
-                    </a:lnBlToTr>
-                    <a:solidFill>
-                      <a:schemeClr val="bg1">
-                        <a:lumMod val="85000"/>
-                      </a:schemeClr>
-                    </a:solidFill>
-                  </a:tcPr>
-                </a:tc>
-                <a:tc>
-                  <a:txBody>
-                    <a:bodyPr/>
-                    <a:lstStyle/>
-                    <a:p>
-                      <a:r>
-                        <a:rPr lang="en-US" sz="1500" b="0" i="0" dirty="0">
-                          <a:solidFill>
-                            <a:schemeClr val="tx1"/>
-                          </a:solidFill>
-                          <a:latin typeface="GT Walsheim Trial Rg" pitchFamily="2" charset="77"/>
-                        </a:rPr>
-                        <a:t>excluded</a:t>
-                      </a:r>
-                    </a:p>
-                  </a:txBody>
-                  <a:tcPr>
-                    <a:lnL w="12700" cap="flat" cmpd="sng" algn="ctr">
-                      <a:noFill/>
-                      <a:prstDash val="solid"/>
-                      <a:round/>
-                      <a:headEnd type="none" w="med" len="med"/>
-                      <a:tailEnd type="none" w="med" len="med"/>
-                    </a:lnL>
-                    <a:lnR w="12700" cap="flat" cmpd="sng" algn="ctr">
-                      <a:noFill/>
-                      <a:prstDash val="solid"/>
-                      <a:round/>
-                      <a:headEnd type="none" w="med" len="med"/>
-                      <a:tailEnd type="none" w="med" len="med"/>
-                    </a:lnR>
-                    <a:lnT w="12700" cap="flat" cmpd="sng" algn="ctr">
-                      <a:noFill/>
-                      <a:prstDash val="solid"/>
-                      <a:round/>
-                      <a:headEnd type="none" w="med" len="med"/>
-                      <a:tailEnd type="none" w="med" len="med"/>
-                    </a:lnT>
-                    <a:lnB w="12700" cap="flat" cmpd="sng" algn="ctr">
-                      <a:noFill/>
-                      <a:prstDash val="solid"/>
-                      <a:round/>
-                      <a:headEnd type="none" w="med" len="med"/>
-                      <a:tailEnd type="none" w="med" len="med"/>
-                    </a:lnB>
-                    <a:lnTlToBr w="12700" cmpd="sng">
-                      <a:noFill/>
-                      <a:prstDash val="solid"/>
-                    </a:lnTlToBr>
-                    <a:lnBlToTr w="12700" cmpd="sng">
-                      <a:noFill/>
-                      <a:prstDash val="solid"/>
-                    </a:lnBlToTr>
-                    <a:solidFill>
-                      <a:schemeClr val="bg1">
-                        <a:lumMod val="85000"/>
-                      </a:schemeClr>
-                    </a:solidFill>
-                  </a:tcPr>
-                </a:tc>
-                <a:extLst>
-                  <a:ext uri="{0D108BD9-81ED-4DB2-BD59-A6C34878D82A}">
-                    <a16:rowId xmlns:a16="http://schemas.microsoft.com/office/drawing/2014/main" val="1062120210"/>
-                  </a:ext>
-                </a:extLst>
-              </a:tr>
-            </a:tbl>
-          </a:graphicData>
-        </a:graphic>
-      </p:graphicFrame>
     </p:spTree>
     <p:extLst>
       <p:ext uri="{BB962C8B-B14F-4D97-AF65-F5344CB8AC3E}">
-        <p14:creationId xmlns:p14="http://schemas.microsoft.com/office/powerpoint/2010/main" val="2606525707"/>
+        <p14:creationId xmlns:p14="http://schemas.microsoft.com/office/powerpoint/2010/main" val="1281361301"/>
       </p:ext>
     </p:extLst>
   </p:cSld>
